--- a/decks/etl-playbook.pptx
+++ b/decks/etl-playbook.pptx
@@ -13,9 +13,15 @@
     <p:sldId id="261" r:id="rId7"/>
     <p:sldId id="262" r:id="rId8"/>
     <p:sldId id="263" r:id="rId9"/>
+    <p:sldId id="264" r:id="rId10"/>
+    <p:sldId id="265" r:id="rId11"/>
+    <p:sldId id="266" r:id="rId12"/>
+    <p:sldId id="267" r:id="rId13"/>
+    <p:sldId id="268" r:id="rId14"/>
+    <p:sldId id="269" r:id="rId15"/>
   </p:sldIdLst>
   <p:notesMasterIdLst>
-    <p:notesMasterId r:id="rId10"/>
+    <p:notesMasterId r:id="rId16"/>
   </p:notesMasterIdLst>
   <p:sldSz cx="12191695" cy="6858000"/>
   <p:notesSz cx="6858000" cy="12191695"/>
@@ -112,6 +118,1070 @@
     </a:lvl9pPr>
   </p:defaultTextStyle>
 </p:presentation>
+</file>
+
+<file path=ppt/charts/chart34.xml><?xml version="1.0" encoding="utf-8"?>
+<c:chartSpace xmlns:c="http://schemas.openxmlformats.org/drawingml/2006/chart" xmlns:a="http://schemas.openxmlformats.org/drawingml/2006/main" xmlns:r="http://schemas.openxmlformats.org/officeDocument/2006/relationships">
+  <c:date1904 val="0"/>
+  <c:roundedCorners val="1"/>
+  <c:chart>
+    <c:autoTitleDeleted val="1"/>
+    <c:plotArea>
+      <c:layout/>
+      <c:doughnutChart>
+        <c:varyColors val="1"/>
+        <c:ser>
+          <c:idx val="0"/>
+          <c:order val="0"/>
+          <c:tx>
+            <c:strRef>
+              <c:f>Sheet1!$B$1</c:f>
+              <c:strCache>
+                <c:ptCount val="1"/>
+                <c:pt idx="0">
+                  <c:v>Breakdown</c:v>
+                </c:pt>
+              </c:strCache>
+            </c:strRef>
+          </c:tx>
+          <c:spPr>
+            <a:solidFill>
+              <a:schemeClr val="accent1"/>
+            </a:solidFill>
+            <a:ln w="9525" cap="flat">
+              <a:solidFill>
+                <a:srgbClr val="F9F9F9"/>
+              </a:solidFill>
+              <a:prstDash val="solid"/>
+              <a:round/>
+            </a:ln>
+            <a:effectLst/>
+          </c:spPr>
+          <c:dPt>
+            <c:idx val="0"/>
+            <c:bubble3D val="0"/>
+            <c:spPr>
+              <a:solidFill>
+                <a:srgbClr val="3B82F6"/>
+              </a:solidFill>
+              <a:effectLst/>
+            </c:spPr>
+          </c:dPt>
+          <c:dPt>
+            <c:idx val="1"/>
+            <c:bubble3D val="0"/>
+            <c:spPr>
+              <a:solidFill>
+                <a:srgbClr val="06B6D4"/>
+              </a:solidFill>
+              <a:effectLst/>
+            </c:spPr>
+          </c:dPt>
+          <c:dPt>
+            <c:idx val="2"/>
+            <c:bubble3D val="0"/>
+            <c:spPr>
+              <a:solidFill>
+                <a:srgbClr val="22D3A0"/>
+              </a:solidFill>
+              <a:effectLst/>
+            </c:spPr>
+          </c:dPt>
+          <c:dPt>
+            <c:idx val="3"/>
+            <c:bubble3D val="0"/>
+            <c:spPr>
+              <a:solidFill>
+                <a:srgbClr val="F59E0B"/>
+              </a:solidFill>
+              <a:effectLst/>
+            </c:spPr>
+          </c:dPt>
+          <c:dLbls>
+            <c:dLbl>
+              <c:idx val="0"/>
+              <c:numFmt formatCode="0%" sourceLinked="0"/>
+              <c:spPr/>
+              <c:txPr>
+                <a:bodyPr/>
+                <a:lstStyle/>
+                <a:p>
+                  <a:pPr>
+                    <a:defRPr sz="1000" b="0" i="0" u="none" strike="noStrike">
+                      <a:solidFill>
+                        <a:srgbClr val="E2E8F0"/>
+                      </a:solidFill>
+                      <a:latin typeface="Segoe UI"/>
+                    </a:defRPr>
+                  </a:pPr>
+                </a:p>
+              </c:txPr>
+              <c:showLegendKey val="0"/>
+              <c:showVal val="0"/>
+              <c:showCatName val="0"/>
+              <c:showSerName val="0"/>
+              <c:showPercent val="1"/>
+              <c:showBubbleSize val="0"/>
+            </c:dLbl>
+            <c:dLbl>
+              <c:idx val="1"/>
+              <c:numFmt formatCode="0%" sourceLinked="0"/>
+              <c:spPr/>
+              <c:txPr>
+                <a:bodyPr/>
+                <a:lstStyle/>
+                <a:p>
+                  <a:pPr>
+                    <a:defRPr sz="1000" b="0" i="0" u="none" strike="noStrike">
+                      <a:solidFill>
+                        <a:srgbClr val="E2E8F0"/>
+                      </a:solidFill>
+                      <a:latin typeface="Segoe UI"/>
+                    </a:defRPr>
+                  </a:pPr>
+                </a:p>
+              </c:txPr>
+              <c:showLegendKey val="0"/>
+              <c:showVal val="0"/>
+              <c:showCatName val="0"/>
+              <c:showSerName val="0"/>
+              <c:showPercent val="1"/>
+              <c:showBubbleSize val="0"/>
+            </c:dLbl>
+            <c:dLbl>
+              <c:idx val="2"/>
+              <c:numFmt formatCode="0%" sourceLinked="0"/>
+              <c:spPr/>
+              <c:txPr>
+                <a:bodyPr/>
+                <a:lstStyle/>
+                <a:p>
+                  <a:pPr>
+                    <a:defRPr sz="1000" b="0" i="0" u="none" strike="noStrike">
+                      <a:solidFill>
+                        <a:srgbClr val="E2E8F0"/>
+                      </a:solidFill>
+                      <a:latin typeface="Segoe UI"/>
+                    </a:defRPr>
+                  </a:pPr>
+                </a:p>
+              </c:txPr>
+              <c:showLegendKey val="0"/>
+              <c:showVal val="0"/>
+              <c:showCatName val="0"/>
+              <c:showSerName val="0"/>
+              <c:showPercent val="1"/>
+              <c:showBubbleSize val="0"/>
+            </c:dLbl>
+            <c:dLbl>
+              <c:idx val="3"/>
+              <c:numFmt formatCode="0%" sourceLinked="0"/>
+              <c:spPr/>
+              <c:txPr>
+                <a:bodyPr/>
+                <a:lstStyle/>
+                <a:p>
+                  <a:pPr>
+                    <a:defRPr sz="1000" b="0" i="0" u="none" strike="noStrike">
+                      <a:solidFill>
+                        <a:srgbClr val="E2E8F0"/>
+                      </a:solidFill>
+                      <a:latin typeface="Segoe UI"/>
+                    </a:defRPr>
+                  </a:pPr>
+                </a:p>
+              </c:txPr>
+              <c:showLegendKey val="0"/>
+              <c:showVal val="0"/>
+              <c:showCatName val="0"/>
+              <c:showSerName val="0"/>
+              <c:showPercent val="1"/>
+              <c:showBubbleSize val="0"/>
+            </c:dLbl>
+            <c:numFmt formatCode="0%" sourceLinked="0"/>
+            <c:txPr>
+              <a:bodyPr/>
+              <a:lstStyle/>
+              <a:p>
+                <a:pPr>
+                  <a:defRPr sz="1800" b="0" i="0" u="none" strike="noStrike">
+                    <a:solidFill>
+                      <a:srgbClr val="000000"/>
+                    </a:solidFill>
+                    <a:latin typeface="Arial"/>
+                  </a:defRPr>
+                </a:pPr>
+              </a:p>
+            </c:txPr>
+            <c:showLegendKey val="0"/>
+            <c:showVal val="0"/>
+            <c:showCatName val="1"/>
+            <c:showSerName val="0"/>
+            <c:showPercent val="1"/>
+            <c:showBubbleSize val="0"/>
+            <c:showLeaderLines val="0"/>
+          </c:dLbls>
+          <c:cat>
+            <c:strRef>
+              <c:f>Sheet1!$A$2:$A$5</c:f>
+              <c:strCache>
+                <c:ptCount val="4"/>
+                <c:pt idx="0">
+                  <c:v>Undocumented source behavior</c:v>
+                </c:pt>
+                <c:pt idx="1">
+                  <c:v>Schedule deaths</c:v>
+                </c:pt>
+                <c:pt idx="2">
+                  <c:v>Logic bugs</c:v>
+                </c:pt>
+                <c:pt idx="3">
+                  <c:v>Schema drift</c:v>
+                </c:pt>
+              </c:strCache>
+            </c:strRef>
+          </c:cat>
+          <c:val>
+            <c:numRef>
+              <c:f>Sheet1!$B$2:$B$5</c:f>
+              <c:numCache>
+                <c:ptCount val="4"/>
+                <c:pt idx="0">
+                  <c:v>50</c:v>
+                </c:pt>
+                <c:pt idx="1">
+                  <c:v>25</c:v>
+                </c:pt>
+                <c:pt idx="2">
+                  <c:v>15</c:v>
+                </c:pt>
+                <c:pt idx="3">
+                  <c:v>10</c:v>
+                </c:pt>
+              </c:numCache>
+            </c:numRef>
+          </c:val>
+        </c:ser>
+        <c:firstSliceAng val="0"/>
+        <c:holeSize val="62"/>
+      </c:doughnutChart>
+      <c:spPr>
+        <a:solidFill>
+          <a:srgbClr val="0D1420"/>
+        </a:solidFill>
+        <a:ln>
+          <a:noFill/>
+        </a:ln>
+        <a:effectLst/>
+      </c:spPr>
+    </c:plotArea>
+    <c:legend>
+      <c:legendPos val="r"/>
+      <c:overlay val="0"/>
+      <c:txPr>
+        <a:bodyPr/>
+        <a:lstStyle/>
+        <a:p>
+          <a:pPr>
+            <a:defRPr sz="1100">
+              <a:solidFill>
+                <a:srgbClr val="CBD5E1"/>
+              </a:solidFill>
+              <a:latin typeface="Segoe UI"/>
+              <a:cs typeface="Segoe UI"/>
+            </a:defRPr>
+          </a:pPr>
+          <a:endParaRPr lang="en-US"/>
+        </a:p>
+      </c:txPr>
+    </c:legend>
+    <c:plotVisOnly val="1"/>
+    <c:dispBlanksAs val="span"/>
+  </c:chart>
+  <c:spPr>
+    <a:solidFill>
+      <a:srgbClr val="0D1420"/>
+    </a:solidFill>
+    <a:ln w="12700" cap="flat">
+      <a:solidFill>
+        <a:srgbClr val="24365A"/>
+      </a:solidFill>
+    </a:ln>
+    <a:effectLst/>
+  </c:spPr>
+  <c:externalData r:id="rId1">
+    <c:autoUpdate val="0"/>
+  </c:externalData>
+</c:chartSpace>
+</file>
+
+<file path=ppt/charts/chart35.xml><?xml version="1.0" encoding="utf-8"?>
+<c:chartSpace xmlns:c="http://schemas.openxmlformats.org/drawingml/2006/chart" xmlns:a="http://schemas.openxmlformats.org/drawingml/2006/main" xmlns:r="http://schemas.openxmlformats.org/officeDocument/2006/relationships">
+  <c:date1904 val="0"/>
+  <c:roundedCorners val="1"/>
+  <c:chart>
+    <c:autoTitleDeleted val="1"/>
+    <c:plotArea>
+      <c:layout/>
+      <c:lineChart>
+        <c:varyColors val="0"/>
+        <c:ser>
+          <c:idx val="0"/>
+          <c:order val="0"/>
+          <c:tx>
+            <c:strRef>
+              <c:f>Sheet1!$B$1</c:f>
+              <c:strCache>
+                <c:ptCount val="1"/>
+                <c:pt idx="0">
+                  <c:v>Schedule deaths</c:v>
+                </c:pt>
+              </c:strCache>
+            </c:strRef>
+          </c:tx>
+          <c:spPr>
+            <a:solidFill>
+              <a:srgbClr val="3B82F6"/>
+            </a:solidFill>
+            <a:ln w="31750" cap="flat">
+              <a:solidFill>
+                <a:srgbClr val="3B82F6"/>
+              </a:solidFill>
+              <a:prstDash val="solid"/>
+              <a:round/>
+            </a:ln>
+            <a:effectLst/>
+          </c:spPr>
+          <c:invertIfNegative val="0"/>
+          <c:dLbls>
+            <c:numFmt formatCode="#,##0" sourceLinked="0"/>
+            <c:txPr>
+              <a:bodyPr/>
+              <a:lstStyle/>
+              <a:p>
+                <a:pPr>
+                  <a:defRPr b="0" i="0" strike="noStrike" sz="1200" u="none">
+                    <a:solidFill>
+                      <a:srgbClr val="000000"/>
+                    </a:solidFill>
+                    <a:latin typeface="Arial"/>
+                  </a:defRPr>
+                </a:pPr>
+              </a:p>
+            </c:txPr>
+            <c:showLegendKey val="0"/>
+            <c:showVal val="0"/>
+            <c:showCatName val="0"/>
+            <c:showSerName val="0"/>
+            <c:showPercent val="0"/>
+            <c:showBubbleSize val="0"/>
+            <c:showLeaderLines val="0"/>
+          </c:dLbls>
+          <c:marker>
+            <c:symbol val="circle"/>
+            <c:size val="6"/>
+            <c:spPr>
+              <a:solidFill>
+                <a:srgbClr val="3B82F6"/>
+              </a:solidFill>
+              <a:ln w="9525" cap="flat">
+                <a:solidFill>
+                  <a:srgbClr val="3B82F6"/>
+                </a:solidFill>
+                <a:prstDash val="solid"/>
+                <a:round/>
+              </a:ln>
+              <a:effectLst/>
+            </c:spPr>
+          </c:marker>
+          <c:cat>
+            <c:multiLvlStrRef>
+              <c:f>Sheet1!$A$2:$A$9</c:f>
+              <c:multiLvlStrCache>
+                <c:ptCount val="8"/>
+                <c:lvl>
+                  <c:pt idx="0">
+                    <c:v>M1</c:v>
+                  </c:pt>
+                  <c:pt idx="1">
+                    <c:v>M2</c:v>
+                  </c:pt>
+                  <c:pt idx="2">
+                    <c:v>M3</c:v>
+                  </c:pt>
+                  <c:pt idx="3">
+                    <c:v>M4</c:v>
+                  </c:pt>
+                  <c:pt idx="4">
+                    <c:v>M5</c:v>
+                  </c:pt>
+                  <c:pt idx="5">
+                    <c:v>M6</c:v>
+                  </c:pt>
+                  <c:pt idx="6">
+                    <c:v>M7</c:v>
+                  </c:pt>
+                  <c:pt idx="7">
+                    <c:v>M8</c:v>
+                  </c:pt>
+                </c:lvl>
+              </c:multiLvlStrCache>
+            </c:multiLvlStrRef>
+          </c:cat>
+          <c:val>
+            <c:numRef>
+              <c:f>Sheet1!$B$2:$B$9</c:f>
+              <c:numCache>
+                <c:formatCode>General</c:formatCode>
+                <c:ptCount val="8"/>
+                <c:pt idx="0">
+                  <c:v>4</c:v>
+                </c:pt>
+                <c:pt idx="1">
+                  <c:v>3</c:v>
+                </c:pt>
+                <c:pt idx="2">
+                  <c:v>4</c:v>
+                </c:pt>
+                <c:pt idx="3">
+                  <c:v>2</c:v>
+                </c:pt>
+                <c:pt idx="4">
+                  <c:v>1</c:v>
+                </c:pt>
+                <c:pt idx="5">
+                  <c:v>1</c:v>
+                </c:pt>
+                <c:pt idx="6">
+                  <c:v>0</c:v>
+                </c:pt>
+                <c:pt idx="7">
+                  <c:v>0</c:v>
+                </c:pt>
+              </c:numCache>
+            </c:numRef>
+          </c:val>
+          <c:smooth val="0"/>
+        </c:ser>
+        <c:ser>
+          <c:idx val="1"/>
+          <c:order val="1"/>
+          <c:tx>
+            <c:strRef>
+              <c:f>Sheet1!$C$1</c:f>
+              <c:strCache>
+                <c:ptCount val="1"/>
+                <c:pt idx="0">
+                  <c:v>Logic bugs</c:v>
+                </c:pt>
+              </c:strCache>
+            </c:strRef>
+          </c:tx>
+          <c:spPr>
+            <a:solidFill>
+              <a:srgbClr val="06B6D4"/>
+            </a:solidFill>
+            <a:ln w="31750" cap="flat">
+              <a:solidFill>
+                <a:srgbClr val="06B6D4"/>
+              </a:solidFill>
+              <a:prstDash val="solid"/>
+              <a:round/>
+            </a:ln>
+            <a:effectLst/>
+          </c:spPr>
+          <c:invertIfNegative val="0"/>
+          <c:dLbls>
+            <c:numFmt formatCode="#,##0" sourceLinked="0"/>
+            <c:txPr>
+              <a:bodyPr/>
+              <a:lstStyle/>
+              <a:p>
+                <a:pPr>
+                  <a:defRPr b="0" i="0" strike="noStrike" sz="1200" u="none">
+                    <a:solidFill>
+                      <a:srgbClr val="000000"/>
+                    </a:solidFill>
+                    <a:latin typeface="Arial"/>
+                  </a:defRPr>
+                </a:pPr>
+              </a:p>
+            </c:txPr>
+            <c:showLegendKey val="0"/>
+            <c:showVal val="0"/>
+            <c:showCatName val="0"/>
+            <c:showSerName val="0"/>
+            <c:showPercent val="0"/>
+            <c:showBubbleSize val="0"/>
+            <c:showLeaderLines val="0"/>
+          </c:dLbls>
+          <c:marker>
+            <c:symbol val="circle"/>
+            <c:size val="6"/>
+            <c:spPr>
+              <a:solidFill>
+                <a:srgbClr val="06B6D4"/>
+              </a:solidFill>
+              <a:ln w="9525" cap="flat">
+                <a:solidFill>
+                  <a:srgbClr val="06B6D4"/>
+                </a:solidFill>
+                <a:prstDash val="solid"/>
+                <a:round/>
+              </a:ln>
+              <a:effectLst/>
+            </c:spPr>
+          </c:marker>
+          <c:cat>
+            <c:multiLvlStrRef>
+              <c:f>Sheet1!$A$2:$A$9</c:f>
+              <c:multiLvlStrCache>
+                <c:ptCount val="8"/>
+                <c:lvl>
+                  <c:pt idx="0">
+                    <c:v>M1</c:v>
+                  </c:pt>
+                  <c:pt idx="1">
+                    <c:v>M2</c:v>
+                  </c:pt>
+                  <c:pt idx="2">
+                    <c:v>M3</c:v>
+                  </c:pt>
+                  <c:pt idx="3">
+                    <c:v>M4</c:v>
+                  </c:pt>
+                  <c:pt idx="4">
+                    <c:v>M5</c:v>
+                  </c:pt>
+                  <c:pt idx="5">
+                    <c:v>M6</c:v>
+                  </c:pt>
+                  <c:pt idx="6">
+                    <c:v>M7</c:v>
+                  </c:pt>
+                  <c:pt idx="7">
+                    <c:v>M8</c:v>
+                  </c:pt>
+                </c:lvl>
+              </c:multiLvlStrCache>
+            </c:multiLvlStrRef>
+          </c:cat>
+          <c:val>
+            <c:numRef>
+              <c:f>Sheet1!$C$2:$C$9</c:f>
+              <c:numCache>
+                <c:formatCode>General</c:formatCode>
+                <c:ptCount val="8"/>
+                <c:pt idx="0">
+                  <c:v>2</c:v>
+                </c:pt>
+                <c:pt idx="1">
+                  <c:v>1</c:v>
+                </c:pt>
+                <c:pt idx="2">
+                  <c:v>2</c:v>
+                </c:pt>
+                <c:pt idx="3">
+                  <c:v>1</c:v>
+                </c:pt>
+                <c:pt idx="4">
+                  <c:v>2</c:v>
+                </c:pt>
+                <c:pt idx="5">
+                  <c:v>1</c:v>
+                </c:pt>
+                <c:pt idx="6">
+                  <c:v>1</c:v>
+                </c:pt>
+                <c:pt idx="7">
+                  <c:v>0</c:v>
+                </c:pt>
+              </c:numCache>
+            </c:numRef>
+          </c:val>
+          <c:smooth val="0"/>
+        </c:ser>
+        <c:dLbls>
+          <c:numFmt formatCode="#,##0" sourceLinked="0"/>
+          <c:txPr>
+            <a:bodyPr/>
+            <a:lstStyle/>
+            <a:p>
+              <a:pPr>
+                <a:defRPr b="0" i="0" strike="noStrike" sz="1200" u="none">
+                  <a:solidFill>
+                    <a:srgbClr val="000000"/>
+                  </a:solidFill>
+                  <a:latin typeface="Arial"/>
+                </a:defRPr>
+              </a:pPr>
+            </a:p>
+          </c:txPr>
+          <c:showLegendKey val="0"/>
+          <c:showVal val="0"/>
+          <c:showCatName val="0"/>
+          <c:showSerName val="0"/>
+          <c:showPercent val="0"/>
+          <c:showBubbleSize val="0"/>
+          <c:showLeaderLines val="0"/>
+        </c:dLbls>
+        <c:marker val="1"/>
+        <c:axId val="2094734554"/>
+        <c:axId val="2094734552"/>
+        <c:axId val="2094734556"/>
+      </c:lineChart>
+      <c:catAx>
+        <c:axId val="2094734554"/>
+        <c:scaling>
+          <c:orientation val="minMax"/>
+        </c:scaling>
+        <c:delete val="0"/>
+        <c:axPos val="b"/>
+        <c:numFmt formatCode="General" sourceLinked="1"/>
+        <c:majorTickMark val="out"/>
+        <c:minorTickMark val="none"/>
+        <c:tickLblPos val="low"/>
+        <c:spPr>
+          <a:ln w="12700" cap="flat">
+            <a:solidFill>
+              <a:srgbClr val="24365A"/>
+            </a:solidFill>
+            <a:prstDash val="solid"/>
+            <a:round/>
+          </a:ln>
+        </c:spPr>
+        <c:txPr>
+          <a:bodyPr/>
+          <a:lstStyle/>
+          <a:p>
+            <a:pPr>
+              <a:defRPr sz="1100" b="0" i="0" u="none" strike="noStrike">
+                <a:solidFill>
+                  <a:srgbClr val="94A3B8"/>
+                </a:solidFill>
+                <a:latin typeface="Segoe UI"/>
+              </a:defRPr>
+            </a:pPr>
+            <a:endParaRPr lang="en-US"/>
+          </a:p>
+        </c:txPr>
+        <c:crossAx val="2094734552"/>
+        <c:crosses val="autoZero"/>
+        <c:auto val="1"/>
+        <c:lblAlgn val="ctr"/>
+        <c:noMultiLvlLbl val="1"/>
+      </c:catAx>
+      <c:valAx>
+        <c:axId val="2094734552"/>
+        <c:scaling>
+          <c:orientation val="minMax"/>
+        </c:scaling>
+        <c:delete val="0"/>
+        <c:axPos val="l"/>
+        <c:majorGridlines>
+          <c:spPr>
+            <a:ln w="12700" cap="flat">
+              <a:solidFill>
+                <a:srgbClr val="18243D"/>
+              </a:solidFill>
+              <a:prstDash val="solid"/>
+              <a:round/>
+            </a:ln>
+          </c:spPr>
+        </c:majorGridlines>
+        <c:numFmt formatCode="General" sourceLinked="0"/>
+        <c:majorTickMark val="out"/>
+        <c:minorTickMark val="none"/>
+        <c:tickLblPos val="nextTo"/>
+        <c:spPr>
+          <a:ln w="12700" cap="flat">
+            <a:solidFill>
+              <a:srgbClr val="24365A"/>
+            </a:solidFill>
+            <a:prstDash val="solid"/>
+            <a:round/>
+          </a:ln>
+        </c:spPr>
+        <c:txPr>
+          <a:bodyPr/>
+          <a:lstStyle/>
+          <a:p>
+            <a:pPr>
+              <a:defRPr sz="1000" b="0" i="0" u="none" strike="noStrike">
+                <a:solidFill>
+                  <a:srgbClr val="94A3B8"/>
+                </a:solidFill>
+                <a:latin typeface="Segoe UI"/>
+              </a:defRPr>
+            </a:pPr>
+            <a:endParaRPr lang="en-US"/>
+          </a:p>
+        </c:txPr>
+        <c:crossAx val="2094734554"/>
+        <c:crosses val="autoZero"/>
+        <c:crossBetween val="between"/>
+      </c:valAx>
+      <c:spPr>
+        <a:solidFill>
+          <a:srgbClr val="0D1420"/>
+        </a:solidFill>
+        <a:ln>
+          <a:noFill/>
+        </a:ln>
+        <a:effectLst/>
+      </c:spPr>
+    </c:plotArea>
+    <c:legend>
+      <c:legendPos val="b"/>
+      <c:overlay val="0"/>
+      <c:txPr>
+        <a:bodyPr/>
+        <a:lstStyle/>
+        <a:p>
+          <a:pPr>
+            <a:defRPr sz="1100">
+              <a:solidFill>
+                <a:srgbClr val="CBD5E1"/>
+              </a:solidFill>
+              <a:latin typeface="Segoe UI"/>
+              <a:cs typeface="Segoe UI"/>
+            </a:defRPr>
+          </a:pPr>
+          <a:endParaRPr lang="en-US"/>
+        </a:p>
+      </c:txPr>
+    </c:legend>
+    <c:plotVisOnly val="1"/>
+    <c:dispBlanksAs val="span"/>
+  </c:chart>
+  <c:spPr>
+    <a:solidFill>
+      <a:srgbClr val="0D1420"/>
+    </a:solidFill>
+    <a:ln w="12700" cap="flat">
+      <a:solidFill>
+        <a:srgbClr val="24365A"/>
+      </a:solidFill>
+    </a:ln>
+    <a:effectLst/>
+  </c:spPr>
+  <c:externalData r:id="rId1">
+    <c:autoUpdate val="0"/>
+  </c:externalData>
+</c:chartSpace>
+</file>
+
+<file path=ppt/charts/chart36.xml><?xml version="1.0" encoding="utf-8"?>
+<c:chartSpace xmlns:c="http://schemas.openxmlformats.org/drawingml/2006/chart" xmlns:a="http://schemas.openxmlformats.org/drawingml/2006/main" xmlns:r="http://schemas.openxmlformats.org/officeDocument/2006/relationships">
+  <c:date1904 val="0"/>
+  <c:roundedCorners val="1"/>
+  <c:chart>
+    <c:autoTitleDeleted val="1"/>
+    <c:plotArea>
+      <c:layout/>
+      <c:barChart>
+        <c:barDir val="col"/>
+        <c:grouping val="clustered"/>
+        <c:varyColors val="0"/>
+        <c:ser>
+          <c:idx val="0"/>
+          <c:order val="0"/>
+          <c:tx>
+            <c:strRef>
+              <c:f>Sheet1!$B$1</c:f>
+              <c:strCache>
+                <c:ptCount val="1"/>
+                <c:pt idx="0">
+                  <c:v>Findings per quarter</c:v>
+                </c:pt>
+              </c:strCache>
+            </c:strRef>
+          </c:tx>
+          <c:spPr>
+            <a:solidFill>
+              <a:srgbClr val="3B82F6"/>
+            </a:solidFill>
+            <a:effectLst/>
+          </c:spPr>
+          <c:invertIfNegative val="0"/>
+          <c:dLbls>
+            <c:numFmt formatCode="#,##0" sourceLinked="0"/>
+            <c:txPr>
+              <a:bodyPr/>
+              <a:lstStyle/>
+              <a:p>
+                <a:pPr>
+                  <a:defRPr b="0" i="0" strike="noStrike" sz="1000" u="none">
+                    <a:solidFill>
+                      <a:srgbClr val="E2E8F0"/>
+                    </a:solidFill>
+                    <a:latin typeface="Segoe UI"/>
+                  </a:defRPr>
+                </a:pPr>
+              </a:p>
+            </c:txPr>
+            <c:showLegendKey val="0"/>
+            <c:showVal val="1"/>
+            <c:showCatName val="0"/>
+            <c:showSerName val="0"/>
+            <c:showPercent val="0"/>
+            <c:showBubbleSize val="0"/>
+            <c:showLeaderLines val="0"/>
+          </c:dLbls>
+          <c:dPt>
+            <c:idx val="0"/>
+            <c:invertIfNegative val="0"/>
+            <c:bubble3D val="0"/>
+            <c:spPr>
+              <a:solidFill>
+                <a:srgbClr val="3B82F6"/>
+              </a:solidFill>
+              <a:effectLst/>
+            </c:spPr>
+          </c:dPt>
+          <c:dPt>
+            <c:idx val="1"/>
+            <c:invertIfNegative val="0"/>
+            <c:bubble3D val="0"/>
+            <c:spPr>
+              <a:solidFill>
+                <a:srgbClr val="06B6D4"/>
+              </a:solidFill>
+              <a:effectLst/>
+            </c:spPr>
+          </c:dPt>
+          <c:dPt>
+            <c:idx val="2"/>
+            <c:invertIfNegative val="0"/>
+            <c:bubble3D val="0"/>
+            <c:spPr>
+              <a:solidFill>
+                <a:srgbClr val="22D3A0"/>
+              </a:solidFill>
+              <a:effectLst/>
+            </c:spPr>
+          </c:dPt>
+          <c:dPt>
+            <c:idx val="3"/>
+            <c:invertIfNegative val="0"/>
+            <c:bubble3D val="0"/>
+            <c:spPr>
+              <a:solidFill>
+                <a:srgbClr val="F59E0B"/>
+              </a:solidFill>
+              <a:effectLst/>
+            </c:spPr>
+          </c:dPt>
+          <c:dPt>
+            <c:idx val="4"/>
+            <c:invertIfNegative val="0"/>
+            <c:bubble3D val="0"/>
+            <c:spPr>
+              <a:solidFill>
+                <a:srgbClr val="3B82F6"/>
+              </a:solidFill>
+              <a:effectLst/>
+            </c:spPr>
+          </c:dPt>
+          <c:cat>
+            <c:multiLvlStrRef>
+              <c:f>Sheet1!$A$2:$A$6</c:f>
+              <c:multiLvlStrCache>
+                <c:ptCount val="5"/>
+                <c:lvl>
+                  <c:pt idx="0">
+                    <c:v>Row counts</c:v>
+                  </c:pt>
+                  <c:pt idx="1">
+                    <c:v>Sum checks</c:v>
+                  </c:pt>
+                  <c:pt idx="2">
+                    <c:v>Freshness</c:v>
+                  </c:pt>
+                  <c:pt idx="3">
+                    <c:v>Duplicate keys</c:v>
+                  </c:pt>
+                  <c:pt idx="4">
+                    <c:v>Schema drift</c:v>
+                  </c:pt>
+                </c:lvl>
+              </c:multiLvlStrCache>
+            </c:multiLvlStrRef>
+          </c:cat>
+          <c:val>
+            <c:numRef>
+              <c:f>Sheet1!$B$2:$B$6</c:f>
+              <c:numCache>
+                <c:formatCode>General</c:formatCode>
+                <c:ptCount val="5"/>
+                <c:pt idx="0">
+                  <c:v>14</c:v>
+                </c:pt>
+                <c:pt idx="1">
+                  <c:v>9</c:v>
+                </c:pt>
+                <c:pt idx="2">
+                  <c:v>11</c:v>
+                </c:pt>
+                <c:pt idx="3">
+                  <c:v>6</c:v>
+                </c:pt>
+                <c:pt idx="4">
+                  <c:v>5</c:v>
+                </c:pt>
+              </c:numCache>
+            </c:numRef>
+          </c:val>
+        </c:ser>
+        <c:dLbls>
+          <c:numFmt formatCode="#,##0" sourceLinked="0"/>
+          <c:txPr>
+            <a:bodyPr/>
+            <a:lstStyle/>
+            <a:p>
+              <a:pPr>
+                <a:defRPr b="0" i="0" strike="noStrike" sz="1000" u="none">
+                  <a:solidFill>
+                    <a:srgbClr val="E2E8F0"/>
+                  </a:solidFill>
+                  <a:latin typeface="Segoe UI"/>
+                </a:defRPr>
+              </a:pPr>
+            </a:p>
+          </c:txPr>
+          <c:showLegendKey val="0"/>
+          <c:showVal val="1"/>
+          <c:showCatName val="0"/>
+          <c:showSerName val="0"/>
+          <c:showPercent val="0"/>
+          <c:showBubbleSize val="0"/>
+          <c:showLeaderLines val="0"/>
+        </c:dLbls>
+        <c:gapWidth val="55"/>
+        <c:overlap val="0"/>
+        <c:axId val="2094734554"/>
+        <c:axId val="2094734552"/>
+        <c:axId val="2094734556"/>
+      </c:barChart>
+      <c:catAx>
+        <c:axId val="2094734554"/>
+        <c:scaling>
+          <c:orientation val="minMax"/>
+        </c:scaling>
+        <c:delete val="0"/>
+        <c:axPos val="b"/>
+        <c:numFmt formatCode="General" sourceLinked="1"/>
+        <c:majorTickMark val="out"/>
+        <c:minorTickMark val="none"/>
+        <c:tickLblPos val="low"/>
+        <c:spPr>
+          <a:ln w="12700" cap="flat">
+            <a:solidFill>
+              <a:srgbClr val="24365A"/>
+            </a:solidFill>
+            <a:prstDash val="solid"/>
+            <a:round/>
+          </a:ln>
+        </c:spPr>
+        <c:txPr>
+          <a:bodyPr/>
+          <a:lstStyle/>
+          <a:p>
+            <a:pPr>
+              <a:defRPr sz="1100" b="0" i="0" u="none" strike="noStrike">
+                <a:solidFill>
+                  <a:srgbClr val="94A3B8"/>
+                </a:solidFill>
+                <a:latin typeface="Segoe UI"/>
+              </a:defRPr>
+            </a:pPr>
+            <a:endParaRPr lang="en-US"/>
+          </a:p>
+        </c:txPr>
+        <c:crossAx val="2094734552"/>
+        <c:crosses val="autoZero"/>
+        <c:auto val="1"/>
+        <c:lblAlgn val="ctr"/>
+        <c:noMultiLvlLbl val="1"/>
+      </c:catAx>
+      <c:valAx>
+        <c:axId val="2094734552"/>
+        <c:scaling>
+          <c:orientation val="minMax"/>
+        </c:scaling>
+        <c:delete val="0"/>
+        <c:axPos val="l"/>
+        <c:majorGridlines>
+          <c:spPr>
+            <a:ln w="12700" cap="flat">
+              <a:solidFill>
+                <a:srgbClr val="18243D"/>
+              </a:solidFill>
+              <a:prstDash val="solid"/>
+              <a:round/>
+            </a:ln>
+          </c:spPr>
+        </c:majorGridlines>
+        <c:numFmt formatCode="General" sourceLinked="0"/>
+        <c:majorTickMark val="out"/>
+        <c:minorTickMark val="none"/>
+        <c:tickLblPos val="nextTo"/>
+        <c:spPr>
+          <a:ln w="12700" cap="flat">
+            <a:solidFill>
+              <a:srgbClr val="24365A"/>
+            </a:solidFill>
+            <a:prstDash val="solid"/>
+            <a:round/>
+          </a:ln>
+        </c:spPr>
+        <c:txPr>
+          <a:bodyPr/>
+          <a:lstStyle/>
+          <a:p>
+            <a:pPr>
+              <a:defRPr sz="1000" b="0" i="0" u="none" strike="noStrike">
+                <a:solidFill>
+                  <a:srgbClr val="94A3B8"/>
+                </a:solidFill>
+                <a:latin typeface="Segoe UI"/>
+              </a:defRPr>
+            </a:pPr>
+            <a:endParaRPr lang="en-US"/>
+          </a:p>
+        </c:txPr>
+        <c:crossAx val="2094734554"/>
+        <c:crosses val="autoZero"/>
+        <c:crossBetween val="between"/>
+      </c:valAx>
+      <c:spPr>
+        <a:solidFill>
+          <a:srgbClr val="0D1420"/>
+        </a:solidFill>
+        <a:ln>
+          <a:noFill/>
+        </a:ln>
+        <a:effectLst/>
+      </c:spPr>
+    </c:plotArea>
+    <c:plotVisOnly val="1"/>
+    <c:dispBlanksAs val="span"/>
+  </c:chart>
+  <c:spPr>
+    <a:solidFill>
+      <a:srgbClr val="0D1420"/>
+    </a:solidFill>
+    <a:ln w="12700" cap="flat">
+      <a:solidFill>
+        <a:srgbClr val="24365A"/>
+      </a:solidFill>
+    </a:ln>
+    <a:effectLst/>
+  </c:spPr>
+  <c:externalData r:id="rId1">
+    <c:autoUpdate val="0"/>
+  </c:externalData>
+</c:chartSpace>
 </file>
 
 <file path=ppt/notesMasters/notesMaster1.xml><?xml version="1.0" encoding="utf-8"?>
@@ -551,6 +1621,446 @@
 </p:notes>
 </file>
 
+<file path=ppt/notesSlides/notesSlide10.xml><?xml version="1.0" encoding="utf-8"?>
+<p:notes xmlns:a="http://schemas.openxmlformats.org/drawingml/2006/main" xmlns:r="http://schemas.openxmlformats.org/officeDocument/2006/relationships" xmlns:p="http://schemas.openxmlformats.org/presentationml/2006/main">
+  <p:cSld>
+    <p:spTree>
+      <p:nvGrpSpPr>
+        <p:cNvPr id="1" name=""/>
+        <p:cNvGrpSpPr/>
+        <p:nvPr/>
+      </p:nvGrpSpPr>
+      <p:grpSpPr>
+        <a:xfrm>
+          <a:off x="0" y="0"/>
+          <a:ext cx="0" cy="0"/>
+          <a:chOff x="0" y="0"/>
+          <a:chExt cx="0" cy="0"/>
+        </a:xfrm>
+      </p:grpSpPr>
+      <p:sp>
+        <p:nvSpPr>
+          <p:cNvPr id="2" name="Slide Image Placeholder 1"/>
+          <p:cNvSpPr>
+            <a:spLocks noGrp="1" noRot="1" noChangeAspect="1"/>
+          </p:cNvSpPr>
+          <p:nvPr>
+            <p:ph type="sldImg"/>
+          </p:nvPr>
+        </p:nvSpPr>
+        <p:spPr/>
+      </p:sp>
+      <p:sp>
+        <p:nvSpPr>
+          <p:cNvPr id="3" name="Notes Placeholder 2"/>
+          <p:cNvSpPr>
+            <a:spLocks noGrp="1"/>
+          </p:cNvSpPr>
+          <p:nvPr>
+            <p:ph type="body" idx="1"/>
+          </p:nvPr>
+        </p:nvSpPr>
+        <p:spPr/>
+        <p:txBody>
+          <a:bodyPr/>
+          <a:lstStyle/>
+          <a:p>
+            <a:r>
+              <a:rPr lang="en-US" dirty="0"/>
+              <a:t/>
+            </a:r>
+            <a:endParaRPr lang="en-US" dirty="0"/>
+          </a:p>
+        </p:txBody>
+      </p:sp>
+      <p:sp>
+        <p:nvSpPr>
+          <p:cNvPr id="4" name="Slide Number Placeholder 3"/>
+          <p:cNvSpPr>
+            <a:spLocks noGrp="1"/>
+          </p:cNvSpPr>
+          <p:nvPr>
+            <p:ph type="sldNum" sz="quarter" idx="10"/>
+          </p:nvPr>
+        </p:nvSpPr>
+        <p:spPr/>
+        <p:txBody>
+          <a:bodyPr/>
+          <a:lstStyle/>
+          <a:p>
+            <a:fld id="{F7021451-1387-4CA6-816F-3879F97B5CBC}" type="slidenum">
+              <a:rPr lang="en-US"/>
+              <a:t>10</a:t>
+            </a:fld>
+            <a:endParaRPr lang="en-US"/>
+          </a:p>
+        </p:txBody>
+      </p:sp>
+    </p:spTree>
+    <p:extLst>
+      <p:ext uri="{BB962C8B-B14F-4D97-AF65-F5344CB8AC3E}">
+        <p14:creationId xmlns:p14="http://schemas.microsoft.com/office/powerpoint/2010/main" val="1024086991"/>
+      </p:ext>
+    </p:extLst>
+  </p:cSld>
+  <p:clrMapOvr>
+    <a:masterClrMapping/>
+  </p:clrMapOvr>
+</p:notes>
+</file>
+
+<file path=ppt/notesSlides/notesSlide11.xml><?xml version="1.0" encoding="utf-8"?>
+<p:notes xmlns:a="http://schemas.openxmlformats.org/drawingml/2006/main" xmlns:r="http://schemas.openxmlformats.org/officeDocument/2006/relationships" xmlns:p="http://schemas.openxmlformats.org/presentationml/2006/main">
+  <p:cSld>
+    <p:spTree>
+      <p:nvGrpSpPr>
+        <p:cNvPr id="1" name=""/>
+        <p:cNvGrpSpPr/>
+        <p:nvPr/>
+      </p:nvGrpSpPr>
+      <p:grpSpPr>
+        <a:xfrm>
+          <a:off x="0" y="0"/>
+          <a:ext cx="0" cy="0"/>
+          <a:chOff x="0" y="0"/>
+          <a:chExt cx="0" cy="0"/>
+        </a:xfrm>
+      </p:grpSpPr>
+      <p:sp>
+        <p:nvSpPr>
+          <p:cNvPr id="2" name="Slide Image Placeholder 1"/>
+          <p:cNvSpPr>
+            <a:spLocks noGrp="1" noRot="1" noChangeAspect="1"/>
+          </p:cNvSpPr>
+          <p:nvPr>
+            <p:ph type="sldImg"/>
+          </p:nvPr>
+        </p:nvSpPr>
+        <p:spPr/>
+      </p:sp>
+      <p:sp>
+        <p:nvSpPr>
+          <p:cNvPr id="3" name="Notes Placeholder 2"/>
+          <p:cNvSpPr>
+            <a:spLocks noGrp="1"/>
+          </p:cNvSpPr>
+          <p:nvPr>
+            <p:ph type="body" idx="1"/>
+          </p:nvPr>
+        </p:nvSpPr>
+        <p:spPr/>
+        <p:txBody>
+          <a:bodyPr/>
+          <a:lstStyle/>
+          <a:p>
+            <a:r>
+              <a:rPr lang="en-US" dirty="0"/>
+              <a:t/>
+            </a:r>
+            <a:endParaRPr lang="en-US" dirty="0"/>
+          </a:p>
+        </p:txBody>
+      </p:sp>
+      <p:sp>
+        <p:nvSpPr>
+          <p:cNvPr id="4" name="Slide Number Placeholder 3"/>
+          <p:cNvSpPr>
+            <a:spLocks noGrp="1"/>
+          </p:cNvSpPr>
+          <p:nvPr>
+            <p:ph type="sldNum" sz="quarter" idx="10"/>
+          </p:nvPr>
+        </p:nvSpPr>
+        <p:spPr/>
+        <p:txBody>
+          <a:bodyPr/>
+          <a:lstStyle/>
+          <a:p>
+            <a:fld id="{F7021451-1387-4CA6-816F-3879F97B5CBC}" type="slidenum">
+              <a:rPr lang="en-US"/>
+              <a:t>11</a:t>
+            </a:fld>
+            <a:endParaRPr lang="en-US"/>
+          </a:p>
+        </p:txBody>
+      </p:sp>
+    </p:spTree>
+    <p:extLst>
+      <p:ext uri="{BB962C8B-B14F-4D97-AF65-F5344CB8AC3E}">
+        <p14:creationId xmlns:p14="http://schemas.microsoft.com/office/powerpoint/2010/main" val="1024086991"/>
+      </p:ext>
+    </p:extLst>
+  </p:cSld>
+  <p:clrMapOvr>
+    <a:masterClrMapping/>
+  </p:clrMapOvr>
+</p:notes>
+</file>
+
+<file path=ppt/notesSlides/notesSlide12.xml><?xml version="1.0" encoding="utf-8"?>
+<p:notes xmlns:a="http://schemas.openxmlformats.org/drawingml/2006/main" xmlns:r="http://schemas.openxmlformats.org/officeDocument/2006/relationships" xmlns:p="http://schemas.openxmlformats.org/presentationml/2006/main">
+  <p:cSld>
+    <p:spTree>
+      <p:nvGrpSpPr>
+        <p:cNvPr id="1" name=""/>
+        <p:cNvGrpSpPr/>
+        <p:nvPr/>
+      </p:nvGrpSpPr>
+      <p:grpSpPr>
+        <a:xfrm>
+          <a:off x="0" y="0"/>
+          <a:ext cx="0" cy="0"/>
+          <a:chOff x="0" y="0"/>
+          <a:chExt cx="0" cy="0"/>
+        </a:xfrm>
+      </p:grpSpPr>
+      <p:sp>
+        <p:nvSpPr>
+          <p:cNvPr id="2" name="Slide Image Placeholder 1"/>
+          <p:cNvSpPr>
+            <a:spLocks noGrp="1" noRot="1" noChangeAspect="1"/>
+          </p:cNvSpPr>
+          <p:nvPr>
+            <p:ph type="sldImg"/>
+          </p:nvPr>
+        </p:nvSpPr>
+        <p:spPr/>
+      </p:sp>
+      <p:sp>
+        <p:nvSpPr>
+          <p:cNvPr id="3" name="Notes Placeholder 2"/>
+          <p:cNvSpPr>
+            <a:spLocks noGrp="1"/>
+          </p:cNvSpPr>
+          <p:nvPr>
+            <p:ph type="body" idx="1"/>
+          </p:nvPr>
+        </p:nvSpPr>
+        <p:spPr/>
+        <p:txBody>
+          <a:bodyPr/>
+          <a:lstStyle/>
+          <a:p>
+            <a:r>
+              <a:rPr lang="en-US" dirty="0"/>
+              <a:t/>
+            </a:r>
+            <a:endParaRPr lang="en-US" dirty="0"/>
+          </a:p>
+        </p:txBody>
+      </p:sp>
+      <p:sp>
+        <p:nvSpPr>
+          <p:cNvPr id="4" name="Slide Number Placeholder 3"/>
+          <p:cNvSpPr>
+            <a:spLocks noGrp="1"/>
+          </p:cNvSpPr>
+          <p:nvPr>
+            <p:ph type="sldNum" sz="quarter" idx="10"/>
+          </p:nvPr>
+        </p:nvSpPr>
+        <p:spPr/>
+        <p:txBody>
+          <a:bodyPr/>
+          <a:lstStyle/>
+          <a:p>
+            <a:fld id="{F7021451-1387-4CA6-816F-3879F97B5CBC}" type="slidenum">
+              <a:rPr lang="en-US"/>
+              <a:t>12</a:t>
+            </a:fld>
+            <a:endParaRPr lang="en-US"/>
+          </a:p>
+        </p:txBody>
+      </p:sp>
+    </p:spTree>
+    <p:extLst>
+      <p:ext uri="{BB962C8B-B14F-4D97-AF65-F5344CB8AC3E}">
+        <p14:creationId xmlns:p14="http://schemas.microsoft.com/office/powerpoint/2010/main" val="1024086991"/>
+      </p:ext>
+    </p:extLst>
+  </p:cSld>
+  <p:clrMapOvr>
+    <a:masterClrMapping/>
+  </p:clrMapOvr>
+</p:notes>
+</file>
+
+<file path=ppt/notesSlides/notesSlide13.xml><?xml version="1.0" encoding="utf-8"?>
+<p:notes xmlns:a="http://schemas.openxmlformats.org/drawingml/2006/main" xmlns:r="http://schemas.openxmlformats.org/officeDocument/2006/relationships" xmlns:p="http://schemas.openxmlformats.org/presentationml/2006/main">
+  <p:cSld>
+    <p:spTree>
+      <p:nvGrpSpPr>
+        <p:cNvPr id="1" name=""/>
+        <p:cNvGrpSpPr/>
+        <p:nvPr/>
+      </p:nvGrpSpPr>
+      <p:grpSpPr>
+        <a:xfrm>
+          <a:off x="0" y="0"/>
+          <a:ext cx="0" cy="0"/>
+          <a:chOff x="0" y="0"/>
+          <a:chExt cx="0" cy="0"/>
+        </a:xfrm>
+      </p:grpSpPr>
+      <p:sp>
+        <p:nvSpPr>
+          <p:cNvPr id="2" name="Slide Image Placeholder 1"/>
+          <p:cNvSpPr>
+            <a:spLocks noGrp="1" noRot="1" noChangeAspect="1"/>
+          </p:cNvSpPr>
+          <p:nvPr>
+            <p:ph type="sldImg"/>
+          </p:nvPr>
+        </p:nvSpPr>
+        <p:spPr/>
+      </p:sp>
+      <p:sp>
+        <p:nvSpPr>
+          <p:cNvPr id="3" name="Notes Placeholder 2"/>
+          <p:cNvSpPr>
+            <a:spLocks noGrp="1"/>
+          </p:cNvSpPr>
+          <p:nvPr>
+            <p:ph type="body" idx="1"/>
+          </p:nvPr>
+        </p:nvSpPr>
+        <p:spPr/>
+        <p:txBody>
+          <a:bodyPr/>
+          <a:lstStyle/>
+          <a:p>
+            <a:r>
+              <a:rPr lang="en-US" dirty="0"/>
+              <a:t/>
+            </a:r>
+            <a:endParaRPr lang="en-US" dirty="0"/>
+          </a:p>
+        </p:txBody>
+      </p:sp>
+      <p:sp>
+        <p:nvSpPr>
+          <p:cNvPr id="4" name="Slide Number Placeholder 3"/>
+          <p:cNvSpPr>
+            <a:spLocks noGrp="1"/>
+          </p:cNvSpPr>
+          <p:nvPr>
+            <p:ph type="sldNum" sz="quarter" idx="10"/>
+          </p:nvPr>
+        </p:nvSpPr>
+        <p:spPr/>
+        <p:txBody>
+          <a:bodyPr/>
+          <a:lstStyle/>
+          <a:p>
+            <a:fld id="{F7021451-1387-4CA6-816F-3879F97B5CBC}" type="slidenum">
+              <a:rPr lang="en-US"/>
+              <a:t>13</a:t>
+            </a:fld>
+            <a:endParaRPr lang="en-US"/>
+          </a:p>
+        </p:txBody>
+      </p:sp>
+    </p:spTree>
+    <p:extLst>
+      <p:ext uri="{BB962C8B-B14F-4D97-AF65-F5344CB8AC3E}">
+        <p14:creationId xmlns:p14="http://schemas.microsoft.com/office/powerpoint/2010/main" val="1024086991"/>
+      </p:ext>
+    </p:extLst>
+  </p:cSld>
+  <p:clrMapOvr>
+    <a:masterClrMapping/>
+  </p:clrMapOvr>
+</p:notes>
+</file>
+
+<file path=ppt/notesSlides/notesSlide14.xml><?xml version="1.0" encoding="utf-8"?>
+<p:notes xmlns:a="http://schemas.openxmlformats.org/drawingml/2006/main" xmlns:r="http://schemas.openxmlformats.org/officeDocument/2006/relationships" xmlns:p="http://schemas.openxmlformats.org/presentationml/2006/main">
+  <p:cSld>
+    <p:spTree>
+      <p:nvGrpSpPr>
+        <p:cNvPr id="1" name=""/>
+        <p:cNvGrpSpPr/>
+        <p:nvPr/>
+      </p:nvGrpSpPr>
+      <p:grpSpPr>
+        <a:xfrm>
+          <a:off x="0" y="0"/>
+          <a:ext cx="0" cy="0"/>
+          <a:chOff x="0" y="0"/>
+          <a:chExt cx="0" cy="0"/>
+        </a:xfrm>
+      </p:grpSpPr>
+      <p:sp>
+        <p:nvSpPr>
+          <p:cNvPr id="2" name="Slide Image Placeholder 1"/>
+          <p:cNvSpPr>
+            <a:spLocks noGrp="1" noRot="1" noChangeAspect="1"/>
+          </p:cNvSpPr>
+          <p:nvPr>
+            <p:ph type="sldImg"/>
+          </p:nvPr>
+        </p:nvSpPr>
+        <p:spPr/>
+      </p:sp>
+      <p:sp>
+        <p:nvSpPr>
+          <p:cNvPr id="3" name="Notes Placeholder 2"/>
+          <p:cNvSpPr>
+            <a:spLocks noGrp="1"/>
+          </p:cNvSpPr>
+          <p:nvPr>
+            <p:ph type="body" idx="1"/>
+          </p:nvPr>
+        </p:nvSpPr>
+        <p:spPr/>
+        <p:txBody>
+          <a:bodyPr/>
+          <a:lstStyle/>
+          <a:p>
+            <a:r>
+              <a:rPr lang="en-US" dirty="0"/>
+              <a:t/>
+            </a:r>
+            <a:endParaRPr lang="en-US" dirty="0"/>
+          </a:p>
+        </p:txBody>
+      </p:sp>
+      <p:sp>
+        <p:nvSpPr>
+          <p:cNvPr id="4" name="Slide Number Placeholder 3"/>
+          <p:cNvSpPr>
+            <a:spLocks noGrp="1"/>
+          </p:cNvSpPr>
+          <p:nvPr>
+            <p:ph type="sldNum" sz="quarter" idx="10"/>
+          </p:nvPr>
+        </p:nvSpPr>
+        <p:spPr/>
+        <p:txBody>
+          <a:bodyPr/>
+          <a:lstStyle/>
+          <a:p>
+            <a:fld id="{F7021451-1387-4CA6-816F-3879F97B5CBC}" type="slidenum">
+              <a:rPr lang="en-US"/>
+              <a:t>14</a:t>
+            </a:fld>
+            <a:endParaRPr lang="en-US"/>
+          </a:p>
+        </p:txBody>
+      </p:sp>
+    </p:spTree>
+    <p:extLst>
+      <p:ext uri="{BB962C8B-B14F-4D97-AF65-F5344CB8AC3E}">
+        <p14:creationId xmlns:p14="http://schemas.microsoft.com/office/powerpoint/2010/main" val="1024086991"/>
+      </p:ext>
+    </p:extLst>
+  </p:cSld>
+  <p:clrMapOvr>
+    <a:masterClrMapping/>
+  </p:clrMapOvr>
+</p:notes>
+</file>
+
 <file path=ppt/notesSlides/notesSlide2.xml><?xml version="1.0" encoding="utf-8"?>
 <p:notes xmlns:a="http://schemas.openxmlformats.org/drawingml/2006/main" xmlns:r="http://schemas.openxmlformats.org/officeDocument/2006/relationships" xmlns:p="http://schemas.openxmlformats.org/presentationml/2006/main">
   <p:cSld>
@@ -1149,6 +2659,94 @@
             <a:fld id="{F7021451-1387-4CA6-816F-3879F97B5CBC}" type="slidenum">
               <a:rPr lang="en-US"/>
               <a:t>8</a:t>
+            </a:fld>
+            <a:endParaRPr lang="en-US"/>
+          </a:p>
+        </p:txBody>
+      </p:sp>
+    </p:spTree>
+    <p:extLst>
+      <p:ext uri="{BB962C8B-B14F-4D97-AF65-F5344CB8AC3E}">
+        <p14:creationId xmlns:p14="http://schemas.microsoft.com/office/powerpoint/2010/main" val="1024086991"/>
+      </p:ext>
+    </p:extLst>
+  </p:cSld>
+  <p:clrMapOvr>
+    <a:masterClrMapping/>
+  </p:clrMapOvr>
+</p:notes>
+</file>
+
+<file path=ppt/notesSlides/notesSlide9.xml><?xml version="1.0" encoding="utf-8"?>
+<p:notes xmlns:a="http://schemas.openxmlformats.org/drawingml/2006/main" xmlns:r="http://schemas.openxmlformats.org/officeDocument/2006/relationships" xmlns:p="http://schemas.openxmlformats.org/presentationml/2006/main">
+  <p:cSld>
+    <p:spTree>
+      <p:nvGrpSpPr>
+        <p:cNvPr id="1" name=""/>
+        <p:cNvGrpSpPr/>
+        <p:nvPr/>
+      </p:nvGrpSpPr>
+      <p:grpSpPr>
+        <a:xfrm>
+          <a:off x="0" y="0"/>
+          <a:ext cx="0" cy="0"/>
+          <a:chOff x="0" y="0"/>
+          <a:chExt cx="0" cy="0"/>
+        </a:xfrm>
+      </p:grpSpPr>
+      <p:sp>
+        <p:nvSpPr>
+          <p:cNvPr id="2" name="Slide Image Placeholder 1"/>
+          <p:cNvSpPr>
+            <a:spLocks noGrp="1" noRot="1" noChangeAspect="1"/>
+          </p:cNvSpPr>
+          <p:nvPr>
+            <p:ph type="sldImg"/>
+          </p:nvPr>
+        </p:nvSpPr>
+        <p:spPr/>
+      </p:sp>
+      <p:sp>
+        <p:nvSpPr>
+          <p:cNvPr id="3" name="Notes Placeholder 2"/>
+          <p:cNvSpPr>
+            <a:spLocks noGrp="1"/>
+          </p:cNvSpPr>
+          <p:nvPr>
+            <p:ph type="body" idx="1"/>
+          </p:nvPr>
+        </p:nvSpPr>
+        <p:spPr/>
+        <p:txBody>
+          <a:bodyPr/>
+          <a:lstStyle/>
+          <a:p>
+            <a:r>
+              <a:rPr lang="en-US" dirty="0"/>
+              <a:t/>
+            </a:r>
+            <a:endParaRPr lang="en-US" dirty="0"/>
+          </a:p>
+        </p:txBody>
+      </p:sp>
+      <p:sp>
+        <p:nvSpPr>
+          <p:cNvPr id="4" name="Slide Number Placeholder 3"/>
+          <p:cNvSpPr>
+            <a:spLocks noGrp="1"/>
+          </p:cNvSpPr>
+          <p:nvPr>
+            <p:ph type="sldNum" sz="quarter" idx="10"/>
+          </p:nvPr>
+        </p:nvSpPr>
+        <p:spPr/>
+        <p:txBody>
+          <a:bodyPr/>
+          <a:lstStyle/>
+          <a:p>
+            <a:fld id="{F7021451-1387-4CA6-816F-3879F97B5CBC}" type="slidenum">
+              <a:rPr lang="en-US"/>
+              <a:t>9</a:t>
             </a:fld>
             <a:endParaRPr lang="en-US"/>
           </a:p>
@@ -1546,7 +3144,7 @@
         </p:nvSpPr>
         <p:spPr>
           <a:xfrm>
-            <a:off x="822960" y="1554480"/>
+            <a:off x="822960" y="1783080"/>
             <a:ext cx="10515600" cy="457200"/>
           </a:xfrm>
           <a:prstGeom prst="rect">
@@ -1571,7 +3169,7 @@
                 <a:ea typeface="Consolas" pitchFamily="34" charset="-122"/>
                 <a:cs typeface="Consolas" pitchFamily="34" charset="-120"/>
               </a:rPr>
-              <a:t>DATA ENGINEERING</a:t>
+              <a:t>ZALIN PLATFORM · DATA ENGINEERING</a:t>
             </a:r>
             <a:endParaRPr lang="en-US" sz="1400" dirty="0"/>
           </a:p>
@@ -1586,7 +3184,7 @@
         <p:spPr>
           <a:xfrm>
             <a:off x="822960" y="2286000"/>
-            <a:ext cx="10515600" cy="1737360"/>
+            <a:ext cx="10607040" cy="1691640"/>
           </a:xfrm>
           <a:prstGeom prst="rect">
             <a:avLst/>
@@ -1602,7 +3200,7 @@
               <a:buNone/>
             </a:pPr>
             <a:r>
-              <a:rPr lang="en-US" sz="4400" b="1" dirty="0">
+              <a:rPr lang="en-US" sz="4100" b="1" dirty="0">
                 <a:solidFill>
                   <a:srgbClr val="FFFFFF"/>
                 </a:solidFill>
@@ -1610,9 +3208,9 @@
                 <a:ea typeface="Segoe UI" pitchFamily="34" charset="-122"/>
                 <a:cs typeface="Segoe UI" pitchFamily="34" charset="-120"/>
               </a:rPr>
-              <a:t>The ETL playbook</a:t>
-            </a:r>
-            <a:endParaRPr lang="en-US" sz="4400" dirty="0"/>
+              <a:t>The ETL Playbook: Data Quality at Scale</a:t>
+            </a:r>
+            <a:endParaRPr lang="en-US" sz="4100" dirty="0"/>
           </a:p>
         </p:txBody>
       </p:sp>
@@ -1624,8 +3222,8 @@
         </p:nvSpPr>
         <p:spPr>
           <a:xfrm>
-            <a:off x="822960" y="4206240"/>
-            <a:ext cx="10515600" cy="914400"/>
+            <a:off x="822960" y="4023360"/>
+            <a:ext cx="10058400" cy="777240"/>
           </a:xfrm>
           <a:prstGeom prst="rect">
             <a:avLst/>
@@ -1641,7 +3239,7 @@
               <a:buNone/>
             </a:pPr>
             <a:r>
-              <a:rPr lang="en-US" sz="1600" dirty="0">
+              <a:rPr lang="en-US" sz="1700" dirty="0">
                 <a:solidFill>
                   <a:srgbClr val="94A3B8"/>
                 </a:solidFill>
@@ -1649,21 +3247,83 @@
                 <a:ea typeface="Segoe UI" pitchFamily="34" charset="-122"/>
                 <a:cs typeface="Segoe UI" pitchFamily="34" charset="-120"/>
               </a:rPr>
-              <a:t>Lessons from retail BI across four countries and the frameworks that followed · Rezalian Vatiady</a:t>
-            </a:r>
-            <a:endParaRPr lang="en-US" sz="1600" dirty="0"/>
-          </a:p>
-        </p:txBody>
-      </p:sp>
-      <p:sp>
-        <p:nvSpPr>
-          <p:cNvPr id="7" name="Text 5"/>
-          <p:cNvSpPr/>
-          <p:nvPr/>
-        </p:nvSpPr>
-        <p:spPr>
-          <a:xfrm>
-            <a:off x="10698480" y="6355080"/>
+              <a:t>ETL fails quietly - unless you design against it</a:t>
+            </a:r>
+            <a:endParaRPr lang="en-US" sz="1700" dirty="0"/>
+          </a:p>
+        </p:txBody>
+      </p:sp>
+      <p:sp>
+        <p:nvSpPr>
+          <p:cNvPr id="7" name="Shape 5"/>
+          <p:cNvSpPr/>
+          <p:nvPr/>
+        </p:nvSpPr>
+        <p:spPr>
+          <a:xfrm>
+            <a:off x="822960" y="5440680"/>
+            <a:ext cx="4114800" cy="0"/>
+          </a:xfrm>
+          <a:prstGeom prst="line">
+            <a:avLst/>
+          </a:prstGeom>
+          <a:noFill/>
+          <a:ln w="31750">
+            <a:solidFill>
+              <a:srgbClr val="3B82F6"/>
+            </a:solidFill>
+            <a:prstDash val="solid"/>
+          </a:ln>
+        </p:spPr>
+      </p:sp>
+      <p:sp>
+        <p:nvSpPr>
+          <p:cNvPr id="8" name="Text 6"/>
+          <p:cNvSpPr/>
+          <p:nvPr/>
+        </p:nvSpPr>
+        <p:spPr>
+          <a:xfrm>
+            <a:off x="822960" y="5596128"/>
+            <a:ext cx="10058400" cy="457200"/>
+          </a:xfrm>
+          <a:prstGeom prst="rect">
+            <a:avLst/>
+          </a:prstGeom>
+          <a:noFill/>
+          <a:ln/>
+        </p:spPr>
+        <p:txBody>
+          <a:bodyPr wrap="square" rtlCol="0" anchor="ctr"/>
+          <a:lstStyle/>
+          <a:p>
+            <a:pPr indent="0" marL="0">
+              <a:buNone/>
+            </a:pPr>
+            <a:r>
+              <a:rPr lang="en-US" sz="1250" dirty="0">
+                <a:solidFill>
+                  <a:srgbClr val="64748B"/>
+                </a:solidFill>
+                <a:latin typeface="Segoe UI" pitchFamily="34" charset="0"/>
+                <a:ea typeface="Segoe UI" pitchFamily="34" charset="-122"/>
+                <a:cs typeface="Segoe UI" pitchFamily="34" charset="-120"/>
+              </a:rPr>
+              <a:t>Rezalian Vatiady · Zalin Labs · 2026</a:t>
+            </a:r>
+            <a:endParaRPr lang="en-US" sz="1250" dirty="0"/>
+          </a:p>
+        </p:txBody>
+      </p:sp>
+      <p:sp>
+        <p:nvSpPr>
+          <p:cNvPr id="9" name="Text 7"/>
+          <p:cNvSpPr/>
+          <p:nvPr/>
+        </p:nvSpPr>
+        <p:spPr>
+          <a:xfrm>
+            <a:off x="10698480" y="6382512"/>
             <a:ext cx="1188720" cy="365760"/>
           </a:xfrm>
           <a:prstGeom prst="rect">
@@ -1688,7 +3348,2659 @@
                 <a:ea typeface="Consolas" pitchFamily="34" charset="-122"/>
                 <a:cs typeface="Consolas" pitchFamily="34" charset="-120"/>
               </a:rPr>
-              <a:t>1 / 8</a:t>
+              <a:t>1 / 14</a:t>
+            </a:r>
+            <a:endParaRPr lang="en-US" sz="1000" dirty="0"/>
+          </a:p>
+        </p:txBody>
+      </p:sp>
+    </p:spTree>
+  </p:cSld>
+  <p:clrMapOvr>
+    <a:masterClrMapping/>
+  </p:clrMapOvr>
+</p:sld>
+</file>
+
+<file path=ppt/slides/slide10.xml><?xml version="1.0" encoding="utf-8"?>
+<p:sld xmlns:a="http://schemas.openxmlformats.org/drawingml/2006/main" xmlns:r="http://schemas.openxmlformats.org/officeDocument/2006/relationships" xmlns:p="http://schemas.openxmlformats.org/presentationml/2006/main">
+  <p:cSld name="Slide 10">
+    <p:bg>
+      <p:bgPr>
+        <a:solidFill>
+          <a:srgbClr val="0A0C12"/>
+        </a:solidFill>
+      </p:bgPr>
+    </p:bg>
+    <p:spTree>
+      <p:nvGrpSpPr>
+        <p:cNvPr id="1" name=""/>
+        <p:cNvGrpSpPr/>
+        <p:nvPr/>
+      </p:nvGrpSpPr>
+      <p:grpSpPr>
+        <a:xfrm>
+          <a:off x="0" y="0"/>
+          <a:ext cx="0" cy="0"/>
+          <a:chOff x="0" y="0"/>
+          <a:chExt cx="0" cy="0"/>
+        </a:xfrm>
+      </p:grpSpPr>
+      <p:sp>
+        <p:nvSpPr>
+          <p:cNvPr id="2" name="Shape 0"/>
+          <p:cNvSpPr/>
+          <p:nvPr/>
+        </p:nvSpPr>
+        <p:spPr>
+          <a:xfrm>
+            <a:off x="0" y="0"/>
+            <a:ext cx="7680960" cy="64008"/>
+          </a:xfrm>
+          <a:prstGeom prst="rect">
+            <a:avLst/>
+          </a:prstGeom>
+          <a:solidFill>
+            <a:srgbClr val="3B82F6"/>
+          </a:solidFill>
+          <a:ln/>
+        </p:spPr>
+      </p:sp>
+      <p:sp>
+        <p:nvSpPr>
+          <p:cNvPr id="3" name="Shape 1"/>
+          <p:cNvSpPr/>
+          <p:nvPr/>
+        </p:nvSpPr>
+        <p:spPr>
+          <a:xfrm>
+            <a:off x="7680960" y="0"/>
+            <a:ext cx="4510735" cy="64008"/>
+          </a:xfrm>
+          <a:prstGeom prst="rect">
+            <a:avLst/>
+          </a:prstGeom>
+          <a:solidFill>
+            <a:srgbClr val="06B6D4"/>
+          </a:solidFill>
+          <a:ln/>
+        </p:spPr>
+      </p:sp>
+      <p:sp>
+        <p:nvSpPr>
+          <p:cNvPr id="4" name="Text 2"/>
+          <p:cNvSpPr/>
+          <p:nvPr/>
+        </p:nvSpPr>
+        <p:spPr>
+          <a:xfrm>
+            <a:off x="822960" y="502920"/>
+            <a:ext cx="10515600" cy="365760"/>
+          </a:xfrm>
+          <a:prstGeom prst="rect">
+            <a:avLst/>
+          </a:prstGeom>
+          <a:noFill/>
+          <a:ln/>
+        </p:spPr>
+        <p:txBody>
+          <a:bodyPr wrap="square" rtlCol="0" anchor="ctr"/>
+          <a:lstStyle/>
+          <a:p>
+            <a:pPr indent="0" marL="0">
+              <a:buNone/>
+            </a:pPr>
+            <a:r>
+              <a:rPr lang="en-US" sz="1200" spc="300" kern="0" dirty="0">
+                <a:solidFill>
+                  <a:srgbClr val="06B6D4"/>
+                </a:solidFill>
+                <a:latin typeface="Consolas" pitchFamily="34" charset="0"/>
+                <a:ea typeface="Consolas" pitchFamily="34" charset="-122"/>
+                <a:cs typeface="Consolas" pitchFamily="34" charset="-120"/>
+              </a:rPr>
+              <a:t>PRINCIPLE 4</a:t>
+            </a:r>
+            <a:endParaRPr lang="en-US" sz="1200" dirty="0"/>
+          </a:p>
+        </p:txBody>
+      </p:sp>
+      <p:sp>
+        <p:nvSpPr>
+          <p:cNvPr id="5" name="Text 3"/>
+          <p:cNvSpPr/>
+          <p:nvPr/>
+        </p:nvSpPr>
+        <p:spPr>
+          <a:xfrm>
+            <a:off x="822960" y="914400"/>
+            <a:ext cx="10561320" cy="868680"/>
+          </a:xfrm>
+          <a:prstGeom prst="rect">
+            <a:avLst/>
+          </a:prstGeom>
+          <a:noFill/>
+          <a:ln/>
+        </p:spPr>
+        <p:txBody>
+          <a:bodyPr wrap="square" rtlCol="0" anchor="ctr"/>
+          <a:lstStyle/>
+          <a:p>
+            <a:pPr indent="0" marL="0">
+              <a:buNone/>
+            </a:pPr>
+            <a:r>
+              <a:rPr lang="en-US" sz="2700" b="1" dirty="0">
+                <a:solidFill>
+                  <a:srgbClr val="FFFFFF"/>
+                </a:solidFill>
+                <a:latin typeface="Segoe UI" pitchFamily="34" charset="0"/>
+                <a:ea typeface="Segoe UI" pitchFamily="34" charset="-122"/>
+                <a:cs typeface="Segoe UI" pitchFamily="34" charset="-120"/>
+              </a:rPr>
+              <a:t>Discrepancies get owners, not just tickets</a:t>
+            </a:r>
+            <a:endParaRPr lang="en-US" sz="2700" dirty="0"/>
+          </a:p>
+        </p:txBody>
+      </p:sp>
+      <p:sp>
+        <p:nvSpPr>
+          <p:cNvPr id="6" name="Shape 4"/>
+          <p:cNvSpPr/>
+          <p:nvPr/>
+        </p:nvSpPr>
+        <p:spPr>
+          <a:xfrm>
+            <a:off x="822960" y="2011680"/>
+            <a:ext cx="5074920" cy="3611880"/>
+          </a:xfrm>
+          <a:prstGeom prst="roundRect">
+            <a:avLst>
+              <a:gd name="adj" fmla="val 2025"/>
+            </a:avLst>
+          </a:prstGeom>
+          <a:solidFill>
+            <a:srgbClr val="111A2E"/>
+          </a:solidFill>
+          <a:ln w="12700">
+            <a:solidFill>
+              <a:srgbClr val="1E2D45"/>
+            </a:solidFill>
+            <a:prstDash val="solid"/>
+          </a:ln>
+        </p:spPr>
+      </p:sp>
+      <p:sp>
+        <p:nvSpPr>
+          <p:cNvPr id="7" name="Text 5"/>
+          <p:cNvSpPr/>
+          <p:nvPr/>
+        </p:nvSpPr>
+        <p:spPr>
+          <a:xfrm>
+            <a:off x="1097280" y="2240280"/>
+            <a:ext cx="4526280" cy="502920"/>
+          </a:xfrm>
+          <a:prstGeom prst="rect">
+            <a:avLst/>
+          </a:prstGeom>
+          <a:noFill/>
+          <a:ln/>
+        </p:spPr>
+        <p:txBody>
+          <a:bodyPr wrap="square" rtlCol="0" anchor="ctr"/>
+          <a:lstStyle/>
+          <a:p>
+            <a:pPr indent="0" marL="0">
+              <a:buNone/>
+            </a:pPr>
+            <a:r>
+              <a:rPr lang="en-US" sz="1650" b="1" dirty="0">
+                <a:solidFill>
+                  <a:srgbClr val="06B6D4"/>
+                </a:solidFill>
+                <a:latin typeface="Segoe UI" pitchFamily="34" charset="0"/>
+                <a:ea typeface="Segoe UI" pitchFamily="34" charset="-122"/>
+                <a:cs typeface="Segoe UI" pitchFamily="34" charset="-120"/>
+              </a:rPr>
+              <a:t>Ticket-only fixes</a:t>
+            </a:r>
+            <a:endParaRPr lang="en-US" sz="1650" dirty="0"/>
+          </a:p>
+        </p:txBody>
+      </p:sp>
+      <p:sp>
+        <p:nvSpPr>
+          <p:cNvPr id="8" name="Text 6"/>
+          <p:cNvSpPr/>
+          <p:nvPr/>
+        </p:nvSpPr>
+        <p:spPr>
+          <a:xfrm>
+            <a:off x="1097280" y="2834640"/>
+            <a:ext cx="4553712" cy="2651760"/>
+          </a:xfrm>
+          <a:prstGeom prst="rect">
+            <a:avLst/>
+          </a:prstGeom>
+          <a:noFill/>
+          <a:ln/>
+        </p:spPr>
+        <p:txBody>
+          <a:bodyPr wrap="square" rtlCol="0" anchor="t"/>
+          <a:lstStyle/>
+          <a:p>
+            <a:pPr marL="342900" indent="-342900">
+              <a:lnSpc>
+                <a:spcPct val="112000"/>
+              </a:lnSpc>
+              <a:spcAft>
+                <a:spcPts val="900"/>
+              </a:spcAft>
+              <a:buSzPct val="100000"/>
+              <a:buChar char="▸"/>
+            </a:pPr>
+            <a:r>
+              <a:rPr lang="en-US" sz="1280" dirty="0">
+                <a:solidFill>
+                  <a:srgbClr val="CBD5E1"/>
+                </a:solidFill>
+                <a:latin typeface="Segoe UI" pitchFamily="34" charset="0"/>
+                <a:ea typeface="Segoe UI" pitchFamily="34" charset="-122"/>
+                <a:cs typeface="Segoe UI" pitchFamily="34" charset="-120"/>
+              </a:rPr>
+              <a:t>A mismatch enters a queue and ages in it</a:t>
+            </a:r>
+            <a:endParaRPr lang="en-US" sz="1280" dirty="0"/>
+          </a:p>
+          <a:p>
+            <a:pPr marL="342900" indent="-342900">
+              <a:lnSpc>
+                <a:spcPct val="112000"/>
+              </a:lnSpc>
+              <a:spcAft>
+                <a:spcPts val="900"/>
+              </a:spcAft>
+              <a:buSzPct val="100000"/>
+              <a:buChar char="▸"/>
+            </a:pPr>
+            <a:r>
+              <a:rPr lang="en-US" sz="1280" dirty="0">
+                <a:solidFill>
+                  <a:srgbClr val="CBD5E1"/>
+                </a:solidFill>
+                <a:latin typeface="Segoe UI" pitchFamily="34" charset="0"/>
+                <a:ea typeface="Segoe UI" pitchFamily="34" charset="-122"/>
+                <a:cs typeface="Segoe UI" pitchFamily="34" charset="-120"/>
+              </a:rPr>
+              <a:t>Both sides assume the other one owns it</a:t>
+            </a:r>
+            <a:endParaRPr lang="en-US" sz="1280" dirty="0"/>
+          </a:p>
+          <a:p>
+            <a:pPr marL="342900" indent="-342900">
+              <a:lnSpc>
+                <a:spcPct val="112000"/>
+              </a:lnSpc>
+              <a:spcAft>
+                <a:spcPts val="900"/>
+              </a:spcAft>
+              <a:buSzPct val="100000"/>
+              <a:buChar char="▸"/>
+            </a:pPr>
+            <a:r>
+              <a:rPr lang="en-US" sz="1280" dirty="0">
+                <a:solidFill>
+                  <a:srgbClr val="CBD5E1"/>
+                </a:solidFill>
+                <a:latin typeface="Segoe UI" pitchFamily="34" charset="0"/>
+                <a:ea typeface="Segoe UI" pitchFamily="34" charset="-122"/>
+                <a:cs typeface="Segoe UI" pitchFamily="34" charset="-120"/>
+              </a:rPr>
+              <a:t>The same discrepancy returns next quarter</a:t>
+            </a:r>
+            <a:endParaRPr lang="en-US" sz="1280" dirty="0"/>
+          </a:p>
+          <a:p>
+            <a:pPr marL="342900" indent="-342900">
+              <a:lnSpc>
+                <a:spcPct val="112000"/>
+              </a:lnSpc>
+              <a:spcAft>
+                <a:spcPts val="900"/>
+              </a:spcAft>
+              <a:buSzPct val="100000"/>
+              <a:buChar char="▸"/>
+            </a:pPr>
+            <a:r>
+              <a:rPr lang="en-US" sz="1280" dirty="0">
+                <a:solidFill>
+                  <a:srgbClr val="CBD5E1"/>
+                </a:solidFill>
+                <a:latin typeface="Segoe UI" pitchFamily="34" charset="0"/>
+                <a:ea typeface="Segoe UI" pitchFamily="34" charset="-122"/>
+                <a:cs typeface="Segoe UI" pitchFamily="34" charset="-120"/>
+              </a:rPr>
+              <a:t>Data quality stays a technical problem</a:t>
+            </a:r>
+            <a:endParaRPr lang="en-US" sz="1280" dirty="0"/>
+          </a:p>
+        </p:txBody>
+      </p:sp>
+      <p:sp>
+        <p:nvSpPr>
+          <p:cNvPr id="9" name="Shape 7"/>
+          <p:cNvSpPr/>
+          <p:nvPr/>
+        </p:nvSpPr>
+        <p:spPr>
+          <a:xfrm>
+            <a:off x="6291072" y="2011680"/>
+            <a:ext cx="5074920" cy="3611880"/>
+          </a:xfrm>
+          <a:prstGeom prst="roundRect">
+            <a:avLst>
+              <a:gd name="adj" fmla="val 2025"/>
+            </a:avLst>
+          </a:prstGeom>
+          <a:solidFill>
+            <a:srgbClr val="111A2E"/>
+          </a:solidFill>
+          <a:ln w="12700">
+            <a:solidFill>
+              <a:srgbClr val="1E2D45"/>
+            </a:solidFill>
+            <a:prstDash val="solid"/>
+          </a:ln>
+        </p:spPr>
+      </p:sp>
+      <p:sp>
+        <p:nvSpPr>
+          <p:cNvPr id="10" name="Text 8"/>
+          <p:cNvSpPr/>
+          <p:nvPr/>
+        </p:nvSpPr>
+        <p:spPr>
+          <a:xfrm>
+            <a:off x="6565392" y="2240280"/>
+            <a:ext cx="4526280" cy="502920"/>
+          </a:xfrm>
+          <a:prstGeom prst="rect">
+            <a:avLst/>
+          </a:prstGeom>
+          <a:noFill/>
+          <a:ln/>
+        </p:spPr>
+        <p:txBody>
+          <a:bodyPr wrap="square" rtlCol="0" anchor="ctr"/>
+          <a:lstStyle/>
+          <a:p>
+            <a:pPr indent="0" marL="0">
+              <a:buNone/>
+            </a:pPr>
+            <a:r>
+              <a:rPr lang="en-US" sz="1650" b="1" dirty="0">
+                <a:solidFill>
+                  <a:srgbClr val="93C5FD"/>
+                </a:solidFill>
+                <a:latin typeface="Segoe UI" pitchFamily="34" charset="0"/>
+                <a:ea typeface="Segoe UI" pitchFamily="34" charset="-122"/>
+                <a:cs typeface="Segoe UI" pitchFamily="34" charset="-120"/>
+              </a:rPr>
+              <a:t>Named owners on both sides</a:t>
+            </a:r>
+            <a:endParaRPr lang="en-US" sz="1650" dirty="0"/>
+          </a:p>
+        </p:txBody>
+      </p:sp>
+      <p:sp>
+        <p:nvSpPr>
+          <p:cNvPr id="11" name="Text 9"/>
+          <p:cNvSpPr/>
+          <p:nvPr/>
+        </p:nvSpPr>
+        <p:spPr>
+          <a:xfrm>
+            <a:off x="6565392" y="2834640"/>
+            <a:ext cx="4553712" cy="2651760"/>
+          </a:xfrm>
+          <a:prstGeom prst="rect">
+            <a:avLst/>
+          </a:prstGeom>
+          <a:noFill/>
+          <a:ln/>
+        </p:spPr>
+        <p:txBody>
+          <a:bodyPr wrap="square" rtlCol="0" anchor="t"/>
+          <a:lstStyle/>
+          <a:p>
+            <a:pPr marL="342900" indent="-342900">
+              <a:lnSpc>
+                <a:spcPct val="112000"/>
+              </a:lnSpc>
+              <a:spcAft>
+                <a:spcPts val="900"/>
+              </a:spcAft>
+              <a:buSzPct val="100000"/>
+              <a:buChar char="▸"/>
+            </a:pPr>
+            <a:r>
+              <a:rPr lang="en-US" sz="1280" dirty="0">
+                <a:solidFill>
+                  <a:srgbClr val="CBD5E1"/>
+                </a:solidFill>
+                <a:latin typeface="Segoe UI" pitchFamily="34" charset="0"/>
+                <a:ea typeface="Segoe UI" pitchFamily="34" charset="-122"/>
+                <a:cs typeface="Segoe UI" pitchFamily="34" charset="-120"/>
+              </a:rPr>
+              <a:t>Every reconciliation failure has two names on it</a:t>
+            </a:r>
+            <a:endParaRPr lang="en-US" sz="1280" dirty="0"/>
+          </a:p>
+          <a:p>
+            <a:pPr marL="342900" indent="-342900">
+              <a:lnSpc>
+                <a:spcPct val="112000"/>
+              </a:lnSpc>
+              <a:spcAft>
+                <a:spcPts val="900"/>
+              </a:spcAft>
+              <a:buSzPct val="100000"/>
+              <a:buChar char="▸"/>
+            </a:pPr>
+            <a:r>
+              <a:rPr lang="en-US" sz="1280" dirty="0">
+                <a:solidFill>
+                  <a:srgbClr val="CBD5E1"/>
+                </a:solidFill>
+                <a:latin typeface="Segoe UI" pitchFamily="34" charset="0"/>
+                <a:ea typeface="Segoe UI" pitchFamily="34" charset="-122"/>
+                <a:cs typeface="Segoe UI" pitchFamily="34" charset="-120"/>
+              </a:rPr>
+              <a:t>The conversation happens between teams, not queues</a:t>
+            </a:r>
+            <a:endParaRPr lang="en-US" sz="1280" dirty="0"/>
+          </a:p>
+          <a:p>
+            <a:pPr marL="342900" indent="-342900">
+              <a:lnSpc>
+                <a:spcPct val="112000"/>
+              </a:lnSpc>
+              <a:spcAft>
+                <a:spcPts val="900"/>
+              </a:spcAft>
+              <a:buSzPct val="100000"/>
+              <a:buChar char="▸"/>
+            </a:pPr>
+            <a:r>
+              <a:rPr lang="en-US" sz="1280" dirty="0">
+                <a:solidFill>
+                  <a:srgbClr val="CBD5E1"/>
+                </a:solidFill>
+                <a:latin typeface="Segoe UI" pitchFamily="34" charset="0"/>
+                <a:ea typeface="Segoe UI" pitchFamily="34" charset="-122"/>
+                <a:cs typeface="Segoe UI" pitchFamily="34" charset="-120"/>
+              </a:rPr>
+              <a:t>Fixes address the definition, not just the symptom</a:t>
+            </a:r>
+            <a:endParaRPr lang="en-US" sz="1280" dirty="0"/>
+          </a:p>
+          <a:p>
+            <a:pPr marL="342900" indent="-342900">
+              <a:lnSpc>
+                <a:spcPct val="112000"/>
+              </a:lnSpc>
+              <a:spcAft>
+                <a:spcPts val="900"/>
+              </a:spcAft>
+              <a:buSzPct val="100000"/>
+              <a:buChar char="▸"/>
+            </a:pPr>
+            <a:r>
+              <a:rPr lang="en-US" sz="1280" dirty="0">
+                <a:solidFill>
+                  <a:srgbClr val="CBD5E1"/>
+                </a:solidFill>
+                <a:latin typeface="Segoe UI" pitchFamily="34" charset="0"/>
+                <a:ea typeface="Segoe UI" pitchFamily="34" charset="-122"/>
+                <a:cs typeface="Segoe UI" pitchFamily="34" charset="-120"/>
+              </a:rPr>
+              <a:t>Data quality becomes a relationship that is maintained</a:t>
+            </a:r>
+            <a:endParaRPr lang="en-US" sz="1280" dirty="0"/>
+          </a:p>
+        </p:txBody>
+      </p:sp>
+      <p:sp>
+        <p:nvSpPr>
+          <p:cNvPr id="12" name="Shape 10"/>
+          <p:cNvSpPr/>
+          <p:nvPr/>
+        </p:nvSpPr>
+        <p:spPr>
+          <a:xfrm>
+            <a:off x="822960" y="5961888"/>
+            <a:ext cx="10515600" cy="0"/>
+          </a:xfrm>
+          <a:prstGeom prst="line">
+            <a:avLst/>
+          </a:prstGeom>
+          <a:noFill/>
+          <a:ln w="12700">
+            <a:solidFill>
+              <a:srgbClr val="1E2D45"/>
+            </a:solidFill>
+            <a:prstDash val="solid"/>
+          </a:ln>
+        </p:spPr>
+      </p:sp>
+      <p:sp>
+        <p:nvSpPr>
+          <p:cNvPr id="13" name="Text 11"/>
+          <p:cNvSpPr/>
+          <p:nvPr/>
+        </p:nvSpPr>
+        <p:spPr>
+          <a:xfrm>
+            <a:off x="822960" y="6053328"/>
+            <a:ext cx="9692640" cy="457200"/>
+          </a:xfrm>
+          <a:prstGeom prst="rect">
+            <a:avLst/>
+          </a:prstGeom>
+          <a:noFill/>
+          <a:ln/>
+        </p:spPr>
+        <p:txBody>
+          <a:bodyPr wrap="square" rtlCol="0" anchor="ctr"/>
+          <a:lstStyle/>
+          <a:p>
+            <a:pPr indent="0" marL="0">
+              <a:buNone/>
+            </a:pPr>
+            <a:r>
+              <a:rPr lang="en-US" sz="1150" dirty="0">
+                <a:solidFill>
+                  <a:srgbClr val="64748B"/>
+                </a:solidFill>
+                <a:latin typeface="Segoe UI" pitchFamily="34" charset="0"/>
+                <a:ea typeface="Segoe UI" pitchFamily="34" charset="-122"/>
+                <a:cs typeface="Segoe UI" pitchFamily="34" charset="-120"/>
+              </a:rPr>
+              <a:t>A mismatch between systems is an organizational fact - treat it like one.</a:t>
+            </a:r>
+            <a:endParaRPr lang="en-US" sz="1150" dirty="0"/>
+          </a:p>
+        </p:txBody>
+      </p:sp>
+      <p:sp>
+        <p:nvSpPr>
+          <p:cNvPr id="14" name="Text 12"/>
+          <p:cNvSpPr/>
+          <p:nvPr/>
+        </p:nvSpPr>
+        <p:spPr>
+          <a:xfrm>
+            <a:off x="10698480" y="6382512"/>
+            <a:ext cx="1188720" cy="365760"/>
+          </a:xfrm>
+          <a:prstGeom prst="rect">
+            <a:avLst/>
+          </a:prstGeom>
+          <a:noFill/>
+          <a:ln/>
+        </p:spPr>
+        <p:txBody>
+          <a:bodyPr wrap="square" rtlCol="0" anchor="ctr"/>
+          <a:lstStyle/>
+          <a:p>
+            <a:pPr algn="r" indent="0" marL="0">
+              <a:buNone/>
+            </a:pPr>
+            <a:r>
+              <a:rPr lang="en-US" sz="1000" dirty="0">
+                <a:solidFill>
+                  <a:srgbClr val="64748B"/>
+                </a:solidFill>
+                <a:latin typeface="Consolas" pitchFamily="34" charset="0"/>
+                <a:ea typeface="Consolas" pitchFamily="34" charset="-122"/>
+                <a:cs typeface="Consolas" pitchFamily="34" charset="-120"/>
+              </a:rPr>
+              <a:t>10 / 14</a:t>
+            </a:r>
+            <a:endParaRPr lang="en-US" sz="1000" dirty="0"/>
+          </a:p>
+        </p:txBody>
+      </p:sp>
+    </p:spTree>
+  </p:cSld>
+  <p:clrMapOvr>
+    <a:masterClrMapping/>
+  </p:clrMapOvr>
+</p:sld>
+</file>
+
+<file path=ppt/slides/slide11.xml><?xml version="1.0" encoding="utf-8"?>
+<p:sld xmlns:a="http://schemas.openxmlformats.org/drawingml/2006/main" xmlns:r="http://schemas.openxmlformats.org/officeDocument/2006/relationships" xmlns:p="http://schemas.openxmlformats.org/presentationml/2006/main">
+  <p:cSld name="Slide 11">
+    <p:bg>
+      <p:bgPr>
+        <a:solidFill>
+          <a:srgbClr val="0A0C12"/>
+        </a:solidFill>
+      </p:bgPr>
+    </p:bg>
+    <p:spTree>
+      <p:nvGrpSpPr>
+        <p:cNvPr id="1" name=""/>
+        <p:cNvGrpSpPr/>
+        <p:nvPr/>
+      </p:nvGrpSpPr>
+      <p:grpSpPr>
+        <a:xfrm>
+          <a:off x="0" y="0"/>
+          <a:ext cx="0" cy="0"/>
+          <a:chOff x="0" y="0"/>
+          <a:chExt cx="0" cy="0"/>
+        </a:xfrm>
+      </p:grpSpPr>
+      <p:sp>
+        <p:nvSpPr>
+          <p:cNvPr id="2" name="Shape 0"/>
+          <p:cNvSpPr/>
+          <p:nvPr/>
+        </p:nvSpPr>
+        <p:spPr>
+          <a:xfrm>
+            <a:off x="0" y="0"/>
+            <a:ext cx="7680960" cy="64008"/>
+          </a:xfrm>
+          <a:prstGeom prst="rect">
+            <a:avLst/>
+          </a:prstGeom>
+          <a:solidFill>
+            <a:srgbClr val="3B82F6"/>
+          </a:solidFill>
+          <a:ln/>
+        </p:spPr>
+      </p:sp>
+      <p:sp>
+        <p:nvSpPr>
+          <p:cNvPr id="3" name="Shape 1"/>
+          <p:cNvSpPr/>
+          <p:nvPr/>
+        </p:nvSpPr>
+        <p:spPr>
+          <a:xfrm>
+            <a:off x="7680960" y="0"/>
+            <a:ext cx="4510735" cy="64008"/>
+          </a:xfrm>
+          <a:prstGeom prst="rect">
+            <a:avLst/>
+          </a:prstGeom>
+          <a:solidFill>
+            <a:srgbClr val="06B6D4"/>
+          </a:solidFill>
+          <a:ln/>
+        </p:spPr>
+      </p:sp>
+      <p:sp>
+        <p:nvSpPr>
+          <p:cNvPr id="4" name="Text 2"/>
+          <p:cNvSpPr/>
+          <p:nvPr/>
+        </p:nvSpPr>
+        <p:spPr>
+          <a:xfrm>
+            <a:off x="822960" y="502920"/>
+            <a:ext cx="10515600" cy="365760"/>
+          </a:xfrm>
+          <a:prstGeom prst="rect">
+            <a:avLst/>
+          </a:prstGeom>
+          <a:noFill/>
+          <a:ln/>
+        </p:spPr>
+        <p:txBody>
+          <a:bodyPr wrap="square" rtlCol="0" anchor="ctr"/>
+          <a:lstStyle/>
+          <a:p>
+            <a:pPr indent="0" marL="0">
+              <a:buNone/>
+            </a:pPr>
+            <a:r>
+              <a:rPr lang="en-US" sz="1200" spc="300" kern="0" dirty="0">
+                <a:solidFill>
+                  <a:srgbClr val="06B6D4"/>
+                </a:solidFill>
+                <a:latin typeface="Consolas" pitchFamily="34" charset="0"/>
+                <a:ea typeface="Consolas" pitchFamily="34" charset="-122"/>
+                <a:cs typeface="Consolas" pitchFamily="34" charset="-120"/>
+              </a:rPr>
+              <a:t>PRINCIPLE 5</a:t>
+            </a:r>
+            <a:endParaRPr lang="en-US" sz="1200" dirty="0"/>
+          </a:p>
+        </p:txBody>
+      </p:sp>
+      <p:sp>
+        <p:nvSpPr>
+          <p:cNvPr id="5" name="Text 3"/>
+          <p:cNvSpPr/>
+          <p:nvPr/>
+        </p:nvSpPr>
+        <p:spPr>
+          <a:xfrm>
+            <a:off x="822960" y="914400"/>
+            <a:ext cx="10561320" cy="868680"/>
+          </a:xfrm>
+          <a:prstGeom prst="rect">
+            <a:avLst/>
+          </a:prstGeom>
+          <a:noFill/>
+          <a:ln/>
+        </p:spPr>
+        <p:txBody>
+          <a:bodyPr wrap="square" rtlCol="0" anchor="ctr"/>
+          <a:lstStyle/>
+          <a:p>
+            <a:pPr indent="0" marL="0">
+              <a:buNone/>
+            </a:pPr>
+            <a:r>
+              <a:rPr lang="en-US" sz="2700" b="1" dirty="0">
+                <a:solidFill>
+                  <a:srgbClr val="FFFFFF"/>
+                </a:solidFill>
+                <a:latin typeface="Segoe UI" pitchFamily="34" charset="0"/>
+                <a:ea typeface="Segoe UI" pitchFamily="34" charset="-122"/>
+                <a:cs typeface="Segoe UI" pitchFamily="34" charset="-120"/>
+              </a:rPr>
+              <a:t>Onboarding a source: where the work happens</a:t>
+            </a:r>
+            <a:endParaRPr lang="en-US" sz="2700" dirty="0"/>
+          </a:p>
+        </p:txBody>
+      </p:sp>
+      <p:sp>
+        <p:nvSpPr>
+          <p:cNvPr id="6" name="Shape 4"/>
+          <p:cNvSpPr/>
+          <p:nvPr/>
+        </p:nvSpPr>
+        <p:spPr>
+          <a:xfrm>
+            <a:off x="1371600" y="3035808"/>
+            <a:ext cx="9464040" cy="0"/>
+          </a:xfrm>
+          <a:prstGeom prst="line">
+            <a:avLst/>
+          </a:prstGeom>
+          <a:noFill/>
+          <a:ln w="25400">
+            <a:solidFill>
+              <a:srgbClr val="24365A"/>
+            </a:solidFill>
+            <a:prstDash val="solid"/>
+          </a:ln>
+        </p:spPr>
+      </p:sp>
+      <p:sp>
+        <p:nvSpPr>
+          <p:cNvPr id="7" name="Shape 5"/>
+          <p:cNvSpPr/>
+          <p:nvPr/>
+        </p:nvSpPr>
+        <p:spPr>
+          <a:xfrm>
+            <a:off x="1289304" y="2953512"/>
+            <a:ext cx="164592" cy="164592"/>
+          </a:xfrm>
+          <a:prstGeom prst="ellipse">
+            <a:avLst/>
+          </a:prstGeom>
+          <a:solidFill>
+            <a:srgbClr val="3B82F6"/>
+          </a:solidFill>
+          <a:ln w="19050">
+            <a:solidFill>
+              <a:srgbClr val="0A0C12"/>
+            </a:solidFill>
+            <a:prstDash val="solid"/>
+          </a:ln>
+        </p:spPr>
+      </p:sp>
+      <p:sp>
+        <p:nvSpPr>
+          <p:cNvPr id="8" name="Text 6"/>
+          <p:cNvSpPr/>
+          <p:nvPr/>
+        </p:nvSpPr>
+        <p:spPr>
+          <a:xfrm>
+            <a:off x="342900" y="2395728"/>
+            <a:ext cx="2057400" cy="365760"/>
+          </a:xfrm>
+          <a:prstGeom prst="rect">
+            <a:avLst/>
+          </a:prstGeom>
+          <a:noFill/>
+          <a:ln/>
+        </p:spPr>
+        <p:txBody>
+          <a:bodyPr wrap="square" rtlCol="0" anchor="ctr"/>
+          <a:lstStyle/>
+          <a:p>
+            <a:pPr algn="ctr" indent="0" marL="0">
+              <a:buNone/>
+            </a:pPr>
+            <a:r>
+              <a:rPr lang="en-US" sz="1100" b="1" dirty="0">
+                <a:solidFill>
+                  <a:srgbClr val="3B82F6"/>
+                </a:solidFill>
+                <a:latin typeface="Consolas" pitchFamily="34" charset="0"/>
+                <a:ea typeface="Consolas" pitchFamily="34" charset="-122"/>
+                <a:cs typeface="Consolas" pitchFamily="34" charset="-120"/>
+              </a:rPr>
+              <a:t>Step 1</a:t>
+            </a:r>
+            <a:endParaRPr lang="en-US" sz="1100" dirty="0"/>
+          </a:p>
+        </p:txBody>
+      </p:sp>
+      <p:sp>
+        <p:nvSpPr>
+          <p:cNvPr id="9" name="Text 7"/>
+          <p:cNvSpPr/>
+          <p:nvPr/>
+        </p:nvSpPr>
+        <p:spPr>
+          <a:xfrm>
+            <a:off x="342900" y="3310128"/>
+            <a:ext cx="2057400" cy="566928"/>
+          </a:xfrm>
+          <a:prstGeom prst="rect">
+            <a:avLst/>
+          </a:prstGeom>
+          <a:noFill/>
+          <a:ln/>
+        </p:spPr>
+        <p:txBody>
+          <a:bodyPr wrap="square" rtlCol="0" anchor="ctr"/>
+          <a:lstStyle/>
+          <a:p>
+            <a:pPr algn="ctr" indent="0" marL="0">
+              <a:buNone/>
+            </a:pPr>
+            <a:r>
+              <a:rPr lang="en-US" sz="1250" b="1" dirty="0">
+                <a:solidFill>
+                  <a:srgbClr val="FFFFFF"/>
+                </a:solidFill>
+                <a:latin typeface="Segoe UI" pitchFamily="34" charset="0"/>
+                <a:ea typeface="Segoe UI" pitchFamily="34" charset="-122"/>
+                <a:cs typeface="Segoe UI" pitchFamily="34" charset="-120"/>
+              </a:rPr>
+              <a:t>Profile</a:t>
+            </a:r>
+            <a:endParaRPr lang="en-US" sz="1250" dirty="0"/>
+          </a:p>
+        </p:txBody>
+      </p:sp>
+      <p:sp>
+        <p:nvSpPr>
+          <p:cNvPr id="10" name="Text 8"/>
+          <p:cNvSpPr/>
+          <p:nvPr/>
+        </p:nvSpPr>
+        <p:spPr>
+          <a:xfrm>
+            <a:off x="342900" y="3895344"/>
+            <a:ext cx="2057400" cy="1234440"/>
+          </a:xfrm>
+          <a:prstGeom prst="rect">
+            <a:avLst/>
+          </a:prstGeom>
+          <a:noFill/>
+          <a:ln/>
+        </p:spPr>
+        <p:txBody>
+          <a:bodyPr wrap="square" rtlCol="0" anchor="ctr"/>
+          <a:lstStyle/>
+          <a:p>
+            <a:pPr algn="ctr" indent="0" marL="0">
+              <a:buNone/>
+            </a:pPr>
+            <a:r>
+              <a:rPr lang="en-US" sz="1000" dirty="0">
+                <a:solidFill>
+                  <a:srgbClr val="CBD5E1"/>
+                </a:solidFill>
+                <a:latin typeface="Segoe UI" pitchFamily="34" charset="0"/>
+                <a:ea typeface="Segoe UI" pitchFamily="34" charset="-122"/>
+                <a:cs typeface="Segoe UI" pitchFamily="34" charset="-120"/>
+              </a:rPr>
+              <a:t>Row counts, key uniqueness, cadence, and known quirks written down first.</a:t>
+            </a:r>
+            <a:endParaRPr lang="en-US" sz="1000" dirty="0"/>
+          </a:p>
+        </p:txBody>
+      </p:sp>
+      <p:sp>
+        <p:nvSpPr>
+          <p:cNvPr id="11" name="Shape 9"/>
+          <p:cNvSpPr/>
+          <p:nvPr/>
+        </p:nvSpPr>
+        <p:spPr>
+          <a:xfrm>
+            <a:off x="3655314" y="2953512"/>
+            <a:ext cx="164592" cy="164592"/>
+          </a:xfrm>
+          <a:prstGeom prst="ellipse">
+            <a:avLst/>
+          </a:prstGeom>
+          <a:solidFill>
+            <a:srgbClr val="06B6D4"/>
+          </a:solidFill>
+          <a:ln w="19050">
+            <a:solidFill>
+              <a:srgbClr val="0A0C12"/>
+            </a:solidFill>
+            <a:prstDash val="solid"/>
+          </a:ln>
+        </p:spPr>
+      </p:sp>
+      <p:sp>
+        <p:nvSpPr>
+          <p:cNvPr id="12" name="Text 10"/>
+          <p:cNvSpPr/>
+          <p:nvPr/>
+        </p:nvSpPr>
+        <p:spPr>
+          <a:xfrm>
+            <a:off x="2708910" y="2395728"/>
+            <a:ext cx="2057400" cy="365760"/>
+          </a:xfrm>
+          <a:prstGeom prst="rect">
+            <a:avLst/>
+          </a:prstGeom>
+          <a:noFill/>
+          <a:ln/>
+        </p:spPr>
+        <p:txBody>
+          <a:bodyPr wrap="square" rtlCol="0" anchor="ctr"/>
+          <a:lstStyle/>
+          <a:p>
+            <a:pPr algn="ctr" indent="0" marL="0">
+              <a:buNone/>
+            </a:pPr>
+            <a:r>
+              <a:rPr lang="en-US" sz="1100" b="1" dirty="0">
+                <a:solidFill>
+                  <a:srgbClr val="06B6D4"/>
+                </a:solidFill>
+                <a:latin typeface="Consolas" pitchFamily="34" charset="0"/>
+                <a:ea typeface="Consolas" pitchFamily="34" charset="-122"/>
+                <a:cs typeface="Consolas" pitchFamily="34" charset="-120"/>
+              </a:rPr>
+              <a:t>Step 2</a:t>
+            </a:r>
+            <a:endParaRPr lang="en-US" sz="1100" dirty="0"/>
+          </a:p>
+        </p:txBody>
+      </p:sp>
+      <p:sp>
+        <p:nvSpPr>
+          <p:cNvPr id="13" name="Text 11"/>
+          <p:cNvSpPr/>
+          <p:nvPr/>
+        </p:nvSpPr>
+        <p:spPr>
+          <a:xfrm>
+            <a:off x="2708910" y="3310128"/>
+            <a:ext cx="2057400" cy="566928"/>
+          </a:xfrm>
+          <a:prstGeom prst="rect">
+            <a:avLst/>
+          </a:prstGeom>
+          <a:noFill/>
+          <a:ln/>
+        </p:spPr>
+        <p:txBody>
+          <a:bodyPr wrap="square" rtlCol="0" anchor="ctr"/>
+          <a:lstStyle/>
+          <a:p>
+            <a:pPr algn="ctr" indent="0" marL="0">
+              <a:buNone/>
+            </a:pPr>
+            <a:r>
+              <a:rPr lang="en-US" sz="1250" b="1" dirty="0">
+                <a:solidFill>
+                  <a:srgbClr val="FFFFFF"/>
+                </a:solidFill>
+                <a:latin typeface="Segoe UI" pitchFamily="34" charset="0"/>
+                <a:ea typeface="Segoe UI" pitchFamily="34" charset="-122"/>
+                <a:cs typeface="Segoe UI" pitchFamily="34" charset="-120"/>
+              </a:rPr>
+              <a:t>Gate</a:t>
+            </a:r>
+            <a:endParaRPr lang="en-US" sz="1250" dirty="0"/>
+          </a:p>
+        </p:txBody>
+      </p:sp>
+      <p:sp>
+        <p:nvSpPr>
+          <p:cNvPr id="14" name="Text 12"/>
+          <p:cNvSpPr/>
+          <p:nvPr/>
+        </p:nvSpPr>
+        <p:spPr>
+          <a:xfrm>
+            <a:off x="2708910" y="3895344"/>
+            <a:ext cx="2057400" cy="1234440"/>
+          </a:xfrm>
+          <a:prstGeom prst="rect">
+            <a:avLst/>
+          </a:prstGeom>
+          <a:noFill/>
+          <a:ln/>
+        </p:spPr>
+        <p:txBody>
+          <a:bodyPr wrap="square" rtlCol="0" anchor="ctr"/>
+          <a:lstStyle/>
+          <a:p>
+            <a:pPr algn="ctr" indent="0" marL="0">
+              <a:buNone/>
+            </a:pPr>
+            <a:r>
+              <a:rPr lang="en-US" sz="1000" dirty="0">
+                <a:solidFill>
+                  <a:srgbClr val="CBD5E1"/>
+                </a:solidFill>
+                <a:latin typeface="Segoe UI" pitchFamily="34" charset="0"/>
+                <a:ea typeface="Segoe UI" pitchFamily="34" charset="-122"/>
+                <a:cs typeface="Segoe UI" pitchFamily="34" charset="-120"/>
+              </a:rPr>
+              <a:t>Schema and sanity checks defined before the first production load.</a:t>
+            </a:r>
+            <a:endParaRPr lang="en-US" sz="1000" dirty="0"/>
+          </a:p>
+        </p:txBody>
+      </p:sp>
+      <p:sp>
+        <p:nvSpPr>
+          <p:cNvPr id="15" name="Shape 13"/>
+          <p:cNvSpPr/>
+          <p:nvPr/>
+        </p:nvSpPr>
+        <p:spPr>
+          <a:xfrm>
+            <a:off x="6021324" y="2953512"/>
+            <a:ext cx="164592" cy="164592"/>
+          </a:xfrm>
+          <a:prstGeom prst="ellipse">
+            <a:avLst/>
+          </a:prstGeom>
+          <a:solidFill>
+            <a:srgbClr val="3B82F6"/>
+          </a:solidFill>
+          <a:ln w="19050">
+            <a:solidFill>
+              <a:srgbClr val="0A0C12"/>
+            </a:solidFill>
+            <a:prstDash val="solid"/>
+          </a:ln>
+        </p:spPr>
+      </p:sp>
+      <p:sp>
+        <p:nvSpPr>
+          <p:cNvPr id="16" name="Text 14"/>
+          <p:cNvSpPr/>
+          <p:nvPr/>
+        </p:nvSpPr>
+        <p:spPr>
+          <a:xfrm>
+            <a:off x="5074920" y="2395728"/>
+            <a:ext cx="2057400" cy="365760"/>
+          </a:xfrm>
+          <a:prstGeom prst="rect">
+            <a:avLst/>
+          </a:prstGeom>
+          <a:noFill/>
+          <a:ln/>
+        </p:spPr>
+        <p:txBody>
+          <a:bodyPr wrap="square" rtlCol="0" anchor="ctr"/>
+          <a:lstStyle/>
+          <a:p>
+            <a:pPr algn="ctr" indent="0" marL="0">
+              <a:buNone/>
+            </a:pPr>
+            <a:r>
+              <a:rPr lang="en-US" sz="1100" b="1" dirty="0">
+                <a:solidFill>
+                  <a:srgbClr val="3B82F6"/>
+                </a:solidFill>
+                <a:latin typeface="Consolas" pitchFamily="34" charset="0"/>
+                <a:ea typeface="Consolas" pitchFamily="34" charset="-122"/>
+                <a:cs typeface="Consolas" pitchFamily="34" charset="-120"/>
+              </a:rPr>
+              <a:t>Step 3</a:t>
+            </a:r>
+            <a:endParaRPr lang="en-US" sz="1100" dirty="0"/>
+          </a:p>
+        </p:txBody>
+      </p:sp>
+      <p:sp>
+        <p:nvSpPr>
+          <p:cNvPr id="17" name="Text 15"/>
+          <p:cNvSpPr/>
+          <p:nvPr/>
+        </p:nvSpPr>
+        <p:spPr>
+          <a:xfrm>
+            <a:off x="5074920" y="3310128"/>
+            <a:ext cx="2057400" cy="566928"/>
+          </a:xfrm>
+          <a:prstGeom prst="rect">
+            <a:avLst/>
+          </a:prstGeom>
+          <a:noFill/>
+          <a:ln/>
+        </p:spPr>
+        <p:txBody>
+          <a:bodyPr wrap="square" rtlCol="0" anchor="ctr"/>
+          <a:lstStyle/>
+          <a:p>
+            <a:pPr algn="ctr" indent="0" marL="0">
+              <a:buNone/>
+            </a:pPr>
+            <a:r>
+              <a:rPr lang="en-US" sz="1250" b="1" dirty="0">
+                <a:solidFill>
+                  <a:srgbClr val="FFFFFF"/>
+                </a:solidFill>
+                <a:latin typeface="Segoe UI" pitchFamily="34" charset="0"/>
+                <a:ea typeface="Segoe UI" pitchFamily="34" charset="-122"/>
+                <a:cs typeface="Segoe UI" pitchFamily="34" charset="-120"/>
+              </a:rPr>
+              <a:t>Reconcile</a:t>
+            </a:r>
+            <a:endParaRPr lang="en-US" sz="1250" dirty="0"/>
+          </a:p>
+        </p:txBody>
+      </p:sp>
+      <p:sp>
+        <p:nvSpPr>
+          <p:cNvPr id="18" name="Text 16"/>
+          <p:cNvSpPr/>
+          <p:nvPr/>
+        </p:nvSpPr>
+        <p:spPr>
+          <a:xfrm>
+            <a:off x="5074920" y="3895344"/>
+            <a:ext cx="2057400" cy="1234440"/>
+          </a:xfrm>
+          <a:prstGeom prst="rect">
+            <a:avLst/>
+          </a:prstGeom>
+          <a:noFill/>
+          <a:ln/>
+        </p:spPr>
+        <p:txBody>
+          <a:bodyPr wrap="square" rtlCol="0" anchor="ctr"/>
+          <a:lstStyle/>
+          <a:p>
+            <a:pPr algn="ctr" indent="0" marL="0">
+              <a:buNone/>
+            </a:pPr>
+            <a:r>
+              <a:rPr lang="en-US" sz="1000" dirty="0">
+                <a:solidFill>
+                  <a:srgbClr val="CBD5E1"/>
+                </a:solidFill>
+                <a:latin typeface="Segoe UI" pitchFamily="34" charset="0"/>
+                <a:ea typeface="Segoe UI" pitchFamily="34" charset="-122"/>
+                <a:cs typeface="Segoe UI" pitchFamily="34" charset="-120"/>
+              </a:rPr>
+              <a:t>Seam checks wired into the pipeline from day one, not retrofitted.</a:t>
+            </a:r>
+            <a:endParaRPr lang="en-US" sz="1000" dirty="0"/>
+          </a:p>
+        </p:txBody>
+      </p:sp>
+      <p:sp>
+        <p:nvSpPr>
+          <p:cNvPr id="19" name="Shape 17"/>
+          <p:cNvSpPr/>
+          <p:nvPr/>
+        </p:nvSpPr>
+        <p:spPr>
+          <a:xfrm>
+            <a:off x="8387334" y="2953512"/>
+            <a:ext cx="164592" cy="164592"/>
+          </a:xfrm>
+          <a:prstGeom prst="ellipse">
+            <a:avLst/>
+          </a:prstGeom>
+          <a:solidFill>
+            <a:srgbClr val="06B6D4"/>
+          </a:solidFill>
+          <a:ln w="19050">
+            <a:solidFill>
+              <a:srgbClr val="0A0C12"/>
+            </a:solidFill>
+            <a:prstDash val="solid"/>
+          </a:ln>
+        </p:spPr>
+      </p:sp>
+      <p:sp>
+        <p:nvSpPr>
+          <p:cNvPr id="20" name="Text 18"/>
+          <p:cNvSpPr/>
+          <p:nvPr/>
+        </p:nvSpPr>
+        <p:spPr>
+          <a:xfrm>
+            <a:off x="7440930" y="2395728"/>
+            <a:ext cx="2057400" cy="365760"/>
+          </a:xfrm>
+          <a:prstGeom prst="rect">
+            <a:avLst/>
+          </a:prstGeom>
+          <a:noFill/>
+          <a:ln/>
+        </p:spPr>
+        <p:txBody>
+          <a:bodyPr wrap="square" rtlCol="0" anchor="ctr"/>
+          <a:lstStyle/>
+          <a:p>
+            <a:pPr algn="ctr" indent="0" marL="0">
+              <a:buNone/>
+            </a:pPr>
+            <a:r>
+              <a:rPr lang="en-US" sz="1100" b="1" dirty="0">
+                <a:solidFill>
+                  <a:srgbClr val="06B6D4"/>
+                </a:solidFill>
+                <a:latin typeface="Consolas" pitchFamily="34" charset="0"/>
+                <a:ea typeface="Consolas" pitchFamily="34" charset="-122"/>
+                <a:cs typeface="Consolas" pitchFamily="34" charset="-120"/>
+              </a:rPr>
+              <a:t>Step 4</a:t>
+            </a:r>
+            <a:endParaRPr lang="en-US" sz="1100" dirty="0"/>
+          </a:p>
+        </p:txBody>
+      </p:sp>
+      <p:sp>
+        <p:nvSpPr>
+          <p:cNvPr id="21" name="Text 19"/>
+          <p:cNvSpPr/>
+          <p:nvPr/>
+        </p:nvSpPr>
+        <p:spPr>
+          <a:xfrm>
+            <a:off x="7440930" y="3310128"/>
+            <a:ext cx="2057400" cy="566928"/>
+          </a:xfrm>
+          <a:prstGeom prst="rect">
+            <a:avLst/>
+          </a:prstGeom>
+          <a:noFill/>
+          <a:ln/>
+        </p:spPr>
+        <p:txBody>
+          <a:bodyPr wrap="square" rtlCol="0" anchor="ctr"/>
+          <a:lstStyle/>
+          <a:p>
+            <a:pPr algn="ctr" indent="0" marL="0">
+              <a:buNone/>
+            </a:pPr>
+            <a:r>
+              <a:rPr lang="en-US" sz="1250" b="1" dirty="0">
+                <a:solidFill>
+                  <a:srgbClr val="FFFFFF"/>
+                </a:solidFill>
+                <a:latin typeface="Segoe UI" pitchFamily="34" charset="0"/>
+                <a:ea typeface="Segoe UI" pitchFamily="34" charset="-122"/>
+                <a:cs typeface="Segoe UI" pitchFamily="34" charset="-120"/>
+              </a:rPr>
+              <a:t>Alarm</a:t>
+            </a:r>
+            <a:endParaRPr lang="en-US" sz="1250" dirty="0"/>
+          </a:p>
+        </p:txBody>
+      </p:sp>
+      <p:sp>
+        <p:nvSpPr>
+          <p:cNvPr id="22" name="Text 20"/>
+          <p:cNvSpPr/>
+          <p:nvPr/>
+        </p:nvSpPr>
+        <p:spPr>
+          <a:xfrm>
+            <a:off x="7440930" y="3895344"/>
+            <a:ext cx="2057400" cy="1234440"/>
+          </a:xfrm>
+          <a:prstGeom prst="rect">
+            <a:avLst/>
+          </a:prstGeom>
+          <a:noFill/>
+          <a:ln/>
+        </p:spPr>
+        <p:txBody>
+          <a:bodyPr wrap="square" rtlCol="0" anchor="ctr"/>
+          <a:lstStyle/>
+          <a:p>
+            <a:pPr algn="ctr" indent="0" marL="0">
+              <a:buNone/>
+            </a:pPr>
+            <a:r>
+              <a:rPr lang="en-US" sz="1000" dirty="0">
+                <a:solidFill>
+                  <a:srgbClr val="CBD5E1"/>
+                </a:solidFill>
+                <a:latin typeface="Segoe UI" pitchFamily="34" charset="0"/>
+                <a:ea typeface="Segoe UI" pitchFamily="34" charset="-122"/>
+                <a:cs typeface="Segoe UI" pitchFamily="34" charset="-120"/>
+              </a:rPr>
+              <a:t>Freshness alarm attached to the schedule with a named recipient.</a:t>
+            </a:r>
+            <a:endParaRPr lang="en-US" sz="1000" dirty="0"/>
+          </a:p>
+        </p:txBody>
+      </p:sp>
+      <p:sp>
+        <p:nvSpPr>
+          <p:cNvPr id="23" name="Shape 21"/>
+          <p:cNvSpPr/>
+          <p:nvPr/>
+        </p:nvSpPr>
+        <p:spPr>
+          <a:xfrm>
+            <a:off x="10753344" y="2953512"/>
+            <a:ext cx="164592" cy="164592"/>
+          </a:xfrm>
+          <a:prstGeom prst="ellipse">
+            <a:avLst/>
+          </a:prstGeom>
+          <a:solidFill>
+            <a:srgbClr val="3B82F6"/>
+          </a:solidFill>
+          <a:ln w="19050">
+            <a:solidFill>
+              <a:srgbClr val="0A0C12"/>
+            </a:solidFill>
+            <a:prstDash val="solid"/>
+          </a:ln>
+        </p:spPr>
+      </p:sp>
+      <p:sp>
+        <p:nvSpPr>
+          <p:cNvPr id="24" name="Text 22"/>
+          <p:cNvSpPr/>
+          <p:nvPr/>
+        </p:nvSpPr>
+        <p:spPr>
+          <a:xfrm>
+            <a:off x="9806940" y="2395728"/>
+            <a:ext cx="2057400" cy="365760"/>
+          </a:xfrm>
+          <a:prstGeom prst="rect">
+            <a:avLst/>
+          </a:prstGeom>
+          <a:noFill/>
+          <a:ln/>
+        </p:spPr>
+        <p:txBody>
+          <a:bodyPr wrap="square" rtlCol="0" anchor="ctr"/>
+          <a:lstStyle/>
+          <a:p>
+            <a:pPr algn="ctr" indent="0" marL="0">
+              <a:buNone/>
+            </a:pPr>
+            <a:r>
+              <a:rPr lang="en-US" sz="1100" b="1" dirty="0">
+                <a:solidFill>
+                  <a:srgbClr val="3B82F6"/>
+                </a:solidFill>
+                <a:latin typeface="Consolas" pitchFamily="34" charset="0"/>
+                <a:ea typeface="Consolas" pitchFamily="34" charset="-122"/>
+                <a:cs typeface="Consolas" pitchFamily="34" charset="-120"/>
+              </a:rPr>
+              <a:t>Step 5</a:t>
+            </a:r>
+            <a:endParaRPr lang="en-US" sz="1100" dirty="0"/>
+          </a:p>
+        </p:txBody>
+      </p:sp>
+      <p:sp>
+        <p:nvSpPr>
+          <p:cNvPr id="25" name="Text 23"/>
+          <p:cNvSpPr/>
+          <p:nvPr/>
+        </p:nvSpPr>
+        <p:spPr>
+          <a:xfrm>
+            <a:off x="9806940" y="3310128"/>
+            <a:ext cx="2057400" cy="566928"/>
+          </a:xfrm>
+          <a:prstGeom prst="rect">
+            <a:avLst/>
+          </a:prstGeom>
+          <a:noFill/>
+          <a:ln/>
+        </p:spPr>
+        <p:txBody>
+          <a:bodyPr wrap="square" rtlCol="0" anchor="ctr"/>
+          <a:lstStyle/>
+          <a:p>
+            <a:pPr algn="ctr" indent="0" marL="0">
+              <a:buNone/>
+            </a:pPr>
+            <a:r>
+              <a:rPr lang="en-US" sz="1250" b="1" dirty="0">
+                <a:solidFill>
+                  <a:srgbClr val="FFFFFF"/>
+                </a:solidFill>
+                <a:latin typeface="Segoe UI" pitchFamily="34" charset="0"/>
+                <a:ea typeface="Segoe UI" pitchFamily="34" charset="-122"/>
+                <a:cs typeface="Segoe UI" pitchFamily="34" charset="-120"/>
+              </a:rPr>
+              <a:t>Document</a:t>
+            </a:r>
+            <a:endParaRPr lang="en-US" sz="1250" dirty="0"/>
+          </a:p>
+        </p:txBody>
+      </p:sp>
+      <p:sp>
+        <p:nvSpPr>
+          <p:cNvPr id="26" name="Text 24"/>
+          <p:cNvSpPr/>
+          <p:nvPr/>
+        </p:nvSpPr>
+        <p:spPr>
+          <a:xfrm>
+            <a:off x="9806940" y="3895344"/>
+            <a:ext cx="2057400" cy="1234440"/>
+          </a:xfrm>
+          <a:prstGeom prst="rect">
+            <a:avLst/>
+          </a:prstGeom>
+          <a:noFill/>
+          <a:ln/>
+        </p:spPr>
+        <p:txBody>
+          <a:bodyPr wrap="square" rtlCol="0" anchor="ctr"/>
+          <a:lstStyle/>
+          <a:p>
+            <a:pPr algn="ctr" indent="0" marL="0">
+              <a:buNone/>
+            </a:pPr>
+            <a:r>
+              <a:rPr lang="en-US" sz="1000" dirty="0">
+                <a:solidFill>
+                  <a:srgbClr val="CBD5E1"/>
+                </a:solidFill>
+                <a:latin typeface="Segoe UI" pitchFamily="34" charset="0"/>
+                <a:ea typeface="Segoe UI" pitchFamily="34" charset="-122"/>
+                <a:cs typeface="Segoe UI" pitchFamily="34" charset="-120"/>
+              </a:rPr>
+              <a:t>Runbook lives next to the pipeline - the quirk you document today is the incident you prevent next month.</a:t>
+            </a:r>
+            <a:endParaRPr lang="en-US" sz="1000" dirty="0"/>
+          </a:p>
+        </p:txBody>
+      </p:sp>
+      <p:sp>
+        <p:nvSpPr>
+          <p:cNvPr id="27" name="Shape 25"/>
+          <p:cNvSpPr/>
+          <p:nvPr/>
+        </p:nvSpPr>
+        <p:spPr>
+          <a:xfrm>
+            <a:off x="822960" y="5961888"/>
+            <a:ext cx="10515600" cy="0"/>
+          </a:xfrm>
+          <a:prstGeom prst="line">
+            <a:avLst/>
+          </a:prstGeom>
+          <a:noFill/>
+          <a:ln w="12700">
+            <a:solidFill>
+              <a:srgbClr val="1E2D45"/>
+            </a:solidFill>
+            <a:prstDash val="solid"/>
+          </a:ln>
+        </p:spPr>
+      </p:sp>
+      <p:sp>
+        <p:nvSpPr>
+          <p:cNvPr id="28" name="Text 26"/>
+          <p:cNvSpPr/>
+          <p:nvPr/>
+        </p:nvSpPr>
+        <p:spPr>
+          <a:xfrm>
+            <a:off x="822960" y="6053328"/>
+            <a:ext cx="9692640" cy="457200"/>
+          </a:xfrm>
+          <a:prstGeom prst="rect">
+            <a:avLst/>
+          </a:prstGeom>
+          <a:noFill/>
+          <a:ln/>
+        </p:spPr>
+        <p:txBody>
+          <a:bodyPr wrap="square" rtlCol="0" anchor="ctr"/>
+          <a:lstStyle/>
+          <a:p>
+            <a:pPr indent="0" marL="0">
+              <a:buNone/>
+            </a:pPr>
+            <a:r>
+              <a:rPr lang="en-US" sz="1150" dirty="0">
+                <a:solidFill>
+                  <a:srgbClr val="64748B"/>
+                </a:solidFill>
+                <a:latin typeface="Segoe UI" pitchFamily="34" charset="0"/>
+                <a:ea typeface="Segoe UI" pitchFamily="34" charset="-122"/>
+                <a:cs typeface="Segoe UI" pitchFamily="34" charset="-120"/>
+              </a:rPr>
+              <a:t>Runbooks live next to the pipelines, not in a wiki nobody opens.</a:t>
+            </a:r>
+            <a:endParaRPr lang="en-US" sz="1150" dirty="0"/>
+          </a:p>
+        </p:txBody>
+      </p:sp>
+      <p:sp>
+        <p:nvSpPr>
+          <p:cNvPr id="29" name="Text 27"/>
+          <p:cNvSpPr/>
+          <p:nvPr/>
+        </p:nvSpPr>
+        <p:spPr>
+          <a:xfrm>
+            <a:off x="10698480" y="6382512"/>
+            <a:ext cx="1188720" cy="365760"/>
+          </a:xfrm>
+          <a:prstGeom prst="rect">
+            <a:avLst/>
+          </a:prstGeom>
+          <a:noFill/>
+          <a:ln/>
+        </p:spPr>
+        <p:txBody>
+          <a:bodyPr wrap="square" rtlCol="0" anchor="ctr"/>
+          <a:lstStyle/>
+          <a:p>
+            <a:pPr algn="r" indent="0" marL="0">
+              <a:buNone/>
+            </a:pPr>
+            <a:r>
+              <a:rPr lang="en-US" sz="1000" dirty="0">
+                <a:solidFill>
+                  <a:srgbClr val="64748B"/>
+                </a:solidFill>
+                <a:latin typeface="Consolas" pitchFamily="34" charset="0"/>
+                <a:ea typeface="Consolas" pitchFamily="34" charset="-122"/>
+                <a:cs typeface="Consolas" pitchFamily="34" charset="-120"/>
+              </a:rPr>
+              <a:t>11 / 14</a:t>
+            </a:r>
+            <a:endParaRPr lang="en-US" sz="1000" dirty="0"/>
+          </a:p>
+        </p:txBody>
+      </p:sp>
+    </p:spTree>
+  </p:cSld>
+  <p:clrMapOvr>
+    <a:masterClrMapping/>
+  </p:clrMapOvr>
+</p:sld>
+</file>
+
+<file path=ppt/slides/slide12.xml><?xml version="1.0" encoding="utf-8"?>
+<p:sld xmlns:a="http://schemas.openxmlformats.org/drawingml/2006/main" xmlns:r="http://schemas.openxmlformats.org/officeDocument/2006/relationships" xmlns:p="http://schemas.openxmlformats.org/presentationml/2006/main">
+  <p:cSld name="Slide 12">
+    <p:bg>
+      <p:bgPr>
+        <a:solidFill>
+          <a:srgbClr val="0A0C12"/>
+        </a:solidFill>
+      </p:bgPr>
+    </p:bg>
+    <p:spTree>
+      <p:nvGrpSpPr>
+        <p:cNvPr id="1" name=""/>
+        <p:cNvGrpSpPr/>
+        <p:nvPr/>
+      </p:nvGrpSpPr>
+      <p:grpSpPr>
+        <a:xfrm>
+          <a:off x="0" y="0"/>
+          <a:ext cx="0" cy="0"/>
+          <a:chOff x="0" y="0"/>
+          <a:chExt cx="0" cy="0"/>
+        </a:xfrm>
+      </p:grpSpPr>
+      <p:sp>
+        <p:nvSpPr>
+          <p:cNvPr id="2" name="Shape 0"/>
+          <p:cNvSpPr/>
+          <p:nvPr/>
+        </p:nvSpPr>
+        <p:spPr>
+          <a:xfrm>
+            <a:off x="0" y="0"/>
+            <a:ext cx="7680960" cy="64008"/>
+          </a:xfrm>
+          <a:prstGeom prst="rect">
+            <a:avLst/>
+          </a:prstGeom>
+          <a:solidFill>
+            <a:srgbClr val="3B82F6"/>
+          </a:solidFill>
+          <a:ln/>
+        </p:spPr>
+      </p:sp>
+      <p:sp>
+        <p:nvSpPr>
+          <p:cNvPr id="3" name="Shape 1"/>
+          <p:cNvSpPr/>
+          <p:nvPr/>
+        </p:nvSpPr>
+        <p:spPr>
+          <a:xfrm>
+            <a:off x="7680960" y="0"/>
+            <a:ext cx="4510735" cy="64008"/>
+          </a:xfrm>
+          <a:prstGeom prst="rect">
+            <a:avLst/>
+          </a:prstGeom>
+          <a:solidFill>
+            <a:srgbClr val="06B6D4"/>
+          </a:solidFill>
+          <a:ln/>
+        </p:spPr>
+      </p:sp>
+      <p:sp>
+        <p:nvSpPr>
+          <p:cNvPr id="4" name="Text 2"/>
+          <p:cNvSpPr/>
+          <p:nvPr/>
+        </p:nvSpPr>
+        <p:spPr>
+          <a:xfrm>
+            <a:off x="822960" y="502920"/>
+            <a:ext cx="10515600" cy="365760"/>
+          </a:xfrm>
+          <a:prstGeom prst="rect">
+            <a:avLst/>
+          </a:prstGeom>
+          <a:noFill/>
+          <a:ln/>
+        </p:spPr>
+        <p:txBody>
+          <a:bodyPr wrap="square" rtlCol="0" anchor="ctr"/>
+          <a:lstStyle/>
+          <a:p>
+            <a:pPr indent="0" marL="0">
+              <a:buNone/>
+            </a:pPr>
+            <a:r>
+              <a:rPr lang="en-US" sz="1200" spc="300" kern="0" dirty="0">
+                <a:solidFill>
+                  <a:srgbClr val="06B6D4"/>
+                </a:solidFill>
+                <a:latin typeface="Consolas" pitchFamily="34" charset="0"/>
+                <a:ea typeface="Consolas" pitchFamily="34" charset="-122"/>
+                <a:cs typeface="Consolas" pitchFamily="34" charset="-120"/>
+              </a:rPr>
+              <a:t>EVIDENCE</a:t>
+            </a:r>
+            <a:endParaRPr lang="en-US" sz="1200" dirty="0"/>
+          </a:p>
+        </p:txBody>
+      </p:sp>
+      <p:sp>
+        <p:nvSpPr>
+          <p:cNvPr id="5" name="Text 3"/>
+          <p:cNvSpPr/>
+          <p:nvPr/>
+        </p:nvSpPr>
+        <p:spPr>
+          <a:xfrm>
+            <a:off x="822960" y="914400"/>
+            <a:ext cx="10561320" cy="868680"/>
+          </a:xfrm>
+          <a:prstGeom prst="rect">
+            <a:avLst/>
+          </a:prstGeom>
+          <a:noFill/>
+          <a:ln/>
+        </p:spPr>
+        <p:txBody>
+          <a:bodyPr wrap="square" rtlCol="0" anchor="ctr"/>
+          <a:lstStyle/>
+          <a:p>
+            <a:pPr indent="0" marL="0">
+              <a:buNone/>
+            </a:pPr>
+            <a:r>
+              <a:rPr lang="en-US" sz="2700" b="1" dirty="0">
+                <a:solidFill>
+                  <a:srgbClr val="FFFFFF"/>
+                </a:solidFill>
+                <a:latin typeface="Segoe UI" pitchFamily="34" charset="0"/>
+                <a:ea typeface="Segoe UI" pitchFamily="34" charset="-122"/>
+                <a:cs typeface="Segoe UI" pitchFamily="34" charset="-120"/>
+              </a:rPr>
+              <a:t>What the seam checks catch in practice</a:t>
+            </a:r>
+            <a:endParaRPr lang="en-US" sz="2700" dirty="0"/>
+          </a:p>
+        </p:txBody>
+      </p:sp>
+      <p:graphicFrame>
+        <p:nvGraphicFramePr>
+          <p:cNvPr id="6" name="Chart 0" descr=""/>
+          <p:cNvGraphicFramePr/>
+          <p:nvPr/>
+        </p:nvGraphicFramePr>
+        <p:xfrm>
+          <a:off x="822960" y="1874520"/>
+          <a:ext cx="10515600" cy="3337560"/>
+        </p:xfrm>
+        <a:graphic xmlns:a="http://schemas.openxmlformats.org/drawingml/2006/main">
+          <a:graphicData uri="http://schemas.openxmlformats.org/drawingml/2006/chart">
+            <c:chart xmlns:c="http://schemas.openxmlformats.org/drawingml/2006/chart" r:id="rId1"/>
+          </a:graphicData>
+        </a:graphic>
+      </p:graphicFrame>
+      <p:sp>
+        <p:nvSpPr>
+          <p:cNvPr id="7" name="Shape 4"/>
+          <p:cNvSpPr/>
+          <p:nvPr/>
+        </p:nvSpPr>
+        <p:spPr>
+          <a:xfrm>
+            <a:off x="822960" y="5413248"/>
+            <a:ext cx="10515600" cy="0"/>
+          </a:xfrm>
+          <a:prstGeom prst="line">
+            <a:avLst/>
+          </a:prstGeom>
+          <a:noFill/>
+          <a:ln w="12700">
+            <a:solidFill>
+              <a:srgbClr val="1E2D45"/>
+            </a:solidFill>
+            <a:prstDash val="solid"/>
+          </a:ln>
+        </p:spPr>
+      </p:sp>
+      <p:sp>
+        <p:nvSpPr>
+          <p:cNvPr id="8" name="Text 5"/>
+          <p:cNvSpPr/>
+          <p:nvPr/>
+        </p:nvSpPr>
+        <p:spPr>
+          <a:xfrm>
+            <a:off x="822960" y="5504688"/>
+            <a:ext cx="10424160" cy="411480"/>
+          </a:xfrm>
+          <a:prstGeom prst="rect">
+            <a:avLst/>
+          </a:prstGeom>
+          <a:noFill/>
+          <a:ln/>
+        </p:spPr>
+        <p:txBody>
+          <a:bodyPr wrap="square" rtlCol="0" anchor="ctr"/>
+          <a:lstStyle/>
+          <a:p>
+            <a:pPr indent="0" marL="0">
+              <a:buNone/>
+            </a:pPr>
+            <a:r>
+              <a:rPr lang="en-US" sz="1300" i="1" dirty="0">
+                <a:solidFill>
+                  <a:srgbClr val="06B6D4"/>
+                </a:solidFill>
+                <a:latin typeface="Segoe UI" pitchFamily="34" charset="0"/>
+                <a:ea typeface="Segoe UI" pitchFamily="34" charset="-122"/>
+                <a:cs typeface="Segoe UI" pitchFamily="34" charset="-120"/>
+              </a:rPr>
+              <a:t>→  Most findings are boring and predictable - which is exactly why automating the checks pays for itself.</a:t>
+            </a:r>
+            <a:endParaRPr lang="en-US" sz="1300" dirty="0"/>
+          </a:p>
+        </p:txBody>
+      </p:sp>
+      <p:sp>
+        <p:nvSpPr>
+          <p:cNvPr id="9" name="Shape 6"/>
+          <p:cNvSpPr/>
+          <p:nvPr/>
+        </p:nvSpPr>
+        <p:spPr>
+          <a:xfrm>
+            <a:off x="822960" y="5961888"/>
+            <a:ext cx="10515600" cy="0"/>
+          </a:xfrm>
+          <a:prstGeom prst="line">
+            <a:avLst/>
+          </a:prstGeom>
+          <a:noFill/>
+          <a:ln w="12700">
+            <a:solidFill>
+              <a:srgbClr val="1E2D45"/>
+            </a:solidFill>
+            <a:prstDash val="solid"/>
+          </a:ln>
+        </p:spPr>
+      </p:sp>
+      <p:sp>
+        <p:nvSpPr>
+          <p:cNvPr id="10" name="Text 7"/>
+          <p:cNvSpPr/>
+          <p:nvPr/>
+        </p:nvSpPr>
+        <p:spPr>
+          <a:xfrm>
+            <a:off x="822960" y="6053328"/>
+            <a:ext cx="9692640" cy="457200"/>
+          </a:xfrm>
+          <a:prstGeom prst="rect">
+            <a:avLst/>
+          </a:prstGeom>
+          <a:noFill/>
+          <a:ln/>
+        </p:spPr>
+        <p:txBody>
+          <a:bodyPr wrap="square" rtlCol="0" anchor="ctr"/>
+          <a:lstStyle/>
+          <a:p>
+            <a:pPr indent="0" marL="0">
+              <a:buNone/>
+            </a:pPr>
+            <a:r>
+              <a:rPr lang="en-US" sz="1150" dirty="0">
+                <a:solidFill>
+                  <a:srgbClr val="64748B"/>
+                </a:solidFill>
+                <a:latin typeface="Segoe UI" pitchFamily="34" charset="0"/>
+                <a:ea typeface="Segoe UI" pitchFamily="34" charset="-122"/>
+                <a:cs typeface="Segoe UI" pitchFamily="34" charset="-120"/>
+              </a:rPr>
+              <a:t>Illustrative mix from a mature quarter of seam checks; the point is coverage, not the exact counts.</a:t>
+            </a:r>
+            <a:endParaRPr lang="en-US" sz="1150" dirty="0"/>
+          </a:p>
+        </p:txBody>
+      </p:sp>
+      <p:sp>
+        <p:nvSpPr>
+          <p:cNvPr id="11" name="Text 8"/>
+          <p:cNvSpPr/>
+          <p:nvPr/>
+        </p:nvSpPr>
+        <p:spPr>
+          <a:xfrm>
+            <a:off x="10698480" y="6382512"/>
+            <a:ext cx="1188720" cy="365760"/>
+          </a:xfrm>
+          <a:prstGeom prst="rect">
+            <a:avLst/>
+          </a:prstGeom>
+          <a:noFill/>
+          <a:ln/>
+        </p:spPr>
+        <p:txBody>
+          <a:bodyPr wrap="square" rtlCol="0" anchor="ctr"/>
+          <a:lstStyle/>
+          <a:p>
+            <a:pPr algn="r" indent="0" marL="0">
+              <a:buNone/>
+            </a:pPr>
+            <a:r>
+              <a:rPr lang="en-US" sz="1000" dirty="0">
+                <a:solidFill>
+                  <a:srgbClr val="64748B"/>
+                </a:solidFill>
+                <a:latin typeface="Consolas" pitchFamily="34" charset="0"/>
+                <a:ea typeface="Consolas" pitchFamily="34" charset="-122"/>
+                <a:cs typeface="Consolas" pitchFamily="34" charset="-120"/>
+              </a:rPr>
+              <a:t>12 / 14</a:t>
+            </a:r>
+            <a:endParaRPr lang="en-US" sz="1000" dirty="0"/>
+          </a:p>
+        </p:txBody>
+      </p:sp>
+    </p:spTree>
+  </p:cSld>
+  <p:clrMapOvr>
+    <a:masterClrMapping/>
+  </p:clrMapOvr>
+</p:sld>
+</file>
+
+<file path=ppt/slides/slide13.xml><?xml version="1.0" encoding="utf-8"?>
+<p:sld xmlns:a="http://schemas.openxmlformats.org/drawingml/2006/main" xmlns:r="http://schemas.openxmlformats.org/officeDocument/2006/relationships" xmlns:p="http://schemas.openxmlformats.org/presentationml/2006/main">
+  <p:cSld name="Slide 13">
+    <p:bg>
+      <p:bgPr>
+        <a:solidFill>
+          <a:srgbClr val="0A0C12"/>
+        </a:solidFill>
+      </p:bgPr>
+    </p:bg>
+    <p:spTree>
+      <p:nvGrpSpPr>
+        <p:cNvPr id="1" name=""/>
+        <p:cNvGrpSpPr/>
+        <p:nvPr/>
+      </p:nvGrpSpPr>
+      <p:grpSpPr>
+        <a:xfrm>
+          <a:off x="0" y="0"/>
+          <a:ext cx="0" cy="0"/>
+          <a:chOff x="0" y="0"/>
+          <a:chExt cx="0" cy="0"/>
+        </a:xfrm>
+      </p:grpSpPr>
+      <p:sp>
+        <p:nvSpPr>
+          <p:cNvPr id="2" name="Shape 0"/>
+          <p:cNvSpPr/>
+          <p:nvPr/>
+        </p:nvSpPr>
+        <p:spPr>
+          <a:xfrm>
+            <a:off x="0" y="0"/>
+            <a:ext cx="7680960" cy="64008"/>
+          </a:xfrm>
+          <a:prstGeom prst="rect">
+            <a:avLst/>
+          </a:prstGeom>
+          <a:solidFill>
+            <a:srgbClr val="3B82F6"/>
+          </a:solidFill>
+          <a:ln/>
+        </p:spPr>
+      </p:sp>
+      <p:sp>
+        <p:nvSpPr>
+          <p:cNvPr id="3" name="Shape 1"/>
+          <p:cNvSpPr/>
+          <p:nvPr/>
+        </p:nvSpPr>
+        <p:spPr>
+          <a:xfrm>
+            <a:off x="7680960" y="0"/>
+            <a:ext cx="4510735" cy="64008"/>
+          </a:xfrm>
+          <a:prstGeom prst="rect">
+            <a:avLst/>
+          </a:prstGeom>
+          <a:solidFill>
+            <a:srgbClr val="06B6D4"/>
+          </a:solidFill>
+          <a:ln/>
+        </p:spPr>
+      </p:sp>
+      <p:sp>
+        <p:nvSpPr>
+          <p:cNvPr id="4" name="Text 2"/>
+          <p:cNvSpPr/>
+          <p:nvPr/>
+        </p:nvSpPr>
+        <p:spPr>
+          <a:xfrm>
+            <a:off x="822960" y="502920"/>
+            <a:ext cx="10515600" cy="365760"/>
+          </a:xfrm>
+          <a:prstGeom prst="rect">
+            <a:avLst/>
+          </a:prstGeom>
+          <a:noFill/>
+          <a:ln/>
+        </p:spPr>
+        <p:txBody>
+          <a:bodyPr wrap="square" rtlCol="0" anchor="ctr"/>
+          <a:lstStyle/>
+          <a:p>
+            <a:pPr indent="0" marL="0">
+              <a:buNone/>
+            </a:pPr>
+            <a:r>
+              <a:rPr lang="en-US" sz="1200" spc="300" kern="0" dirty="0">
+                <a:solidFill>
+                  <a:srgbClr val="06B6D4"/>
+                </a:solidFill>
+                <a:latin typeface="Consolas" pitchFamily="34" charset="0"/>
+                <a:ea typeface="Consolas" pitchFamily="34" charset="-122"/>
+                <a:cs typeface="Consolas" pitchFamily="34" charset="-120"/>
+              </a:rPr>
+              <a:t>THE STACK</a:t>
+            </a:r>
+            <a:endParaRPr lang="en-US" sz="1200" dirty="0"/>
+          </a:p>
+        </p:txBody>
+      </p:sp>
+      <p:sp>
+        <p:nvSpPr>
+          <p:cNvPr id="5" name="Text 3"/>
+          <p:cNvSpPr/>
+          <p:nvPr/>
+        </p:nvSpPr>
+        <p:spPr>
+          <a:xfrm>
+            <a:off x="822960" y="914400"/>
+            <a:ext cx="10561320" cy="868680"/>
+          </a:xfrm>
+          <a:prstGeom prst="rect">
+            <a:avLst/>
+          </a:prstGeom>
+          <a:noFill/>
+          <a:ln/>
+        </p:spPr>
+        <p:txBody>
+          <a:bodyPr wrap="square" rtlCol="0" anchor="ctr"/>
+          <a:lstStyle/>
+          <a:p>
+            <a:pPr indent="0" marL="0">
+              <a:buNone/>
+            </a:pPr>
+            <a:r>
+              <a:rPr lang="en-US" sz="2700" b="1" dirty="0">
+                <a:solidFill>
+                  <a:srgbClr val="FFFFFF"/>
+                </a:solidFill>
+                <a:latin typeface="Segoe UI" pitchFamily="34" charset="0"/>
+                <a:ea typeface="Segoe UI" pitchFamily="34" charset="-122"/>
+                <a:cs typeface="Segoe UI" pitchFamily="34" charset="-120"/>
+              </a:rPr>
+              <a:t>Run on enterprise tools, governed like engineering</a:t>
+            </a:r>
+            <a:endParaRPr lang="en-US" sz="2700" dirty="0"/>
+          </a:p>
+        </p:txBody>
+      </p:sp>
+      <p:sp>
+        <p:nvSpPr>
+          <p:cNvPr id="6" name="Text 4"/>
+          <p:cNvSpPr/>
+          <p:nvPr/>
+        </p:nvSpPr>
+        <p:spPr>
+          <a:xfrm>
+            <a:off x="868680" y="2011680"/>
+            <a:ext cx="10424160" cy="3566160"/>
+          </a:xfrm>
+          <a:prstGeom prst="rect">
+            <a:avLst/>
+          </a:prstGeom>
+          <a:noFill/>
+          <a:ln/>
+        </p:spPr>
+        <p:txBody>
+          <a:bodyPr wrap="square" rtlCol="0" anchor="t"/>
+          <a:lstStyle/>
+          <a:p>
+            <a:pPr marL="342900" indent="-342900">
+              <a:lnSpc>
+                <a:spcPct val="112000"/>
+              </a:lnSpc>
+              <a:spcAft>
+                <a:spcPts val="900"/>
+              </a:spcAft>
+              <a:buSzPct val="100000"/>
+              <a:buChar char="▸"/>
+            </a:pPr>
+            <a:r>
+              <a:rPr lang="en-US" sz="1600" dirty="0">
+                <a:solidFill>
+                  <a:srgbClr val="CBD5E1"/>
+                </a:solidFill>
+                <a:latin typeface="Segoe UI" pitchFamily="34" charset="0"/>
+                <a:ea typeface="Segoe UI" pitchFamily="34" charset="-122"/>
+                <a:cs typeface="Segoe UI" pitchFamily="34" charset="-120"/>
+              </a:rPr>
+              <a:t>Alteryx scheduled the pipelines feeding the datalake, with naming and error-path standards.</a:t>
+            </a:r>
+            <a:endParaRPr lang="en-US" sz="1600" dirty="0"/>
+          </a:p>
+          <a:p>
+            <a:pPr marL="342900" indent="-342900">
+              <a:lnSpc>
+                <a:spcPct val="112000"/>
+              </a:lnSpc>
+              <a:spcAft>
+                <a:spcPts val="900"/>
+              </a:spcAft>
+              <a:buSzPct val="100000"/>
+              <a:buChar char="▸"/>
+            </a:pPr>
+            <a:r>
+              <a:rPr lang="en-US" sz="1600" dirty="0">
+                <a:solidFill>
+                  <a:srgbClr val="CBD5E1"/>
+                </a:solidFill>
+                <a:latin typeface="Segoe UI" pitchFamily="34" charset="0"/>
+                <a:ea typeface="Segoe UI" pitchFamily="34" charset="-122"/>
+                <a:cs typeface="Segoe UI" pitchFamily="34" charset="-120"/>
+              </a:rPr>
+              <a:t>Qlik Sense served regional dashboards under Management Console governance.</a:t>
+            </a:r>
+            <a:endParaRPr lang="en-US" sz="1600" dirty="0"/>
+          </a:p>
+          <a:p>
+            <a:pPr marL="342900" indent="-342900">
+              <a:lnSpc>
+                <a:spcPct val="112000"/>
+              </a:lnSpc>
+              <a:spcAft>
+                <a:spcPts val="900"/>
+              </a:spcAft>
+              <a:buSzPct val="100000"/>
+              <a:buChar char="▸"/>
+            </a:pPr>
+            <a:r>
+              <a:rPr lang="en-US" sz="1600" dirty="0">
+                <a:solidFill>
+                  <a:srgbClr val="CBD5E1"/>
+                </a:solidFill>
+                <a:latin typeface="Segoe UI" pitchFamily="34" charset="0"/>
+                <a:ea typeface="Segoe UI" pitchFamily="34" charset="-122"/>
+                <a:cs typeface="Segoe UI" pitchFamily="34" charset="-120"/>
+              </a:rPr>
+              <a:t>SQL Server held the ground truth every check compared against.</a:t>
+            </a:r>
+            <a:endParaRPr lang="en-US" sz="1600" dirty="0"/>
+          </a:p>
+          <a:p>
+            <a:pPr marL="342900" indent="-342900">
+              <a:lnSpc>
+                <a:spcPct val="112000"/>
+              </a:lnSpc>
+              <a:spcAft>
+                <a:spcPts val="900"/>
+              </a:spcAft>
+              <a:buSzPct val="100000"/>
+              <a:buChar char="▸"/>
+            </a:pPr>
+            <a:r>
+              <a:rPr lang="en-US" sz="1600" dirty="0">
+                <a:solidFill>
+                  <a:srgbClr val="CBD5E1"/>
+                </a:solidFill>
+                <a:latin typeface="Segoe UI" pitchFamily="34" charset="0"/>
+                <a:ea typeface="Segoe UI" pitchFamily="34" charset="-122"/>
+                <a:cs typeface="Segoe UI" pitchFamily="34" charset="-120"/>
+              </a:rPr>
+              <a:t>A definition registry recorded every KPI's formula, scope, and owner - one number, one definition.</a:t>
+            </a:r>
+            <a:endParaRPr lang="en-US" sz="1600" dirty="0"/>
+          </a:p>
+          <a:p>
+            <a:pPr marL="342900" indent="-342900">
+              <a:lnSpc>
+                <a:spcPct val="112000"/>
+              </a:lnSpc>
+              <a:spcAft>
+                <a:spcPts val="900"/>
+              </a:spcAft>
+              <a:buSzPct val="100000"/>
+              <a:buChar char="▸"/>
+            </a:pPr>
+            <a:r>
+              <a:rPr lang="en-US" sz="1600" dirty="0">
+                <a:solidFill>
+                  <a:srgbClr val="CBD5E1"/>
+                </a:solidFill>
+                <a:latin typeface="Segoe UI" pitchFamily="34" charset="0"/>
+                <a:ea typeface="Segoe UI" pitchFamily="34" charset="-122"/>
+                <a:cs typeface="Segoe UI" pitchFamily="34" charset="-120"/>
+              </a:rPr>
+              <a:t>The tools did not create quality; the discipline wrapped around them did.</a:t>
+            </a:r>
+            <a:endParaRPr lang="en-US" sz="1600" dirty="0"/>
+          </a:p>
+        </p:txBody>
+      </p:sp>
+      <p:sp>
+        <p:nvSpPr>
+          <p:cNvPr id="7" name="Shape 5"/>
+          <p:cNvSpPr/>
+          <p:nvPr/>
+        </p:nvSpPr>
+        <p:spPr>
+          <a:xfrm>
+            <a:off x="822960" y="5961888"/>
+            <a:ext cx="10515600" cy="0"/>
+          </a:xfrm>
+          <a:prstGeom prst="line">
+            <a:avLst/>
+          </a:prstGeom>
+          <a:noFill/>
+          <a:ln w="12700">
+            <a:solidFill>
+              <a:srgbClr val="1E2D45"/>
+            </a:solidFill>
+            <a:prstDash val="solid"/>
+          </a:ln>
+        </p:spPr>
+      </p:sp>
+      <p:sp>
+        <p:nvSpPr>
+          <p:cNvPr id="8" name="Text 6"/>
+          <p:cNvSpPr/>
+          <p:nvPr/>
+        </p:nvSpPr>
+        <p:spPr>
+          <a:xfrm>
+            <a:off x="822960" y="6053328"/>
+            <a:ext cx="9692640" cy="457200"/>
+          </a:xfrm>
+          <a:prstGeom prst="rect">
+            <a:avLst/>
+          </a:prstGeom>
+          <a:noFill/>
+          <a:ln/>
+        </p:spPr>
+        <p:txBody>
+          <a:bodyPr wrap="square" rtlCol="0" anchor="ctr"/>
+          <a:lstStyle/>
+          <a:p>
+            <a:pPr indent="0" marL="0">
+              <a:buNone/>
+            </a:pPr>
+            <a:r>
+              <a:rPr lang="en-US" sz="1150" dirty="0">
+                <a:solidFill>
+                  <a:srgbClr val="64748B"/>
+                </a:solidFill>
+                <a:latin typeface="Segoe UI" pitchFamily="34" charset="0"/>
+                <a:ea typeface="Segoe UI" pitchFamily="34" charset="-122"/>
+                <a:cs typeface="Segoe UI" pitchFamily="34" charset="-120"/>
+              </a:rPr>
+              <a:t>Enterprise BI stacks mirror the discipline of the team running them.</a:t>
+            </a:r>
+            <a:endParaRPr lang="en-US" sz="1150" dirty="0"/>
+          </a:p>
+        </p:txBody>
+      </p:sp>
+      <p:sp>
+        <p:nvSpPr>
+          <p:cNvPr id="9" name="Text 7"/>
+          <p:cNvSpPr/>
+          <p:nvPr/>
+        </p:nvSpPr>
+        <p:spPr>
+          <a:xfrm>
+            <a:off x="10698480" y="6382512"/>
+            <a:ext cx="1188720" cy="365760"/>
+          </a:xfrm>
+          <a:prstGeom prst="rect">
+            <a:avLst/>
+          </a:prstGeom>
+          <a:noFill/>
+          <a:ln/>
+        </p:spPr>
+        <p:txBody>
+          <a:bodyPr wrap="square" rtlCol="0" anchor="ctr"/>
+          <a:lstStyle/>
+          <a:p>
+            <a:pPr algn="r" indent="0" marL="0">
+              <a:buNone/>
+            </a:pPr>
+            <a:r>
+              <a:rPr lang="en-US" sz="1000" dirty="0">
+                <a:solidFill>
+                  <a:srgbClr val="64748B"/>
+                </a:solidFill>
+                <a:latin typeface="Consolas" pitchFamily="34" charset="0"/>
+                <a:ea typeface="Consolas" pitchFamily="34" charset="-122"/>
+                <a:cs typeface="Consolas" pitchFamily="34" charset="-120"/>
+              </a:rPr>
+              <a:t>13 / 14</a:t>
+            </a:r>
+            <a:endParaRPr lang="en-US" sz="1000" dirty="0"/>
+          </a:p>
+        </p:txBody>
+      </p:sp>
+    </p:spTree>
+  </p:cSld>
+  <p:clrMapOvr>
+    <a:masterClrMapping/>
+  </p:clrMapOvr>
+</p:sld>
+</file>
+
+<file path=ppt/slides/slide14.xml><?xml version="1.0" encoding="utf-8"?>
+<p:sld xmlns:a="http://schemas.openxmlformats.org/drawingml/2006/main" xmlns:r="http://schemas.openxmlformats.org/officeDocument/2006/relationships" xmlns:p="http://schemas.openxmlformats.org/presentationml/2006/main">
+  <p:cSld name="Slide 14">
+    <p:bg>
+      <p:bgPr>
+        <a:solidFill>
+          <a:srgbClr val="0A0C12"/>
+        </a:solidFill>
+      </p:bgPr>
+    </p:bg>
+    <p:spTree>
+      <p:nvGrpSpPr>
+        <p:cNvPr id="1" name=""/>
+        <p:cNvGrpSpPr/>
+        <p:nvPr/>
+      </p:nvGrpSpPr>
+      <p:grpSpPr>
+        <a:xfrm>
+          <a:off x="0" y="0"/>
+          <a:ext cx="0" cy="0"/>
+          <a:chOff x="0" y="0"/>
+          <a:chExt cx="0" cy="0"/>
+        </a:xfrm>
+      </p:grpSpPr>
+      <p:sp>
+        <p:nvSpPr>
+          <p:cNvPr id="2" name="Shape 0"/>
+          <p:cNvSpPr/>
+          <p:nvPr/>
+        </p:nvSpPr>
+        <p:spPr>
+          <a:xfrm>
+            <a:off x="0" y="0"/>
+            <a:ext cx="7680960" cy="64008"/>
+          </a:xfrm>
+          <a:prstGeom prst="rect">
+            <a:avLst/>
+          </a:prstGeom>
+          <a:solidFill>
+            <a:srgbClr val="3B82F6"/>
+          </a:solidFill>
+          <a:ln/>
+        </p:spPr>
+      </p:sp>
+      <p:sp>
+        <p:nvSpPr>
+          <p:cNvPr id="3" name="Shape 1"/>
+          <p:cNvSpPr/>
+          <p:nvPr/>
+        </p:nvSpPr>
+        <p:spPr>
+          <a:xfrm>
+            <a:off x="7680960" y="0"/>
+            <a:ext cx="4510735" cy="64008"/>
+          </a:xfrm>
+          <a:prstGeom prst="rect">
+            <a:avLst/>
+          </a:prstGeom>
+          <a:solidFill>
+            <a:srgbClr val="06B6D4"/>
+          </a:solidFill>
+          <a:ln/>
+        </p:spPr>
+      </p:sp>
+      <p:sp>
+        <p:nvSpPr>
+          <p:cNvPr id="4" name="Text 2"/>
+          <p:cNvSpPr/>
+          <p:nvPr/>
+        </p:nvSpPr>
+        <p:spPr>
+          <a:xfrm>
+            <a:off x="822960" y="1417320"/>
+            <a:ext cx="10515600" cy="411480"/>
+          </a:xfrm>
+          <a:prstGeom prst="rect">
+            <a:avLst/>
+          </a:prstGeom>
+          <a:noFill/>
+          <a:ln/>
+        </p:spPr>
+        <p:txBody>
+          <a:bodyPr wrap="square" rtlCol="0" anchor="ctr"/>
+          <a:lstStyle/>
+          <a:p>
+            <a:pPr algn="ctr" indent="0" marL="0">
+              <a:buNone/>
+            </a:pPr>
+            <a:r>
+              <a:rPr lang="en-US" sz="1300" spc="400" kern="0" dirty="0">
+                <a:solidFill>
+                  <a:srgbClr val="06B6D4"/>
+                </a:solidFill>
+                <a:latin typeface="Consolas" pitchFamily="34" charset="0"/>
+                <a:ea typeface="Consolas" pitchFamily="34" charset="-122"/>
+                <a:cs typeface="Consolas" pitchFamily="34" charset="-120"/>
+              </a:rPr>
+              <a:t>WORK WITH ME</a:t>
+            </a:r>
+            <a:endParaRPr lang="en-US" sz="1300" dirty="0"/>
+          </a:p>
+        </p:txBody>
+      </p:sp>
+      <p:sp>
+        <p:nvSpPr>
+          <p:cNvPr id="5" name="Text 3"/>
+          <p:cNvSpPr/>
+          <p:nvPr/>
+        </p:nvSpPr>
+        <p:spPr>
+          <a:xfrm>
+            <a:off x="822960" y="1920240"/>
+            <a:ext cx="10515600" cy="1371600"/>
+          </a:xfrm>
+          <a:prstGeom prst="rect">
+            <a:avLst/>
+          </a:prstGeom>
+          <a:noFill/>
+          <a:ln/>
+        </p:spPr>
+        <p:txBody>
+          <a:bodyPr wrap="square" rtlCol="0" anchor="ctr"/>
+          <a:lstStyle/>
+          <a:p>
+            <a:pPr algn="ctr" indent="0" marL="0">
+              <a:buNone/>
+            </a:pPr>
+            <a:r>
+              <a:rPr lang="en-US" sz="3200" b="1" dirty="0">
+                <a:solidFill>
+                  <a:srgbClr val="FFFFFF"/>
+                </a:solidFill>
+                <a:latin typeface="Segoe UI" pitchFamily="34" charset="0"/>
+                <a:ea typeface="Segoe UI" pitchFamily="34" charset="-122"/>
+                <a:cs typeface="Segoe UI" pitchFamily="34" charset="-120"/>
+              </a:rPr>
+              <a:t>Trust is built one reconciliation at a time</a:t>
+            </a:r>
+            <a:endParaRPr lang="en-US" sz="3200" dirty="0"/>
+          </a:p>
+        </p:txBody>
+      </p:sp>
+      <p:sp>
+        <p:nvSpPr>
+          <p:cNvPr id="6" name="Text 4"/>
+          <p:cNvSpPr/>
+          <p:nvPr/>
+        </p:nvSpPr>
+        <p:spPr>
+          <a:xfrm>
+            <a:off x="2011680" y="3429000"/>
+            <a:ext cx="8183880" cy="1554480"/>
+          </a:xfrm>
+          <a:prstGeom prst="rect">
+            <a:avLst/>
+          </a:prstGeom>
+          <a:noFill/>
+          <a:ln/>
+        </p:spPr>
+        <p:txBody>
+          <a:bodyPr wrap="square" rtlCol="0" anchor="t"/>
+          <a:lstStyle/>
+          <a:p>
+            <a:pPr algn="ctr" indent="0" marL="0">
+              <a:spcAft>
+                <a:spcPts val="800"/>
+              </a:spcAft>
+              <a:buNone/>
+            </a:pPr>
+            <a:r>
+              <a:rPr lang="en-US" sz="1500" dirty="0">
+                <a:solidFill>
+                  <a:srgbClr val="CBD5E1"/>
+                </a:solidFill>
+                <a:latin typeface="Segoe UI" pitchFamily="34" charset="0"/>
+                <a:ea typeface="Segoe UI" pitchFamily="34" charset="-122"/>
+                <a:cs typeface="Segoe UI" pitchFamily="34" charset="-120"/>
+              </a:rPr>
+              <a:t>Your datalake and your source systems already disagree - I find where and why.</a:t>
+            </a:r>
+            <a:pPr algn="ctr" indent="0" marL="0">
+              <a:spcAft>
+                <a:spcPts val="800"/>
+              </a:spcAft>
+              <a:buNone/>
+            </a:pPr>
+            <a:r>
+              <a:rPr lang="en-US" sz="1500" dirty="0">
+                <a:solidFill>
+                  <a:srgbClr val="CBD5E1"/>
+                </a:solidFill>
+                <a:latin typeface="Segoe UI" pitchFamily="34" charset="0"/>
+                <a:ea typeface="Segoe UI" pitchFamily="34" charset="-122"/>
+                <a:cs typeface="Segoe UI" pitchFamily="34" charset="-120"/>
+              </a:rPr>
+              <a:t>I design pipelines where failure is loud, owners are named, and numbers survive scrutiny.</a:t>
+            </a:r>
+            <a:pPr algn="ctr" indent="0" marL="0">
+              <a:spcAft>
+                <a:spcPts val="800"/>
+              </a:spcAft>
+              <a:buNone/>
+            </a:pPr>
+            <a:r>
+              <a:rPr lang="en-US" sz="1500" dirty="0">
+                <a:solidFill>
+                  <a:srgbClr val="CBD5E1"/>
+                </a:solidFill>
+                <a:latin typeface="Segoe UI" pitchFamily="34" charset="0"/>
+                <a:ea typeface="Segoe UI" pitchFamily="34" charset="-122"/>
+                <a:cs typeface="Segoe UI" pitchFamily="34" charset="-120"/>
+              </a:rPr>
+              <a:t>Bring me the pipeline everyone is afraid to touch.</a:t>
+            </a:r>
+            <a:endParaRPr lang="en-US" sz="1500" dirty="0"/>
+          </a:p>
+        </p:txBody>
+      </p:sp>
+      <p:sp>
+        <p:nvSpPr>
+          <p:cNvPr id="7" name="Shape 5"/>
+          <p:cNvSpPr/>
+          <p:nvPr/>
+        </p:nvSpPr>
+        <p:spPr>
+          <a:xfrm>
+            <a:off x="3566160" y="5212080"/>
+            <a:ext cx="5074920" cy="0"/>
+          </a:xfrm>
+          <a:prstGeom prst="line">
+            <a:avLst/>
+          </a:prstGeom>
+          <a:noFill/>
+          <a:ln w="25400">
+            <a:solidFill>
+              <a:srgbClr val="3B82F6"/>
+            </a:solidFill>
+            <a:prstDash val="solid"/>
+          </a:ln>
+        </p:spPr>
+      </p:sp>
+      <p:sp>
+        <p:nvSpPr>
+          <p:cNvPr id="8" name="Text 6"/>
+          <p:cNvSpPr/>
+          <p:nvPr/>
+        </p:nvSpPr>
+        <p:spPr>
+          <a:xfrm>
+            <a:off x="822960" y="5376672"/>
+            <a:ext cx="10515600" cy="457200"/>
+          </a:xfrm>
+          <a:prstGeom prst="rect">
+            <a:avLst/>
+          </a:prstGeom>
+          <a:noFill/>
+          <a:ln/>
+        </p:spPr>
+        <p:txBody>
+          <a:bodyPr wrap="square" rtlCol="0" anchor="ctr"/>
+          <a:lstStyle/>
+          <a:p>
+            <a:pPr algn="ctr" indent="0" marL="0">
+              <a:buNone/>
+            </a:pPr>
+            <a:r>
+              <a:rPr lang="en-US" sz="1350" b="1" dirty="0">
+                <a:solidFill>
+                  <a:srgbClr val="06B6D4"/>
+                </a:solidFill>
+                <a:latin typeface="Consolas" pitchFamily="34" charset="0"/>
+                <a:ea typeface="Consolas" pitchFamily="34" charset="-122"/>
+                <a:cs typeface="Consolas" pitchFamily="34" charset="-120"/>
+              </a:rPr>
+              <a:t>rezalianvatiady.github.io · github.com/rezalianvatiady</a:t>
+            </a:r>
+            <a:endParaRPr lang="en-US" sz="1350" dirty="0"/>
+          </a:p>
+        </p:txBody>
+      </p:sp>
+      <p:sp>
+        <p:nvSpPr>
+          <p:cNvPr id="9" name="Text 7"/>
+          <p:cNvSpPr/>
+          <p:nvPr/>
+        </p:nvSpPr>
+        <p:spPr>
+          <a:xfrm>
+            <a:off x="10698480" y="6382512"/>
+            <a:ext cx="1188720" cy="365760"/>
+          </a:xfrm>
+          <a:prstGeom prst="rect">
+            <a:avLst/>
+          </a:prstGeom>
+          <a:noFill/>
+          <a:ln/>
+        </p:spPr>
+        <p:txBody>
+          <a:bodyPr wrap="square" rtlCol="0" anchor="ctr"/>
+          <a:lstStyle/>
+          <a:p>
+            <a:pPr algn="r" indent="0" marL="0">
+              <a:buNone/>
+            </a:pPr>
+            <a:r>
+              <a:rPr lang="en-US" sz="1000" dirty="0">
+                <a:solidFill>
+                  <a:srgbClr val="64748B"/>
+                </a:solidFill>
+                <a:latin typeface="Consolas" pitchFamily="34" charset="0"/>
+                <a:ea typeface="Consolas" pitchFamily="34" charset="-122"/>
+                <a:cs typeface="Consolas" pitchFamily="34" charset="-120"/>
+              </a:rPr>
+              <a:t>14 / 14</a:t>
             </a:r>
             <a:endParaRPr lang="en-US" sz="1000" dirty="0"/>
           </a:p>
@@ -1799,7 +6111,7 @@
                 <a:ea typeface="Consolas" pitchFamily="34" charset="-122"/>
                 <a:cs typeface="Consolas" pitchFamily="34" charset="-120"/>
               </a:rPr>
-              <a:t>REALITY</a:t>
+              <a:t>AGENDA</a:t>
             </a:r>
             <a:endParaRPr lang="en-US" sz="1200" dirty="0"/>
           </a:p>
@@ -1813,8 +6125,8 @@
         </p:nvSpPr>
         <p:spPr>
           <a:xfrm>
-            <a:off x="822960" y="960120"/>
-            <a:ext cx="10515600" cy="868680"/>
+            <a:off x="822960" y="914400"/>
+            <a:ext cx="10561320" cy="868680"/>
           </a:xfrm>
           <a:prstGeom prst="rect">
             <a:avLst/>
@@ -1830,7 +6142,7 @@
               <a:buNone/>
             </a:pPr>
             <a:r>
-              <a:rPr lang="en-US" sz="3000" b="1" dirty="0">
+              <a:rPr lang="en-US" sz="2700" b="1" dirty="0">
                 <a:solidFill>
                   <a:srgbClr val="FFFFFF"/>
                 </a:solidFill>
@@ -1838,45 +6150,102 @@
                 <a:ea typeface="Segoe UI" pitchFamily="34" charset="-122"/>
                 <a:cs typeface="Segoe UI" pitchFamily="34" charset="-120"/>
               </a:rPr>
-              <a:t>ETL fails quietly</a:t>
-            </a:r>
-            <a:endParaRPr lang="en-US" sz="3000" dirty="0"/>
-          </a:p>
-        </p:txBody>
-      </p:sp>
-      <p:sp>
-        <p:nvSpPr>
-          <p:cNvPr id="6" name="Text 4"/>
-          <p:cNvSpPr/>
-          <p:nvPr/>
-        </p:nvSpPr>
-        <p:spPr>
-          <a:xfrm>
-            <a:off x="868680" y="2057400"/>
-            <a:ext cx="10424160" cy="3566160"/>
-          </a:xfrm>
-          <a:prstGeom prst="rect">
-            <a:avLst/>
-          </a:prstGeom>
-          <a:noFill/>
-          <a:ln/>
-        </p:spPr>
-        <p:txBody>
-          <a:bodyPr wrap="square" rtlCol="0" anchor="t"/>
-          <a:lstStyle/>
-          <a:p>
-            <a:pPr marL="342900" indent="-342900">
-              <a:lnSpc>
-                <a:spcPct val="115000"/>
-              </a:lnSpc>
-              <a:spcAft>
-                <a:spcPts val="1000"/>
-              </a:spcAft>
-              <a:buSzPct val="100000"/>
-              <a:buChar char="▸"/>
-            </a:pPr>
-            <a:r>
-              <a:rPr lang="en-US" sz="1600" dirty="0">
+              <a:t>What this deck covers</a:t>
+            </a:r>
+            <a:endParaRPr lang="en-US" sz="2700" dirty="0"/>
+          </a:p>
+        </p:txBody>
+      </p:sp>
+      <p:sp>
+        <p:nvSpPr>
+          <p:cNvPr id="6" name="Shape 4"/>
+          <p:cNvSpPr/>
+          <p:nvPr/>
+        </p:nvSpPr>
+        <p:spPr>
+          <a:xfrm>
+            <a:off x="868680" y="2112264"/>
+            <a:ext cx="420624" cy="420624"/>
+          </a:xfrm>
+          <a:prstGeom prst="ellipse">
+            <a:avLst/>
+          </a:prstGeom>
+          <a:solidFill>
+            <a:srgbClr val="111A2E"/>
+          </a:solidFill>
+          <a:ln w="19050">
+            <a:solidFill>
+              <a:srgbClr val="3B82F6"/>
+            </a:solidFill>
+            <a:prstDash val="solid"/>
+          </a:ln>
+        </p:spPr>
+      </p:sp>
+      <p:sp>
+        <p:nvSpPr>
+          <p:cNvPr id="7" name="Text 5"/>
+          <p:cNvSpPr/>
+          <p:nvPr/>
+        </p:nvSpPr>
+        <p:spPr>
+          <a:xfrm>
+            <a:off x="868680" y="2112264"/>
+            <a:ext cx="420624" cy="420624"/>
+          </a:xfrm>
+          <a:prstGeom prst="rect">
+            <a:avLst/>
+          </a:prstGeom>
+          <a:noFill/>
+          <a:ln/>
+        </p:spPr>
+        <p:txBody>
+          <a:bodyPr wrap="square" rtlCol="0" anchor="ctr"/>
+          <a:lstStyle/>
+          <a:p>
+            <a:pPr algn="ctr" indent="0" marL="0">
+              <a:buNone/>
+            </a:pPr>
+            <a:r>
+              <a:rPr lang="en-US" sz="1300" b="1" dirty="0">
+                <a:solidFill>
+                  <a:srgbClr val="3B82F6"/>
+                </a:solidFill>
+                <a:latin typeface="Consolas" pitchFamily="34" charset="0"/>
+                <a:ea typeface="Consolas" pitchFamily="34" charset="-122"/>
+                <a:cs typeface="Consolas" pitchFamily="34" charset="-120"/>
+              </a:rPr>
+              <a:t>1</a:t>
+            </a:r>
+            <a:endParaRPr lang="en-US" sz="1300" dirty="0"/>
+          </a:p>
+        </p:txBody>
+      </p:sp>
+      <p:sp>
+        <p:nvSpPr>
+          <p:cNvPr id="8" name="Text 6"/>
+          <p:cNvSpPr/>
+          <p:nvPr/>
+        </p:nvSpPr>
+        <p:spPr>
+          <a:xfrm>
+            <a:off x="1435608" y="2057400"/>
+            <a:ext cx="4480560" cy="822960"/>
+          </a:xfrm>
+          <a:prstGeom prst="rect">
+            <a:avLst/>
+          </a:prstGeom>
+          <a:noFill/>
+          <a:ln/>
+        </p:spPr>
+        <p:txBody>
+          <a:bodyPr wrap="square" rtlCol="0" anchor="ctr"/>
+          <a:lstStyle/>
+          <a:p>
+            <a:pPr indent="0" marL="0">
+              <a:buNone/>
+            </a:pPr>
+            <a:r>
+              <a:rPr lang="en-US" sz="1450" dirty="0">
                 <a:solidFill>
                   <a:srgbClr val="CBD5E1"/>
                 </a:solidFill>
@@ -1884,23 +6253,102 @@
                 <a:ea typeface="Segoe UI" pitchFamily="34" charset="-122"/>
                 <a:cs typeface="Segoe UI" pitchFamily="34" charset="-120"/>
               </a:rPr>
-              <a:t>Silent truncation, schema drift, stale schedules</a:t>
-            </a:r>
-            <a:endParaRPr lang="en-US" sz="1600" dirty="0"/>
-          </a:p>
-          <a:p>
-            <a:pPr marL="342900" indent="-342900">
-              <a:lnSpc>
-                <a:spcPct val="115000"/>
-              </a:lnSpc>
-              <a:spcAft>
-                <a:spcPts val="1000"/>
-              </a:spcAft>
-              <a:buSzPct val="100000"/>
-              <a:buChar char="▸"/>
-            </a:pPr>
-            <a:r>
-              <a:rPr lang="en-US" sz="1600" dirty="0">
+              <a:t>Why ETL fails quietly - and why silent is the default state</a:t>
+            </a:r>
+            <a:endParaRPr lang="en-US" sz="1450" dirty="0"/>
+          </a:p>
+        </p:txBody>
+      </p:sp>
+      <p:sp>
+        <p:nvSpPr>
+          <p:cNvPr id="9" name="Shape 7"/>
+          <p:cNvSpPr/>
+          <p:nvPr/>
+        </p:nvSpPr>
+        <p:spPr>
+          <a:xfrm>
+            <a:off x="868680" y="3044952"/>
+            <a:ext cx="420624" cy="420624"/>
+          </a:xfrm>
+          <a:prstGeom prst="ellipse">
+            <a:avLst/>
+          </a:prstGeom>
+          <a:solidFill>
+            <a:srgbClr val="111A2E"/>
+          </a:solidFill>
+          <a:ln w="19050">
+            <a:solidFill>
+              <a:srgbClr val="06B6D4"/>
+            </a:solidFill>
+            <a:prstDash val="solid"/>
+          </a:ln>
+        </p:spPr>
+      </p:sp>
+      <p:sp>
+        <p:nvSpPr>
+          <p:cNvPr id="10" name="Text 8"/>
+          <p:cNvSpPr/>
+          <p:nvPr/>
+        </p:nvSpPr>
+        <p:spPr>
+          <a:xfrm>
+            <a:off x="868680" y="3044952"/>
+            <a:ext cx="420624" cy="420624"/>
+          </a:xfrm>
+          <a:prstGeom prst="rect">
+            <a:avLst/>
+          </a:prstGeom>
+          <a:noFill/>
+          <a:ln/>
+        </p:spPr>
+        <p:txBody>
+          <a:bodyPr wrap="square" rtlCol="0" anchor="ctr"/>
+          <a:lstStyle/>
+          <a:p>
+            <a:pPr algn="ctr" indent="0" marL="0">
+              <a:buNone/>
+            </a:pPr>
+            <a:r>
+              <a:rPr lang="en-US" sz="1300" b="1" dirty="0">
+                <a:solidFill>
+                  <a:srgbClr val="06B6D4"/>
+                </a:solidFill>
+                <a:latin typeface="Consolas" pitchFamily="34" charset="0"/>
+                <a:ea typeface="Consolas" pitchFamily="34" charset="-122"/>
+                <a:cs typeface="Consolas" pitchFamily="34" charset="-120"/>
+              </a:rPr>
+              <a:t>2</a:t>
+            </a:r>
+            <a:endParaRPr lang="en-US" sz="1300" dirty="0"/>
+          </a:p>
+        </p:txBody>
+      </p:sp>
+      <p:sp>
+        <p:nvSpPr>
+          <p:cNvPr id="11" name="Text 9"/>
+          <p:cNvSpPr/>
+          <p:nvPr/>
+        </p:nvSpPr>
+        <p:spPr>
+          <a:xfrm>
+            <a:off x="1435608" y="2990088"/>
+            <a:ext cx="4480560" cy="822960"/>
+          </a:xfrm>
+          <a:prstGeom prst="rect">
+            <a:avLst/>
+          </a:prstGeom>
+          <a:noFill/>
+          <a:ln/>
+        </p:spPr>
+        <p:txBody>
+          <a:bodyPr wrap="square" rtlCol="0" anchor="ctr"/>
+          <a:lstStyle/>
+          <a:p>
+            <a:pPr indent="0" marL="0">
+              <a:buNone/>
+            </a:pPr>
+            <a:r>
+              <a:rPr lang="en-US" sz="1450" dirty="0">
                 <a:solidFill>
                   <a:srgbClr val="CBD5E1"/>
                 </a:solidFill>
@@ -1908,23 +6356,102 @@
                 <a:ea typeface="Segoe UI" pitchFamily="34" charset="-122"/>
                 <a:cs typeface="Segoe UI" pitchFamily="34" charset="-120"/>
               </a:rPr>
-              <a:t>Nobody notices for weeks - then leadership quotes the wrong number</a:t>
-            </a:r>
-            <a:endParaRPr lang="en-US" sz="1600" dirty="0"/>
-          </a:p>
-          <a:p>
-            <a:pPr marL="342900" indent="-342900">
-              <a:lnSpc>
-                <a:spcPct val="115000"/>
-              </a:lnSpc>
-              <a:spcAft>
-                <a:spcPts val="1000"/>
-              </a:spcAft>
-              <a:buSzPct val="100000"/>
-              <a:buChar char="▸"/>
-            </a:pPr>
-            <a:r>
-              <a:rPr lang="en-US" sz="1600" dirty="0">
+              <a:t>The arena: one datalake serving four countries of retail BI</a:t>
+            </a:r>
+            <a:endParaRPr lang="en-US" sz="1450" dirty="0"/>
+          </a:p>
+        </p:txBody>
+      </p:sp>
+      <p:sp>
+        <p:nvSpPr>
+          <p:cNvPr id="12" name="Shape 10"/>
+          <p:cNvSpPr/>
+          <p:nvPr/>
+        </p:nvSpPr>
+        <p:spPr>
+          <a:xfrm>
+            <a:off x="868680" y="3977640"/>
+            <a:ext cx="420624" cy="420624"/>
+          </a:xfrm>
+          <a:prstGeom prst="ellipse">
+            <a:avLst/>
+          </a:prstGeom>
+          <a:solidFill>
+            <a:srgbClr val="111A2E"/>
+          </a:solidFill>
+          <a:ln w="19050">
+            <a:solidFill>
+              <a:srgbClr val="3B82F6"/>
+            </a:solidFill>
+            <a:prstDash val="solid"/>
+          </a:ln>
+        </p:spPr>
+      </p:sp>
+      <p:sp>
+        <p:nvSpPr>
+          <p:cNvPr id="13" name="Text 11"/>
+          <p:cNvSpPr/>
+          <p:nvPr/>
+        </p:nvSpPr>
+        <p:spPr>
+          <a:xfrm>
+            <a:off x="868680" y="3977640"/>
+            <a:ext cx="420624" cy="420624"/>
+          </a:xfrm>
+          <a:prstGeom prst="rect">
+            <a:avLst/>
+          </a:prstGeom>
+          <a:noFill/>
+          <a:ln/>
+        </p:spPr>
+        <p:txBody>
+          <a:bodyPr wrap="square" rtlCol="0" anchor="ctr"/>
+          <a:lstStyle/>
+          <a:p>
+            <a:pPr algn="ctr" indent="0" marL="0">
+              <a:buNone/>
+            </a:pPr>
+            <a:r>
+              <a:rPr lang="en-US" sz="1300" b="1" dirty="0">
+                <a:solidFill>
+                  <a:srgbClr val="3B82F6"/>
+                </a:solidFill>
+                <a:latin typeface="Consolas" pitchFamily="34" charset="0"/>
+                <a:ea typeface="Consolas" pitchFamily="34" charset="-122"/>
+                <a:cs typeface="Consolas" pitchFamily="34" charset="-120"/>
+              </a:rPr>
+              <a:t>3</a:t>
+            </a:r>
+            <a:endParaRPr lang="en-US" sz="1300" dirty="0"/>
+          </a:p>
+        </p:txBody>
+      </p:sp>
+      <p:sp>
+        <p:nvSpPr>
+          <p:cNvPr id="14" name="Text 12"/>
+          <p:cNvSpPr/>
+          <p:nvPr/>
+        </p:nvSpPr>
+        <p:spPr>
+          <a:xfrm>
+            <a:off x="1435608" y="3922776"/>
+            <a:ext cx="4480560" cy="822960"/>
+          </a:xfrm>
+          <a:prstGeom prst="rect">
+            <a:avLst/>
+          </a:prstGeom>
+          <a:noFill/>
+          <a:ln/>
+        </p:spPr>
+        <p:txBody>
+          <a:bodyPr wrap="square" rtlCol="0" anchor="ctr"/>
+          <a:lstStyle/>
+          <a:p>
+            <a:pPr indent="0" marL="0">
+              <a:buNone/>
+            </a:pPr>
+            <a:r>
+              <a:rPr lang="en-US" sz="1450" dirty="0">
                 <a:solidFill>
                   <a:srgbClr val="CBD5E1"/>
                 </a:solidFill>
@@ -1932,23 +6459,102 @@
                 <a:ea typeface="Segoe UI" pitchFamily="34" charset="-122"/>
                 <a:cs typeface="Segoe UI" pitchFamily="34" charset="-120"/>
               </a:rPr>
-              <a:t>The pipeline that 'works' is the most dangerous one</a:t>
-            </a:r>
-            <a:endParaRPr lang="en-US" sz="1600" dirty="0"/>
-          </a:p>
-          <a:p>
-            <a:pPr marL="342900" indent="-342900">
-              <a:lnSpc>
-                <a:spcPct val="115000"/>
-              </a:lnSpc>
-              <a:spcAft>
-                <a:spcPts val="1000"/>
-              </a:spcAft>
-              <a:buSzPct val="100000"/>
-              <a:buChar char="▸"/>
-            </a:pPr>
-            <a:r>
-              <a:rPr lang="en-US" sz="1600" dirty="0">
+              <a:t>Profiling sources and reconciling at every seam</a:t>
+            </a:r>
+            <a:endParaRPr lang="en-US" sz="1450" dirty="0"/>
+          </a:p>
+        </p:txBody>
+      </p:sp>
+      <p:sp>
+        <p:nvSpPr>
+          <p:cNvPr id="15" name="Shape 13"/>
+          <p:cNvSpPr/>
+          <p:nvPr/>
+        </p:nvSpPr>
+        <p:spPr>
+          <a:xfrm>
+            <a:off x="6355080" y="2112264"/>
+            <a:ext cx="420624" cy="420624"/>
+          </a:xfrm>
+          <a:prstGeom prst="ellipse">
+            <a:avLst/>
+          </a:prstGeom>
+          <a:solidFill>
+            <a:srgbClr val="111A2E"/>
+          </a:solidFill>
+          <a:ln w="19050">
+            <a:solidFill>
+              <a:srgbClr val="06B6D4"/>
+            </a:solidFill>
+            <a:prstDash val="solid"/>
+          </a:ln>
+        </p:spPr>
+      </p:sp>
+      <p:sp>
+        <p:nvSpPr>
+          <p:cNvPr id="16" name="Text 14"/>
+          <p:cNvSpPr/>
+          <p:nvPr/>
+        </p:nvSpPr>
+        <p:spPr>
+          <a:xfrm>
+            <a:off x="6355080" y="2112264"/>
+            <a:ext cx="420624" cy="420624"/>
+          </a:xfrm>
+          <a:prstGeom prst="rect">
+            <a:avLst/>
+          </a:prstGeom>
+          <a:noFill/>
+          <a:ln/>
+        </p:spPr>
+        <p:txBody>
+          <a:bodyPr wrap="square" rtlCol="0" anchor="ctr"/>
+          <a:lstStyle/>
+          <a:p>
+            <a:pPr algn="ctr" indent="0" marL="0">
+              <a:buNone/>
+            </a:pPr>
+            <a:r>
+              <a:rPr lang="en-US" sz="1300" b="1" dirty="0">
+                <a:solidFill>
+                  <a:srgbClr val="06B6D4"/>
+                </a:solidFill>
+                <a:latin typeface="Consolas" pitchFamily="34" charset="0"/>
+                <a:ea typeface="Consolas" pitchFamily="34" charset="-122"/>
+                <a:cs typeface="Consolas" pitchFamily="34" charset="-120"/>
+              </a:rPr>
+              <a:t>4</a:t>
+            </a:r>
+            <a:endParaRPr lang="en-US" sz="1300" dirty="0"/>
+          </a:p>
+        </p:txBody>
+      </p:sp>
+      <p:sp>
+        <p:nvSpPr>
+          <p:cNvPr id="17" name="Text 15"/>
+          <p:cNvSpPr/>
+          <p:nvPr/>
+        </p:nvSpPr>
+        <p:spPr>
+          <a:xfrm>
+            <a:off x="6922008" y="2057400"/>
+            <a:ext cx="4480560" cy="822960"/>
+          </a:xfrm>
+          <a:prstGeom prst="rect">
+            <a:avLst/>
+          </a:prstGeom>
+          <a:noFill/>
+          <a:ln/>
+        </p:spPr>
+        <p:txBody>
+          <a:bodyPr wrap="square" rtlCol="0" anchor="ctr"/>
+          <a:lstStyle/>
+          <a:p>
+            <a:pPr indent="0" marL="0">
+              <a:buNone/>
+            </a:pPr>
+            <a:r>
+              <a:rPr lang="en-US" sz="1450" dirty="0">
                 <a:solidFill>
                   <a:srgbClr val="CBD5E1"/>
                 </a:solidFill>
@@ -1956,22 +6562,47 @@
                 <a:ea typeface="Segoe UI" pitchFamily="34" charset="-122"/>
                 <a:cs typeface="Segoe UI" pitchFamily="34" charset="-120"/>
               </a:rPr>
-              <a:t>Design against quiet failure, not loud failure</a:t>
-            </a:r>
-            <a:endParaRPr lang="en-US" sz="1600" dirty="0"/>
-          </a:p>
-        </p:txBody>
-      </p:sp>
-      <p:sp>
-        <p:nvSpPr>
-          <p:cNvPr id="7" name="Text 5"/>
-          <p:cNvSpPr/>
-          <p:nvPr/>
-        </p:nvSpPr>
-        <p:spPr>
-          <a:xfrm>
-            <a:off x="10698480" y="6355080"/>
-            <a:ext cx="1188720" cy="365760"/>
+              <a:t>Instrumenting schedules and giving discrepancies owners</a:t>
+            </a:r>
+            <a:endParaRPr lang="en-US" sz="1450" dirty="0"/>
+          </a:p>
+        </p:txBody>
+      </p:sp>
+      <p:sp>
+        <p:nvSpPr>
+          <p:cNvPr id="18" name="Shape 16"/>
+          <p:cNvSpPr/>
+          <p:nvPr/>
+        </p:nvSpPr>
+        <p:spPr>
+          <a:xfrm>
+            <a:off x="6355080" y="3044952"/>
+            <a:ext cx="420624" cy="420624"/>
+          </a:xfrm>
+          <a:prstGeom prst="ellipse">
+            <a:avLst/>
+          </a:prstGeom>
+          <a:solidFill>
+            <a:srgbClr val="111A2E"/>
+          </a:solidFill>
+          <a:ln w="19050">
+            <a:solidFill>
+              <a:srgbClr val="3B82F6"/>
+            </a:solidFill>
+            <a:prstDash val="solid"/>
+          </a:ln>
+        </p:spPr>
+      </p:sp>
+      <p:sp>
+        <p:nvSpPr>
+          <p:cNvPr id="19" name="Text 17"/>
+          <p:cNvSpPr/>
+          <p:nvPr/>
+        </p:nvSpPr>
+        <p:spPr>
+          <a:xfrm>
+            <a:off x="6355080" y="3044952"/>
+            <a:ext cx="420624" cy="420624"/>
           </a:xfrm>
           <a:prstGeom prst="rect">
             <a:avLst/>
@@ -1983,19 +6614,97 @@
           <a:bodyPr wrap="square" rtlCol="0" anchor="ctr"/>
           <a:lstStyle/>
           <a:p>
-            <a:pPr algn="r" indent="0" marL="0">
+            <a:pPr algn="ctr" indent="0" marL="0">
               <a:buNone/>
             </a:pPr>
             <a:r>
-              <a:rPr lang="en-US" sz="1000" dirty="0">
-                <a:solidFill>
-                  <a:srgbClr val="64748B"/>
+              <a:rPr lang="en-US" sz="1300" b="1" dirty="0">
+                <a:solidFill>
+                  <a:srgbClr val="3B82F6"/>
                 </a:solidFill>
                 <a:latin typeface="Consolas" pitchFamily="34" charset="0"/>
                 <a:ea typeface="Consolas" pitchFamily="34" charset="-122"/>
                 <a:cs typeface="Consolas" pitchFamily="34" charset="-120"/>
               </a:rPr>
-              <a:t>2 / 8</a:t>
+              <a:t>5</a:t>
+            </a:r>
+            <a:endParaRPr lang="en-US" sz="1300" dirty="0"/>
+          </a:p>
+        </p:txBody>
+      </p:sp>
+      <p:sp>
+        <p:nvSpPr>
+          <p:cNvPr id="20" name="Text 18"/>
+          <p:cNvSpPr/>
+          <p:nvPr/>
+        </p:nvSpPr>
+        <p:spPr>
+          <a:xfrm>
+            <a:off x="6922008" y="2990088"/>
+            <a:ext cx="4480560" cy="822960"/>
+          </a:xfrm>
+          <a:prstGeom prst="rect">
+            <a:avLst/>
+          </a:prstGeom>
+          <a:noFill/>
+          <a:ln/>
+        </p:spPr>
+        <p:txBody>
+          <a:bodyPr wrap="square" rtlCol="0" anchor="ctr"/>
+          <a:lstStyle/>
+          <a:p>
+            <a:pPr indent="0" marL="0">
+              <a:buNone/>
+            </a:pPr>
+            <a:r>
+              <a:rPr lang="en-US" sz="1450" dirty="0">
+                <a:solidFill>
+                  <a:srgbClr val="CBD5E1"/>
+                </a:solidFill>
+                <a:latin typeface="Segoe UI" pitchFamily="34" charset="0"/>
+                <a:ea typeface="Segoe UI" pitchFamily="34" charset="-122"/>
+                <a:cs typeface="Segoe UI" pitchFamily="34" charset="-120"/>
+              </a:rPr>
+              <a:t>What a trustworthy pipeline looks like in daily operation</a:t>
+            </a:r>
+            <a:endParaRPr lang="en-US" sz="1450" dirty="0"/>
+          </a:p>
+        </p:txBody>
+      </p:sp>
+      <p:sp>
+        <p:nvSpPr>
+          <p:cNvPr id="21" name="Text 19"/>
+          <p:cNvSpPr/>
+          <p:nvPr/>
+        </p:nvSpPr>
+        <p:spPr>
+          <a:xfrm>
+            <a:off x="10698480" y="6382512"/>
+            <a:ext cx="1188720" cy="365760"/>
+          </a:xfrm>
+          <a:prstGeom prst="rect">
+            <a:avLst/>
+          </a:prstGeom>
+          <a:noFill/>
+          <a:ln/>
+        </p:spPr>
+        <p:txBody>
+          <a:bodyPr wrap="square" rtlCol="0" anchor="ctr"/>
+          <a:lstStyle/>
+          <a:p>
+            <a:pPr algn="r" indent="0" marL="0">
+              <a:buNone/>
+            </a:pPr>
+            <a:r>
+              <a:rPr lang="en-US" sz="1000" dirty="0">
+                <a:solidFill>
+                  <a:srgbClr val="64748B"/>
+                </a:solidFill>
+                <a:latin typeface="Consolas" pitchFamily="34" charset="0"/>
+                <a:ea typeface="Consolas" pitchFamily="34" charset="-122"/>
+                <a:cs typeface="Consolas" pitchFamily="34" charset="-120"/>
+              </a:rPr>
+              <a:t>2 / 14</a:t>
             </a:r>
             <a:endParaRPr lang="en-US" sz="1000" dirty="0"/>
           </a:p>
@@ -2106,7 +6815,7 @@
                 <a:ea typeface="Consolas" pitchFamily="34" charset="-122"/>
                 <a:cs typeface="Consolas" pitchFamily="34" charset="-120"/>
               </a:rPr>
-              <a:t>PRINCIPLE 1</a:t>
+              <a:t>THE REALITY</a:t>
             </a:r>
             <a:endParaRPr lang="en-US" sz="1200" dirty="0"/>
           </a:p>
@@ -2120,8 +6829,8 @@
         </p:nvSpPr>
         <p:spPr>
           <a:xfrm>
-            <a:off x="822960" y="960120"/>
-            <a:ext cx="10515600" cy="868680"/>
+            <a:off x="822960" y="914400"/>
+            <a:ext cx="10561320" cy="868680"/>
           </a:xfrm>
           <a:prstGeom prst="rect">
             <a:avLst/>
@@ -2137,7 +6846,7 @@
               <a:buNone/>
             </a:pPr>
             <a:r>
-              <a:rPr lang="en-US" sz="3000" b="1" dirty="0">
+              <a:rPr lang="en-US" sz="2700" b="1" dirty="0">
                 <a:solidFill>
                   <a:srgbClr val="FFFFFF"/>
                 </a:solidFill>
@@ -2145,9 +6854,9 @@
                 <a:ea typeface="Segoe UI" pitchFamily="34" charset="-122"/>
                 <a:cs typeface="Segoe UI" pitchFamily="34" charset="-120"/>
               </a:rPr>
-              <a:t>Profile sources before you trust them</a:t>
-            </a:r>
-            <a:endParaRPr lang="en-US" sz="3000" dirty="0"/>
+              <a:t>ETL fails quietly</a:t>
+            </a:r>
+            <a:endParaRPr lang="en-US" sz="2700" dirty="0"/>
           </a:p>
         </p:txBody>
       </p:sp>
@@ -2159,7 +6868,7 @@
         </p:nvSpPr>
         <p:spPr>
           <a:xfrm>
-            <a:off x="868680" y="2057400"/>
+            <a:off x="868680" y="2011680"/>
             <a:ext cx="10424160" cy="3566160"/>
           </a:xfrm>
           <a:prstGeom prst="rect">
@@ -2174,10 +6883,10 @@
           <a:p>
             <a:pPr marL="342900" indent="-342900">
               <a:lnSpc>
-                <a:spcPct val="115000"/>
+                <a:spcPct val="112000"/>
               </a:lnSpc>
               <a:spcAft>
-                <a:spcPts val="1000"/>
+                <a:spcPts val="900"/>
               </a:spcAft>
               <a:buSzPct val="100000"/>
               <a:buChar char="▸"/>
@@ -2191,17 +6900,17 @@
                 <a:ea typeface="Segoe UI" pitchFamily="34" charset="-122"/>
                 <a:cs typeface="Segoe UI" pitchFamily="34" charset="-120"/>
               </a:rPr>
-              <a:t>Expected row counts, key uniqueness, update cadence</a:t>
+              <a:t>Silent truncation, schema drift, and stale schedules never announce themselves.</a:t>
             </a:r>
             <a:endParaRPr lang="en-US" sz="1600" dirty="0"/>
           </a:p>
           <a:p>
             <a:pPr marL="342900" indent="-342900">
               <a:lnSpc>
-                <a:spcPct val="115000"/>
+                <a:spcPct val="112000"/>
               </a:lnSpc>
               <a:spcAft>
-                <a:spcPts val="1000"/>
+                <a:spcPts val="900"/>
               </a:spcAft>
               <a:buSzPct val="100000"/>
               <a:buChar char="▸"/>
@@ -2215,17 +6924,17 @@
                 <a:ea typeface="Segoe UI" pitchFamily="34" charset="-122"/>
                 <a:cs typeface="Segoe UI" pitchFamily="34" charset="-120"/>
               </a:rPr>
-              <a:t>Known quirks documented per source</a:t>
+              <a:t>Nobody notices for weeks - then leadership quotes the wrong number in a meeting.</a:t>
             </a:r>
             <a:endParaRPr lang="en-US" sz="1600" dirty="0"/>
           </a:p>
           <a:p>
             <a:pPr marL="342900" indent="-342900">
               <a:lnSpc>
-                <a:spcPct val="115000"/>
+                <a:spcPct val="112000"/>
               </a:lnSpc>
               <a:spcAft>
-                <a:spcPts val="1000"/>
+                <a:spcPts val="900"/>
               </a:spcAft>
               <a:buSzPct val="100000"/>
               <a:buChar char="▸"/>
@@ -2239,17 +6948,17 @@
                 <a:ea typeface="Segoe UI" pitchFamily="34" charset="-122"/>
                 <a:cs typeface="Segoe UI" pitchFamily="34" charset="-120"/>
               </a:rPr>
-              <a:t>Restated numbers, skipped weekends - every source has a personality</a:t>
+              <a:t>The pipeline that 'works' is the most dangerous one, because nobody checks it.</a:t>
             </a:r>
             <a:endParaRPr lang="en-US" sz="1600" dirty="0"/>
           </a:p>
           <a:p>
             <a:pPr marL="342900" indent="-342900">
               <a:lnSpc>
-                <a:spcPct val="115000"/>
+                <a:spcPct val="112000"/>
               </a:lnSpc>
               <a:spcAft>
-                <a:spcPts val="1000"/>
+                <a:spcPts val="900"/>
               </a:spcAft>
               <a:buSzPct val="100000"/>
               <a:buChar char="▸"/>
@@ -2263,21 +6972,107 @@
                 <a:ea typeface="Segoe UI" pitchFamily="34" charset="-122"/>
                 <a:cs typeface="Segoe UI" pitchFamily="34" charset="-120"/>
               </a:rPr>
-              <a:t>Half of quality issues are undocumented source behavior</a:t>
+              <a:t>Loud failures get fixed the same day; quiet failures get fixed never.</a:t>
             </a:r>
             <a:endParaRPr lang="en-US" sz="1600" dirty="0"/>
           </a:p>
-        </p:txBody>
-      </p:sp>
-      <p:sp>
-        <p:nvSpPr>
-          <p:cNvPr id="7" name="Text 5"/>
-          <p:cNvSpPr/>
-          <p:nvPr/>
-        </p:nvSpPr>
-        <p:spPr>
-          <a:xfrm>
-            <a:off x="10698480" y="6355080"/>
+          <a:p>
+            <a:pPr marL="342900" indent="-342900">
+              <a:lnSpc>
+                <a:spcPct val="112000"/>
+              </a:lnSpc>
+              <a:spcAft>
+                <a:spcPts val="900"/>
+              </a:spcAft>
+              <a:buSzPct val="100000"/>
+              <a:buChar char="▸"/>
+            </a:pPr>
+            <a:r>
+              <a:rPr lang="en-US" sz="1600" dirty="0">
+                <a:solidFill>
+                  <a:srgbClr val="CBD5E1"/>
+                </a:solidFill>
+                <a:latin typeface="Segoe UI" pitchFamily="34" charset="0"/>
+                <a:ea typeface="Segoe UI" pitchFamily="34" charset="-122"/>
+                <a:cs typeface="Segoe UI" pitchFamily="34" charset="-120"/>
+              </a:rPr>
+              <a:t>The design goal is not fewer failures - it is failures that cannot stay silent.</a:t>
+            </a:r>
+            <a:endParaRPr lang="en-US" sz="1600" dirty="0"/>
+          </a:p>
+        </p:txBody>
+      </p:sp>
+      <p:sp>
+        <p:nvSpPr>
+          <p:cNvPr id="7" name="Shape 5"/>
+          <p:cNvSpPr/>
+          <p:nvPr/>
+        </p:nvSpPr>
+        <p:spPr>
+          <a:xfrm>
+            <a:off x="822960" y="5961888"/>
+            <a:ext cx="10515600" cy="0"/>
+          </a:xfrm>
+          <a:prstGeom prst="line">
+            <a:avLst/>
+          </a:prstGeom>
+          <a:noFill/>
+          <a:ln w="12700">
+            <a:solidFill>
+              <a:srgbClr val="1E2D45"/>
+            </a:solidFill>
+            <a:prstDash val="solid"/>
+          </a:ln>
+        </p:spPr>
+      </p:sp>
+      <p:sp>
+        <p:nvSpPr>
+          <p:cNvPr id="8" name="Text 6"/>
+          <p:cNvSpPr/>
+          <p:nvPr/>
+        </p:nvSpPr>
+        <p:spPr>
+          <a:xfrm>
+            <a:off x="822960" y="6053328"/>
+            <a:ext cx="9692640" cy="457200"/>
+          </a:xfrm>
+          <a:prstGeom prst="rect">
+            <a:avLst/>
+          </a:prstGeom>
+          <a:noFill/>
+          <a:ln/>
+        </p:spPr>
+        <p:txBody>
+          <a:bodyPr wrap="square" rtlCol="0" anchor="ctr"/>
+          <a:lstStyle/>
+          <a:p>
+            <a:pPr indent="0" marL="0">
+              <a:buNone/>
+            </a:pPr>
+            <a:r>
+              <a:rPr lang="en-US" sz="1150" dirty="0">
+                <a:solidFill>
+                  <a:srgbClr val="64748B"/>
+                </a:solidFill>
+                <a:latin typeface="Segoe UI" pitchFamily="34" charset="0"/>
+                <a:ea typeface="Segoe UI" pitchFamily="34" charset="-122"/>
+                <a:cs typeface="Segoe UI" pitchFamily="34" charset="-120"/>
+              </a:rPr>
+              <a:t>Every principle in this playbook exists to make failure loud.</a:t>
+            </a:r>
+            <a:endParaRPr lang="en-US" sz="1150" dirty="0"/>
+          </a:p>
+        </p:txBody>
+      </p:sp>
+      <p:sp>
+        <p:nvSpPr>
+          <p:cNvPr id="9" name="Text 7"/>
+          <p:cNvSpPr/>
+          <p:nvPr/>
+        </p:nvSpPr>
+        <p:spPr>
+          <a:xfrm>
+            <a:off x="10698480" y="6382512"/>
             <a:ext cx="1188720" cy="365760"/>
           </a:xfrm>
           <a:prstGeom prst="rect">
@@ -2302,7 +7097,7 @@
                 <a:ea typeface="Consolas" pitchFamily="34" charset="-122"/>
                 <a:cs typeface="Consolas" pitchFamily="34" charset="-120"/>
               </a:rPr>
-              <a:t>3 / 8</a:t>
+              <a:t>3 / 14</a:t>
             </a:r>
             <a:endParaRPr lang="en-US" sz="1000" dirty="0"/>
           </a:p>
@@ -2413,7 +7208,7 @@
                 <a:ea typeface="Consolas" pitchFamily="34" charset="-122"/>
                 <a:cs typeface="Consolas" pitchFamily="34" charset="-120"/>
               </a:rPr>
-              <a:t>PRINCIPLE 2</a:t>
+              <a:t>THE ARENA</a:t>
             </a:r>
             <a:endParaRPr lang="en-US" sz="1200" dirty="0"/>
           </a:p>
@@ -2427,8 +7222,8 @@
         </p:nvSpPr>
         <p:spPr>
           <a:xfrm>
-            <a:off x="822960" y="960120"/>
-            <a:ext cx="10515600" cy="868680"/>
+            <a:off x="822960" y="914400"/>
+            <a:ext cx="10561320" cy="868680"/>
           </a:xfrm>
           <a:prstGeom prst="rect">
             <a:avLst/>
@@ -2444,7 +7239,7 @@
               <a:buNone/>
             </a:pPr>
             <a:r>
-              <a:rPr lang="en-US" sz="3000" b="1" dirty="0">
+              <a:rPr lang="en-US" sz="2700" b="1" dirty="0">
                 <a:solidFill>
                   <a:srgbClr val="FFFFFF"/>
                 </a:solidFill>
@@ -2452,139 +7247,659 @@
                 <a:ea typeface="Segoe UI" pitchFamily="34" charset="-122"/>
                 <a:cs typeface="Segoe UI" pitchFamily="34" charset="-120"/>
               </a:rPr>
-              <a:t>Reconcile at the seams</a:t>
-            </a:r>
-            <a:endParaRPr lang="en-US" sz="3000" dirty="0"/>
-          </a:p>
-        </p:txBody>
-      </p:sp>
-      <p:sp>
-        <p:nvSpPr>
-          <p:cNvPr id="6" name="Text 4"/>
-          <p:cNvSpPr/>
-          <p:nvPr/>
-        </p:nvSpPr>
-        <p:spPr>
-          <a:xfrm>
-            <a:off x="868680" y="2057400"/>
-            <a:ext cx="10424160" cy="3566160"/>
-          </a:xfrm>
-          <a:prstGeom prst="rect">
-            <a:avLst/>
-          </a:prstGeom>
-          <a:noFill/>
-          <a:ln/>
-        </p:spPr>
-        <p:txBody>
-          <a:bodyPr wrap="square" rtlCol="0" anchor="t"/>
-          <a:lstStyle/>
-          <a:p>
-            <a:pPr marL="342900" indent="-342900">
-              <a:lnSpc>
-                <a:spcPct val="115000"/>
-              </a:lnSpc>
-              <a:spcAft>
-                <a:spcPts val="1000"/>
-              </a:spcAft>
-              <a:buSzPct val="100000"/>
-              <a:buChar char="▸"/>
-            </a:pPr>
-            <a:r>
-              <a:rPr lang="en-US" sz="1600" dirty="0">
-                <a:solidFill>
-                  <a:srgbClr val="CBD5E1"/>
+              <a:t>Regional BI across four countries, one datalake</a:t>
+            </a:r>
+            <a:endParaRPr lang="en-US" sz="2700" dirty="0"/>
+          </a:p>
+        </p:txBody>
+      </p:sp>
+      <p:sp>
+        <p:nvSpPr>
+          <p:cNvPr id="6" name="Shape 4"/>
+          <p:cNvSpPr/>
+          <p:nvPr/>
+        </p:nvSpPr>
+        <p:spPr>
+          <a:xfrm>
+            <a:off x="822960" y="2194560"/>
+            <a:ext cx="2423160" cy="2697480"/>
+          </a:xfrm>
+          <a:prstGeom prst="roundRect">
+            <a:avLst>
+              <a:gd name="adj" fmla="val 3019"/>
+            </a:avLst>
+          </a:prstGeom>
+          <a:solidFill>
+            <a:srgbClr val="111A2E"/>
+          </a:solidFill>
+          <a:ln w="12700">
+            <a:solidFill>
+              <a:srgbClr val="1E2D45"/>
+            </a:solidFill>
+            <a:prstDash val="solid"/>
+          </a:ln>
+        </p:spPr>
+      </p:sp>
+      <p:sp>
+        <p:nvSpPr>
+          <p:cNvPr id="7" name="Text 5"/>
+          <p:cNvSpPr/>
+          <p:nvPr/>
+        </p:nvSpPr>
+        <p:spPr>
+          <a:xfrm>
+            <a:off x="960120" y="2514600"/>
+            <a:ext cx="2148840" cy="914400"/>
+          </a:xfrm>
+          <a:prstGeom prst="rect">
+            <a:avLst/>
+          </a:prstGeom>
+          <a:noFill/>
+          <a:ln/>
+        </p:spPr>
+        <p:txBody>
+          <a:bodyPr wrap="square" rtlCol="0" anchor="ctr"/>
+          <a:lstStyle/>
+          <a:p>
+            <a:pPr algn="ctr" indent="0" marL="0">
+              <a:buNone/>
+            </a:pPr>
+            <a:r>
+              <a:rPr lang="en-US" sz="3800" b="1" dirty="0">
+                <a:solidFill>
+                  <a:srgbClr val="3B82F6"/>
                 </a:solidFill>
                 <a:latin typeface="Segoe UI" pitchFamily="34" charset="0"/>
                 <a:ea typeface="Segoe UI" pitchFamily="34" charset="-122"/>
                 <a:cs typeface="Segoe UI" pitchFamily="34" charset="-120"/>
               </a:rPr>
-              <a:t>Every boundary crossing gets reconciliation checks</a:t>
-            </a:r>
-            <a:endParaRPr lang="en-US" sz="1600" dirty="0"/>
-          </a:p>
-          <a:p>
-            <a:pPr marL="342900" indent="-342900">
-              <a:lnSpc>
-                <a:spcPct val="115000"/>
-              </a:lnSpc>
-              <a:spcAft>
-                <a:spcPts val="1000"/>
-              </a:spcAft>
-              <a:buSzPct val="100000"/>
-              <a:buChar char="▸"/>
-            </a:pPr>
-            <a:r>
-              <a:rPr lang="en-US" sz="1600" dirty="0">
-                <a:solidFill>
-                  <a:srgbClr val="CBD5E1"/>
+              <a:t>4</a:t>
+            </a:r>
+            <a:endParaRPr lang="en-US" sz="3800" dirty="0"/>
+          </a:p>
+        </p:txBody>
+      </p:sp>
+      <p:sp>
+        <p:nvSpPr>
+          <p:cNvPr id="8" name="Text 6"/>
+          <p:cNvSpPr/>
+          <p:nvPr/>
+        </p:nvSpPr>
+        <p:spPr>
+          <a:xfrm>
+            <a:off x="960120" y="3520440"/>
+            <a:ext cx="2148840" cy="502920"/>
+          </a:xfrm>
+          <a:prstGeom prst="rect">
+            <a:avLst/>
+          </a:prstGeom>
+          <a:noFill/>
+          <a:ln/>
+        </p:spPr>
+        <p:txBody>
+          <a:bodyPr wrap="square" rtlCol="0" anchor="ctr"/>
+          <a:lstStyle/>
+          <a:p>
+            <a:pPr algn="ctr" indent="0" marL="0">
+              <a:buNone/>
+            </a:pPr>
+            <a:r>
+              <a:rPr lang="en-US" sz="1450" b="1" dirty="0">
+                <a:solidFill>
+                  <a:srgbClr val="FFFFFF"/>
                 </a:solidFill>
                 <a:latin typeface="Segoe UI" pitchFamily="34" charset="0"/>
                 <a:ea typeface="Segoe UI" pitchFamily="34" charset="-122"/>
                 <a:cs typeface="Segoe UI" pitchFamily="34" charset="-120"/>
               </a:rPr>
-              <a:t>Row counts, sum checks, sampled row-level comparisons</a:t>
-            </a:r>
-            <a:endParaRPr lang="en-US" sz="1600" dirty="0"/>
-          </a:p>
-          <a:p>
-            <a:pPr marL="342900" indent="-342900">
-              <a:lnSpc>
-                <a:spcPct val="115000"/>
-              </a:lnSpc>
-              <a:spcAft>
-                <a:spcPts val="1000"/>
-              </a:spcAft>
-              <a:buSzPct val="100000"/>
-              <a:buChar char="▸"/>
-            </a:pPr>
-            <a:r>
-              <a:rPr lang="en-US" sz="1600" dirty="0">
-                <a:solidFill>
-                  <a:srgbClr val="CBD5E1"/>
+              <a:t>Markets supported</a:t>
+            </a:r>
+            <a:endParaRPr lang="en-US" sz="1450" dirty="0"/>
+          </a:p>
+        </p:txBody>
+      </p:sp>
+      <p:sp>
+        <p:nvSpPr>
+          <p:cNvPr id="9" name="Text 7"/>
+          <p:cNvSpPr/>
+          <p:nvPr/>
+        </p:nvSpPr>
+        <p:spPr>
+          <a:xfrm>
+            <a:off x="1005840" y="4069080"/>
+            <a:ext cx="2057400" cy="685800"/>
+          </a:xfrm>
+          <a:prstGeom prst="rect">
+            <a:avLst/>
+          </a:prstGeom>
+          <a:noFill/>
+          <a:ln/>
+        </p:spPr>
+        <p:txBody>
+          <a:bodyPr wrap="square" rtlCol="0" anchor="ctr"/>
+          <a:lstStyle/>
+          <a:p>
+            <a:pPr algn="ctr" indent="0" marL="0">
+              <a:buNone/>
+            </a:pPr>
+            <a:r>
+              <a:rPr lang="en-US" sz="1050" dirty="0">
+                <a:solidFill>
+                  <a:srgbClr val="94A3B8"/>
                 </a:solidFill>
                 <a:latin typeface="Segoe UI" pitchFamily="34" charset="0"/>
                 <a:ea typeface="Segoe UI" pitchFamily="34" charset="-122"/>
                 <a:cs typeface="Segoe UI" pitchFamily="34" charset="-120"/>
               </a:rPr>
-              <a:t>Every load - not quarterly, not on request</a:t>
-            </a:r>
-            <a:endParaRPr lang="en-US" sz="1600" dirty="0"/>
-          </a:p>
-          <a:p>
-            <a:pPr marL="342900" indent="-342900">
-              <a:lnSpc>
-                <a:spcPct val="115000"/>
-              </a:lnSpc>
-              <a:spcAft>
-                <a:spcPts val="1000"/>
-              </a:spcAft>
-              <a:buSzPct val="100000"/>
-              <a:buChar char="▸"/>
-            </a:pPr>
-            <a:r>
-              <a:rPr lang="en-US" sz="1600" dirty="0">
-                <a:solidFill>
-                  <a:srgbClr val="CBD5E1"/>
+              <a:t>Indonesia, Taiwan, Hong Kong, and Macau reporting from one datalake.</a:t>
+            </a:r>
+            <a:endParaRPr lang="en-US" sz="1050" dirty="0"/>
+          </a:p>
+        </p:txBody>
+      </p:sp>
+      <p:sp>
+        <p:nvSpPr>
+          <p:cNvPr id="10" name="Shape 8"/>
+          <p:cNvSpPr/>
+          <p:nvPr/>
+        </p:nvSpPr>
+        <p:spPr>
+          <a:xfrm>
+            <a:off x="3520440" y="2194560"/>
+            <a:ext cx="2423160" cy="2697480"/>
+          </a:xfrm>
+          <a:prstGeom prst="roundRect">
+            <a:avLst>
+              <a:gd name="adj" fmla="val 3019"/>
+            </a:avLst>
+          </a:prstGeom>
+          <a:solidFill>
+            <a:srgbClr val="111A2E"/>
+          </a:solidFill>
+          <a:ln w="12700">
+            <a:solidFill>
+              <a:srgbClr val="1E2D45"/>
+            </a:solidFill>
+            <a:prstDash val="solid"/>
+          </a:ln>
+        </p:spPr>
+      </p:sp>
+      <p:sp>
+        <p:nvSpPr>
+          <p:cNvPr id="11" name="Text 9"/>
+          <p:cNvSpPr/>
+          <p:nvPr/>
+        </p:nvSpPr>
+        <p:spPr>
+          <a:xfrm>
+            <a:off x="3657600" y="2514600"/>
+            <a:ext cx="2148840" cy="914400"/>
+          </a:xfrm>
+          <a:prstGeom prst="rect">
+            <a:avLst/>
+          </a:prstGeom>
+          <a:noFill/>
+          <a:ln/>
+        </p:spPr>
+        <p:txBody>
+          <a:bodyPr wrap="square" rtlCol="0" anchor="ctr"/>
+          <a:lstStyle/>
+          <a:p>
+            <a:pPr algn="ctr" indent="0" marL="0">
+              <a:buNone/>
+            </a:pPr>
+            <a:r>
+              <a:rPr lang="en-US" sz="3800" b="1" dirty="0">
+                <a:solidFill>
+                  <a:srgbClr val="06B6D4"/>
                 </a:solidFill>
                 <a:latin typeface="Segoe UI" pitchFamily="34" charset="0"/>
                 <a:ea typeface="Segoe UI" pitchFamily="34" charset="-122"/>
                 <a:cs typeface="Segoe UI" pitchFamily="34" charset="-120"/>
               </a:rPr>
-              <a:t>Reconciliation is a property of the pipeline, not a project</a:t>
-            </a:r>
-            <a:endParaRPr lang="en-US" sz="1600" dirty="0"/>
-          </a:p>
-        </p:txBody>
-      </p:sp>
-      <p:sp>
-        <p:nvSpPr>
-          <p:cNvPr id="7" name="Text 5"/>
-          <p:cNvSpPr/>
-          <p:nvPr/>
-        </p:nvSpPr>
-        <p:spPr>
-          <a:xfrm>
-            <a:off x="10698480" y="6355080"/>
+              <a:t>100%</a:t>
+            </a:r>
+            <a:endParaRPr lang="en-US" sz="3800" dirty="0"/>
+          </a:p>
+        </p:txBody>
+      </p:sp>
+      <p:sp>
+        <p:nvSpPr>
+          <p:cNvPr id="12" name="Text 10"/>
+          <p:cNvSpPr/>
+          <p:nvPr/>
+        </p:nvSpPr>
+        <p:spPr>
+          <a:xfrm>
+            <a:off x="3657600" y="3520440"/>
+            <a:ext cx="2148840" cy="502920"/>
+          </a:xfrm>
+          <a:prstGeom prst="rect">
+            <a:avLst/>
+          </a:prstGeom>
+          <a:noFill/>
+          <a:ln/>
+        </p:spPr>
+        <p:txBody>
+          <a:bodyPr wrap="square" rtlCol="0" anchor="ctr"/>
+          <a:lstStyle/>
+          <a:p>
+            <a:pPr algn="ctr" indent="0" marL="0">
+              <a:buNone/>
+            </a:pPr>
+            <a:r>
+              <a:rPr lang="en-US" sz="1450" b="1" dirty="0">
+                <a:solidFill>
+                  <a:srgbClr val="FFFFFF"/>
+                </a:solidFill>
+                <a:latin typeface="Segoe UI" pitchFamily="34" charset="0"/>
+                <a:ea typeface="Segoe UI" pitchFamily="34" charset="-122"/>
+                <a:cs typeface="Segoe UI" pitchFamily="34" charset="-120"/>
+              </a:rPr>
+              <a:t>Loads reconciled</a:t>
+            </a:r>
+            <a:endParaRPr lang="en-US" sz="1450" dirty="0"/>
+          </a:p>
+        </p:txBody>
+      </p:sp>
+      <p:sp>
+        <p:nvSpPr>
+          <p:cNvPr id="13" name="Text 11"/>
+          <p:cNvSpPr/>
+          <p:nvPr/>
+        </p:nvSpPr>
+        <p:spPr>
+          <a:xfrm>
+            <a:off x="3703320" y="4069080"/>
+            <a:ext cx="2057400" cy="685800"/>
+          </a:xfrm>
+          <a:prstGeom prst="rect">
+            <a:avLst/>
+          </a:prstGeom>
+          <a:noFill/>
+          <a:ln/>
+        </p:spPr>
+        <p:txBody>
+          <a:bodyPr wrap="square" rtlCol="0" anchor="ctr"/>
+          <a:lstStyle/>
+          <a:p>
+            <a:pPr algn="ctr" indent="0" marL="0">
+              <a:buNone/>
+            </a:pPr>
+            <a:r>
+              <a:rPr lang="en-US" sz="1050" dirty="0">
+                <a:solidFill>
+                  <a:srgbClr val="94A3B8"/>
+                </a:solidFill>
+                <a:latin typeface="Segoe UI" pitchFamily="34" charset="0"/>
+                <a:ea typeface="Segoe UI" pitchFamily="34" charset="-122"/>
+                <a:cs typeface="Segoe UI" pitchFamily="34" charset="-120"/>
+              </a:rPr>
+              <a:t>Every boundary crossing gets checks - not a quarterly audit.</a:t>
+            </a:r>
+            <a:endParaRPr lang="en-US" sz="1050" dirty="0"/>
+          </a:p>
+        </p:txBody>
+      </p:sp>
+      <p:sp>
+        <p:nvSpPr>
+          <p:cNvPr id="14" name="Shape 12"/>
+          <p:cNvSpPr/>
+          <p:nvPr/>
+        </p:nvSpPr>
+        <p:spPr>
+          <a:xfrm>
+            <a:off x="6217920" y="2194560"/>
+            <a:ext cx="2423160" cy="2697480"/>
+          </a:xfrm>
+          <a:prstGeom prst="roundRect">
+            <a:avLst>
+              <a:gd name="adj" fmla="val 3019"/>
+            </a:avLst>
+          </a:prstGeom>
+          <a:solidFill>
+            <a:srgbClr val="111A2E"/>
+          </a:solidFill>
+          <a:ln w="12700">
+            <a:solidFill>
+              <a:srgbClr val="1E2D45"/>
+            </a:solidFill>
+            <a:prstDash val="solid"/>
+          </a:ln>
+        </p:spPr>
+      </p:sp>
+      <p:sp>
+        <p:nvSpPr>
+          <p:cNvPr id="15" name="Text 13"/>
+          <p:cNvSpPr/>
+          <p:nvPr/>
+        </p:nvSpPr>
+        <p:spPr>
+          <a:xfrm>
+            <a:off x="6355080" y="2514600"/>
+            <a:ext cx="2148840" cy="914400"/>
+          </a:xfrm>
+          <a:prstGeom prst="rect">
+            <a:avLst/>
+          </a:prstGeom>
+          <a:noFill/>
+          <a:ln/>
+        </p:spPr>
+        <p:txBody>
+          <a:bodyPr wrap="square" rtlCol="0" anchor="ctr"/>
+          <a:lstStyle/>
+          <a:p>
+            <a:pPr algn="ctr" indent="0" marL="0">
+              <a:buNone/>
+            </a:pPr>
+            <a:r>
+              <a:rPr lang="en-US" sz="3800" b="1" dirty="0">
+                <a:solidFill>
+                  <a:srgbClr val="22D3A0"/>
+                </a:solidFill>
+                <a:latin typeface="Segoe UI" pitchFamily="34" charset="0"/>
+                <a:ea typeface="Segoe UI" pitchFamily="34" charset="-122"/>
+                <a:cs typeface="Segoe UI" pitchFamily="34" charset="-120"/>
+              </a:rPr>
+              <a:t>50%</a:t>
+            </a:r>
+            <a:endParaRPr lang="en-US" sz="3800" dirty="0"/>
+          </a:p>
+        </p:txBody>
+      </p:sp>
+      <p:sp>
+        <p:nvSpPr>
+          <p:cNvPr id="16" name="Text 14"/>
+          <p:cNvSpPr/>
+          <p:nvPr/>
+        </p:nvSpPr>
+        <p:spPr>
+          <a:xfrm>
+            <a:off x="6355080" y="3520440"/>
+            <a:ext cx="2148840" cy="502920"/>
+          </a:xfrm>
+          <a:prstGeom prst="rect">
+            <a:avLst/>
+          </a:prstGeom>
+          <a:noFill/>
+          <a:ln/>
+        </p:spPr>
+        <p:txBody>
+          <a:bodyPr wrap="square" rtlCol="0" anchor="ctr"/>
+          <a:lstStyle/>
+          <a:p>
+            <a:pPr algn="ctr" indent="0" marL="0">
+              <a:buNone/>
+            </a:pPr>
+            <a:r>
+              <a:rPr lang="en-US" sz="1450" b="1" dirty="0">
+                <a:solidFill>
+                  <a:srgbClr val="FFFFFF"/>
+                </a:solidFill>
+                <a:latin typeface="Segoe UI" pitchFamily="34" charset="0"/>
+                <a:ea typeface="Segoe UI" pitchFamily="34" charset="-122"/>
+                <a:cs typeface="Segoe UI" pitchFamily="34" charset="-120"/>
+              </a:rPr>
+              <a:t>Undocumented quirks</a:t>
+            </a:r>
+            <a:endParaRPr lang="en-US" sz="1450" dirty="0"/>
+          </a:p>
+        </p:txBody>
+      </p:sp>
+      <p:sp>
+        <p:nvSpPr>
+          <p:cNvPr id="17" name="Text 15"/>
+          <p:cNvSpPr/>
+          <p:nvPr/>
+        </p:nvSpPr>
+        <p:spPr>
+          <a:xfrm>
+            <a:off x="6400800" y="4069080"/>
+            <a:ext cx="2057400" cy="685800"/>
+          </a:xfrm>
+          <a:prstGeom prst="rect">
+            <a:avLst/>
+          </a:prstGeom>
+          <a:noFill/>
+          <a:ln/>
+        </p:spPr>
+        <p:txBody>
+          <a:bodyPr wrap="square" rtlCol="0" anchor="ctr"/>
+          <a:lstStyle/>
+          <a:p>
+            <a:pPr algn="ctr" indent="0" marL="0">
+              <a:buNone/>
+            </a:pPr>
+            <a:r>
+              <a:rPr lang="en-US" sz="1050" dirty="0">
+                <a:solidFill>
+                  <a:srgbClr val="94A3B8"/>
+                </a:solidFill>
+                <a:latin typeface="Segoe UI" pitchFamily="34" charset="0"/>
+                <a:ea typeface="Segoe UI" pitchFamily="34" charset="-122"/>
+                <a:cs typeface="Segoe UI" pitchFamily="34" charset="-120"/>
+              </a:rPr>
+              <a:t>Half of data quality issues trace to undocumented source behavior.</a:t>
+            </a:r>
+            <a:endParaRPr lang="en-US" sz="1050" dirty="0"/>
+          </a:p>
+        </p:txBody>
+      </p:sp>
+      <p:sp>
+        <p:nvSpPr>
+          <p:cNvPr id="18" name="Shape 16"/>
+          <p:cNvSpPr/>
+          <p:nvPr/>
+        </p:nvSpPr>
+        <p:spPr>
+          <a:xfrm>
+            <a:off x="8915400" y="2194560"/>
+            <a:ext cx="2423160" cy="2697480"/>
+          </a:xfrm>
+          <a:prstGeom prst="roundRect">
+            <a:avLst>
+              <a:gd name="adj" fmla="val 3019"/>
+            </a:avLst>
+          </a:prstGeom>
+          <a:solidFill>
+            <a:srgbClr val="111A2E"/>
+          </a:solidFill>
+          <a:ln w="12700">
+            <a:solidFill>
+              <a:srgbClr val="1E2D45"/>
+            </a:solidFill>
+            <a:prstDash val="solid"/>
+          </a:ln>
+        </p:spPr>
+      </p:sp>
+      <p:sp>
+        <p:nvSpPr>
+          <p:cNvPr id="19" name="Text 17"/>
+          <p:cNvSpPr/>
+          <p:nvPr/>
+        </p:nvSpPr>
+        <p:spPr>
+          <a:xfrm>
+            <a:off x="9052560" y="2514600"/>
+            <a:ext cx="2148840" cy="914400"/>
+          </a:xfrm>
+          <a:prstGeom prst="rect">
+            <a:avLst/>
+          </a:prstGeom>
+          <a:noFill/>
+          <a:ln/>
+        </p:spPr>
+        <p:txBody>
+          <a:bodyPr wrap="square" rtlCol="0" anchor="ctr"/>
+          <a:lstStyle/>
+          <a:p>
+            <a:pPr algn="ctr" indent="0" marL="0">
+              <a:buNone/>
+            </a:pPr>
+            <a:r>
+              <a:rPr lang="en-US" sz="3800" b="1" dirty="0">
+                <a:solidFill>
+                  <a:srgbClr val="F59E0B"/>
+                </a:solidFill>
+                <a:latin typeface="Segoe UI" pitchFamily="34" charset="0"/>
+                <a:ea typeface="Segoe UI" pitchFamily="34" charset="-122"/>
+                <a:cs typeface="Segoe UI" pitchFamily="34" charset="-120"/>
+              </a:rPr>
+              <a:t>5</a:t>
+            </a:r>
+            <a:endParaRPr lang="en-US" sz="3800" dirty="0"/>
+          </a:p>
+        </p:txBody>
+      </p:sp>
+      <p:sp>
+        <p:nvSpPr>
+          <p:cNvPr id="20" name="Text 18"/>
+          <p:cNvSpPr/>
+          <p:nvPr/>
+        </p:nvSpPr>
+        <p:spPr>
+          <a:xfrm>
+            <a:off x="9052560" y="3520440"/>
+            <a:ext cx="2148840" cy="502920"/>
+          </a:xfrm>
+          <a:prstGeom prst="rect">
+            <a:avLst/>
+          </a:prstGeom>
+          <a:noFill/>
+          <a:ln/>
+        </p:spPr>
+        <p:txBody>
+          <a:bodyPr wrap="square" rtlCol="0" anchor="ctr"/>
+          <a:lstStyle/>
+          <a:p>
+            <a:pPr algn="ctr" indent="0" marL="0">
+              <a:buNone/>
+            </a:pPr>
+            <a:r>
+              <a:rPr lang="en-US" sz="1450" b="1" dirty="0">
+                <a:solidFill>
+                  <a:srgbClr val="FFFFFF"/>
+                </a:solidFill>
+                <a:latin typeface="Segoe UI" pitchFamily="34" charset="0"/>
+                <a:ea typeface="Segoe UI" pitchFamily="34" charset="-122"/>
+                <a:cs typeface="Segoe UI" pitchFamily="34" charset="-120"/>
+              </a:rPr>
+              <a:t>Quality principles</a:t>
+            </a:r>
+            <a:endParaRPr lang="en-US" sz="1450" dirty="0"/>
+          </a:p>
+        </p:txBody>
+      </p:sp>
+      <p:sp>
+        <p:nvSpPr>
+          <p:cNvPr id="21" name="Text 19"/>
+          <p:cNvSpPr/>
+          <p:nvPr/>
+        </p:nvSpPr>
+        <p:spPr>
+          <a:xfrm>
+            <a:off x="9098280" y="4069080"/>
+            <a:ext cx="2057400" cy="685800"/>
+          </a:xfrm>
+          <a:prstGeom prst="rect">
+            <a:avLst/>
+          </a:prstGeom>
+          <a:noFill/>
+          <a:ln/>
+        </p:spPr>
+        <p:txBody>
+          <a:bodyPr wrap="square" rtlCol="0" anchor="ctr"/>
+          <a:lstStyle/>
+          <a:p>
+            <a:pPr algn="ctr" indent="0" marL="0">
+              <a:buNone/>
+            </a:pPr>
+            <a:r>
+              <a:rPr lang="en-US" sz="1050" dirty="0">
+                <a:solidFill>
+                  <a:srgbClr val="94A3B8"/>
+                </a:solidFill>
+                <a:latin typeface="Segoe UI" pitchFamily="34" charset="0"/>
+                <a:ea typeface="Segoe UI" pitchFamily="34" charset="-122"/>
+                <a:cs typeface="Segoe UI" pitchFamily="34" charset="-120"/>
+              </a:rPr>
+              <a:t>The playbook this deck walks through, applied to every source.</a:t>
+            </a:r>
+            <a:endParaRPr lang="en-US" sz="1050" dirty="0"/>
+          </a:p>
+        </p:txBody>
+      </p:sp>
+      <p:sp>
+        <p:nvSpPr>
+          <p:cNvPr id="22" name="Shape 20"/>
+          <p:cNvSpPr/>
+          <p:nvPr/>
+        </p:nvSpPr>
+        <p:spPr>
+          <a:xfrm>
+            <a:off x="822960" y="5413248"/>
+            <a:ext cx="10515600" cy="0"/>
+          </a:xfrm>
+          <a:prstGeom prst="line">
+            <a:avLst/>
+          </a:prstGeom>
+          <a:noFill/>
+          <a:ln w="12700">
+            <a:solidFill>
+              <a:srgbClr val="1E2D45"/>
+            </a:solidFill>
+            <a:prstDash val="solid"/>
+          </a:ln>
+        </p:spPr>
+      </p:sp>
+      <p:sp>
+        <p:nvSpPr>
+          <p:cNvPr id="23" name="Text 21"/>
+          <p:cNvSpPr/>
+          <p:nvPr/>
+        </p:nvSpPr>
+        <p:spPr>
+          <a:xfrm>
+            <a:off x="822960" y="5504688"/>
+            <a:ext cx="10424160" cy="411480"/>
+          </a:xfrm>
+          <a:prstGeom prst="rect">
+            <a:avLst/>
+          </a:prstGeom>
+          <a:noFill/>
+          <a:ln/>
+        </p:spPr>
+        <p:txBody>
+          <a:bodyPr wrap="square" rtlCol="0" anchor="ctr"/>
+          <a:lstStyle/>
+          <a:p>
+            <a:pPr indent="0" marL="0">
+              <a:buNone/>
+            </a:pPr>
+            <a:r>
+              <a:rPr lang="en-US" sz="1300" i="1" dirty="0">
+                <a:solidFill>
+                  <a:srgbClr val="06B6D4"/>
+                </a:solidFill>
+                <a:latin typeface="Segoe UI" pitchFamily="34" charset="0"/>
+                <a:ea typeface="Segoe UI" pitchFamily="34" charset="-122"/>
+                <a:cs typeface="Segoe UI" pitchFamily="34" charset="-120"/>
+              </a:rPr>
+              <a:t>→  Run as Regional Business Intelligence Specialist for IKEA Indonesia.</a:t>
+            </a:r>
+            <a:endParaRPr lang="en-US" sz="1300" dirty="0"/>
+          </a:p>
+        </p:txBody>
+      </p:sp>
+      <p:sp>
+        <p:nvSpPr>
+          <p:cNvPr id="24" name="Text 22"/>
+          <p:cNvSpPr/>
+          <p:nvPr/>
+        </p:nvSpPr>
+        <p:spPr>
+          <a:xfrm>
+            <a:off x="10698480" y="6382512"/>
             <a:ext cx="1188720" cy="365760"/>
           </a:xfrm>
           <a:prstGeom prst="rect">
@@ -2609,7 +7924,7 @@
                 <a:ea typeface="Consolas" pitchFamily="34" charset="-122"/>
                 <a:cs typeface="Consolas" pitchFamily="34" charset="-120"/>
               </a:rPr>
-              <a:t>4 / 8</a:t>
+              <a:t>4 / 14</a:t>
             </a:r>
             <a:endParaRPr lang="en-US" sz="1000" dirty="0"/>
           </a:p>
@@ -2720,7 +8035,7 @@
                 <a:ea typeface="Consolas" pitchFamily="34" charset="-122"/>
                 <a:cs typeface="Consolas" pitchFamily="34" charset="-120"/>
               </a:rPr>
-              <a:t>PRINCIPLE 3</a:t>
+              <a:t>ARCHITECTURE</a:t>
             </a:r>
             <a:endParaRPr lang="en-US" sz="1200" dirty="0"/>
           </a:p>
@@ -2734,8 +8049,8 @@
         </p:nvSpPr>
         <p:spPr>
           <a:xfrm>
-            <a:off x="822960" y="960120"/>
-            <a:ext cx="10515600" cy="868680"/>
+            <a:off x="822960" y="914400"/>
+            <a:ext cx="10561320" cy="868680"/>
           </a:xfrm>
           <a:prstGeom prst="rect">
             <a:avLst/>
@@ -2751,7 +8066,7 @@
               <a:buNone/>
             </a:pPr>
             <a:r>
-              <a:rPr lang="en-US" sz="3000" b="1" dirty="0">
+              <a:rPr lang="en-US" sz="2700" b="1" dirty="0">
                 <a:solidFill>
                   <a:srgbClr val="FFFFFF"/>
                 </a:solidFill>
@@ -2759,69 +8074,143 @@
                 <a:ea typeface="Segoe UI" pitchFamily="34" charset="-122"/>
                 <a:cs typeface="Segoe UI" pitchFamily="34" charset="-120"/>
               </a:rPr>
-              <a:t>Instrument the schedule itself</a:t>
-            </a:r>
-            <a:endParaRPr lang="en-US" sz="3000" dirty="0"/>
-          </a:p>
-        </p:txBody>
-      </p:sp>
-      <p:sp>
-        <p:nvSpPr>
-          <p:cNvPr id="6" name="Text 4"/>
-          <p:cNvSpPr/>
-          <p:nvPr/>
-        </p:nvSpPr>
-        <p:spPr>
-          <a:xfrm>
-            <a:off x="868680" y="2057400"/>
-            <a:ext cx="10424160" cy="3566160"/>
-          </a:xfrm>
-          <a:prstGeom prst="rect">
-            <a:avLst/>
-          </a:prstGeom>
-          <a:noFill/>
-          <a:ln/>
-        </p:spPr>
-        <p:txBody>
-          <a:bodyPr wrap="square" rtlCol="0" anchor="t"/>
-          <a:lstStyle/>
-          <a:p>
-            <a:pPr marL="342900" indent="-342900">
-              <a:lnSpc>
-                <a:spcPct val="115000"/>
-              </a:lnSpc>
-              <a:spcAft>
-                <a:spcPts val="1000"/>
-              </a:spcAft>
-              <a:buSzPct val="100000"/>
-              <a:buChar char="▸"/>
-            </a:pPr>
-            <a:r>
-              <a:rPr lang="en-US" sz="1600" dirty="0">
-                <a:solidFill>
-                  <a:srgbClr val="CBD5E1"/>
+              <a:t>The pipeline, instrumented end to end</a:t>
+            </a:r>
+            <a:endParaRPr lang="en-US" sz="2700" dirty="0"/>
+          </a:p>
+        </p:txBody>
+      </p:sp>
+      <p:sp>
+        <p:nvSpPr>
+          <p:cNvPr id="6" name="Shape 4"/>
+          <p:cNvSpPr/>
+          <p:nvPr/>
+        </p:nvSpPr>
+        <p:spPr>
+          <a:xfrm>
+            <a:off x="774040" y="2514600"/>
+            <a:ext cx="1938528" cy="2103120"/>
+          </a:xfrm>
+          <a:prstGeom prst="roundRect">
+            <a:avLst>
+              <a:gd name="adj" fmla="val 3302"/>
+            </a:avLst>
+          </a:prstGeom>
+          <a:solidFill>
+            <a:srgbClr val="111A2E"/>
+          </a:solidFill>
+          <a:ln w="19050">
+            <a:solidFill>
+              <a:srgbClr val="3B82F6"/>
+            </a:solidFill>
+            <a:prstDash val="solid"/>
+          </a:ln>
+        </p:spPr>
+      </p:sp>
+      <p:sp>
+        <p:nvSpPr>
+          <p:cNvPr id="7" name="Text 5"/>
+          <p:cNvSpPr/>
+          <p:nvPr/>
+        </p:nvSpPr>
+        <p:spPr>
+          <a:xfrm>
+            <a:off x="902056" y="2633472"/>
+            <a:ext cx="1682496" cy="310896"/>
+          </a:xfrm>
+          <a:prstGeom prst="rect">
+            <a:avLst/>
+          </a:prstGeom>
+          <a:noFill/>
+          <a:ln/>
+        </p:spPr>
+        <p:txBody>
+          <a:bodyPr wrap="square" rtlCol="0" anchor="ctr"/>
+          <a:lstStyle/>
+          <a:p>
+            <a:pPr indent="0" marL="0">
+              <a:buNone/>
+            </a:pPr>
+            <a:r>
+              <a:rPr lang="en-US" sz="1100" b="1" dirty="0">
+                <a:solidFill>
+                  <a:srgbClr val="3B82F6"/>
+                </a:solidFill>
+                <a:latin typeface="Consolas" pitchFamily="34" charset="0"/>
+                <a:ea typeface="Consolas" pitchFamily="34" charset="-122"/>
+                <a:cs typeface="Consolas" pitchFamily="34" charset="-120"/>
+              </a:rPr>
+              <a:t>01</a:t>
+            </a:r>
+            <a:endParaRPr lang="en-US" sz="1100" dirty="0"/>
+          </a:p>
+        </p:txBody>
+      </p:sp>
+      <p:sp>
+        <p:nvSpPr>
+          <p:cNvPr id="8" name="Text 6"/>
+          <p:cNvSpPr/>
+          <p:nvPr/>
+        </p:nvSpPr>
+        <p:spPr>
+          <a:xfrm>
+            <a:off x="902056" y="2962656"/>
+            <a:ext cx="1682496" cy="566928"/>
+          </a:xfrm>
+          <a:prstGeom prst="rect">
+            <a:avLst/>
+          </a:prstGeom>
+          <a:noFill/>
+          <a:ln/>
+        </p:spPr>
+        <p:txBody>
+          <a:bodyPr wrap="square" rtlCol="0" anchor="ctr"/>
+          <a:lstStyle/>
+          <a:p>
+            <a:pPr indent="0" marL="0">
+              <a:buNone/>
+            </a:pPr>
+            <a:r>
+              <a:rPr lang="en-US" sz="1350" b="1" dirty="0">
+                <a:solidFill>
+                  <a:srgbClr val="FFFFFF"/>
                 </a:solidFill>
                 <a:latin typeface="Segoe UI" pitchFamily="34" charset="0"/>
                 <a:ea typeface="Segoe UI" pitchFamily="34" charset="-122"/>
                 <a:cs typeface="Segoe UI" pitchFamily="34" charset="-120"/>
               </a:rPr>
-              <a:t>Freshness alarms on every source</a:t>
-            </a:r>
-            <a:endParaRPr lang="en-US" sz="1600" dirty="0"/>
-          </a:p>
-          <a:p>
-            <a:pPr marL="342900" indent="-342900">
-              <a:lnSpc>
-                <a:spcPct val="115000"/>
-              </a:lnSpc>
-              <a:spcAft>
-                <a:spcPts val="1000"/>
-              </a:spcAft>
-              <a:buSzPct val="100000"/>
-              <a:buChar char="▸"/>
-            </a:pPr>
-            <a:r>
-              <a:rPr lang="en-US" sz="1600" dirty="0">
+              <a:t>Extract</a:t>
+            </a:r>
+            <a:endParaRPr lang="en-US" sz="1350" dirty="0"/>
+          </a:p>
+        </p:txBody>
+      </p:sp>
+      <p:sp>
+        <p:nvSpPr>
+          <p:cNvPr id="9" name="Text 7"/>
+          <p:cNvSpPr/>
+          <p:nvPr/>
+        </p:nvSpPr>
+        <p:spPr>
+          <a:xfrm>
+            <a:off x="902056" y="3566160"/>
+            <a:ext cx="1682496" cy="960120"/>
+          </a:xfrm>
+          <a:prstGeom prst="rect">
+            <a:avLst/>
+          </a:prstGeom>
+          <a:noFill/>
+          <a:ln/>
+        </p:spPr>
+        <p:txBody>
+          <a:bodyPr wrap="square" rtlCol="0" anchor="ctr"/>
+          <a:lstStyle/>
+          <a:p>
+            <a:pPr indent="0" marL="0">
+              <a:buNone/>
+            </a:pPr>
+            <a:r>
+              <a:rPr lang="en-US" sz="980" dirty="0">
                 <a:solidFill>
                   <a:srgbClr val="CBD5E1"/>
                 </a:solidFill>
@@ -2829,47 +8218,163 @@
                 <a:ea typeface="Segoe UI" pitchFamily="34" charset="-122"/>
                 <a:cs typeface="Segoe UI" pitchFamily="34" charset="-120"/>
               </a:rPr>
-              <a:t>If data is late, someone hears before the CEO does</a:t>
-            </a:r>
-            <a:endParaRPr lang="en-US" sz="1600" dirty="0"/>
-          </a:p>
-          <a:p>
-            <a:pPr marL="342900" indent="-342900">
-              <a:lnSpc>
-                <a:spcPct val="115000"/>
-              </a:lnSpc>
-              <a:spcAft>
-                <a:spcPts val="1000"/>
-              </a:spcAft>
-              <a:buSzPct val="100000"/>
-              <a:buChar char="▸"/>
-            </a:pPr>
-            <a:r>
-              <a:rPr lang="en-US" sz="1600" dirty="0">
-                <a:solidFill>
-                  <a:srgbClr val="CBD5E1"/>
+              <a:t>Alteryx schedules pull from regional store systems on a known cadence.</a:t>
+            </a:r>
+            <a:endParaRPr lang="en-US" sz="980" dirty="0"/>
+          </a:p>
+        </p:txBody>
+      </p:sp>
+      <p:sp>
+        <p:nvSpPr>
+          <p:cNvPr id="10" name="Shape 8"/>
+          <p:cNvSpPr/>
+          <p:nvPr/>
+        </p:nvSpPr>
+        <p:spPr>
+          <a:xfrm>
+            <a:off x="2726284" y="3419856"/>
+            <a:ext cx="210312" cy="274320"/>
+          </a:xfrm>
+          <a:prstGeom prst="rightArrow">
+            <a:avLst/>
+          </a:prstGeom>
+          <a:solidFill>
+            <a:srgbClr val="06B6D4"/>
+          </a:solidFill>
+          <a:ln/>
+        </p:spPr>
+      </p:sp>
+      <p:sp>
+        <p:nvSpPr>
+          <p:cNvPr id="11" name="Shape 9"/>
+          <p:cNvSpPr/>
+          <p:nvPr/>
+        </p:nvSpPr>
+        <p:spPr>
+          <a:xfrm>
+            <a:off x="2950312" y="2514600"/>
+            <a:ext cx="1938528" cy="2103120"/>
+          </a:xfrm>
+          <a:prstGeom prst="roundRect">
+            <a:avLst>
+              <a:gd name="adj" fmla="val 3302"/>
+            </a:avLst>
+          </a:prstGeom>
+          <a:solidFill>
+            <a:srgbClr val="111A2E"/>
+          </a:solidFill>
+          <a:ln w="19050">
+            <a:solidFill>
+              <a:srgbClr val="06B6D4"/>
+            </a:solidFill>
+            <a:prstDash val="solid"/>
+          </a:ln>
+        </p:spPr>
+      </p:sp>
+      <p:sp>
+        <p:nvSpPr>
+          <p:cNvPr id="12" name="Text 10"/>
+          <p:cNvSpPr/>
+          <p:nvPr/>
+        </p:nvSpPr>
+        <p:spPr>
+          <a:xfrm>
+            <a:off x="3078328" y="2633472"/>
+            <a:ext cx="1682496" cy="310896"/>
+          </a:xfrm>
+          <a:prstGeom prst="rect">
+            <a:avLst/>
+          </a:prstGeom>
+          <a:noFill/>
+          <a:ln/>
+        </p:spPr>
+        <p:txBody>
+          <a:bodyPr wrap="square" rtlCol="0" anchor="ctr"/>
+          <a:lstStyle/>
+          <a:p>
+            <a:pPr indent="0" marL="0">
+              <a:buNone/>
+            </a:pPr>
+            <a:r>
+              <a:rPr lang="en-US" sz="1100" b="1" dirty="0">
+                <a:solidFill>
+                  <a:srgbClr val="06B6D4"/>
+                </a:solidFill>
+                <a:latin typeface="Consolas" pitchFamily="34" charset="0"/>
+                <a:ea typeface="Consolas" pitchFamily="34" charset="-122"/>
+                <a:cs typeface="Consolas" pitchFamily="34" charset="-120"/>
+              </a:rPr>
+              <a:t>02</a:t>
+            </a:r>
+            <a:endParaRPr lang="en-US" sz="1100" dirty="0"/>
+          </a:p>
+        </p:txBody>
+      </p:sp>
+      <p:sp>
+        <p:nvSpPr>
+          <p:cNvPr id="13" name="Text 11"/>
+          <p:cNvSpPr/>
+          <p:nvPr/>
+        </p:nvSpPr>
+        <p:spPr>
+          <a:xfrm>
+            <a:off x="3078328" y="2962656"/>
+            <a:ext cx="1682496" cy="566928"/>
+          </a:xfrm>
+          <a:prstGeom prst="rect">
+            <a:avLst/>
+          </a:prstGeom>
+          <a:noFill/>
+          <a:ln/>
+        </p:spPr>
+        <p:txBody>
+          <a:bodyPr wrap="square" rtlCol="0" anchor="ctr"/>
+          <a:lstStyle/>
+          <a:p>
+            <a:pPr indent="0" marL="0">
+              <a:buNone/>
+            </a:pPr>
+            <a:r>
+              <a:rPr lang="en-US" sz="1350" b="1" dirty="0">
+                <a:solidFill>
+                  <a:srgbClr val="FFFFFF"/>
                 </a:solidFill>
                 <a:latin typeface="Segoe UI" pitchFamily="34" charset="0"/>
                 <a:ea typeface="Segoe UI" pitchFamily="34" charset="-122"/>
                 <a:cs typeface="Segoe UI" pitchFamily="34" charset="-120"/>
               </a:rPr>
-              <a:t>Schedule deaths caused more incidents than logic bugs</a:t>
-            </a:r>
-            <a:endParaRPr lang="en-US" sz="1600" dirty="0"/>
-          </a:p>
-          <a:p>
-            <a:pPr marL="342900" indent="-342900">
-              <a:lnSpc>
-                <a:spcPct val="115000"/>
-              </a:lnSpc>
-              <a:spcAft>
-                <a:spcPts val="1000"/>
-              </a:spcAft>
-              <a:buSzPct val="100000"/>
-              <a:buChar char="▸"/>
-            </a:pPr>
-            <a:r>
-              <a:rPr lang="en-US" sz="1600" dirty="0">
+              <a:t>Load</a:t>
+            </a:r>
+            <a:endParaRPr lang="en-US" sz="1350" dirty="0"/>
+          </a:p>
+        </p:txBody>
+      </p:sp>
+      <p:sp>
+        <p:nvSpPr>
+          <p:cNvPr id="14" name="Text 12"/>
+          <p:cNvSpPr/>
+          <p:nvPr/>
+        </p:nvSpPr>
+        <p:spPr>
+          <a:xfrm>
+            <a:off x="3078328" y="3566160"/>
+            <a:ext cx="1682496" cy="960120"/>
+          </a:xfrm>
+          <a:prstGeom prst="rect">
+            <a:avLst/>
+          </a:prstGeom>
+          <a:noFill/>
+          <a:ln/>
+        </p:spPr>
+        <p:txBody>
+          <a:bodyPr wrap="square" rtlCol="0" anchor="ctr"/>
+          <a:lstStyle/>
+          <a:p>
+            <a:pPr indent="0" marL="0">
+              <a:buNone/>
+            </a:pPr>
+            <a:r>
+              <a:rPr lang="en-US" sz="980" dirty="0">
                 <a:solidFill>
                   <a:srgbClr val="CBD5E1"/>
                 </a:solidFill>
@@ -2877,22 +8382,69 @@
                 <a:ea typeface="Segoe UI" pitchFamily="34" charset="-122"/>
                 <a:cs typeface="Segoe UI" pitchFamily="34" charset="-120"/>
               </a:rPr>
-              <a:t>Silent is the default state - fight it on purpose</a:t>
-            </a:r>
-            <a:endParaRPr lang="en-US" sz="1600" dirty="0"/>
-          </a:p>
-        </p:txBody>
-      </p:sp>
-      <p:sp>
-        <p:nvSpPr>
-          <p:cNvPr id="7" name="Text 5"/>
-          <p:cNvSpPr/>
-          <p:nvPr/>
-        </p:nvSpPr>
-        <p:spPr>
-          <a:xfrm>
-            <a:off x="10698480" y="6355080"/>
-            <a:ext cx="1188720" cy="365760"/>
+              <a:t>Landing into SQL Server with schema checks before anything is trusted.</a:t>
+            </a:r>
+            <a:endParaRPr lang="en-US" sz="980" dirty="0"/>
+          </a:p>
+        </p:txBody>
+      </p:sp>
+      <p:sp>
+        <p:nvSpPr>
+          <p:cNvPr id="15" name="Shape 13"/>
+          <p:cNvSpPr/>
+          <p:nvPr/>
+        </p:nvSpPr>
+        <p:spPr>
+          <a:xfrm>
+            <a:off x="4902556" y="3419856"/>
+            <a:ext cx="210312" cy="274320"/>
+          </a:xfrm>
+          <a:prstGeom prst="rightArrow">
+            <a:avLst/>
+          </a:prstGeom>
+          <a:solidFill>
+            <a:srgbClr val="06B6D4"/>
+          </a:solidFill>
+          <a:ln/>
+        </p:spPr>
+      </p:sp>
+      <p:sp>
+        <p:nvSpPr>
+          <p:cNvPr id="16" name="Shape 14"/>
+          <p:cNvSpPr/>
+          <p:nvPr/>
+        </p:nvSpPr>
+        <p:spPr>
+          <a:xfrm>
+            <a:off x="5126584" y="2514600"/>
+            <a:ext cx="1938528" cy="2103120"/>
+          </a:xfrm>
+          <a:prstGeom prst="roundRect">
+            <a:avLst>
+              <a:gd name="adj" fmla="val 3302"/>
+            </a:avLst>
+          </a:prstGeom>
+          <a:solidFill>
+            <a:srgbClr val="111A2E"/>
+          </a:solidFill>
+          <a:ln w="19050">
+            <a:solidFill>
+              <a:srgbClr val="3B82F6"/>
+            </a:solidFill>
+            <a:prstDash val="solid"/>
+          </a:ln>
+        </p:spPr>
+      </p:sp>
+      <p:sp>
+        <p:nvSpPr>
+          <p:cNvPr id="17" name="Text 15"/>
+          <p:cNvSpPr/>
+          <p:nvPr/>
+        </p:nvSpPr>
+        <p:spPr>
+          <a:xfrm>
+            <a:off x="5254600" y="2633472"/>
+            <a:ext cx="1682496" cy="310896"/>
           </a:xfrm>
           <a:prstGeom prst="rect">
             <a:avLst/>
@@ -2904,19 +8456,526 @@
           <a:bodyPr wrap="square" rtlCol="0" anchor="ctr"/>
           <a:lstStyle/>
           <a:p>
-            <a:pPr algn="r" indent="0" marL="0">
+            <a:pPr indent="0" marL="0">
               <a:buNone/>
             </a:pPr>
             <a:r>
-              <a:rPr lang="en-US" sz="1000" dirty="0">
-                <a:solidFill>
-                  <a:srgbClr val="64748B"/>
+              <a:rPr lang="en-US" sz="1100" b="1" dirty="0">
+                <a:solidFill>
+                  <a:srgbClr val="3B82F6"/>
                 </a:solidFill>
                 <a:latin typeface="Consolas" pitchFamily="34" charset="0"/>
                 <a:ea typeface="Consolas" pitchFamily="34" charset="-122"/>
                 <a:cs typeface="Consolas" pitchFamily="34" charset="-120"/>
               </a:rPr>
-              <a:t>5 / 8</a:t>
+              <a:t>03</a:t>
+            </a:r>
+            <a:endParaRPr lang="en-US" sz="1100" dirty="0"/>
+          </a:p>
+        </p:txBody>
+      </p:sp>
+      <p:sp>
+        <p:nvSpPr>
+          <p:cNvPr id="18" name="Text 16"/>
+          <p:cNvSpPr/>
+          <p:nvPr/>
+        </p:nvSpPr>
+        <p:spPr>
+          <a:xfrm>
+            <a:off x="5254600" y="2962656"/>
+            <a:ext cx="1682496" cy="566928"/>
+          </a:xfrm>
+          <a:prstGeom prst="rect">
+            <a:avLst/>
+          </a:prstGeom>
+          <a:noFill/>
+          <a:ln/>
+        </p:spPr>
+        <p:txBody>
+          <a:bodyPr wrap="square" rtlCol="0" anchor="ctr"/>
+          <a:lstStyle/>
+          <a:p>
+            <a:pPr indent="0" marL="0">
+              <a:buNone/>
+            </a:pPr>
+            <a:r>
+              <a:rPr lang="en-US" sz="1350" b="1" dirty="0">
+                <a:solidFill>
+                  <a:srgbClr val="FFFFFF"/>
+                </a:solidFill>
+                <a:latin typeface="Segoe UI" pitchFamily="34" charset="0"/>
+                <a:ea typeface="Segoe UI" pitchFamily="34" charset="-122"/>
+                <a:cs typeface="Segoe UI" pitchFamily="34" charset="-120"/>
+              </a:rPr>
+              <a:t>Reconcile</a:t>
+            </a:r>
+            <a:endParaRPr lang="en-US" sz="1350" dirty="0"/>
+          </a:p>
+        </p:txBody>
+      </p:sp>
+      <p:sp>
+        <p:nvSpPr>
+          <p:cNvPr id="19" name="Text 17"/>
+          <p:cNvSpPr/>
+          <p:nvPr/>
+        </p:nvSpPr>
+        <p:spPr>
+          <a:xfrm>
+            <a:off x="5254600" y="3566160"/>
+            <a:ext cx="1682496" cy="960120"/>
+          </a:xfrm>
+          <a:prstGeom prst="rect">
+            <a:avLst/>
+          </a:prstGeom>
+          <a:noFill/>
+          <a:ln/>
+        </p:spPr>
+        <p:txBody>
+          <a:bodyPr wrap="square" rtlCol="0" anchor="ctr"/>
+          <a:lstStyle/>
+          <a:p>
+            <a:pPr indent="0" marL="0">
+              <a:buNone/>
+            </a:pPr>
+            <a:r>
+              <a:rPr lang="en-US" sz="980" dirty="0">
+                <a:solidFill>
+                  <a:srgbClr val="CBD5E1"/>
+                </a:solidFill>
+                <a:latin typeface="Segoe UI" pitchFamily="34" charset="0"/>
+                <a:ea typeface="Segoe UI" pitchFamily="34" charset="-122"/>
+                <a:cs typeface="Segoe UI" pitchFamily="34" charset="-120"/>
+              </a:rPr>
+              <a:t>Row counts, sum checks, and sampled rows at every seam - every load.</a:t>
+            </a:r>
+            <a:endParaRPr lang="en-US" sz="980" dirty="0"/>
+          </a:p>
+        </p:txBody>
+      </p:sp>
+      <p:sp>
+        <p:nvSpPr>
+          <p:cNvPr id="20" name="Shape 18"/>
+          <p:cNvSpPr/>
+          <p:nvPr/>
+        </p:nvSpPr>
+        <p:spPr>
+          <a:xfrm>
+            <a:off x="7078828" y="3419856"/>
+            <a:ext cx="210312" cy="274320"/>
+          </a:xfrm>
+          <a:prstGeom prst="rightArrow">
+            <a:avLst/>
+          </a:prstGeom>
+          <a:solidFill>
+            <a:srgbClr val="06B6D4"/>
+          </a:solidFill>
+          <a:ln/>
+        </p:spPr>
+      </p:sp>
+      <p:sp>
+        <p:nvSpPr>
+          <p:cNvPr id="21" name="Shape 19"/>
+          <p:cNvSpPr/>
+          <p:nvPr/>
+        </p:nvSpPr>
+        <p:spPr>
+          <a:xfrm>
+            <a:off x="7302856" y="2514600"/>
+            <a:ext cx="1938528" cy="2103120"/>
+          </a:xfrm>
+          <a:prstGeom prst="roundRect">
+            <a:avLst>
+              <a:gd name="adj" fmla="val 3302"/>
+            </a:avLst>
+          </a:prstGeom>
+          <a:solidFill>
+            <a:srgbClr val="111A2E"/>
+          </a:solidFill>
+          <a:ln w="19050">
+            <a:solidFill>
+              <a:srgbClr val="06B6D4"/>
+            </a:solidFill>
+            <a:prstDash val="solid"/>
+          </a:ln>
+        </p:spPr>
+      </p:sp>
+      <p:sp>
+        <p:nvSpPr>
+          <p:cNvPr id="22" name="Text 20"/>
+          <p:cNvSpPr/>
+          <p:nvPr/>
+        </p:nvSpPr>
+        <p:spPr>
+          <a:xfrm>
+            <a:off x="7430872" y="2633472"/>
+            <a:ext cx="1682496" cy="310896"/>
+          </a:xfrm>
+          <a:prstGeom prst="rect">
+            <a:avLst/>
+          </a:prstGeom>
+          <a:noFill/>
+          <a:ln/>
+        </p:spPr>
+        <p:txBody>
+          <a:bodyPr wrap="square" rtlCol="0" anchor="ctr"/>
+          <a:lstStyle/>
+          <a:p>
+            <a:pPr indent="0" marL="0">
+              <a:buNone/>
+            </a:pPr>
+            <a:r>
+              <a:rPr lang="en-US" sz="1100" b="1" dirty="0">
+                <a:solidFill>
+                  <a:srgbClr val="06B6D4"/>
+                </a:solidFill>
+                <a:latin typeface="Consolas" pitchFamily="34" charset="0"/>
+                <a:ea typeface="Consolas" pitchFamily="34" charset="-122"/>
+                <a:cs typeface="Consolas" pitchFamily="34" charset="-120"/>
+              </a:rPr>
+              <a:t>04</a:t>
+            </a:r>
+            <a:endParaRPr lang="en-US" sz="1100" dirty="0"/>
+          </a:p>
+        </p:txBody>
+      </p:sp>
+      <p:sp>
+        <p:nvSpPr>
+          <p:cNvPr id="23" name="Text 21"/>
+          <p:cNvSpPr/>
+          <p:nvPr/>
+        </p:nvSpPr>
+        <p:spPr>
+          <a:xfrm>
+            <a:off x="7430872" y="2962656"/>
+            <a:ext cx="1682496" cy="566928"/>
+          </a:xfrm>
+          <a:prstGeom prst="rect">
+            <a:avLst/>
+          </a:prstGeom>
+          <a:noFill/>
+          <a:ln/>
+        </p:spPr>
+        <p:txBody>
+          <a:bodyPr wrap="square" rtlCol="0" anchor="ctr"/>
+          <a:lstStyle/>
+          <a:p>
+            <a:pPr indent="0" marL="0">
+              <a:buNone/>
+            </a:pPr>
+            <a:r>
+              <a:rPr lang="en-US" sz="1350" b="1" dirty="0">
+                <a:solidFill>
+                  <a:srgbClr val="FFFFFF"/>
+                </a:solidFill>
+                <a:latin typeface="Segoe UI" pitchFamily="34" charset="0"/>
+                <a:ea typeface="Segoe UI" pitchFamily="34" charset="-122"/>
+                <a:cs typeface="Segoe UI" pitchFamily="34" charset="-120"/>
+              </a:rPr>
+              <a:t>Serve</a:t>
+            </a:r>
+            <a:endParaRPr lang="en-US" sz="1350" dirty="0"/>
+          </a:p>
+        </p:txBody>
+      </p:sp>
+      <p:sp>
+        <p:nvSpPr>
+          <p:cNvPr id="24" name="Text 22"/>
+          <p:cNvSpPr/>
+          <p:nvPr/>
+        </p:nvSpPr>
+        <p:spPr>
+          <a:xfrm>
+            <a:off x="7430872" y="3566160"/>
+            <a:ext cx="1682496" cy="960120"/>
+          </a:xfrm>
+          <a:prstGeom prst="rect">
+            <a:avLst/>
+          </a:prstGeom>
+          <a:noFill/>
+          <a:ln/>
+        </p:spPr>
+        <p:txBody>
+          <a:bodyPr wrap="square" rtlCol="0" anchor="ctr"/>
+          <a:lstStyle/>
+          <a:p>
+            <a:pPr indent="0" marL="0">
+              <a:buNone/>
+            </a:pPr>
+            <a:r>
+              <a:rPr lang="en-US" sz="980" dirty="0">
+                <a:solidFill>
+                  <a:srgbClr val="CBD5E1"/>
+                </a:solidFill>
+                <a:latin typeface="Segoe UI" pitchFamily="34" charset="0"/>
+                <a:ea typeface="Segoe UI" pitchFamily="34" charset="-122"/>
+                <a:cs typeface="Segoe UI" pitchFamily="34" charset="-120"/>
+              </a:rPr>
+              <a:t>Qlik Sense dashboards subscribe to certified, reconciled models only.</a:t>
+            </a:r>
+            <a:endParaRPr lang="en-US" sz="980" dirty="0"/>
+          </a:p>
+        </p:txBody>
+      </p:sp>
+      <p:sp>
+        <p:nvSpPr>
+          <p:cNvPr id="25" name="Shape 23"/>
+          <p:cNvSpPr/>
+          <p:nvPr/>
+        </p:nvSpPr>
+        <p:spPr>
+          <a:xfrm>
+            <a:off x="9255100" y="3419856"/>
+            <a:ext cx="210312" cy="274320"/>
+          </a:xfrm>
+          <a:prstGeom prst="rightArrow">
+            <a:avLst/>
+          </a:prstGeom>
+          <a:solidFill>
+            <a:srgbClr val="06B6D4"/>
+          </a:solidFill>
+          <a:ln/>
+        </p:spPr>
+      </p:sp>
+      <p:sp>
+        <p:nvSpPr>
+          <p:cNvPr id="26" name="Shape 24"/>
+          <p:cNvSpPr/>
+          <p:nvPr/>
+        </p:nvSpPr>
+        <p:spPr>
+          <a:xfrm>
+            <a:off x="9479128" y="2514600"/>
+            <a:ext cx="1938528" cy="2103120"/>
+          </a:xfrm>
+          <a:prstGeom prst="roundRect">
+            <a:avLst>
+              <a:gd name="adj" fmla="val 3302"/>
+            </a:avLst>
+          </a:prstGeom>
+          <a:solidFill>
+            <a:srgbClr val="111A2E"/>
+          </a:solidFill>
+          <a:ln w="19050">
+            <a:solidFill>
+              <a:srgbClr val="3B82F6"/>
+            </a:solidFill>
+            <a:prstDash val="solid"/>
+          </a:ln>
+        </p:spPr>
+      </p:sp>
+      <p:sp>
+        <p:nvSpPr>
+          <p:cNvPr id="27" name="Text 25"/>
+          <p:cNvSpPr/>
+          <p:nvPr/>
+        </p:nvSpPr>
+        <p:spPr>
+          <a:xfrm>
+            <a:off x="9607144" y="2633472"/>
+            <a:ext cx="1682496" cy="310896"/>
+          </a:xfrm>
+          <a:prstGeom prst="rect">
+            <a:avLst/>
+          </a:prstGeom>
+          <a:noFill/>
+          <a:ln/>
+        </p:spPr>
+        <p:txBody>
+          <a:bodyPr wrap="square" rtlCol="0" anchor="ctr"/>
+          <a:lstStyle/>
+          <a:p>
+            <a:pPr indent="0" marL="0">
+              <a:buNone/>
+            </a:pPr>
+            <a:r>
+              <a:rPr lang="en-US" sz="1100" b="1" dirty="0">
+                <a:solidFill>
+                  <a:srgbClr val="3B82F6"/>
+                </a:solidFill>
+                <a:latin typeface="Consolas" pitchFamily="34" charset="0"/>
+                <a:ea typeface="Consolas" pitchFamily="34" charset="-122"/>
+                <a:cs typeface="Consolas" pitchFamily="34" charset="-120"/>
+              </a:rPr>
+              <a:t>05</a:t>
+            </a:r>
+            <a:endParaRPr lang="en-US" sz="1100" dirty="0"/>
+          </a:p>
+        </p:txBody>
+      </p:sp>
+      <p:sp>
+        <p:nvSpPr>
+          <p:cNvPr id="28" name="Text 26"/>
+          <p:cNvSpPr/>
+          <p:nvPr/>
+        </p:nvSpPr>
+        <p:spPr>
+          <a:xfrm>
+            <a:off x="9607144" y="2962656"/>
+            <a:ext cx="1682496" cy="566928"/>
+          </a:xfrm>
+          <a:prstGeom prst="rect">
+            <a:avLst/>
+          </a:prstGeom>
+          <a:noFill/>
+          <a:ln/>
+        </p:spPr>
+        <p:txBody>
+          <a:bodyPr wrap="square" rtlCol="0" anchor="ctr"/>
+          <a:lstStyle/>
+          <a:p>
+            <a:pPr indent="0" marL="0">
+              <a:buNone/>
+            </a:pPr>
+            <a:r>
+              <a:rPr lang="en-US" sz="1350" b="1" dirty="0">
+                <a:solidFill>
+                  <a:srgbClr val="FFFFFF"/>
+                </a:solidFill>
+                <a:latin typeface="Segoe UI" pitchFamily="34" charset="0"/>
+                <a:ea typeface="Segoe UI" pitchFamily="34" charset="-122"/>
+                <a:cs typeface="Segoe UI" pitchFamily="34" charset="-120"/>
+              </a:rPr>
+              <a:t>Monitor</a:t>
+            </a:r>
+            <a:endParaRPr lang="en-US" sz="1350" dirty="0"/>
+          </a:p>
+        </p:txBody>
+      </p:sp>
+      <p:sp>
+        <p:nvSpPr>
+          <p:cNvPr id="29" name="Text 27"/>
+          <p:cNvSpPr/>
+          <p:nvPr/>
+        </p:nvSpPr>
+        <p:spPr>
+          <a:xfrm>
+            <a:off x="9607144" y="3566160"/>
+            <a:ext cx="1682496" cy="960120"/>
+          </a:xfrm>
+          <a:prstGeom prst="rect">
+            <a:avLst/>
+          </a:prstGeom>
+          <a:noFill/>
+          <a:ln/>
+        </p:spPr>
+        <p:txBody>
+          <a:bodyPr wrap="square" rtlCol="0" anchor="ctr"/>
+          <a:lstStyle/>
+          <a:p>
+            <a:pPr indent="0" marL="0">
+              <a:buNone/>
+            </a:pPr>
+            <a:r>
+              <a:rPr lang="en-US" sz="980" dirty="0">
+                <a:solidFill>
+                  <a:srgbClr val="CBD5E1"/>
+                </a:solidFill>
+                <a:latin typeface="Segoe UI" pitchFamily="34" charset="0"/>
+                <a:ea typeface="Segoe UI" pitchFamily="34" charset="-122"/>
+                <a:cs typeface="Segoe UI" pitchFamily="34" charset="-120"/>
+              </a:rPr>
+              <a:t>Freshness alarms fire when any source runs late - before the CEO asks.</a:t>
+            </a:r>
+            <a:endParaRPr lang="en-US" sz="980" dirty="0"/>
+          </a:p>
+        </p:txBody>
+      </p:sp>
+      <p:sp>
+        <p:nvSpPr>
+          <p:cNvPr id="30" name="Shape 28"/>
+          <p:cNvSpPr/>
+          <p:nvPr/>
+        </p:nvSpPr>
+        <p:spPr>
+          <a:xfrm>
+            <a:off x="822960" y="5961888"/>
+            <a:ext cx="10515600" cy="0"/>
+          </a:xfrm>
+          <a:prstGeom prst="line">
+            <a:avLst/>
+          </a:prstGeom>
+          <a:noFill/>
+          <a:ln w="12700">
+            <a:solidFill>
+              <a:srgbClr val="1E2D45"/>
+            </a:solidFill>
+            <a:prstDash val="solid"/>
+          </a:ln>
+        </p:spPr>
+      </p:sp>
+      <p:sp>
+        <p:nvSpPr>
+          <p:cNvPr id="31" name="Text 29"/>
+          <p:cNvSpPr/>
+          <p:nvPr/>
+        </p:nvSpPr>
+        <p:spPr>
+          <a:xfrm>
+            <a:off x="822960" y="6053328"/>
+            <a:ext cx="9692640" cy="457200"/>
+          </a:xfrm>
+          <a:prstGeom prst="rect">
+            <a:avLst/>
+          </a:prstGeom>
+          <a:noFill/>
+          <a:ln/>
+        </p:spPr>
+        <p:txBody>
+          <a:bodyPr wrap="square" rtlCol="0" anchor="ctr"/>
+          <a:lstStyle/>
+          <a:p>
+            <a:pPr indent="0" marL="0">
+              <a:buNone/>
+            </a:pPr>
+            <a:r>
+              <a:rPr lang="en-US" sz="1150" dirty="0">
+                <a:solidFill>
+                  <a:srgbClr val="64748B"/>
+                </a:solidFill>
+                <a:latin typeface="Segoe UI" pitchFamily="34" charset="0"/>
+                <a:ea typeface="Segoe UI" pitchFamily="34" charset="-122"/>
+                <a:cs typeface="Segoe UI" pitchFamily="34" charset="-120"/>
+              </a:rPr>
+              <a:t>Reconciliation is a property of the pipeline, not a project.</a:t>
+            </a:r>
+            <a:endParaRPr lang="en-US" sz="1150" dirty="0"/>
+          </a:p>
+        </p:txBody>
+      </p:sp>
+      <p:sp>
+        <p:nvSpPr>
+          <p:cNvPr id="32" name="Text 30"/>
+          <p:cNvSpPr/>
+          <p:nvPr/>
+        </p:nvSpPr>
+        <p:spPr>
+          <a:xfrm>
+            <a:off x="10698480" y="6382512"/>
+            <a:ext cx="1188720" cy="365760"/>
+          </a:xfrm>
+          <a:prstGeom prst="rect">
+            <a:avLst/>
+          </a:prstGeom>
+          <a:noFill/>
+          <a:ln/>
+        </p:spPr>
+        <p:txBody>
+          <a:bodyPr wrap="square" rtlCol="0" anchor="ctr"/>
+          <a:lstStyle/>
+          <a:p>
+            <a:pPr algn="r" indent="0" marL="0">
+              <a:buNone/>
+            </a:pPr>
+            <a:r>
+              <a:rPr lang="en-US" sz="1000" dirty="0">
+                <a:solidFill>
+                  <a:srgbClr val="64748B"/>
+                </a:solidFill>
+                <a:latin typeface="Consolas" pitchFamily="34" charset="0"/>
+                <a:ea typeface="Consolas" pitchFamily="34" charset="-122"/>
+                <a:cs typeface="Consolas" pitchFamily="34" charset="-120"/>
+              </a:rPr>
+              <a:t>5 / 14</a:t>
             </a:r>
             <a:endParaRPr lang="en-US" sz="1000" dirty="0"/>
           </a:p>
@@ -3027,7 +9086,7 @@
                 <a:ea typeface="Consolas" pitchFamily="34" charset="-122"/>
                 <a:cs typeface="Consolas" pitchFamily="34" charset="-120"/>
               </a:rPr>
-              <a:t>PRINCIPLE 4</a:t>
+              <a:t>PRINCIPLE 1</a:t>
             </a:r>
             <a:endParaRPr lang="en-US" sz="1200" dirty="0"/>
           </a:p>
@@ -3041,8 +9100,8 @@
         </p:nvSpPr>
         <p:spPr>
           <a:xfrm>
-            <a:off x="822960" y="960120"/>
-            <a:ext cx="10515600" cy="868680"/>
+            <a:off x="822960" y="914400"/>
+            <a:ext cx="10561320" cy="868680"/>
           </a:xfrm>
           <a:prstGeom prst="rect">
             <a:avLst/>
@@ -3058,7 +9117,7 @@
               <a:buNone/>
             </a:pPr>
             <a:r>
-              <a:rPr lang="en-US" sz="3000" b="1" dirty="0">
+              <a:rPr lang="en-US" sz="2700" b="1" dirty="0">
                 <a:solidFill>
                   <a:srgbClr val="FFFFFF"/>
                 </a:solidFill>
@@ -3066,9 +9125,9 @@
                 <a:ea typeface="Segoe UI" pitchFamily="34" charset="-122"/>
                 <a:cs typeface="Segoe UI" pitchFamily="34" charset="-120"/>
               </a:rPr>
-              <a:t>Discrepancies get owners</a:t>
-            </a:r>
-            <a:endParaRPr lang="en-US" sz="3000" dirty="0"/>
+              <a:t>Profile sources before you trust them</a:t>
+            </a:r>
+            <a:endParaRPr lang="en-US" sz="2700" dirty="0"/>
           </a:p>
         </p:txBody>
       </p:sp>
@@ -3080,7 +9139,7 @@
         </p:nvSpPr>
         <p:spPr>
           <a:xfrm>
-            <a:off x="868680" y="2057400"/>
+            <a:off x="868680" y="2011680"/>
             <a:ext cx="10424160" cy="3566160"/>
           </a:xfrm>
           <a:prstGeom prst="rect">
@@ -3095,10 +9154,10 @@
           <a:p>
             <a:pPr marL="342900" indent="-342900">
               <a:lnSpc>
-                <a:spcPct val="115000"/>
+                <a:spcPct val="112000"/>
               </a:lnSpc>
               <a:spcAft>
-                <a:spcPts val="1000"/>
+                <a:spcPts val="900"/>
               </a:spcAft>
               <a:buSzPct val="100000"/>
               <a:buChar char="▸"/>
@@ -3112,17 +9171,17 @@
                 <a:ea typeface="Segoe UI" pitchFamily="34" charset="-122"/>
                 <a:cs typeface="Segoe UI" pitchFamily="34" charset="-120"/>
               </a:rPr>
-              <a:t>A mismatch between systems is an organizational fact</a:t>
+              <a:t>Every source gets a profile: expected row counts, key uniqueness, update cadence.</a:t>
             </a:r>
             <a:endParaRPr lang="en-US" sz="1600" dirty="0"/>
           </a:p>
           <a:p>
             <a:pPr marL="342900" indent="-342900">
               <a:lnSpc>
-                <a:spcPct val="115000"/>
+                <a:spcPct val="112000"/>
               </a:lnSpc>
               <a:spcAft>
-                <a:spcPts val="1000"/>
+                <a:spcPts val="900"/>
               </a:spcAft>
               <a:buSzPct val="100000"/>
               <a:buChar char="▸"/>
@@ -3136,17 +9195,17 @@
                 <a:ea typeface="Segoe UI" pitchFamily="34" charset="-122"/>
                 <a:cs typeface="Segoe UI" pitchFamily="34" charset="-120"/>
               </a:rPr>
-              <a:t>Named owners on both sides, not just a ticket</a:t>
+              <a:t>Known quirks are documented per source, next to the pipeline that consumes it.</a:t>
             </a:r>
             <a:endParaRPr lang="en-US" sz="1600" dirty="0"/>
           </a:p>
           <a:p>
             <a:pPr marL="342900" indent="-342900">
               <a:lnSpc>
-                <a:spcPct val="115000"/>
+                <a:spcPct val="112000"/>
               </a:lnSpc>
               <a:spcAft>
-                <a:spcPts val="1000"/>
+                <a:spcPts val="900"/>
               </a:spcAft>
               <a:buSzPct val="100000"/>
               <a:buChar char="▸"/>
@@ -3160,21 +9219,131 @@
                 <a:ea typeface="Segoe UI" pitchFamily="34" charset="-122"/>
                 <a:cs typeface="Segoe UI" pitchFamily="34" charset="-120"/>
               </a:rPr>
-              <a:t>Data quality is a relationship between teams</a:t>
+              <a:t>Restated numbers, skipped Sundays, late posts - every source has a personality.</a:t>
             </a:r>
             <a:endParaRPr lang="en-US" sz="1600" dirty="0"/>
           </a:p>
-        </p:txBody>
-      </p:sp>
-      <p:sp>
-        <p:nvSpPr>
-          <p:cNvPr id="7" name="Text 5"/>
-          <p:cNvSpPr/>
-          <p:nvPr/>
-        </p:nvSpPr>
-        <p:spPr>
-          <a:xfrm>
-            <a:off x="10698480" y="6355080"/>
+          <a:p>
+            <a:pPr marL="342900" indent="-342900">
+              <a:lnSpc>
+                <a:spcPct val="112000"/>
+              </a:lnSpc>
+              <a:spcAft>
+                <a:spcPts val="900"/>
+              </a:spcAft>
+              <a:buSzPct val="100000"/>
+              <a:buChar char="▸"/>
+            </a:pPr>
+            <a:r>
+              <a:rPr lang="en-US" sz="1600" dirty="0">
+                <a:solidFill>
+                  <a:srgbClr val="CBD5E1"/>
+                </a:solidFill>
+                <a:latin typeface="Segoe UI" pitchFamily="34" charset="0"/>
+                <a:ea typeface="Segoe UI" pitchFamily="34" charset="-122"/>
+                <a:cs typeface="Segoe UI" pitchFamily="34" charset="-120"/>
+              </a:rPr>
+              <a:t>Profiling turns 'the data is wrong' into 'this feed always restates yesterday'.</a:t>
+            </a:r>
+            <a:endParaRPr lang="en-US" sz="1600" dirty="0"/>
+          </a:p>
+          <a:p>
+            <a:pPr marL="342900" indent="-342900">
+              <a:lnSpc>
+                <a:spcPct val="112000"/>
+              </a:lnSpc>
+              <a:spcAft>
+                <a:spcPts val="900"/>
+              </a:spcAft>
+              <a:buSzPct val="100000"/>
+              <a:buChar char="▸"/>
+            </a:pPr>
+            <a:r>
+              <a:rPr lang="en-US" sz="1600" dirty="0">
+                <a:solidFill>
+                  <a:srgbClr val="CBD5E1"/>
+                </a:solidFill>
+                <a:latin typeface="Segoe UI" pitchFamily="34" charset="0"/>
+                <a:ea typeface="Segoe UI" pitchFamily="34" charset="-122"/>
+                <a:cs typeface="Segoe UI" pitchFamily="34" charset="-120"/>
+              </a:rPr>
+              <a:t>Half of quality issues are simply behavior nobody wrote down.</a:t>
+            </a:r>
+            <a:endParaRPr lang="en-US" sz="1600" dirty="0"/>
+          </a:p>
+        </p:txBody>
+      </p:sp>
+      <p:sp>
+        <p:nvSpPr>
+          <p:cNvPr id="7" name="Shape 5"/>
+          <p:cNvSpPr/>
+          <p:nvPr/>
+        </p:nvSpPr>
+        <p:spPr>
+          <a:xfrm>
+            <a:off x="822960" y="5961888"/>
+            <a:ext cx="10515600" cy="0"/>
+          </a:xfrm>
+          <a:prstGeom prst="line">
+            <a:avLst/>
+          </a:prstGeom>
+          <a:noFill/>
+          <a:ln w="12700">
+            <a:solidFill>
+              <a:srgbClr val="1E2D45"/>
+            </a:solidFill>
+            <a:prstDash val="solid"/>
+          </a:ln>
+        </p:spPr>
+      </p:sp>
+      <p:sp>
+        <p:nvSpPr>
+          <p:cNvPr id="8" name="Text 6"/>
+          <p:cNvSpPr/>
+          <p:nvPr/>
+        </p:nvSpPr>
+        <p:spPr>
+          <a:xfrm>
+            <a:off x="822960" y="6053328"/>
+            <a:ext cx="9692640" cy="457200"/>
+          </a:xfrm>
+          <a:prstGeom prst="rect">
+            <a:avLst/>
+          </a:prstGeom>
+          <a:noFill/>
+          <a:ln/>
+        </p:spPr>
+        <p:txBody>
+          <a:bodyPr wrap="square" rtlCol="0" anchor="ctr"/>
+          <a:lstStyle/>
+          <a:p>
+            <a:pPr indent="0" marL="0">
+              <a:buNone/>
+            </a:pPr>
+            <a:r>
+              <a:rPr lang="en-US" sz="1150" dirty="0">
+                <a:solidFill>
+                  <a:srgbClr val="64748B"/>
+                </a:solidFill>
+                <a:latin typeface="Segoe UI" pitchFamily="34" charset="0"/>
+                <a:ea typeface="Segoe UI" pitchFamily="34" charset="-122"/>
+                <a:cs typeface="Segoe UI" pitchFamily="34" charset="-120"/>
+              </a:rPr>
+              <a:t>You cannot validate against expectations you never defined.</a:t>
+            </a:r>
+            <a:endParaRPr lang="en-US" sz="1150" dirty="0"/>
+          </a:p>
+        </p:txBody>
+      </p:sp>
+      <p:sp>
+        <p:nvSpPr>
+          <p:cNvPr id="9" name="Text 7"/>
+          <p:cNvSpPr/>
+          <p:nvPr/>
+        </p:nvSpPr>
+        <p:spPr>
+          <a:xfrm>
+            <a:off x="10698480" y="6382512"/>
             <a:ext cx="1188720" cy="365760"/>
           </a:xfrm>
           <a:prstGeom prst="rect">
@@ -3199,7 +9368,7 @@
                 <a:ea typeface="Consolas" pitchFamily="34" charset="-122"/>
                 <a:cs typeface="Consolas" pitchFamily="34" charset="-120"/>
               </a:rPr>
-              <a:t>6 / 8</a:t>
+              <a:t>6 / 14</a:t>
             </a:r>
             <a:endParaRPr lang="en-US" sz="1000" dirty="0"/>
           </a:p>
@@ -3310,7 +9479,7 @@
                 <a:ea typeface="Consolas" pitchFamily="34" charset="-122"/>
                 <a:cs typeface="Consolas" pitchFamily="34" charset="-120"/>
               </a:rPr>
-              <a:t>PRINCIPLE 5</a:t>
+              <a:t>DIAGNOSIS</a:t>
             </a:r>
             <a:endParaRPr lang="en-US" sz="1200" dirty="0"/>
           </a:p>
@@ -3324,8 +9493,8 @@
         </p:nvSpPr>
         <p:spPr>
           <a:xfrm>
-            <a:off x="822960" y="960120"/>
-            <a:ext cx="10515600" cy="868680"/>
+            <a:off x="822960" y="914400"/>
+            <a:ext cx="10561320" cy="868680"/>
           </a:xfrm>
           <a:prstGeom prst="rect">
             <a:avLst/>
@@ -3341,7 +9510,7 @@
               <a:buNone/>
             </a:pPr>
             <a:r>
-              <a:rPr lang="en-US" sz="3000" b="1" dirty="0">
+              <a:rPr lang="en-US" sz="2700" b="1" dirty="0">
                 <a:solidFill>
                   <a:srgbClr val="FFFFFF"/>
                 </a:solidFill>
@@ -3349,115 +9518,161 @@
                 <a:ea typeface="Segoe UI" pitchFamily="34" charset="-122"/>
                 <a:cs typeface="Segoe UI" pitchFamily="34" charset="-120"/>
               </a:rPr>
-              <a:t>Document where the work happens</a:t>
-            </a:r>
-            <a:endParaRPr lang="en-US" sz="3000" dirty="0"/>
-          </a:p>
-        </p:txBody>
-      </p:sp>
-      <p:sp>
-        <p:nvSpPr>
-          <p:cNvPr id="6" name="Text 4"/>
-          <p:cNvSpPr/>
-          <p:nvPr/>
-        </p:nvSpPr>
-        <p:spPr>
-          <a:xfrm>
-            <a:off x="868680" y="2057400"/>
-            <a:ext cx="10424160" cy="3566160"/>
-          </a:xfrm>
-          <a:prstGeom prst="rect">
-            <a:avLst/>
-          </a:prstGeom>
-          <a:noFill/>
-          <a:ln/>
-        </p:spPr>
-        <p:txBody>
-          <a:bodyPr wrap="square" rtlCol="0" anchor="t"/>
-          <a:lstStyle/>
-          <a:p>
-            <a:pPr marL="342900" indent="-342900">
-              <a:lnSpc>
-                <a:spcPct val="115000"/>
-              </a:lnSpc>
-              <a:spcAft>
-                <a:spcPts val="1000"/>
-              </a:spcAft>
-              <a:buSzPct val="100000"/>
-              <a:buChar char="▸"/>
-            </a:pPr>
-            <a:r>
-              <a:rPr lang="en-US" sz="1600" dirty="0">
-                <a:solidFill>
-                  <a:srgbClr val="CBD5E1"/>
+              <a:t>Where data quality issues actually originate</a:t>
+            </a:r>
+            <a:endParaRPr lang="en-US" sz="2700" dirty="0"/>
+          </a:p>
+        </p:txBody>
+      </p:sp>
+      <p:graphicFrame>
+        <p:nvGraphicFramePr>
+          <p:cNvPr id="6" name="Chart 0" descr=""/>
+          <p:cNvGraphicFramePr/>
+          <p:nvPr/>
+        </p:nvGraphicFramePr>
+        <p:xfrm>
+          <a:off x="822960" y="1874520"/>
+          <a:ext cx="10515600" cy="3337560"/>
+        </p:xfrm>
+        <a:graphic xmlns:a="http://schemas.openxmlformats.org/drawingml/2006/main">
+          <a:graphicData uri="http://schemas.openxmlformats.org/drawingml/2006/chart">
+            <c:chart xmlns:c="http://schemas.openxmlformats.org/drawingml/2006/chart" r:id="rId1"/>
+          </a:graphicData>
+        </a:graphic>
+      </p:graphicFrame>
+      <p:sp>
+        <p:nvSpPr>
+          <p:cNvPr id="7" name="Shape 4"/>
+          <p:cNvSpPr/>
+          <p:nvPr/>
+        </p:nvSpPr>
+        <p:spPr>
+          <a:xfrm>
+            <a:off x="822960" y="5413248"/>
+            <a:ext cx="10515600" cy="0"/>
+          </a:xfrm>
+          <a:prstGeom prst="line">
+            <a:avLst/>
+          </a:prstGeom>
+          <a:noFill/>
+          <a:ln w="12700">
+            <a:solidFill>
+              <a:srgbClr val="1E2D45"/>
+            </a:solidFill>
+            <a:prstDash val="solid"/>
+          </a:ln>
+        </p:spPr>
+      </p:sp>
+      <p:sp>
+        <p:nvSpPr>
+          <p:cNvPr id="8" name="Text 5"/>
+          <p:cNvSpPr/>
+          <p:nvPr/>
+        </p:nvSpPr>
+        <p:spPr>
+          <a:xfrm>
+            <a:off x="822960" y="5504688"/>
+            <a:ext cx="10424160" cy="411480"/>
+          </a:xfrm>
+          <a:prstGeom prst="rect">
+            <a:avLst/>
+          </a:prstGeom>
+          <a:noFill/>
+          <a:ln/>
+        </p:spPr>
+        <p:txBody>
+          <a:bodyPr wrap="square" rtlCol="0" anchor="ctr"/>
+          <a:lstStyle/>
+          <a:p>
+            <a:pPr indent="0" marL="0">
+              <a:buNone/>
+            </a:pPr>
+            <a:r>
+              <a:rPr lang="en-US" sz="1300" i="1" dirty="0">
+                <a:solidFill>
+                  <a:srgbClr val="06B6D4"/>
                 </a:solidFill>
                 <a:latin typeface="Segoe UI" pitchFamily="34" charset="0"/>
                 <a:ea typeface="Segoe UI" pitchFamily="34" charset="-122"/>
                 <a:cs typeface="Segoe UI" pitchFamily="34" charset="-120"/>
               </a:rPr>
-              <a:t>Runbooks next to the pipelines, not in a forgotten wiki</a:t>
-            </a:r>
-            <a:endParaRPr lang="en-US" sz="1600" dirty="0"/>
-          </a:p>
-          <a:p>
-            <a:pPr marL="342900" indent="-342900">
-              <a:lnSpc>
-                <a:spcPct val="115000"/>
-              </a:lnSpc>
-              <a:spcAft>
-                <a:spcPts val="1000"/>
-              </a:spcAft>
-              <a:buSzPct val="100000"/>
-              <a:buChar char="▸"/>
-            </a:pPr>
-            <a:r>
-              <a:rPr lang="en-US" sz="1600" dirty="0">
-                <a:solidFill>
-                  <a:srgbClr val="CBD5E1"/>
+              <a:t>→  Half of 'quality issues' are undocumented source behavior - profiling prevents more than debugging ever will.</a:t>
+            </a:r>
+            <a:endParaRPr lang="en-US" sz="1300" dirty="0"/>
+          </a:p>
+        </p:txBody>
+      </p:sp>
+      <p:sp>
+        <p:nvSpPr>
+          <p:cNvPr id="9" name="Shape 6"/>
+          <p:cNvSpPr/>
+          <p:nvPr/>
+        </p:nvSpPr>
+        <p:spPr>
+          <a:xfrm>
+            <a:off x="822960" y="5961888"/>
+            <a:ext cx="10515600" cy="0"/>
+          </a:xfrm>
+          <a:prstGeom prst="line">
+            <a:avLst/>
+          </a:prstGeom>
+          <a:noFill/>
+          <a:ln w="12700">
+            <a:solidFill>
+              <a:srgbClr val="1E2D45"/>
+            </a:solidFill>
+            <a:prstDash val="solid"/>
+          </a:ln>
+        </p:spPr>
+      </p:sp>
+      <p:sp>
+        <p:nvSpPr>
+          <p:cNvPr id="10" name="Text 7"/>
+          <p:cNvSpPr/>
+          <p:nvPr/>
+        </p:nvSpPr>
+        <p:spPr>
+          <a:xfrm>
+            <a:off x="822960" y="6053328"/>
+            <a:ext cx="9692640" cy="457200"/>
+          </a:xfrm>
+          <a:prstGeom prst="rect">
+            <a:avLst/>
+          </a:prstGeom>
+          <a:noFill/>
+          <a:ln/>
+        </p:spPr>
+        <p:txBody>
+          <a:bodyPr wrap="square" rtlCol="0" anchor="ctr"/>
+          <a:lstStyle/>
+          <a:p>
+            <a:pPr indent="0" marL="0">
+              <a:buNone/>
+            </a:pPr>
+            <a:r>
+              <a:rPr lang="en-US" sz="1150" dirty="0">
+                <a:solidFill>
+                  <a:srgbClr val="64748B"/>
                 </a:solidFill>
                 <a:latin typeface="Segoe UI" pitchFamily="34" charset="0"/>
                 <a:ea typeface="Segoe UI" pitchFamily="34" charset="-122"/>
                 <a:cs typeface="Segoe UI" pitchFamily="34" charset="-120"/>
               </a:rPr>
-              <a:t>Pipeline maps, ownership, decisions logged</a:t>
-            </a:r>
-            <a:endParaRPr lang="en-US" sz="1600" dirty="0"/>
-          </a:p>
-          <a:p>
-            <a:pPr marL="342900" indent="-342900">
-              <a:lnSpc>
-                <a:spcPct val="115000"/>
-              </a:lnSpc>
-              <a:spcAft>
-                <a:spcPts val="1000"/>
-              </a:spcAft>
-              <a:buSzPct val="100000"/>
-              <a:buChar char="▸"/>
-            </a:pPr>
-            <a:r>
-              <a:rPr lang="en-US" sz="1600" dirty="0">
-                <a:solidFill>
-                  <a:srgbClr val="CBD5E1"/>
-                </a:solidFill>
-                <a:latin typeface="Segoe UI" pitchFamily="34" charset="0"/>
-                <a:ea typeface="Segoe UI" pitchFamily="34" charset="-122"/>
-                <a:cs typeface="Segoe UI" pitchFamily="34" charset="-120"/>
-              </a:rPr>
-              <a:t>The quirk you document today is the incident you prevent next month</a:t>
-            </a:r>
-            <a:endParaRPr lang="en-US" sz="1600" dirty="0"/>
-          </a:p>
-        </p:txBody>
-      </p:sp>
-      <p:sp>
-        <p:nvSpPr>
-          <p:cNvPr id="7" name="Text 5"/>
-          <p:cNvSpPr/>
-          <p:nvPr/>
-        </p:nvSpPr>
-        <p:spPr>
-          <a:xfrm>
-            <a:off x="10698480" y="6355080"/>
+              <a:t>Illustrative distribution consistent with the IKEA regional BI playbook.</a:t>
+            </a:r>
+            <a:endParaRPr lang="en-US" sz="1150" dirty="0"/>
+          </a:p>
+        </p:txBody>
+      </p:sp>
+      <p:sp>
+        <p:nvSpPr>
+          <p:cNvPr id="11" name="Text 8"/>
+          <p:cNvSpPr/>
+          <p:nvPr/>
+        </p:nvSpPr>
+        <p:spPr>
+          <a:xfrm>
+            <a:off x="10698480" y="6382512"/>
             <a:ext cx="1188720" cy="365760"/>
           </a:xfrm>
           <a:prstGeom prst="rect">
@@ -3482,7 +9697,7 @@
                 <a:ea typeface="Consolas" pitchFamily="34" charset="-122"/>
                 <a:cs typeface="Consolas" pitchFamily="34" charset="-120"/>
               </a:rPr>
-              <a:t>7 / 8</a:t>
+              <a:t>7 / 14</a:t>
             </a:r>
             <a:endParaRPr lang="en-US" sz="1000" dirty="0"/>
           </a:p>
@@ -3568,8 +9783,8 @@
         </p:nvSpPr>
         <p:spPr>
           <a:xfrm>
-            <a:off x="822960" y="1554480"/>
-            <a:ext cx="10515600" cy="457200"/>
+            <a:off x="822960" y="502920"/>
+            <a:ext cx="10515600" cy="365760"/>
           </a:xfrm>
           <a:prstGeom prst="rect">
             <a:avLst/>
@@ -3585,7 +9800,7 @@
               <a:buNone/>
             </a:pPr>
             <a:r>
-              <a:rPr lang="en-US" sz="1400" spc="400" kern="0" dirty="0">
+              <a:rPr lang="en-US" sz="1200" spc="300" kern="0" dirty="0">
                 <a:solidFill>
                   <a:srgbClr val="06B6D4"/>
                 </a:solidFill>
@@ -3593,9 +9808,9 @@
                 <a:ea typeface="Consolas" pitchFamily="34" charset="-122"/>
                 <a:cs typeface="Consolas" pitchFamily="34" charset="-120"/>
               </a:rPr>
-              <a:t>TAKEAWAY</a:t>
-            </a:r>
-            <a:endParaRPr lang="en-US" sz="1400" dirty="0"/>
+              <a:t>PRINCIPLE 2</a:t>
+            </a:r>
+            <a:endParaRPr lang="en-US" sz="1200" dirty="0"/>
           </a:p>
         </p:txBody>
       </p:sp>
@@ -3607,8 +9822,8 @@
         </p:nvSpPr>
         <p:spPr>
           <a:xfrm>
-            <a:off x="822960" y="2286000"/>
-            <a:ext cx="10515600" cy="1737360"/>
+            <a:off x="822960" y="914400"/>
+            <a:ext cx="10561320" cy="868680"/>
           </a:xfrm>
           <a:prstGeom prst="rect">
             <a:avLst/>
@@ -3624,7 +9839,7 @@
               <a:buNone/>
             </a:pPr>
             <a:r>
-              <a:rPr lang="en-US" sz="4400" b="1" dirty="0">
+              <a:rPr lang="en-US" sz="2700" b="1" dirty="0">
                 <a:solidFill>
                   <a:srgbClr val="FFFFFF"/>
                 </a:solidFill>
@@ -3632,22 +9847,1447 @@
                 <a:ea typeface="Segoe UI" pitchFamily="34" charset="-122"/>
                 <a:cs typeface="Segoe UI" pitchFamily="34" charset="-120"/>
               </a:rPr>
-              <a:t>Trust is built one reconciliation at a time</a:t>
-            </a:r>
-            <a:endParaRPr lang="en-US" sz="4400" dirty="0"/>
-          </a:p>
-        </p:txBody>
-      </p:sp>
-      <p:sp>
-        <p:nvSpPr>
-          <p:cNvPr id="6" name="Text 4"/>
-          <p:cNvSpPr/>
-          <p:nvPr/>
-        </p:nvSpPr>
-        <p:spPr>
-          <a:xfrm>
-            <a:off x="822960" y="4206240"/>
-            <a:ext cx="10515600" cy="914400"/>
+              <a:t>Reconciliation checks at every seam</a:t>
+            </a:r>
+            <a:endParaRPr lang="en-US" sz="2700" dirty="0"/>
+          </a:p>
+        </p:txBody>
+      </p:sp>
+      <p:graphicFrame>
+        <p:nvGraphicFramePr>
+          <p:cNvPr id="9" name="Table 0"/>
+          <p:cNvGraphicFramePr>
+            <a:graphicFrameLocks noGrp="1"/>
+          </p:cNvGraphicFramePr>
+          <p:nvPr>
+            <p:extLst>
+              <p:ext uri="{D42A27DB-BD31-4B8C-83A1-F6EECF244321}">
+                <p14:modId xmlns:p14="http://schemas.microsoft.com/office/powerpoint/2010/main" val="1579011935"/>
+              </p:ext>
+            </p:extLst>
+          </p:nvPr>
+        </p:nvGraphicFramePr>
+        <p:xfrm>
+          <a:off x="822960" y="2011680"/>
+          <a:ext cx="10515600" cy="914400"/>
+        </p:xfrm>
+        <a:graphic>
+          <a:graphicData uri="http://schemas.openxmlformats.org/drawingml/2006/table">
+            <a:tbl>
+              <a:tblPr/>
+              <a:tblGrid>
+                <a:gridCol w="2628900"/>
+                <a:gridCol w="2628900"/>
+                <a:gridCol w="2628900"/>
+                <a:gridCol w="2628900"/>
+              </a:tblGrid>
+              <a:tr h="402336">
+                <a:tc>
+                  <a:txBody>
+                    <a:bodyPr/>
+                    <a:lstStyle/>
+                    <a:p>
+                      <a:pPr indent="0" marL="0">
+                        <a:buNone/>
+                      </a:pPr>
+                      <a:r>
+                        <a:rPr lang="en-US" sz="1150" b="1" dirty="0">
+                          <a:solidFill>
+                            <a:srgbClr val="FFFFFF"/>
+                          </a:solidFill>
+                          <a:latin typeface="Segoe UI" pitchFamily="34" charset="0"/>
+                          <a:ea typeface="Segoe UI" pitchFamily="34" charset="-122"/>
+                          <a:cs typeface="Segoe UI" pitchFamily="34" charset="-120"/>
+                        </a:rPr>
+                        <a:t>Boundary</a:t>
+                      </a:r>
+                      <a:endParaRPr lang="en-US" sz="1150" dirty="0">
+                        <a:latin typeface="Segoe UI" charset="0"/>
+                        <a:ea typeface="Segoe UI" charset="0"/>
+                        <a:cs typeface="Segoe UI" charset="0"/>
+                      </a:endParaRPr>
+                    </a:p>
+                  </a:txBody>
+                  <a:tcPr marL="64008" marR="64008" marT="64008" marB="64008" anchor="ctr">
+                    <a:lnL w="6350" cap="flat" cmpd="sng" algn="ctr">
+                      <a:solidFill>
+                        <a:srgbClr val="24365A"/>
+                      </a:solidFill>
+                      <a:prstDash val="solid"/>
+                      <a:round/>
+                      <a:headEnd type="none" w="med" len="med"/>
+                      <a:tailEnd type="none" w="med" len="med"/>
+                    </a:lnL>
+                    <a:lnR w="6350" cap="flat" cmpd="sng" algn="ctr">
+                      <a:solidFill>
+                        <a:srgbClr val="24365A"/>
+                      </a:solidFill>
+                      <a:prstDash val="solid"/>
+                      <a:round/>
+                      <a:headEnd type="none" w="med" len="med"/>
+                      <a:tailEnd type="none" w="med" len="med"/>
+                    </a:lnR>
+                    <a:lnT w="6350" cap="flat" cmpd="sng" algn="ctr">
+                      <a:solidFill>
+                        <a:srgbClr val="24365A"/>
+                      </a:solidFill>
+                      <a:prstDash val="solid"/>
+                      <a:round/>
+                      <a:headEnd type="none" w="med" len="med"/>
+                      <a:tailEnd type="none" w="med" len="med"/>
+                    </a:lnT>
+                    <a:lnB w="6350" cap="flat" cmpd="sng" algn="ctr">
+                      <a:solidFill>
+                        <a:srgbClr val="24365A"/>
+                      </a:solidFill>
+                      <a:prstDash val="solid"/>
+                      <a:round/>
+                      <a:headEnd type="none" w="med" len="med"/>
+                      <a:tailEnd type="none" w="med" len="med"/>
+                    </a:lnB>
+                    <a:solidFill>
+                      <a:srgbClr val="16233B"/>
+                    </a:solidFill>
+                  </a:tcPr>
+                </a:tc>
+                <a:tc>
+                  <a:txBody>
+                    <a:bodyPr/>
+                    <a:lstStyle/>
+                    <a:p>
+                      <a:pPr indent="0" marL="0">
+                        <a:buNone/>
+                      </a:pPr>
+                      <a:r>
+                        <a:rPr lang="en-US" sz="1150" b="1" dirty="0">
+                          <a:solidFill>
+                            <a:srgbClr val="FFFFFF"/>
+                          </a:solidFill>
+                          <a:latin typeface="Segoe UI" pitchFamily="34" charset="0"/>
+                          <a:ea typeface="Segoe UI" pitchFamily="34" charset="-122"/>
+                          <a:cs typeface="Segoe UI" pitchFamily="34" charset="-120"/>
+                        </a:rPr>
+                        <a:t>Check</a:t>
+                      </a:r>
+                      <a:endParaRPr lang="en-US" sz="1150" dirty="0">
+                        <a:latin typeface="Segoe UI" charset="0"/>
+                        <a:ea typeface="Segoe UI" charset="0"/>
+                        <a:cs typeface="Segoe UI" charset="0"/>
+                      </a:endParaRPr>
+                    </a:p>
+                  </a:txBody>
+                  <a:tcPr marL="64008" marR="64008" marT="64008" marB="64008" anchor="ctr">
+                    <a:lnL w="6350" cap="flat" cmpd="sng" algn="ctr">
+                      <a:solidFill>
+                        <a:srgbClr val="24365A"/>
+                      </a:solidFill>
+                      <a:prstDash val="solid"/>
+                      <a:round/>
+                      <a:headEnd type="none" w="med" len="med"/>
+                      <a:tailEnd type="none" w="med" len="med"/>
+                    </a:lnL>
+                    <a:lnR w="6350" cap="flat" cmpd="sng" algn="ctr">
+                      <a:solidFill>
+                        <a:srgbClr val="24365A"/>
+                      </a:solidFill>
+                      <a:prstDash val="solid"/>
+                      <a:round/>
+                      <a:headEnd type="none" w="med" len="med"/>
+                      <a:tailEnd type="none" w="med" len="med"/>
+                    </a:lnR>
+                    <a:lnT w="6350" cap="flat" cmpd="sng" algn="ctr">
+                      <a:solidFill>
+                        <a:srgbClr val="24365A"/>
+                      </a:solidFill>
+                      <a:prstDash val="solid"/>
+                      <a:round/>
+                      <a:headEnd type="none" w="med" len="med"/>
+                      <a:tailEnd type="none" w="med" len="med"/>
+                    </a:lnT>
+                    <a:lnB w="6350" cap="flat" cmpd="sng" algn="ctr">
+                      <a:solidFill>
+                        <a:srgbClr val="24365A"/>
+                      </a:solidFill>
+                      <a:prstDash val="solid"/>
+                      <a:round/>
+                      <a:headEnd type="none" w="med" len="med"/>
+                      <a:tailEnd type="none" w="med" len="med"/>
+                    </a:lnB>
+                    <a:solidFill>
+                      <a:srgbClr val="16233B"/>
+                    </a:solidFill>
+                  </a:tcPr>
+                </a:tc>
+                <a:tc>
+                  <a:txBody>
+                    <a:bodyPr/>
+                    <a:lstStyle/>
+                    <a:p>
+                      <a:pPr indent="0" marL="0">
+                        <a:buNone/>
+                      </a:pPr>
+                      <a:r>
+                        <a:rPr lang="en-US" sz="1150" b="1" dirty="0">
+                          <a:solidFill>
+                            <a:srgbClr val="FFFFFF"/>
+                          </a:solidFill>
+                          <a:latin typeface="Segoe UI" pitchFamily="34" charset="0"/>
+                          <a:ea typeface="Segoe UI" pitchFamily="34" charset="-122"/>
+                          <a:cs typeface="Segoe UI" pitchFamily="34" charset="-120"/>
+                        </a:rPr>
+                        <a:t>Cadence</a:t>
+                      </a:r>
+                      <a:endParaRPr lang="en-US" sz="1150" dirty="0">
+                        <a:latin typeface="Segoe UI" charset="0"/>
+                        <a:ea typeface="Segoe UI" charset="0"/>
+                        <a:cs typeface="Segoe UI" charset="0"/>
+                      </a:endParaRPr>
+                    </a:p>
+                  </a:txBody>
+                  <a:tcPr marL="64008" marR="64008" marT="64008" marB="64008" anchor="ctr">
+                    <a:lnL w="6350" cap="flat" cmpd="sng" algn="ctr">
+                      <a:solidFill>
+                        <a:srgbClr val="24365A"/>
+                      </a:solidFill>
+                      <a:prstDash val="solid"/>
+                      <a:round/>
+                      <a:headEnd type="none" w="med" len="med"/>
+                      <a:tailEnd type="none" w="med" len="med"/>
+                    </a:lnL>
+                    <a:lnR w="6350" cap="flat" cmpd="sng" algn="ctr">
+                      <a:solidFill>
+                        <a:srgbClr val="24365A"/>
+                      </a:solidFill>
+                      <a:prstDash val="solid"/>
+                      <a:round/>
+                      <a:headEnd type="none" w="med" len="med"/>
+                      <a:tailEnd type="none" w="med" len="med"/>
+                    </a:lnR>
+                    <a:lnT w="6350" cap="flat" cmpd="sng" algn="ctr">
+                      <a:solidFill>
+                        <a:srgbClr val="24365A"/>
+                      </a:solidFill>
+                      <a:prstDash val="solid"/>
+                      <a:round/>
+                      <a:headEnd type="none" w="med" len="med"/>
+                      <a:tailEnd type="none" w="med" len="med"/>
+                    </a:lnT>
+                    <a:lnB w="6350" cap="flat" cmpd="sng" algn="ctr">
+                      <a:solidFill>
+                        <a:srgbClr val="24365A"/>
+                      </a:solidFill>
+                      <a:prstDash val="solid"/>
+                      <a:round/>
+                      <a:headEnd type="none" w="med" len="med"/>
+                      <a:tailEnd type="none" w="med" len="med"/>
+                    </a:lnB>
+                    <a:solidFill>
+                      <a:srgbClr val="16233B"/>
+                    </a:solidFill>
+                  </a:tcPr>
+                </a:tc>
+                <a:tc>
+                  <a:txBody>
+                    <a:bodyPr/>
+                    <a:lstStyle/>
+                    <a:p>
+                      <a:pPr indent="0" marL="0">
+                        <a:buNone/>
+                      </a:pPr>
+                      <a:r>
+                        <a:rPr lang="en-US" sz="1150" b="1" dirty="0">
+                          <a:solidFill>
+                            <a:srgbClr val="FFFFFF"/>
+                          </a:solidFill>
+                          <a:latin typeface="Segoe UI" pitchFamily="34" charset="0"/>
+                          <a:ea typeface="Segoe UI" pitchFamily="34" charset="-122"/>
+                          <a:cs typeface="Segoe UI" pitchFamily="34" charset="-120"/>
+                        </a:rPr>
+                        <a:t>When it fails</a:t>
+                      </a:r>
+                      <a:endParaRPr lang="en-US" sz="1150" dirty="0">
+                        <a:latin typeface="Segoe UI" charset="0"/>
+                        <a:ea typeface="Segoe UI" charset="0"/>
+                        <a:cs typeface="Segoe UI" charset="0"/>
+                      </a:endParaRPr>
+                    </a:p>
+                  </a:txBody>
+                  <a:tcPr marL="64008" marR="64008" marT="64008" marB="64008" anchor="ctr">
+                    <a:lnL w="6350" cap="flat" cmpd="sng" algn="ctr">
+                      <a:solidFill>
+                        <a:srgbClr val="24365A"/>
+                      </a:solidFill>
+                      <a:prstDash val="solid"/>
+                      <a:round/>
+                      <a:headEnd type="none" w="med" len="med"/>
+                      <a:tailEnd type="none" w="med" len="med"/>
+                    </a:lnL>
+                    <a:lnR w="6350" cap="flat" cmpd="sng" algn="ctr">
+                      <a:solidFill>
+                        <a:srgbClr val="24365A"/>
+                      </a:solidFill>
+                      <a:prstDash val="solid"/>
+                      <a:round/>
+                      <a:headEnd type="none" w="med" len="med"/>
+                      <a:tailEnd type="none" w="med" len="med"/>
+                    </a:lnR>
+                    <a:lnT w="6350" cap="flat" cmpd="sng" algn="ctr">
+                      <a:solidFill>
+                        <a:srgbClr val="24365A"/>
+                      </a:solidFill>
+                      <a:prstDash val="solid"/>
+                      <a:round/>
+                      <a:headEnd type="none" w="med" len="med"/>
+                      <a:tailEnd type="none" w="med" len="med"/>
+                    </a:lnT>
+                    <a:lnB w="6350" cap="flat" cmpd="sng" algn="ctr">
+                      <a:solidFill>
+                        <a:srgbClr val="24365A"/>
+                      </a:solidFill>
+                      <a:prstDash val="solid"/>
+                      <a:round/>
+                      <a:headEnd type="none" w="med" len="med"/>
+                      <a:tailEnd type="none" w="med" len="med"/>
+                    </a:lnB>
+                    <a:solidFill>
+                      <a:srgbClr val="16233B"/>
+                    </a:solidFill>
+                  </a:tcPr>
+                </a:tc>
+              </a:tr>
+              <a:tr h="402336">
+                <a:tc>
+                  <a:txBody>
+                    <a:bodyPr/>
+                    <a:lstStyle/>
+                    <a:p>
+                      <a:pPr indent="0" marL="0">
+                        <a:buNone/>
+                      </a:pPr>
+                      <a:r>
+                        <a:rPr lang="en-US" sz="1080" dirty="0">
+                          <a:solidFill>
+                            <a:srgbClr val="CBD5E1"/>
+                          </a:solidFill>
+                          <a:latin typeface="Segoe UI" pitchFamily="34" charset="0"/>
+                          <a:ea typeface="Segoe UI" pitchFamily="34" charset="-122"/>
+                          <a:cs typeface="Segoe UI" pitchFamily="34" charset="-120"/>
+                        </a:rPr>
+                        <a:t>Source to landing</a:t>
+                      </a:r>
+                      <a:endParaRPr lang="en-US" sz="1080" dirty="0">
+                        <a:latin typeface="Segoe UI" charset="0"/>
+                        <a:ea typeface="Segoe UI" charset="0"/>
+                        <a:cs typeface="Segoe UI" charset="0"/>
+                      </a:endParaRPr>
+                    </a:p>
+                  </a:txBody>
+                  <a:tcPr marL="64008" marR="64008" marT="64008" marB="64008" anchor="ctr">
+                    <a:lnL w="6350" cap="flat" cmpd="sng" algn="ctr">
+                      <a:solidFill>
+                        <a:srgbClr val="24365A"/>
+                      </a:solidFill>
+                      <a:prstDash val="solid"/>
+                      <a:round/>
+                      <a:headEnd type="none" w="med" len="med"/>
+                      <a:tailEnd type="none" w="med" len="med"/>
+                    </a:lnL>
+                    <a:lnR w="6350" cap="flat" cmpd="sng" algn="ctr">
+                      <a:solidFill>
+                        <a:srgbClr val="24365A"/>
+                      </a:solidFill>
+                      <a:prstDash val="solid"/>
+                      <a:round/>
+                      <a:headEnd type="none" w="med" len="med"/>
+                      <a:tailEnd type="none" w="med" len="med"/>
+                    </a:lnR>
+                    <a:lnT w="6350" cap="flat" cmpd="sng" algn="ctr">
+                      <a:solidFill>
+                        <a:srgbClr val="24365A"/>
+                      </a:solidFill>
+                      <a:prstDash val="solid"/>
+                      <a:round/>
+                      <a:headEnd type="none" w="med" len="med"/>
+                      <a:tailEnd type="none" w="med" len="med"/>
+                    </a:lnT>
+                    <a:lnB w="6350" cap="flat" cmpd="sng" algn="ctr">
+                      <a:solidFill>
+                        <a:srgbClr val="24365A"/>
+                      </a:solidFill>
+                      <a:prstDash val="solid"/>
+                      <a:round/>
+                      <a:headEnd type="none" w="med" len="med"/>
+                      <a:tailEnd type="none" w="med" len="med"/>
+                    </a:lnB>
+                    <a:solidFill>
+                      <a:srgbClr val="101A2D"/>
+                    </a:solidFill>
+                  </a:tcPr>
+                </a:tc>
+                <a:tc>
+                  <a:txBody>
+                    <a:bodyPr/>
+                    <a:lstStyle/>
+                    <a:p>
+                      <a:pPr indent="0" marL="0">
+                        <a:buNone/>
+                      </a:pPr>
+                      <a:r>
+                        <a:rPr lang="en-US" sz="1080" dirty="0">
+                          <a:solidFill>
+                            <a:srgbClr val="CBD5E1"/>
+                          </a:solidFill>
+                          <a:latin typeface="Segoe UI" pitchFamily="34" charset="0"/>
+                          <a:ea typeface="Segoe UI" pitchFamily="34" charset="-122"/>
+                          <a:cs typeface="Segoe UI" pitchFamily="34" charset="-120"/>
+                        </a:rPr>
+                        <a:t>Row count and key uniqueness</a:t>
+                      </a:r>
+                      <a:endParaRPr lang="en-US" sz="1080" dirty="0">
+                        <a:latin typeface="Segoe UI" charset="0"/>
+                        <a:ea typeface="Segoe UI" charset="0"/>
+                        <a:cs typeface="Segoe UI" charset="0"/>
+                      </a:endParaRPr>
+                    </a:p>
+                  </a:txBody>
+                  <a:tcPr marL="64008" marR="64008" marT="64008" marB="64008" anchor="ctr">
+                    <a:lnL w="6350" cap="flat" cmpd="sng" algn="ctr">
+                      <a:solidFill>
+                        <a:srgbClr val="24365A"/>
+                      </a:solidFill>
+                      <a:prstDash val="solid"/>
+                      <a:round/>
+                      <a:headEnd type="none" w="med" len="med"/>
+                      <a:tailEnd type="none" w="med" len="med"/>
+                    </a:lnL>
+                    <a:lnR w="6350" cap="flat" cmpd="sng" algn="ctr">
+                      <a:solidFill>
+                        <a:srgbClr val="24365A"/>
+                      </a:solidFill>
+                      <a:prstDash val="solid"/>
+                      <a:round/>
+                      <a:headEnd type="none" w="med" len="med"/>
+                      <a:tailEnd type="none" w="med" len="med"/>
+                    </a:lnR>
+                    <a:lnT w="6350" cap="flat" cmpd="sng" algn="ctr">
+                      <a:solidFill>
+                        <a:srgbClr val="24365A"/>
+                      </a:solidFill>
+                      <a:prstDash val="solid"/>
+                      <a:round/>
+                      <a:headEnd type="none" w="med" len="med"/>
+                      <a:tailEnd type="none" w="med" len="med"/>
+                    </a:lnT>
+                    <a:lnB w="6350" cap="flat" cmpd="sng" algn="ctr">
+                      <a:solidFill>
+                        <a:srgbClr val="24365A"/>
+                      </a:solidFill>
+                      <a:prstDash val="solid"/>
+                      <a:round/>
+                      <a:headEnd type="none" w="med" len="med"/>
+                      <a:tailEnd type="none" w="med" len="med"/>
+                    </a:lnB>
+                    <a:solidFill>
+                      <a:srgbClr val="101A2D"/>
+                    </a:solidFill>
+                  </a:tcPr>
+                </a:tc>
+                <a:tc>
+                  <a:txBody>
+                    <a:bodyPr/>
+                    <a:lstStyle/>
+                    <a:p>
+                      <a:pPr indent="0" marL="0">
+                        <a:buNone/>
+                      </a:pPr>
+                      <a:r>
+                        <a:rPr lang="en-US" sz="1080" dirty="0">
+                          <a:solidFill>
+                            <a:srgbClr val="CBD5E1"/>
+                          </a:solidFill>
+                          <a:latin typeface="Segoe UI" pitchFamily="34" charset="0"/>
+                          <a:ea typeface="Segoe UI" pitchFamily="34" charset="-122"/>
+                          <a:cs typeface="Segoe UI" pitchFamily="34" charset="-120"/>
+                        </a:rPr>
+                        <a:t>Every load</a:t>
+                      </a:r>
+                      <a:endParaRPr lang="en-US" sz="1080" dirty="0">
+                        <a:latin typeface="Segoe UI" charset="0"/>
+                        <a:ea typeface="Segoe UI" charset="0"/>
+                        <a:cs typeface="Segoe UI" charset="0"/>
+                      </a:endParaRPr>
+                    </a:p>
+                  </a:txBody>
+                  <a:tcPr marL="64008" marR="64008" marT="64008" marB="64008" anchor="ctr">
+                    <a:lnL w="6350" cap="flat" cmpd="sng" algn="ctr">
+                      <a:solidFill>
+                        <a:srgbClr val="24365A"/>
+                      </a:solidFill>
+                      <a:prstDash val="solid"/>
+                      <a:round/>
+                      <a:headEnd type="none" w="med" len="med"/>
+                      <a:tailEnd type="none" w="med" len="med"/>
+                    </a:lnL>
+                    <a:lnR w="6350" cap="flat" cmpd="sng" algn="ctr">
+                      <a:solidFill>
+                        <a:srgbClr val="24365A"/>
+                      </a:solidFill>
+                      <a:prstDash val="solid"/>
+                      <a:round/>
+                      <a:headEnd type="none" w="med" len="med"/>
+                      <a:tailEnd type="none" w="med" len="med"/>
+                    </a:lnR>
+                    <a:lnT w="6350" cap="flat" cmpd="sng" algn="ctr">
+                      <a:solidFill>
+                        <a:srgbClr val="24365A"/>
+                      </a:solidFill>
+                      <a:prstDash val="solid"/>
+                      <a:round/>
+                      <a:headEnd type="none" w="med" len="med"/>
+                      <a:tailEnd type="none" w="med" len="med"/>
+                    </a:lnT>
+                    <a:lnB w="6350" cap="flat" cmpd="sng" algn="ctr">
+                      <a:solidFill>
+                        <a:srgbClr val="24365A"/>
+                      </a:solidFill>
+                      <a:prstDash val="solid"/>
+                      <a:round/>
+                      <a:headEnd type="none" w="med" len="med"/>
+                      <a:tailEnd type="none" w="med" len="med"/>
+                    </a:lnB>
+                    <a:solidFill>
+                      <a:srgbClr val="101A2D"/>
+                    </a:solidFill>
+                  </a:tcPr>
+                </a:tc>
+                <a:tc>
+                  <a:txBody>
+                    <a:bodyPr/>
+                    <a:lstStyle/>
+                    <a:p>
+                      <a:pPr indent="0" marL="0">
+                        <a:buNone/>
+                      </a:pPr>
+                      <a:r>
+                        <a:rPr lang="en-US" sz="1080" dirty="0">
+                          <a:solidFill>
+                            <a:srgbClr val="CBD5E1"/>
+                          </a:solidFill>
+                          <a:latin typeface="Segoe UI" pitchFamily="34" charset="0"/>
+                          <a:ea typeface="Segoe UI" pitchFamily="34" charset="-122"/>
+                          <a:cs typeface="Segoe UI" pitchFamily="34" charset="-120"/>
+                        </a:rPr>
+                        <a:t>Load halts, alert fires</a:t>
+                      </a:r>
+                      <a:endParaRPr lang="en-US" sz="1080" dirty="0">
+                        <a:latin typeface="Segoe UI" charset="0"/>
+                        <a:ea typeface="Segoe UI" charset="0"/>
+                        <a:cs typeface="Segoe UI" charset="0"/>
+                      </a:endParaRPr>
+                    </a:p>
+                  </a:txBody>
+                  <a:tcPr marL="64008" marR="64008" marT="64008" marB="64008" anchor="ctr">
+                    <a:lnL w="6350" cap="flat" cmpd="sng" algn="ctr">
+                      <a:solidFill>
+                        <a:srgbClr val="24365A"/>
+                      </a:solidFill>
+                      <a:prstDash val="solid"/>
+                      <a:round/>
+                      <a:headEnd type="none" w="med" len="med"/>
+                      <a:tailEnd type="none" w="med" len="med"/>
+                    </a:lnL>
+                    <a:lnR w="6350" cap="flat" cmpd="sng" algn="ctr">
+                      <a:solidFill>
+                        <a:srgbClr val="24365A"/>
+                      </a:solidFill>
+                      <a:prstDash val="solid"/>
+                      <a:round/>
+                      <a:headEnd type="none" w="med" len="med"/>
+                      <a:tailEnd type="none" w="med" len="med"/>
+                    </a:lnR>
+                    <a:lnT w="6350" cap="flat" cmpd="sng" algn="ctr">
+                      <a:solidFill>
+                        <a:srgbClr val="24365A"/>
+                      </a:solidFill>
+                      <a:prstDash val="solid"/>
+                      <a:round/>
+                      <a:headEnd type="none" w="med" len="med"/>
+                      <a:tailEnd type="none" w="med" len="med"/>
+                    </a:lnT>
+                    <a:lnB w="6350" cap="flat" cmpd="sng" algn="ctr">
+                      <a:solidFill>
+                        <a:srgbClr val="24365A"/>
+                      </a:solidFill>
+                      <a:prstDash val="solid"/>
+                      <a:round/>
+                      <a:headEnd type="none" w="med" len="med"/>
+                      <a:tailEnd type="none" w="med" len="med"/>
+                    </a:lnB>
+                    <a:solidFill>
+                      <a:srgbClr val="101A2D"/>
+                    </a:solidFill>
+                  </a:tcPr>
+                </a:tc>
+              </a:tr>
+              <a:tr h="402336">
+                <a:tc>
+                  <a:txBody>
+                    <a:bodyPr/>
+                    <a:lstStyle/>
+                    <a:p>
+                      <a:pPr indent="0" marL="0">
+                        <a:buNone/>
+                      </a:pPr>
+                      <a:r>
+                        <a:rPr lang="en-US" sz="1080" dirty="0">
+                          <a:solidFill>
+                            <a:srgbClr val="CBD5E1"/>
+                          </a:solidFill>
+                          <a:latin typeface="Segoe UI" pitchFamily="34" charset="0"/>
+                          <a:ea typeface="Segoe UI" pitchFamily="34" charset="-122"/>
+                          <a:cs typeface="Segoe UI" pitchFamily="34" charset="-120"/>
+                        </a:rPr>
+                        <a:t>Landing to datalake</a:t>
+                      </a:r>
+                      <a:endParaRPr lang="en-US" sz="1080" dirty="0">
+                        <a:latin typeface="Segoe UI" charset="0"/>
+                        <a:ea typeface="Segoe UI" charset="0"/>
+                        <a:cs typeface="Segoe UI" charset="0"/>
+                      </a:endParaRPr>
+                    </a:p>
+                  </a:txBody>
+                  <a:tcPr marL="64008" marR="64008" marT="64008" marB="64008" anchor="ctr">
+                    <a:lnL w="6350" cap="flat" cmpd="sng" algn="ctr">
+                      <a:solidFill>
+                        <a:srgbClr val="24365A"/>
+                      </a:solidFill>
+                      <a:prstDash val="solid"/>
+                      <a:round/>
+                      <a:headEnd type="none" w="med" len="med"/>
+                      <a:tailEnd type="none" w="med" len="med"/>
+                    </a:lnL>
+                    <a:lnR w="6350" cap="flat" cmpd="sng" algn="ctr">
+                      <a:solidFill>
+                        <a:srgbClr val="24365A"/>
+                      </a:solidFill>
+                      <a:prstDash val="solid"/>
+                      <a:round/>
+                      <a:headEnd type="none" w="med" len="med"/>
+                      <a:tailEnd type="none" w="med" len="med"/>
+                    </a:lnR>
+                    <a:lnT w="6350" cap="flat" cmpd="sng" algn="ctr">
+                      <a:solidFill>
+                        <a:srgbClr val="24365A"/>
+                      </a:solidFill>
+                      <a:prstDash val="solid"/>
+                      <a:round/>
+                      <a:headEnd type="none" w="med" len="med"/>
+                      <a:tailEnd type="none" w="med" len="med"/>
+                    </a:lnT>
+                    <a:lnB w="6350" cap="flat" cmpd="sng" algn="ctr">
+                      <a:solidFill>
+                        <a:srgbClr val="24365A"/>
+                      </a:solidFill>
+                      <a:prstDash val="solid"/>
+                      <a:round/>
+                      <a:headEnd type="none" w="med" len="med"/>
+                      <a:tailEnd type="none" w="med" len="med"/>
+                    </a:lnB>
+                    <a:solidFill>
+                      <a:srgbClr val="0D1420"/>
+                    </a:solidFill>
+                  </a:tcPr>
+                </a:tc>
+                <a:tc>
+                  <a:txBody>
+                    <a:bodyPr/>
+                    <a:lstStyle/>
+                    <a:p>
+                      <a:pPr indent="0" marL="0">
+                        <a:buNone/>
+                      </a:pPr>
+                      <a:r>
+                        <a:rPr lang="en-US" sz="1080" dirty="0">
+                          <a:solidFill>
+                            <a:srgbClr val="CBD5E1"/>
+                          </a:solidFill>
+                          <a:latin typeface="Segoe UI" pitchFamily="34" charset="0"/>
+                          <a:ea typeface="Segoe UI" pitchFamily="34" charset="-122"/>
+                          <a:cs typeface="Segoe UI" pitchFamily="34" charset="-120"/>
+                        </a:rPr>
+                        <a:t>Sum checks on money and volume</a:t>
+                      </a:r>
+                      <a:endParaRPr lang="en-US" sz="1080" dirty="0">
+                        <a:latin typeface="Segoe UI" charset="0"/>
+                        <a:ea typeface="Segoe UI" charset="0"/>
+                        <a:cs typeface="Segoe UI" charset="0"/>
+                      </a:endParaRPr>
+                    </a:p>
+                  </a:txBody>
+                  <a:tcPr marL="64008" marR="64008" marT="64008" marB="64008" anchor="ctr">
+                    <a:lnL w="6350" cap="flat" cmpd="sng" algn="ctr">
+                      <a:solidFill>
+                        <a:srgbClr val="24365A"/>
+                      </a:solidFill>
+                      <a:prstDash val="solid"/>
+                      <a:round/>
+                      <a:headEnd type="none" w="med" len="med"/>
+                      <a:tailEnd type="none" w="med" len="med"/>
+                    </a:lnL>
+                    <a:lnR w="6350" cap="flat" cmpd="sng" algn="ctr">
+                      <a:solidFill>
+                        <a:srgbClr val="24365A"/>
+                      </a:solidFill>
+                      <a:prstDash val="solid"/>
+                      <a:round/>
+                      <a:headEnd type="none" w="med" len="med"/>
+                      <a:tailEnd type="none" w="med" len="med"/>
+                    </a:lnR>
+                    <a:lnT w="6350" cap="flat" cmpd="sng" algn="ctr">
+                      <a:solidFill>
+                        <a:srgbClr val="24365A"/>
+                      </a:solidFill>
+                      <a:prstDash val="solid"/>
+                      <a:round/>
+                      <a:headEnd type="none" w="med" len="med"/>
+                      <a:tailEnd type="none" w="med" len="med"/>
+                    </a:lnT>
+                    <a:lnB w="6350" cap="flat" cmpd="sng" algn="ctr">
+                      <a:solidFill>
+                        <a:srgbClr val="24365A"/>
+                      </a:solidFill>
+                      <a:prstDash val="solid"/>
+                      <a:round/>
+                      <a:headEnd type="none" w="med" len="med"/>
+                      <a:tailEnd type="none" w="med" len="med"/>
+                    </a:lnB>
+                    <a:solidFill>
+                      <a:srgbClr val="0D1420"/>
+                    </a:solidFill>
+                  </a:tcPr>
+                </a:tc>
+                <a:tc>
+                  <a:txBody>
+                    <a:bodyPr/>
+                    <a:lstStyle/>
+                    <a:p>
+                      <a:pPr indent="0" marL="0">
+                        <a:buNone/>
+                      </a:pPr>
+                      <a:r>
+                        <a:rPr lang="en-US" sz="1080" dirty="0">
+                          <a:solidFill>
+                            <a:srgbClr val="CBD5E1"/>
+                          </a:solidFill>
+                          <a:latin typeface="Segoe UI" pitchFamily="34" charset="0"/>
+                          <a:ea typeface="Segoe UI" pitchFamily="34" charset="-122"/>
+                          <a:cs typeface="Segoe UI" pitchFamily="34" charset="-120"/>
+                        </a:rPr>
+                        <a:t>Every load</a:t>
+                      </a:r>
+                      <a:endParaRPr lang="en-US" sz="1080" dirty="0">
+                        <a:latin typeface="Segoe UI" charset="0"/>
+                        <a:ea typeface="Segoe UI" charset="0"/>
+                        <a:cs typeface="Segoe UI" charset="0"/>
+                      </a:endParaRPr>
+                    </a:p>
+                  </a:txBody>
+                  <a:tcPr marL="64008" marR="64008" marT="64008" marB="64008" anchor="ctr">
+                    <a:lnL w="6350" cap="flat" cmpd="sng" algn="ctr">
+                      <a:solidFill>
+                        <a:srgbClr val="24365A"/>
+                      </a:solidFill>
+                      <a:prstDash val="solid"/>
+                      <a:round/>
+                      <a:headEnd type="none" w="med" len="med"/>
+                      <a:tailEnd type="none" w="med" len="med"/>
+                    </a:lnL>
+                    <a:lnR w="6350" cap="flat" cmpd="sng" algn="ctr">
+                      <a:solidFill>
+                        <a:srgbClr val="24365A"/>
+                      </a:solidFill>
+                      <a:prstDash val="solid"/>
+                      <a:round/>
+                      <a:headEnd type="none" w="med" len="med"/>
+                      <a:tailEnd type="none" w="med" len="med"/>
+                    </a:lnR>
+                    <a:lnT w="6350" cap="flat" cmpd="sng" algn="ctr">
+                      <a:solidFill>
+                        <a:srgbClr val="24365A"/>
+                      </a:solidFill>
+                      <a:prstDash val="solid"/>
+                      <a:round/>
+                      <a:headEnd type="none" w="med" len="med"/>
+                      <a:tailEnd type="none" w="med" len="med"/>
+                    </a:lnT>
+                    <a:lnB w="6350" cap="flat" cmpd="sng" algn="ctr">
+                      <a:solidFill>
+                        <a:srgbClr val="24365A"/>
+                      </a:solidFill>
+                      <a:prstDash val="solid"/>
+                      <a:round/>
+                      <a:headEnd type="none" w="med" len="med"/>
+                      <a:tailEnd type="none" w="med" len="med"/>
+                    </a:lnB>
+                    <a:solidFill>
+                      <a:srgbClr val="0D1420"/>
+                    </a:solidFill>
+                  </a:tcPr>
+                </a:tc>
+                <a:tc>
+                  <a:txBody>
+                    <a:bodyPr/>
+                    <a:lstStyle/>
+                    <a:p>
+                      <a:pPr indent="0" marL="0">
+                        <a:buNone/>
+                      </a:pPr>
+                      <a:r>
+                        <a:rPr lang="en-US" sz="1080" dirty="0">
+                          <a:solidFill>
+                            <a:srgbClr val="CBD5E1"/>
+                          </a:solidFill>
+                          <a:latin typeface="Segoe UI" pitchFamily="34" charset="0"/>
+                          <a:ea typeface="Segoe UI" pitchFamily="34" charset="-122"/>
+                          <a:cs typeface="Segoe UI" pitchFamily="34" charset="-120"/>
+                        </a:rPr>
+                        <a:t>Discrepancy ticket with owner</a:t>
+                      </a:r>
+                      <a:endParaRPr lang="en-US" sz="1080" dirty="0">
+                        <a:latin typeface="Segoe UI" charset="0"/>
+                        <a:ea typeface="Segoe UI" charset="0"/>
+                        <a:cs typeface="Segoe UI" charset="0"/>
+                      </a:endParaRPr>
+                    </a:p>
+                  </a:txBody>
+                  <a:tcPr marL="64008" marR="64008" marT="64008" marB="64008" anchor="ctr">
+                    <a:lnL w="6350" cap="flat" cmpd="sng" algn="ctr">
+                      <a:solidFill>
+                        <a:srgbClr val="24365A"/>
+                      </a:solidFill>
+                      <a:prstDash val="solid"/>
+                      <a:round/>
+                      <a:headEnd type="none" w="med" len="med"/>
+                      <a:tailEnd type="none" w="med" len="med"/>
+                    </a:lnL>
+                    <a:lnR w="6350" cap="flat" cmpd="sng" algn="ctr">
+                      <a:solidFill>
+                        <a:srgbClr val="24365A"/>
+                      </a:solidFill>
+                      <a:prstDash val="solid"/>
+                      <a:round/>
+                      <a:headEnd type="none" w="med" len="med"/>
+                      <a:tailEnd type="none" w="med" len="med"/>
+                    </a:lnR>
+                    <a:lnT w="6350" cap="flat" cmpd="sng" algn="ctr">
+                      <a:solidFill>
+                        <a:srgbClr val="24365A"/>
+                      </a:solidFill>
+                      <a:prstDash val="solid"/>
+                      <a:round/>
+                      <a:headEnd type="none" w="med" len="med"/>
+                      <a:tailEnd type="none" w="med" len="med"/>
+                    </a:lnT>
+                    <a:lnB w="6350" cap="flat" cmpd="sng" algn="ctr">
+                      <a:solidFill>
+                        <a:srgbClr val="24365A"/>
+                      </a:solidFill>
+                      <a:prstDash val="solid"/>
+                      <a:round/>
+                      <a:headEnd type="none" w="med" len="med"/>
+                      <a:tailEnd type="none" w="med" len="med"/>
+                    </a:lnB>
+                    <a:solidFill>
+                      <a:srgbClr val="0D1420"/>
+                    </a:solidFill>
+                  </a:tcPr>
+                </a:tc>
+              </a:tr>
+              <a:tr h="402336">
+                <a:tc>
+                  <a:txBody>
+                    <a:bodyPr/>
+                    <a:lstStyle/>
+                    <a:p>
+                      <a:pPr indent="0" marL="0">
+                        <a:buNone/>
+                      </a:pPr>
+                      <a:r>
+                        <a:rPr lang="en-US" sz="1080" dirty="0">
+                          <a:solidFill>
+                            <a:srgbClr val="CBD5E1"/>
+                          </a:solidFill>
+                          <a:latin typeface="Segoe UI" pitchFamily="34" charset="0"/>
+                          <a:ea typeface="Segoe UI" pitchFamily="34" charset="-122"/>
+                          <a:cs typeface="Segoe UI" pitchFamily="34" charset="-120"/>
+                        </a:rPr>
+                        <a:t>Datalake to marts</a:t>
+                      </a:r>
+                      <a:endParaRPr lang="en-US" sz="1080" dirty="0">
+                        <a:latin typeface="Segoe UI" charset="0"/>
+                        <a:ea typeface="Segoe UI" charset="0"/>
+                        <a:cs typeface="Segoe UI" charset="0"/>
+                      </a:endParaRPr>
+                    </a:p>
+                  </a:txBody>
+                  <a:tcPr marL="64008" marR="64008" marT="64008" marB="64008" anchor="ctr">
+                    <a:lnL w="6350" cap="flat" cmpd="sng" algn="ctr">
+                      <a:solidFill>
+                        <a:srgbClr val="24365A"/>
+                      </a:solidFill>
+                      <a:prstDash val="solid"/>
+                      <a:round/>
+                      <a:headEnd type="none" w="med" len="med"/>
+                      <a:tailEnd type="none" w="med" len="med"/>
+                    </a:lnL>
+                    <a:lnR w="6350" cap="flat" cmpd="sng" algn="ctr">
+                      <a:solidFill>
+                        <a:srgbClr val="24365A"/>
+                      </a:solidFill>
+                      <a:prstDash val="solid"/>
+                      <a:round/>
+                      <a:headEnd type="none" w="med" len="med"/>
+                      <a:tailEnd type="none" w="med" len="med"/>
+                    </a:lnR>
+                    <a:lnT w="6350" cap="flat" cmpd="sng" algn="ctr">
+                      <a:solidFill>
+                        <a:srgbClr val="24365A"/>
+                      </a:solidFill>
+                      <a:prstDash val="solid"/>
+                      <a:round/>
+                      <a:headEnd type="none" w="med" len="med"/>
+                      <a:tailEnd type="none" w="med" len="med"/>
+                    </a:lnT>
+                    <a:lnB w="6350" cap="flat" cmpd="sng" algn="ctr">
+                      <a:solidFill>
+                        <a:srgbClr val="24365A"/>
+                      </a:solidFill>
+                      <a:prstDash val="solid"/>
+                      <a:round/>
+                      <a:headEnd type="none" w="med" len="med"/>
+                      <a:tailEnd type="none" w="med" len="med"/>
+                    </a:lnB>
+                    <a:solidFill>
+                      <a:srgbClr val="101A2D"/>
+                    </a:solidFill>
+                  </a:tcPr>
+                </a:tc>
+                <a:tc>
+                  <a:txBody>
+                    <a:bodyPr/>
+                    <a:lstStyle/>
+                    <a:p>
+                      <a:pPr indent="0" marL="0">
+                        <a:buNone/>
+                      </a:pPr>
+                      <a:r>
+                        <a:rPr lang="en-US" sz="1080" dirty="0">
+                          <a:solidFill>
+                            <a:srgbClr val="CBD5E1"/>
+                          </a:solidFill>
+                          <a:latin typeface="Segoe UI" pitchFamily="34" charset="0"/>
+                          <a:ea typeface="Segoe UI" pitchFamily="34" charset="-122"/>
+                          <a:cs typeface="Segoe UI" pitchFamily="34" charset="-120"/>
+                        </a:rPr>
+                        <a:t>Sampled row-level comparison</a:t>
+                      </a:r>
+                      <a:endParaRPr lang="en-US" sz="1080" dirty="0">
+                        <a:latin typeface="Segoe UI" charset="0"/>
+                        <a:ea typeface="Segoe UI" charset="0"/>
+                        <a:cs typeface="Segoe UI" charset="0"/>
+                      </a:endParaRPr>
+                    </a:p>
+                  </a:txBody>
+                  <a:tcPr marL="64008" marR="64008" marT="64008" marB="64008" anchor="ctr">
+                    <a:lnL w="6350" cap="flat" cmpd="sng" algn="ctr">
+                      <a:solidFill>
+                        <a:srgbClr val="24365A"/>
+                      </a:solidFill>
+                      <a:prstDash val="solid"/>
+                      <a:round/>
+                      <a:headEnd type="none" w="med" len="med"/>
+                      <a:tailEnd type="none" w="med" len="med"/>
+                    </a:lnL>
+                    <a:lnR w="6350" cap="flat" cmpd="sng" algn="ctr">
+                      <a:solidFill>
+                        <a:srgbClr val="24365A"/>
+                      </a:solidFill>
+                      <a:prstDash val="solid"/>
+                      <a:round/>
+                      <a:headEnd type="none" w="med" len="med"/>
+                      <a:tailEnd type="none" w="med" len="med"/>
+                    </a:lnR>
+                    <a:lnT w="6350" cap="flat" cmpd="sng" algn="ctr">
+                      <a:solidFill>
+                        <a:srgbClr val="24365A"/>
+                      </a:solidFill>
+                      <a:prstDash val="solid"/>
+                      <a:round/>
+                      <a:headEnd type="none" w="med" len="med"/>
+                      <a:tailEnd type="none" w="med" len="med"/>
+                    </a:lnT>
+                    <a:lnB w="6350" cap="flat" cmpd="sng" algn="ctr">
+                      <a:solidFill>
+                        <a:srgbClr val="24365A"/>
+                      </a:solidFill>
+                      <a:prstDash val="solid"/>
+                      <a:round/>
+                      <a:headEnd type="none" w="med" len="med"/>
+                      <a:tailEnd type="none" w="med" len="med"/>
+                    </a:lnB>
+                    <a:solidFill>
+                      <a:srgbClr val="101A2D"/>
+                    </a:solidFill>
+                  </a:tcPr>
+                </a:tc>
+                <a:tc>
+                  <a:txBody>
+                    <a:bodyPr/>
+                    <a:lstStyle/>
+                    <a:p>
+                      <a:pPr indent="0" marL="0">
+                        <a:buNone/>
+                      </a:pPr>
+                      <a:r>
+                        <a:rPr lang="en-US" sz="1080" dirty="0">
+                          <a:solidFill>
+                            <a:srgbClr val="CBD5E1"/>
+                          </a:solidFill>
+                          <a:latin typeface="Segoe UI" pitchFamily="34" charset="0"/>
+                          <a:ea typeface="Segoe UI" pitchFamily="34" charset="-122"/>
+                          <a:cs typeface="Segoe UI" pitchFamily="34" charset="-120"/>
+                        </a:rPr>
+                        <a:t>Every load</a:t>
+                      </a:r>
+                      <a:endParaRPr lang="en-US" sz="1080" dirty="0">
+                        <a:latin typeface="Segoe UI" charset="0"/>
+                        <a:ea typeface="Segoe UI" charset="0"/>
+                        <a:cs typeface="Segoe UI" charset="0"/>
+                      </a:endParaRPr>
+                    </a:p>
+                  </a:txBody>
+                  <a:tcPr marL="64008" marR="64008" marT="64008" marB="64008" anchor="ctr">
+                    <a:lnL w="6350" cap="flat" cmpd="sng" algn="ctr">
+                      <a:solidFill>
+                        <a:srgbClr val="24365A"/>
+                      </a:solidFill>
+                      <a:prstDash val="solid"/>
+                      <a:round/>
+                      <a:headEnd type="none" w="med" len="med"/>
+                      <a:tailEnd type="none" w="med" len="med"/>
+                    </a:lnL>
+                    <a:lnR w="6350" cap="flat" cmpd="sng" algn="ctr">
+                      <a:solidFill>
+                        <a:srgbClr val="24365A"/>
+                      </a:solidFill>
+                      <a:prstDash val="solid"/>
+                      <a:round/>
+                      <a:headEnd type="none" w="med" len="med"/>
+                      <a:tailEnd type="none" w="med" len="med"/>
+                    </a:lnR>
+                    <a:lnT w="6350" cap="flat" cmpd="sng" algn="ctr">
+                      <a:solidFill>
+                        <a:srgbClr val="24365A"/>
+                      </a:solidFill>
+                      <a:prstDash val="solid"/>
+                      <a:round/>
+                      <a:headEnd type="none" w="med" len="med"/>
+                      <a:tailEnd type="none" w="med" len="med"/>
+                    </a:lnT>
+                    <a:lnB w="6350" cap="flat" cmpd="sng" algn="ctr">
+                      <a:solidFill>
+                        <a:srgbClr val="24365A"/>
+                      </a:solidFill>
+                      <a:prstDash val="solid"/>
+                      <a:round/>
+                      <a:headEnd type="none" w="med" len="med"/>
+                      <a:tailEnd type="none" w="med" len="med"/>
+                    </a:lnB>
+                    <a:solidFill>
+                      <a:srgbClr val="101A2D"/>
+                    </a:solidFill>
+                  </a:tcPr>
+                </a:tc>
+                <a:tc>
+                  <a:txBody>
+                    <a:bodyPr/>
+                    <a:lstStyle/>
+                    <a:p>
+                      <a:pPr indent="0" marL="0">
+                        <a:buNone/>
+                      </a:pPr>
+                      <a:r>
+                        <a:rPr lang="en-US" sz="1080" dirty="0">
+                          <a:solidFill>
+                            <a:srgbClr val="CBD5E1"/>
+                          </a:solidFill>
+                          <a:latin typeface="Segoe UI" pitchFamily="34" charset="0"/>
+                          <a:ea typeface="Segoe UI" pitchFamily="34" charset="-122"/>
+                          <a:cs typeface="Segoe UI" pitchFamily="34" charset="-120"/>
+                        </a:rPr>
+                        <a:t>Transform blocked until resolved</a:t>
+                      </a:r>
+                      <a:endParaRPr lang="en-US" sz="1080" dirty="0">
+                        <a:latin typeface="Segoe UI" charset="0"/>
+                        <a:ea typeface="Segoe UI" charset="0"/>
+                        <a:cs typeface="Segoe UI" charset="0"/>
+                      </a:endParaRPr>
+                    </a:p>
+                  </a:txBody>
+                  <a:tcPr marL="64008" marR="64008" marT="64008" marB="64008" anchor="ctr">
+                    <a:lnL w="6350" cap="flat" cmpd="sng" algn="ctr">
+                      <a:solidFill>
+                        <a:srgbClr val="24365A"/>
+                      </a:solidFill>
+                      <a:prstDash val="solid"/>
+                      <a:round/>
+                      <a:headEnd type="none" w="med" len="med"/>
+                      <a:tailEnd type="none" w="med" len="med"/>
+                    </a:lnL>
+                    <a:lnR w="6350" cap="flat" cmpd="sng" algn="ctr">
+                      <a:solidFill>
+                        <a:srgbClr val="24365A"/>
+                      </a:solidFill>
+                      <a:prstDash val="solid"/>
+                      <a:round/>
+                      <a:headEnd type="none" w="med" len="med"/>
+                      <a:tailEnd type="none" w="med" len="med"/>
+                    </a:lnR>
+                    <a:lnT w="6350" cap="flat" cmpd="sng" algn="ctr">
+                      <a:solidFill>
+                        <a:srgbClr val="24365A"/>
+                      </a:solidFill>
+                      <a:prstDash val="solid"/>
+                      <a:round/>
+                      <a:headEnd type="none" w="med" len="med"/>
+                      <a:tailEnd type="none" w="med" len="med"/>
+                    </a:lnT>
+                    <a:lnB w="6350" cap="flat" cmpd="sng" algn="ctr">
+                      <a:solidFill>
+                        <a:srgbClr val="24365A"/>
+                      </a:solidFill>
+                      <a:prstDash val="solid"/>
+                      <a:round/>
+                      <a:headEnd type="none" w="med" len="med"/>
+                      <a:tailEnd type="none" w="med" len="med"/>
+                    </a:lnB>
+                    <a:solidFill>
+                      <a:srgbClr val="101A2D"/>
+                    </a:solidFill>
+                  </a:tcPr>
+                </a:tc>
+              </a:tr>
+              <a:tr h="402336">
+                <a:tc>
+                  <a:txBody>
+                    <a:bodyPr/>
+                    <a:lstStyle/>
+                    <a:p>
+                      <a:pPr indent="0" marL="0">
+                        <a:buNone/>
+                      </a:pPr>
+                      <a:r>
+                        <a:rPr lang="en-US" sz="1080" dirty="0">
+                          <a:solidFill>
+                            <a:srgbClr val="CBD5E1"/>
+                          </a:solidFill>
+                          <a:latin typeface="Segoe UI" pitchFamily="34" charset="0"/>
+                          <a:ea typeface="Segoe UI" pitchFamily="34" charset="-122"/>
+                          <a:cs typeface="Segoe UI" pitchFamily="34" charset="-120"/>
+                        </a:rPr>
+                        <a:t>Marts to dashboards</a:t>
+                      </a:r>
+                      <a:endParaRPr lang="en-US" sz="1080" dirty="0">
+                        <a:latin typeface="Segoe UI" charset="0"/>
+                        <a:ea typeface="Segoe UI" charset="0"/>
+                        <a:cs typeface="Segoe UI" charset="0"/>
+                      </a:endParaRPr>
+                    </a:p>
+                  </a:txBody>
+                  <a:tcPr marL="64008" marR="64008" marT="64008" marB="64008" anchor="ctr">
+                    <a:lnL w="6350" cap="flat" cmpd="sng" algn="ctr">
+                      <a:solidFill>
+                        <a:srgbClr val="24365A"/>
+                      </a:solidFill>
+                      <a:prstDash val="solid"/>
+                      <a:round/>
+                      <a:headEnd type="none" w="med" len="med"/>
+                      <a:tailEnd type="none" w="med" len="med"/>
+                    </a:lnL>
+                    <a:lnR w="6350" cap="flat" cmpd="sng" algn="ctr">
+                      <a:solidFill>
+                        <a:srgbClr val="24365A"/>
+                      </a:solidFill>
+                      <a:prstDash val="solid"/>
+                      <a:round/>
+                      <a:headEnd type="none" w="med" len="med"/>
+                      <a:tailEnd type="none" w="med" len="med"/>
+                    </a:lnR>
+                    <a:lnT w="6350" cap="flat" cmpd="sng" algn="ctr">
+                      <a:solidFill>
+                        <a:srgbClr val="24365A"/>
+                      </a:solidFill>
+                      <a:prstDash val="solid"/>
+                      <a:round/>
+                      <a:headEnd type="none" w="med" len="med"/>
+                      <a:tailEnd type="none" w="med" len="med"/>
+                    </a:lnT>
+                    <a:lnB w="6350" cap="flat" cmpd="sng" algn="ctr">
+                      <a:solidFill>
+                        <a:srgbClr val="24365A"/>
+                      </a:solidFill>
+                      <a:prstDash val="solid"/>
+                      <a:round/>
+                      <a:headEnd type="none" w="med" len="med"/>
+                      <a:tailEnd type="none" w="med" len="med"/>
+                    </a:lnB>
+                    <a:solidFill>
+                      <a:srgbClr val="0D1420"/>
+                    </a:solidFill>
+                  </a:tcPr>
+                </a:tc>
+                <a:tc>
+                  <a:txBody>
+                    <a:bodyPr/>
+                    <a:lstStyle/>
+                    <a:p>
+                      <a:pPr indent="0" marL="0">
+                        <a:buNone/>
+                      </a:pPr>
+                      <a:r>
+                        <a:rPr lang="en-US" sz="1080" dirty="0">
+                          <a:solidFill>
+                            <a:srgbClr val="CBD5E1"/>
+                          </a:solidFill>
+                          <a:latin typeface="Segoe UI" pitchFamily="34" charset="0"/>
+                          <a:ea typeface="Segoe UI" pitchFamily="34" charset="-122"/>
+                          <a:cs typeface="Segoe UI" pitchFamily="34" charset="-120"/>
+                        </a:rPr>
+                        <a:t>Certified model subscription</a:t>
+                      </a:r>
+                      <a:endParaRPr lang="en-US" sz="1080" dirty="0">
+                        <a:latin typeface="Segoe UI" charset="0"/>
+                        <a:ea typeface="Segoe UI" charset="0"/>
+                        <a:cs typeface="Segoe UI" charset="0"/>
+                      </a:endParaRPr>
+                    </a:p>
+                  </a:txBody>
+                  <a:tcPr marL="64008" marR="64008" marT="64008" marB="64008" anchor="ctr">
+                    <a:lnL w="6350" cap="flat" cmpd="sng" algn="ctr">
+                      <a:solidFill>
+                        <a:srgbClr val="24365A"/>
+                      </a:solidFill>
+                      <a:prstDash val="solid"/>
+                      <a:round/>
+                      <a:headEnd type="none" w="med" len="med"/>
+                      <a:tailEnd type="none" w="med" len="med"/>
+                    </a:lnL>
+                    <a:lnR w="6350" cap="flat" cmpd="sng" algn="ctr">
+                      <a:solidFill>
+                        <a:srgbClr val="24365A"/>
+                      </a:solidFill>
+                      <a:prstDash val="solid"/>
+                      <a:round/>
+                      <a:headEnd type="none" w="med" len="med"/>
+                      <a:tailEnd type="none" w="med" len="med"/>
+                    </a:lnR>
+                    <a:lnT w="6350" cap="flat" cmpd="sng" algn="ctr">
+                      <a:solidFill>
+                        <a:srgbClr val="24365A"/>
+                      </a:solidFill>
+                      <a:prstDash val="solid"/>
+                      <a:round/>
+                      <a:headEnd type="none" w="med" len="med"/>
+                      <a:tailEnd type="none" w="med" len="med"/>
+                    </a:lnT>
+                    <a:lnB w="6350" cap="flat" cmpd="sng" algn="ctr">
+                      <a:solidFill>
+                        <a:srgbClr val="24365A"/>
+                      </a:solidFill>
+                      <a:prstDash val="solid"/>
+                      <a:round/>
+                      <a:headEnd type="none" w="med" len="med"/>
+                      <a:tailEnd type="none" w="med" len="med"/>
+                    </a:lnB>
+                    <a:solidFill>
+                      <a:srgbClr val="0D1420"/>
+                    </a:solidFill>
+                  </a:tcPr>
+                </a:tc>
+                <a:tc>
+                  <a:txBody>
+                    <a:bodyPr/>
+                    <a:lstStyle/>
+                    <a:p>
+                      <a:pPr indent="0" marL="0">
+                        <a:buNone/>
+                      </a:pPr>
+                      <a:r>
+                        <a:rPr lang="en-US" sz="1080" dirty="0">
+                          <a:solidFill>
+                            <a:srgbClr val="CBD5E1"/>
+                          </a:solidFill>
+                          <a:latin typeface="Segoe UI" pitchFamily="34" charset="0"/>
+                          <a:ea typeface="Segoe UI" pitchFamily="34" charset="-122"/>
+                          <a:cs typeface="Segoe UI" pitchFamily="34" charset="-120"/>
+                        </a:rPr>
+                        <a:t>Every publish</a:t>
+                      </a:r>
+                      <a:endParaRPr lang="en-US" sz="1080" dirty="0">
+                        <a:latin typeface="Segoe UI" charset="0"/>
+                        <a:ea typeface="Segoe UI" charset="0"/>
+                        <a:cs typeface="Segoe UI" charset="0"/>
+                      </a:endParaRPr>
+                    </a:p>
+                  </a:txBody>
+                  <a:tcPr marL="64008" marR="64008" marT="64008" marB="64008" anchor="ctr">
+                    <a:lnL w="6350" cap="flat" cmpd="sng" algn="ctr">
+                      <a:solidFill>
+                        <a:srgbClr val="24365A"/>
+                      </a:solidFill>
+                      <a:prstDash val="solid"/>
+                      <a:round/>
+                      <a:headEnd type="none" w="med" len="med"/>
+                      <a:tailEnd type="none" w="med" len="med"/>
+                    </a:lnL>
+                    <a:lnR w="6350" cap="flat" cmpd="sng" algn="ctr">
+                      <a:solidFill>
+                        <a:srgbClr val="24365A"/>
+                      </a:solidFill>
+                      <a:prstDash val="solid"/>
+                      <a:round/>
+                      <a:headEnd type="none" w="med" len="med"/>
+                      <a:tailEnd type="none" w="med" len="med"/>
+                    </a:lnR>
+                    <a:lnT w="6350" cap="flat" cmpd="sng" algn="ctr">
+                      <a:solidFill>
+                        <a:srgbClr val="24365A"/>
+                      </a:solidFill>
+                      <a:prstDash val="solid"/>
+                      <a:round/>
+                      <a:headEnd type="none" w="med" len="med"/>
+                      <a:tailEnd type="none" w="med" len="med"/>
+                    </a:lnT>
+                    <a:lnB w="6350" cap="flat" cmpd="sng" algn="ctr">
+                      <a:solidFill>
+                        <a:srgbClr val="24365A"/>
+                      </a:solidFill>
+                      <a:prstDash val="solid"/>
+                      <a:round/>
+                      <a:headEnd type="none" w="med" len="med"/>
+                      <a:tailEnd type="none" w="med" len="med"/>
+                    </a:lnB>
+                    <a:solidFill>
+                      <a:srgbClr val="0D1420"/>
+                    </a:solidFill>
+                  </a:tcPr>
+                </a:tc>
+                <a:tc>
+                  <a:txBody>
+                    <a:bodyPr/>
+                    <a:lstStyle/>
+                    <a:p>
+                      <a:pPr indent="0" marL="0">
+                        <a:buNone/>
+                      </a:pPr>
+                      <a:r>
+                        <a:rPr lang="en-US" sz="1080" dirty="0">
+                          <a:solidFill>
+                            <a:srgbClr val="CBD5E1"/>
+                          </a:solidFill>
+                          <a:latin typeface="Segoe UI" pitchFamily="34" charset="0"/>
+                          <a:ea typeface="Segoe UI" pitchFamily="34" charset="-122"/>
+                          <a:cs typeface="Segoe UI" pitchFamily="34" charset="-120"/>
+                        </a:rPr>
+                        <a:t>Dashboard refuses stale data</a:t>
+                      </a:r>
+                      <a:endParaRPr lang="en-US" sz="1080" dirty="0">
+                        <a:latin typeface="Segoe UI" charset="0"/>
+                        <a:ea typeface="Segoe UI" charset="0"/>
+                        <a:cs typeface="Segoe UI" charset="0"/>
+                      </a:endParaRPr>
+                    </a:p>
+                  </a:txBody>
+                  <a:tcPr marL="64008" marR="64008" marT="64008" marB="64008" anchor="ctr">
+                    <a:lnL w="6350" cap="flat" cmpd="sng" algn="ctr">
+                      <a:solidFill>
+                        <a:srgbClr val="24365A"/>
+                      </a:solidFill>
+                      <a:prstDash val="solid"/>
+                      <a:round/>
+                      <a:headEnd type="none" w="med" len="med"/>
+                      <a:tailEnd type="none" w="med" len="med"/>
+                    </a:lnL>
+                    <a:lnR w="6350" cap="flat" cmpd="sng" algn="ctr">
+                      <a:solidFill>
+                        <a:srgbClr val="24365A"/>
+                      </a:solidFill>
+                      <a:prstDash val="solid"/>
+                      <a:round/>
+                      <a:headEnd type="none" w="med" len="med"/>
+                      <a:tailEnd type="none" w="med" len="med"/>
+                    </a:lnR>
+                    <a:lnT w="6350" cap="flat" cmpd="sng" algn="ctr">
+                      <a:solidFill>
+                        <a:srgbClr val="24365A"/>
+                      </a:solidFill>
+                      <a:prstDash val="solid"/>
+                      <a:round/>
+                      <a:headEnd type="none" w="med" len="med"/>
+                      <a:tailEnd type="none" w="med" len="med"/>
+                    </a:lnT>
+                    <a:lnB w="6350" cap="flat" cmpd="sng" algn="ctr">
+                      <a:solidFill>
+                        <a:srgbClr val="24365A"/>
+                      </a:solidFill>
+                      <a:prstDash val="solid"/>
+                      <a:round/>
+                      <a:headEnd type="none" w="med" len="med"/>
+                      <a:tailEnd type="none" w="med" len="med"/>
+                    </a:lnB>
+                    <a:solidFill>
+                      <a:srgbClr val="0D1420"/>
+                    </a:solidFill>
+                  </a:tcPr>
+                </a:tc>
+              </a:tr>
+            </a:tbl>
+          </a:graphicData>
+        </a:graphic>
+      </p:graphicFrame>
+      <p:sp>
+        <p:nvSpPr>
+          <p:cNvPr id="7" name="Shape 4"/>
+          <p:cNvSpPr/>
+          <p:nvPr/>
+        </p:nvSpPr>
+        <p:spPr>
+          <a:xfrm>
+            <a:off x="822960" y="5961888"/>
+            <a:ext cx="10515600" cy="0"/>
+          </a:xfrm>
+          <a:prstGeom prst="line">
+            <a:avLst/>
+          </a:prstGeom>
+          <a:noFill/>
+          <a:ln w="12700">
+            <a:solidFill>
+              <a:srgbClr val="1E2D45"/>
+            </a:solidFill>
+            <a:prstDash val="solid"/>
+          </a:ln>
+        </p:spPr>
+      </p:sp>
+      <p:sp>
+        <p:nvSpPr>
+          <p:cNvPr id="8" name="Text 5"/>
+          <p:cNvSpPr/>
+          <p:nvPr/>
+        </p:nvSpPr>
+        <p:spPr>
+          <a:xfrm>
+            <a:off x="822960" y="6053328"/>
+            <a:ext cx="9692640" cy="457200"/>
           </a:xfrm>
           <a:prstGeom prst="rect">
             <a:avLst/>
@@ -3663,29 +11303,29 @@
               <a:buNone/>
             </a:pPr>
             <a:r>
-              <a:rPr lang="en-US" sz="1600" dirty="0">
-                <a:solidFill>
-                  <a:srgbClr val="94A3B8"/>
+              <a:rPr lang="en-US" sz="1150" dirty="0">
+                <a:solidFill>
+                  <a:srgbClr val="64748B"/>
                 </a:solidFill>
                 <a:latin typeface="Segoe UI" pitchFamily="34" charset="0"/>
                 <a:ea typeface="Segoe UI" pitchFamily="34" charset="-122"/>
                 <a:cs typeface="Segoe UI" pitchFamily="34" charset="-120"/>
               </a:rPr>
-              <a:t>And destroyed by one unexplained number. · rezalianvatiady.github.io</a:t>
-            </a:r>
-            <a:endParaRPr lang="en-US" sz="1600" dirty="0"/>
-          </a:p>
-        </p:txBody>
-      </p:sp>
-      <p:sp>
-        <p:nvSpPr>
-          <p:cNvPr id="7" name="Text 5"/>
-          <p:cNvSpPr/>
-          <p:nvPr/>
-        </p:nvSpPr>
-        <p:spPr>
-          <a:xfrm>
-            <a:off x="10698480" y="6355080"/>
+              <a:t>Not quarterly, not on request - reconciliation runs on every load.</a:t>
+            </a:r>
+            <a:endParaRPr lang="en-US" sz="1150" dirty="0"/>
+          </a:p>
+        </p:txBody>
+      </p:sp>
+      <p:sp>
+        <p:nvSpPr>
+          <p:cNvPr id="9" name="Text 6"/>
+          <p:cNvSpPr/>
+          <p:nvPr/>
+        </p:nvSpPr>
+        <p:spPr>
+          <a:xfrm>
+            <a:off x="10698480" y="6382512"/>
             <a:ext cx="1188720" cy="365760"/>
           </a:xfrm>
           <a:prstGeom prst="rect">
@@ -3710,7 +11350,336 @@
                 <a:ea typeface="Consolas" pitchFamily="34" charset="-122"/>
                 <a:cs typeface="Consolas" pitchFamily="34" charset="-120"/>
               </a:rPr>
-              <a:t>8 / 8</a:t>
+              <a:t>8 / 14</a:t>
+            </a:r>
+            <a:endParaRPr lang="en-US" sz="1000" dirty="0"/>
+          </a:p>
+        </p:txBody>
+      </p:sp>
+    </p:spTree>
+  </p:cSld>
+  <p:clrMapOvr>
+    <a:masterClrMapping/>
+  </p:clrMapOvr>
+</p:sld>
+</file>
+
+<file path=ppt/slides/slide9.xml><?xml version="1.0" encoding="utf-8"?>
+<p:sld xmlns:a="http://schemas.openxmlformats.org/drawingml/2006/main" xmlns:r="http://schemas.openxmlformats.org/officeDocument/2006/relationships" xmlns:p="http://schemas.openxmlformats.org/presentationml/2006/main">
+  <p:cSld name="Slide 9">
+    <p:bg>
+      <p:bgPr>
+        <a:solidFill>
+          <a:srgbClr val="0A0C12"/>
+        </a:solidFill>
+      </p:bgPr>
+    </p:bg>
+    <p:spTree>
+      <p:nvGrpSpPr>
+        <p:cNvPr id="1" name=""/>
+        <p:cNvGrpSpPr/>
+        <p:nvPr/>
+      </p:nvGrpSpPr>
+      <p:grpSpPr>
+        <a:xfrm>
+          <a:off x="0" y="0"/>
+          <a:ext cx="0" cy="0"/>
+          <a:chOff x="0" y="0"/>
+          <a:chExt cx="0" cy="0"/>
+        </a:xfrm>
+      </p:grpSpPr>
+      <p:sp>
+        <p:nvSpPr>
+          <p:cNvPr id="2" name="Shape 0"/>
+          <p:cNvSpPr/>
+          <p:nvPr/>
+        </p:nvSpPr>
+        <p:spPr>
+          <a:xfrm>
+            <a:off x="0" y="0"/>
+            <a:ext cx="7680960" cy="64008"/>
+          </a:xfrm>
+          <a:prstGeom prst="rect">
+            <a:avLst/>
+          </a:prstGeom>
+          <a:solidFill>
+            <a:srgbClr val="3B82F6"/>
+          </a:solidFill>
+          <a:ln/>
+        </p:spPr>
+      </p:sp>
+      <p:sp>
+        <p:nvSpPr>
+          <p:cNvPr id="3" name="Shape 1"/>
+          <p:cNvSpPr/>
+          <p:nvPr/>
+        </p:nvSpPr>
+        <p:spPr>
+          <a:xfrm>
+            <a:off x="7680960" y="0"/>
+            <a:ext cx="4510735" cy="64008"/>
+          </a:xfrm>
+          <a:prstGeom prst="rect">
+            <a:avLst/>
+          </a:prstGeom>
+          <a:solidFill>
+            <a:srgbClr val="06B6D4"/>
+          </a:solidFill>
+          <a:ln/>
+        </p:spPr>
+      </p:sp>
+      <p:sp>
+        <p:nvSpPr>
+          <p:cNvPr id="4" name="Text 2"/>
+          <p:cNvSpPr/>
+          <p:nvPr/>
+        </p:nvSpPr>
+        <p:spPr>
+          <a:xfrm>
+            <a:off x="822960" y="502920"/>
+            <a:ext cx="10515600" cy="365760"/>
+          </a:xfrm>
+          <a:prstGeom prst="rect">
+            <a:avLst/>
+          </a:prstGeom>
+          <a:noFill/>
+          <a:ln/>
+        </p:spPr>
+        <p:txBody>
+          <a:bodyPr wrap="square" rtlCol="0" anchor="ctr"/>
+          <a:lstStyle/>
+          <a:p>
+            <a:pPr indent="0" marL="0">
+              <a:buNone/>
+            </a:pPr>
+            <a:r>
+              <a:rPr lang="en-US" sz="1200" spc="300" kern="0" dirty="0">
+                <a:solidFill>
+                  <a:srgbClr val="06B6D4"/>
+                </a:solidFill>
+                <a:latin typeface="Consolas" pitchFamily="34" charset="0"/>
+                <a:ea typeface="Consolas" pitchFamily="34" charset="-122"/>
+                <a:cs typeface="Consolas" pitchFamily="34" charset="-120"/>
+              </a:rPr>
+              <a:t>PRINCIPLE 3</a:t>
+            </a:r>
+            <a:endParaRPr lang="en-US" sz="1200" dirty="0"/>
+          </a:p>
+        </p:txBody>
+      </p:sp>
+      <p:sp>
+        <p:nvSpPr>
+          <p:cNvPr id="5" name="Text 3"/>
+          <p:cNvSpPr/>
+          <p:nvPr/>
+        </p:nvSpPr>
+        <p:spPr>
+          <a:xfrm>
+            <a:off x="822960" y="914400"/>
+            <a:ext cx="10561320" cy="868680"/>
+          </a:xfrm>
+          <a:prstGeom prst="rect">
+            <a:avLst/>
+          </a:prstGeom>
+          <a:noFill/>
+          <a:ln/>
+        </p:spPr>
+        <p:txBody>
+          <a:bodyPr wrap="square" rtlCol="0" anchor="ctr"/>
+          <a:lstStyle/>
+          <a:p>
+            <a:pPr indent="0" marL="0">
+              <a:buNone/>
+            </a:pPr>
+            <a:r>
+              <a:rPr lang="en-US" sz="2700" b="1" dirty="0">
+                <a:solidFill>
+                  <a:srgbClr val="FFFFFF"/>
+                </a:solidFill>
+                <a:latin typeface="Segoe UI" pitchFamily="34" charset="0"/>
+                <a:ea typeface="Segoe UI" pitchFamily="34" charset="-122"/>
+                <a:cs typeface="Segoe UI" pitchFamily="34" charset="-120"/>
+              </a:rPr>
+              <a:t>Instrument the schedule itself</a:t>
+            </a:r>
+            <a:endParaRPr lang="en-US" sz="2700" dirty="0"/>
+          </a:p>
+        </p:txBody>
+      </p:sp>
+      <p:graphicFrame>
+        <p:nvGraphicFramePr>
+          <p:cNvPr id="6" name="Chart 0" descr=""/>
+          <p:cNvGraphicFramePr/>
+          <p:nvPr/>
+        </p:nvGraphicFramePr>
+        <p:xfrm>
+          <a:off x="822960" y="1874520"/>
+          <a:ext cx="10515600" cy="3337560"/>
+        </p:xfrm>
+        <a:graphic xmlns:a="http://schemas.openxmlformats.org/drawingml/2006/main">
+          <a:graphicData uri="http://schemas.openxmlformats.org/drawingml/2006/chart">
+            <c:chart xmlns:c="http://schemas.openxmlformats.org/drawingml/2006/chart" r:id="rId1"/>
+          </a:graphicData>
+        </a:graphic>
+      </p:graphicFrame>
+      <p:sp>
+        <p:nvSpPr>
+          <p:cNvPr id="7" name="Shape 4"/>
+          <p:cNvSpPr/>
+          <p:nvPr/>
+        </p:nvSpPr>
+        <p:spPr>
+          <a:xfrm>
+            <a:off x="822960" y="5413248"/>
+            <a:ext cx="10515600" cy="0"/>
+          </a:xfrm>
+          <a:prstGeom prst="line">
+            <a:avLst/>
+          </a:prstGeom>
+          <a:noFill/>
+          <a:ln w="12700">
+            <a:solidFill>
+              <a:srgbClr val="1E2D45"/>
+            </a:solidFill>
+            <a:prstDash val="solid"/>
+          </a:ln>
+        </p:spPr>
+      </p:sp>
+      <p:sp>
+        <p:nvSpPr>
+          <p:cNvPr id="8" name="Text 5"/>
+          <p:cNvSpPr/>
+          <p:nvPr/>
+        </p:nvSpPr>
+        <p:spPr>
+          <a:xfrm>
+            <a:off x="822960" y="5504688"/>
+            <a:ext cx="10424160" cy="411480"/>
+          </a:xfrm>
+          <a:prstGeom prst="rect">
+            <a:avLst/>
+          </a:prstGeom>
+          <a:noFill/>
+          <a:ln/>
+        </p:spPr>
+        <p:txBody>
+          <a:bodyPr wrap="square" rtlCol="0" anchor="ctr"/>
+          <a:lstStyle/>
+          <a:p>
+            <a:pPr indent="0" marL="0">
+              <a:buNone/>
+            </a:pPr>
+            <a:r>
+              <a:rPr lang="en-US" sz="1300" i="1" dirty="0">
+                <a:solidFill>
+                  <a:srgbClr val="06B6D4"/>
+                </a:solidFill>
+                <a:latin typeface="Segoe UI" pitchFamily="34" charset="0"/>
+                <a:ea typeface="Segoe UI" pitchFamily="34" charset="-122"/>
+                <a:cs typeface="Segoe UI" pitchFamily="34" charset="-120"/>
+              </a:rPr>
+              <a:t>→  Freshness alarms eliminated the biggest incident class within weeks - schedule deaths had caused more incidents than logic bugs.</a:t>
+            </a:r>
+            <a:endParaRPr lang="en-US" sz="1300" dirty="0"/>
+          </a:p>
+        </p:txBody>
+      </p:sp>
+      <p:sp>
+        <p:nvSpPr>
+          <p:cNvPr id="9" name="Shape 6"/>
+          <p:cNvSpPr/>
+          <p:nvPr/>
+        </p:nvSpPr>
+        <p:spPr>
+          <a:xfrm>
+            <a:off x="822960" y="5961888"/>
+            <a:ext cx="10515600" cy="0"/>
+          </a:xfrm>
+          <a:prstGeom prst="line">
+            <a:avLst/>
+          </a:prstGeom>
+          <a:noFill/>
+          <a:ln w="12700">
+            <a:solidFill>
+              <a:srgbClr val="1E2D45"/>
+            </a:solidFill>
+            <a:prstDash val="solid"/>
+          </a:ln>
+        </p:spPr>
+      </p:sp>
+      <p:sp>
+        <p:nvSpPr>
+          <p:cNvPr id="10" name="Text 7"/>
+          <p:cNvSpPr/>
+          <p:nvPr/>
+        </p:nvSpPr>
+        <p:spPr>
+          <a:xfrm>
+            <a:off x="822960" y="6053328"/>
+            <a:ext cx="9692640" cy="457200"/>
+          </a:xfrm>
+          <a:prstGeom prst="rect">
+            <a:avLst/>
+          </a:prstGeom>
+          <a:noFill/>
+          <a:ln/>
+        </p:spPr>
+        <p:txBody>
+          <a:bodyPr wrap="square" rtlCol="0" anchor="ctr"/>
+          <a:lstStyle/>
+          <a:p>
+            <a:pPr indent="0" marL="0">
+              <a:buNone/>
+            </a:pPr>
+            <a:r>
+              <a:rPr lang="en-US" sz="1150" dirty="0">
+                <a:solidFill>
+                  <a:srgbClr val="64748B"/>
+                </a:solidFill>
+                <a:latin typeface="Segoe UI" pitchFamily="34" charset="0"/>
+                <a:ea typeface="Segoe UI" pitchFamily="34" charset="-122"/>
+                <a:cs typeface="Segoe UI" pitchFamily="34" charset="-120"/>
+              </a:rPr>
+              <a:t>Illustrative trend showing the pattern behind the freshness-alarm principle.</a:t>
+            </a:r>
+            <a:endParaRPr lang="en-US" sz="1150" dirty="0"/>
+          </a:p>
+        </p:txBody>
+      </p:sp>
+      <p:sp>
+        <p:nvSpPr>
+          <p:cNvPr id="11" name="Text 8"/>
+          <p:cNvSpPr/>
+          <p:nvPr/>
+        </p:nvSpPr>
+        <p:spPr>
+          <a:xfrm>
+            <a:off x="10698480" y="6382512"/>
+            <a:ext cx="1188720" cy="365760"/>
+          </a:xfrm>
+          <a:prstGeom prst="rect">
+            <a:avLst/>
+          </a:prstGeom>
+          <a:noFill/>
+          <a:ln/>
+        </p:spPr>
+        <p:txBody>
+          <a:bodyPr wrap="square" rtlCol="0" anchor="ctr"/>
+          <a:lstStyle/>
+          <a:p>
+            <a:pPr algn="r" indent="0" marL="0">
+              <a:buNone/>
+            </a:pPr>
+            <a:r>
+              <a:rPr lang="en-US" sz="1000" dirty="0">
+                <a:solidFill>
+                  <a:srgbClr val="64748B"/>
+                </a:solidFill>
+                <a:latin typeface="Consolas" pitchFamily="34" charset="0"/>
+                <a:ea typeface="Consolas" pitchFamily="34" charset="-122"/>
+                <a:cs typeface="Consolas" pitchFamily="34" charset="-120"/>
+              </a:rPr>
+              <a:t>9 / 14</a:t>
             </a:r>
             <a:endParaRPr lang="en-US" sz="1000" dirty="0"/>
           </a:p>

--- a/decks/etl-playbook.pptx
+++ b/decks/etl-playbook.pptx
@@ -207,7 +207,7 @@
                 <a:lstStyle/>
                 <a:p>
                   <a:pPr>
-                    <a:defRPr sz="1000" b="0" i="0" u="none" strike="noStrike">
+                    <a:defRPr sz="1800" b="0" i="0" u="none" strike="noStrike">
                       <a:solidFill>
                         <a:srgbClr val="E2E8F0"/>
                       </a:solidFill>
@@ -232,7 +232,7 @@
                 <a:lstStyle/>
                 <a:p>
                   <a:pPr>
-                    <a:defRPr sz="1000" b="0" i="0" u="none" strike="noStrike">
+                    <a:defRPr sz="1800" b="0" i="0" u="none" strike="noStrike">
                       <a:solidFill>
                         <a:srgbClr val="E2E8F0"/>
                       </a:solidFill>
@@ -257,7 +257,7 @@
                 <a:lstStyle/>
                 <a:p>
                   <a:pPr>
-                    <a:defRPr sz="1000" b="0" i="0" u="none" strike="noStrike">
+                    <a:defRPr sz="1800" b="0" i="0" u="none" strike="noStrike">
                       <a:solidFill>
                         <a:srgbClr val="E2E8F0"/>
                       </a:solidFill>
@@ -282,7 +282,7 @@
                 <a:lstStyle/>
                 <a:p>
                   <a:pPr>
-                    <a:defRPr sz="1000" b="0" i="0" u="none" strike="noStrike">
+                    <a:defRPr sz="1800" b="0" i="0" u="none" strike="noStrike">
                       <a:solidFill>
                         <a:srgbClr val="E2E8F0"/>
                       </a:solidFill>
@@ -363,7 +363,7 @@
           </c:val>
         </c:ser>
         <c:firstSliceAng val="0"/>
-        <c:holeSize val="62"/>
+        <c:holeSize val="60"/>
       </c:doughnutChart>
       <c:spPr>
         <a:solidFill>
@@ -383,7 +383,7 @@
         <a:lstStyle/>
         <a:p>
           <a:pPr>
-            <a:defRPr sz="1100">
+            <a:defRPr sz="1800">
               <a:solidFill>
                 <a:srgbClr val="CBD5E1"/>
               </a:solidFill>
@@ -755,7 +755,7 @@
           <a:lstStyle/>
           <a:p>
             <a:pPr>
-              <a:defRPr sz="1100" b="0" i="0" u="none" strike="noStrike">
+              <a:defRPr sz="1800" b="0" i="0" u="none" strike="noStrike">
                 <a:solidFill>
                   <a:srgbClr val="94A3B8"/>
                 </a:solidFill>
@@ -775,6 +775,7 @@
         <c:axId val="2094734552"/>
         <c:scaling>
           <c:orientation val="minMax"/>
+          <c:min val="0"/>
         </c:scaling>
         <c:delete val="0"/>
         <c:axPos val="l"/>
@@ -807,7 +808,7 @@
           <a:lstStyle/>
           <a:p>
             <a:pPr>
-              <a:defRPr sz="1000" b="0" i="0" u="none" strike="noStrike">
+              <a:defRPr sz="1800" b="0" i="0" u="none" strike="noStrike">
                 <a:solidFill>
                   <a:srgbClr val="94A3B8"/>
                 </a:solidFill>
@@ -839,7 +840,7 @@
         <a:lstStyle/>
         <a:p>
           <a:pPr>
-            <a:defRPr sz="1100">
+            <a:defRPr sz="1800">
               <a:solidFill>
                 <a:srgbClr val="CBD5E1"/>
               </a:solidFill>
@@ -911,7 +912,7 @@
               <a:lstStyle/>
               <a:p>
                 <a:pPr>
-                  <a:defRPr b="0" i="0" strike="noStrike" sz="1000" u="none">
+                  <a:defRPr b="0" i="0" strike="noStrike" sz="1800" u="none">
                     <a:solidFill>
                       <a:srgbClr val="E2E8F0"/>
                     </a:solidFill>
@@ -1040,7 +1041,7 @@
             <a:lstStyle/>
             <a:p>
               <a:pPr>
-                <a:defRPr b="0" i="0" strike="noStrike" sz="1000" u="none">
+                <a:defRPr b="0" i="0" strike="noStrike" sz="1800" u="none">
                   <a:solidFill>
                     <a:srgbClr val="E2E8F0"/>
                   </a:solidFill>
@@ -1088,7 +1089,7 @@
           <a:lstStyle/>
           <a:p>
             <a:pPr>
-              <a:defRPr sz="1100" b="0" i="0" u="none" strike="noStrike">
+              <a:defRPr sz="1800" b="0" i="0" u="none" strike="noStrike">
                 <a:solidFill>
                   <a:srgbClr val="94A3B8"/>
                 </a:solidFill>
@@ -1108,6 +1109,7 @@
         <c:axId val="2094734552"/>
         <c:scaling>
           <c:orientation val="minMax"/>
+          <c:min val="0"/>
         </c:scaling>
         <c:delete val="0"/>
         <c:axPos val="l"/>
@@ -1140,7 +1142,7 @@
           <a:lstStyle/>
           <a:p>
             <a:pPr>
-              <a:defRPr sz="1000" b="0" i="0" u="none" strike="noStrike">
+              <a:defRPr sz="1800" b="0" i="0" u="none" strike="noStrike">
                 <a:solidFill>
                   <a:srgbClr val="94A3B8"/>
                 </a:solidFill>
@@ -1579,7 +1581,7 @@
           <a:p>
             <a:r>
               <a:rPr lang="en-US" dirty="0"/>
-              <a:t/>
+              <a:t>Opening: introduce yourself and this deck, "The ETL Playbook: Data Quality at Scale". | Transition: next up - "What this deck covers".</a:t>
             </a:r>
             <a:endParaRPr lang="en-US" dirty="0"/>
           </a:p>
@@ -1667,7 +1669,7 @@
           <a:p>
             <a:r>
               <a:rPr lang="en-US" dirty="0"/>
-              <a:t/>
+              <a:t>Key message: Discrepancies get owners, not just tickets | Talk track: A mismatch between systems is an organizational fact - treat it like one. | Transition: next up - "Onboarding a source: where the work happens".</a:t>
             </a:r>
             <a:endParaRPr lang="en-US" dirty="0"/>
           </a:p>
@@ -1755,7 +1757,7 @@
           <a:p>
             <a:r>
               <a:rPr lang="en-US" dirty="0"/>
-              <a:t/>
+              <a:t>Key message: Onboarding a source: where the work happens | Talk track: Runbooks live next to the pipelines, not in a wiki nobody opens. | Transition: next up - "What the seam checks catch in practice".</a:t>
             </a:r>
             <a:endParaRPr lang="en-US" dirty="0"/>
           </a:p>
@@ -1843,7 +1845,7 @@
           <a:p>
             <a:r>
               <a:rPr lang="en-US" dirty="0"/>
-              <a:t/>
+              <a:t>Key message: What the seam checks catch in practice | Insight: Most findings are boring and predictable - which is exactly why automating the checks pays for itself. | Talk track: Illustrative mix from a mature quarter of seam checks; the point is coverage, not the exact counts. | Transition: next up - "Run on enterprise tools, governed like engineering".</a:t>
             </a:r>
             <a:endParaRPr lang="en-US" dirty="0"/>
           </a:p>
@@ -1931,7 +1933,7 @@
           <a:p>
             <a:r>
               <a:rPr lang="en-US" dirty="0"/>
-              <a:t/>
+              <a:t>Key message: Run on enterprise tools, governed like engineering | Talk track: Enterprise BI stacks mirror the discipline of the team running them. | Transition: next up - "Trust is built one reconciliation at a time".</a:t>
             </a:r>
             <a:endParaRPr lang="en-US" dirty="0"/>
           </a:p>
@@ -2019,7 +2021,7 @@
           <a:p>
             <a:r>
               <a:rPr lang="en-US" dirty="0"/>
-              <a:t/>
+              <a:t>Key message: Trust is built one reconciliation at a time | Transition: close with the call to action on the contact slide, invite questions.</a:t>
             </a:r>
             <a:endParaRPr lang="en-US" dirty="0"/>
           </a:p>
@@ -2107,7 +2109,7 @@
           <a:p>
             <a:r>
               <a:rPr lang="en-US" dirty="0"/>
-              <a:t/>
+              <a:t>Key message: What this deck covers | Agenda: Why ETL fails quietly - and why silent is the default state; The arena: one datalake serving four countries of retail BI; Profiling sources and reconciling at every seam; Instrumenting schedules and giving discrepancies owners; What a trustworthy pipeline looks like in daily operation | Transition: next up - "ETL fails quietly".</a:t>
             </a:r>
             <a:endParaRPr lang="en-US" dirty="0"/>
           </a:p>
@@ -2195,7 +2197,7 @@
           <a:p>
             <a:r>
               <a:rPr lang="en-US" dirty="0"/>
-              <a:t/>
+              <a:t>Key message: ETL fails quietly | Talk track: Every principle in this playbook exists to make failure loud. | Transition: next up - "Regional BI across four countries, one datalake".</a:t>
             </a:r>
             <a:endParaRPr lang="en-US" dirty="0"/>
           </a:p>
@@ -2283,7 +2285,7 @@
           <a:p>
             <a:r>
               <a:rPr lang="en-US" dirty="0"/>
-              <a:t/>
+              <a:t>Key message: Regional BI across four countries, one datalake | Talk track: Run as Regional Business Intelligence Specialist for IKEA Indonesia. | Transition: next up - "The pipeline, instrumented end to end".</a:t>
             </a:r>
             <a:endParaRPr lang="en-US" dirty="0"/>
           </a:p>
@@ -2371,7 +2373,7 @@
           <a:p>
             <a:r>
               <a:rPr lang="en-US" dirty="0"/>
-              <a:t/>
+              <a:t>Key message: The pipeline, instrumented end to end | Talk track: Reconciliation is a property of the pipeline, not a project. | Transition: next up - "Profile sources before you trust them".</a:t>
             </a:r>
             <a:endParaRPr lang="en-US" dirty="0"/>
           </a:p>
@@ -2459,7 +2461,7 @@
           <a:p>
             <a:r>
               <a:rPr lang="en-US" dirty="0"/>
-              <a:t/>
+              <a:t>Key message: Profile sources before you trust them | Talk track: You cannot validate against expectations you never defined. | Transition: next up - "Where data quality issues actually originate".</a:t>
             </a:r>
             <a:endParaRPr lang="en-US" dirty="0"/>
           </a:p>
@@ -2547,7 +2549,7 @@
           <a:p>
             <a:r>
               <a:rPr lang="en-US" dirty="0"/>
-              <a:t/>
+              <a:t>Key message: Where data quality issues actually originate | Insight: Half of 'quality issues' are undocumented source behavior - profiling prevents more than debugging ever will. | Talk track: Illustrative distribution consistent with the IKEA regional BI playbook. | Transition: next up - "Reconciliation checks at every seam".</a:t>
             </a:r>
             <a:endParaRPr lang="en-US" dirty="0"/>
           </a:p>
@@ -2635,7 +2637,7 @@
           <a:p>
             <a:r>
               <a:rPr lang="en-US" dirty="0"/>
-              <a:t/>
+              <a:t>Key message: Reconciliation checks at every seam | Talk track: Not quarterly, not on request - reconciliation runs on every load. | Transition: next up - "Instrument the schedule itself".</a:t>
             </a:r>
             <a:endParaRPr lang="en-US" dirty="0"/>
           </a:p>
@@ -2723,7 +2725,7 @@
           <a:p>
             <a:r>
               <a:rPr lang="en-US" dirty="0"/>
-              <a:t/>
+              <a:t>Key message: Instrument the schedule itself | Insight: Freshness alarms eliminated the biggest incident class within weeks - schedule deaths had caused more incidents than logic bugs. | Talk track: Illustrative trend showing the pattern behind the freshness-alarm principle. | Transition: next up - "Discrepancies get owners, not just tickets".</a:t>
             </a:r>
             <a:endParaRPr lang="en-US" dirty="0"/>
           </a:p>
@@ -3144,7 +3146,7 @@
         </p:nvSpPr>
         <p:spPr>
           <a:xfrm>
-            <a:off x="822960" y="1783080"/>
+            <a:off x="822960" y="1737360"/>
             <a:ext cx="10515600" cy="457200"/>
           </a:xfrm>
           <a:prstGeom prst="rect">
@@ -3161,7 +3163,7 @@
               <a:buNone/>
             </a:pPr>
             <a:r>
-              <a:rPr lang="en-US" sz="1400" spc="400" kern="0" dirty="0">
+              <a:rPr lang="en-US" sz="1800" spc="400" kern="0" dirty="0">
                 <a:solidFill>
                   <a:srgbClr val="06B6D4"/>
                 </a:solidFill>
@@ -3171,7 +3173,7 @@
               </a:rPr>
               <a:t>ZALIN PLATFORM · DATA ENGINEERING</a:t>
             </a:r>
-            <a:endParaRPr lang="en-US" sz="1400" dirty="0"/>
+            <a:endParaRPr lang="en-US" sz="1800" dirty="0"/>
           </a:p>
         </p:txBody>
       </p:sp>
@@ -3183,7 +3185,7 @@
         </p:nvSpPr>
         <p:spPr>
           <a:xfrm>
-            <a:off x="822960" y="2286000"/>
+            <a:off x="822960" y="2240280"/>
             <a:ext cx="10607040" cy="1691640"/>
           </a:xfrm>
           <a:prstGeom prst="rect">
@@ -3222,8 +3224,8 @@
         </p:nvSpPr>
         <p:spPr>
           <a:xfrm>
-            <a:off x="822960" y="4023360"/>
-            <a:ext cx="10058400" cy="777240"/>
+            <a:off x="822960" y="3977640"/>
+            <a:ext cx="10058400" cy="822960"/>
           </a:xfrm>
           <a:prstGeom prst="rect">
             <a:avLst/>
@@ -3239,7 +3241,7 @@
               <a:buNone/>
             </a:pPr>
             <a:r>
-              <a:rPr lang="en-US" sz="1700" dirty="0">
+              <a:rPr lang="en-US" sz="2000" dirty="0">
                 <a:solidFill>
                   <a:srgbClr val="94A3B8"/>
                 </a:solidFill>
@@ -3249,7 +3251,7 @@
               </a:rPr>
               <a:t>ETL fails quietly - unless you design against it</a:t>
             </a:r>
-            <a:endParaRPr lang="en-US" sz="1700" dirty="0"/>
+            <a:endParaRPr lang="en-US" sz="2000" dirty="0"/>
           </a:p>
         </p:txBody>
       </p:sp>
@@ -3261,7 +3263,7 @@
         </p:nvSpPr>
         <p:spPr>
           <a:xfrm>
-            <a:off x="822960" y="5440680"/>
+            <a:off x="822960" y="5349240"/>
             <a:ext cx="4114800" cy="0"/>
           </a:xfrm>
           <a:prstGeom prst="line">
@@ -3284,8 +3286,8 @@
         </p:nvSpPr>
         <p:spPr>
           <a:xfrm>
-            <a:off x="822960" y="5596128"/>
-            <a:ext cx="10058400" cy="457200"/>
+            <a:off x="822960" y="5532120"/>
+            <a:ext cx="10058400" cy="502920"/>
           </a:xfrm>
           <a:prstGeom prst="rect">
             <a:avLst/>
@@ -3301,9 +3303,9 @@
               <a:buNone/>
             </a:pPr>
             <a:r>
-              <a:rPr lang="en-US" sz="1250" dirty="0">
-                <a:solidFill>
-                  <a:srgbClr val="64748B"/>
+              <a:rPr lang="en-US" sz="1800" dirty="0">
+                <a:solidFill>
+                  <a:srgbClr val="8FA3BF"/>
                 </a:solidFill>
                 <a:latin typeface="Segoe UI" pitchFamily="34" charset="0"/>
                 <a:ea typeface="Segoe UI" pitchFamily="34" charset="-122"/>
@@ -3311,7 +3313,7 @@
               </a:rPr>
               <a:t>Rezalian Vatiady · Zalin Labs · 2026</a:t>
             </a:r>
-            <a:endParaRPr lang="en-US" sz="1250" dirty="0"/>
+            <a:endParaRPr lang="en-US" sz="1800" dirty="0"/>
           </a:p>
         </p:txBody>
       </p:sp>
@@ -3323,8 +3325,8 @@
         </p:nvSpPr>
         <p:spPr>
           <a:xfrm>
-            <a:off x="10698480" y="6382512"/>
-            <a:ext cx="1188720" cy="365760"/>
+            <a:off x="10698480" y="6309360"/>
+            <a:ext cx="1188720" cy="411480"/>
           </a:xfrm>
           <a:prstGeom prst="rect">
             <a:avLst/>
@@ -3340,9 +3342,9 @@
               <a:buNone/>
             </a:pPr>
             <a:r>
-              <a:rPr lang="en-US" sz="1000" dirty="0">
-                <a:solidFill>
-                  <a:srgbClr val="64748B"/>
+              <a:rPr lang="en-US" sz="1800" dirty="0">
+                <a:solidFill>
+                  <a:srgbClr val="8FA3BF"/>
                 </a:solidFill>
                 <a:latin typeface="Consolas" pitchFamily="34" charset="0"/>
                 <a:ea typeface="Consolas" pitchFamily="34" charset="-122"/>
@@ -3350,7 +3352,7 @@
               </a:rPr>
               <a:t>1 / 14</a:t>
             </a:r>
-            <a:endParaRPr lang="en-US" sz="1000" dirty="0"/>
+            <a:endParaRPr lang="en-US" sz="1800" dirty="0"/>
           </a:p>
         </p:txBody>
       </p:sp>
@@ -3434,8 +3436,8 @@
         </p:nvSpPr>
         <p:spPr>
           <a:xfrm>
-            <a:off x="822960" y="502920"/>
-            <a:ext cx="10515600" cy="365760"/>
+            <a:off x="822960" y="457200"/>
+            <a:ext cx="10515600" cy="411480"/>
           </a:xfrm>
           <a:prstGeom prst="rect">
             <a:avLst/>
@@ -3451,7 +3453,7 @@
               <a:buNone/>
             </a:pPr>
             <a:r>
-              <a:rPr lang="en-US" sz="1200" spc="300" kern="0" dirty="0">
+              <a:rPr lang="en-US" sz="1800" spc="300" kern="0" dirty="0">
                 <a:solidFill>
                   <a:srgbClr val="06B6D4"/>
                 </a:solidFill>
@@ -3461,7 +3463,7 @@
               </a:rPr>
               <a:t>PRINCIPLE 4</a:t>
             </a:r>
-            <a:endParaRPr lang="en-US" sz="1200" dirty="0"/>
+            <a:endParaRPr lang="en-US" sz="1800" dirty="0"/>
           </a:p>
         </p:txBody>
       </p:sp>
@@ -3512,12 +3514,12 @@
         </p:nvSpPr>
         <p:spPr>
           <a:xfrm>
-            <a:off x="822960" y="2011680"/>
-            <a:ext cx="5074920" cy="3611880"/>
+            <a:off x="822960" y="1965960"/>
+            <a:ext cx="5074920" cy="3657600"/>
           </a:xfrm>
           <a:prstGeom prst="roundRect">
             <a:avLst>
-              <a:gd name="adj" fmla="val 2025"/>
+              <a:gd name="adj" fmla="val 2000"/>
             </a:avLst>
           </a:prstGeom>
           <a:solidFill>
@@ -3539,8 +3541,8 @@
         </p:nvSpPr>
         <p:spPr>
           <a:xfrm>
-            <a:off x="1097280" y="2240280"/>
-            <a:ext cx="4526280" cy="502920"/>
+            <a:off x="1097280" y="2194560"/>
+            <a:ext cx="4526280" cy="548640"/>
           </a:xfrm>
           <a:prstGeom prst="rect">
             <a:avLst/>
@@ -3556,7 +3558,7 @@
               <a:buNone/>
             </a:pPr>
             <a:r>
-              <a:rPr lang="en-US" sz="1650" b="1" dirty="0">
+              <a:rPr lang="en-US" sz="2000" b="1" dirty="0">
                 <a:solidFill>
                   <a:srgbClr val="06B6D4"/>
                 </a:solidFill>
@@ -3566,7 +3568,7 @@
               </a:rPr>
               <a:t>Ticket-only fixes</a:t>
             </a:r>
-            <a:endParaRPr lang="en-US" sz="1650" dirty="0"/>
+            <a:endParaRPr lang="en-US" sz="2000" dirty="0"/>
           </a:p>
         </p:txBody>
       </p:sp>
@@ -3602,7 +3604,7 @@
               <a:buChar char="▸"/>
             </a:pPr>
             <a:r>
-              <a:rPr lang="en-US" sz="1280" dirty="0">
+              <a:rPr lang="en-US" sz="1800" dirty="0">
                 <a:solidFill>
                   <a:srgbClr val="CBD5E1"/>
                 </a:solidFill>
@@ -3612,7 +3614,7 @@
               </a:rPr>
               <a:t>A mismatch enters a queue and ages in it</a:t>
             </a:r>
-            <a:endParaRPr lang="en-US" sz="1280" dirty="0"/>
+            <a:endParaRPr lang="en-US" sz="1800" dirty="0"/>
           </a:p>
           <a:p>
             <a:pPr marL="342900" indent="-342900">
@@ -3626,7 +3628,7 @@
               <a:buChar char="▸"/>
             </a:pPr>
             <a:r>
-              <a:rPr lang="en-US" sz="1280" dirty="0">
+              <a:rPr lang="en-US" sz="1800" dirty="0">
                 <a:solidFill>
                   <a:srgbClr val="CBD5E1"/>
                 </a:solidFill>
@@ -3636,7 +3638,7 @@
               </a:rPr>
               <a:t>Both sides assume the other one owns it</a:t>
             </a:r>
-            <a:endParaRPr lang="en-US" sz="1280" dirty="0"/>
+            <a:endParaRPr lang="en-US" sz="1800" dirty="0"/>
           </a:p>
           <a:p>
             <a:pPr marL="342900" indent="-342900">
@@ -3650,7 +3652,7 @@
               <a:buChar char="▸"/>
             </a:pPr>
             <a:r>
-              <a:rPr lang="en-US" sz="1280" dirty="0">
+              <a:rPr lang="en-US" sz="1800" dirty="0">
                 <a:solidFill>
                   <a:srgbClr val="CBD5E1"/>
                 </a:solidFill>
@@ -3660,7 +3662,7 @@
               </a:rPr>
               <a:t>The same discrepancy returns next quarter</a:t>
             </a:r>
-            <a:endParaRPr lang="en-US" sz="1280" dirty="0"/>
+            <a:endParaRPr lang="en-US" sz="1800" dirty="0"/>
           </a:p>
           <a:p>
             <a:pPr marL="342900" indent="-342900">
@@ -3674,7 +3676,7 @@
               <a:buChar char="▸"/>
             </a:pPr>
             <a:r>
-              <a:rPr lang="en-US" sz="1280" dirty="0">
+              <a:rPr lang="en-US" sz="1800" dirty="0">
                 <a:solidFill>
                   <a:srgbClr val="CBD5E1"/>
                 </a:solidFill>
@@ -3684,7 +3686,7 @@
               </a:rPr>
               <a:t>Data quality stays a technical problem</a:t>
             </a:r>
-            <a:endParaRPr lang="en-US" sz="1280" dirty="0"/>
+            <a:endParaRPr lang="en-US" sz="1800" dirty="0"/>
           </a:p>
         </p:txBody>
       </p:sp>
@@ -3696,12 +3698,12 @@
         </p:nvSpPr>
         <p:spPr>
           <a:xfrm>
-            <a:off x="6291072" y="2011680"/>
-            <a:ext cx="5074920" cy="3611880"/>
+            <a:off x="6291072" y="1965960"/>
+            <a:ext cx="5074920" cy="3657600"/>
           </a:xfrm>
           <a:prstGeom prst="roundRect">
             <a:avLst>
-              <a:gd name="adj" fmla="val 2025"/>
+              <a:gd name="adj" fmla="val 2000"/>
             </a:avLst>
           </a:prstGeom>
           <a:solidFill>
@@ -3723,8 +3725,8 @@
         </p:nvSpPr>
         <p:spPr>
           <a:xfrm>
-            <a:off x="6565392" y="2240280"/>
-            <a:ext cx="4526280" cy="502920"/>
+            <a:off x="6565392" y="2194560"/>
+            <a:ext cx="4526280" cy="548640"/>
           </a:xfrm>
           <a:prstGeom prst="rect">
             <a:avLst/>
@@ -3740,7 +3742,7 @@
               <a:buNone/>
             </a:pPr>
             <a:r>
-              <a:rPr lang="en-US" sz="1650" b="1" dirty="0">
+              <a:rPr lang="en-US" sz="2000" b="1" dirty="0">
                 <a:solidFill>
                   <a:srgbClr val="93C5FD"/>
                 </a:solidFill>
@@ -3750,7 +3752,7 @@
               </a:rPr>
               <a:t>Named owners on both sides</a:t>
             </a:r>
-            <a:endParaRPr lang="en-US" sz="1650" dirty="0"/>
+            <a:endParaRPr lang="en-US" sz="2000" dirty="0"/>
           </a:p>
         </p:txBody>
       </p:sp>
@@ -3786,7 +3788,7 @@
               <a:buChar char="▸"/>
             </a:pPr>
             <a:r>
-              <a:rPr lang="en-US" sz="1280" dirty="0">
+              <a:rPr lang="en-US" sz="1800" dirty="0">
                 <a:solidFill>
                   <a:srgbClr val="CBD5E1"/>
                 </a:solidFill>
@@ -3796,7 +3798,7 @@
               </a:rPr>
               <a:t>Every reconciliation failure has two names on it</a:t>
             </a:r>
-            <a:endParaRPr lang="en-US" sz="1280" dirty="0"/>
+            <a:endParaRPr lang="en-US" sz="1800" dirty="0"/>
           </a:p>
           <a:p>
             <a:pPr marL="342900" indent="-342900">
@@ -3810,7 +3812,7 @@
               <a:buChar char="▸"/>
             </a:pPr>
             <a:r>
-              <a:rPr lang="en-US" sz="1280" dirty="0">
+              <a:rPr lang="en-US" sz="1800" dirty="0">
                 <a:solidFill>
                   <a:srgbClr val="CBD5E1"/>
                 </a:solidFill>
@@ -3820,7 +3822,7 @@
               </a:rPr>
               <a:t>The conversation happens between teams, not queues</a:t>
             </a:r>
-            <a:endParaRPr lang="en-US" sz="1280" dirty="0"/>
+            <a:endParaRPr lang="en-US" sz="1800" dirty="0"/>
           </a:p>
           <a:p>
             <a:pPr marL="342900" indent="-342900">
@@ -3834,7 +3836,7 @@
               <a:buChar char="▸"/>
             </a:pPr>
             <a:r>
-              <a:rPr lang="en-US" sz="1280" dirty="0">
+              <a:rPr lang="en-US" sz="1800" dirty="0">
                 <a:solidFill>
                   <a:srgbClr val="CBD5E1"/>
                 </a:solidFill>
@@ -3844,7 +3846,7 @@
               </a:rPr>
               <a:t>Fixes address the definition, not just the symptom</a:t>
             </a:r>
-            <a:endParaRPr lang="en-US" sz="1280" dirty="0"/>
+            <a:endParaRPr lang="en-US" sz="1800" dirty="0"/>
           </a:p>
           <a:p>
             <a:pPr marL="342900" indent="-342900">
@@ -3858,7 +3860,7 @@
               <a:buChar char="▸"/>
             </a:pPr>
             <a:r>
-              <a:rPr lang="en-US" sz="1280" dirty="0">
+              <a:rPr lang="en-US" sz="1800" dirty="0">
                 <a:solidFill>
                   <a:srgbClr val="CBD5E1"/>
                 </a:solidFill>
@@ -3868,7 +3870,7 @@
               </a:rPr>
               <a:t>Data quality becomes a relationship that is maintained</a:t>
             </a:r>
-            <a:endParaRPr lang="en-US" sz="1280" dirty="0"/>
+            <a:endParaRPr lang="en-US" sz="1800" dirty="0"/>
           </a:p>
         </p:txBody>
       </p:sp>
@@ -3903,8 +3905,8 @@
         </p:nvSpPr>
         <p:spPr>
           <a:xfrm>
-            <a:off x="822960" y="6053328"/>
-            <a:ext cx="9692640" cy="457200"/>
+            <a:off x="822960" y="6035040"/>
+            <a:ext cx="10424160" cy="566928"/>
           </a:xfrm>
           <a:prstGeom prst="rect">
             <a:avLst/>
@@ -3920,9 +3922,9 @@
               <a:buNone/>
             </a:pPr>
             <a:r>
-              <a:rPr lang="en-US" sz="1150" dirty="0">
-                <a:solidFill>
-                  <a:srgbClr val="64748B"/>
+              <a:rPr lang="en-US" sz="1800" dirty="0">
+                <a:solidFill>
+                  <a:srgbClr val="8FA3BF"/>
                 </a:solidFill>
                 <a:latin typeface="Segoe UI" pitchFamily="34" charset="0"/>
                 <a:ea typeface="Segoe UI" pitchFamily="34" charset="-122"/>
@@ -3930,7 +3932,7 @@
               </a:rPr>
               <a:t>A mismatch between systems is an organizational fact - treat it like one.</a:t>
             </a:r>
-            <a:endParaRPr lang="en-US" sz="1150" dirty="0"/>
+            <a:endParaRPr lang="en-US" sz="1800" dirty="0"/>
           </a:p>
         </p:txBody>
       </p:sp>
@@ -3942,8 +3944,8 @@
         </p:nvSpPr>
         <p:spPr>
           <a:xfrm>
-            <a:off x="10698480" y="6382512"/>
-            <a:ext cx="1188720" cy="365760"/>
+            <a:off x="10698480" y="6309360"/>
+            <a:ext cx="1188720" cy="411480"/>
           </a:xfrm>
           <a:prstGeom prst="rect">
             <a:avLst/>
@@ -3959,9 +3961,9 @@
               <a:buNone/>
             </a:pPr>
             <a:r>
-              <a:rPr lang="en-US" sz="1000" dirty="0">
-                <a:solidFill>
-                  <a:srgbClr val="64748B"/>
+              <a:rPr lang="en-US" sz="1800" dirty="0">
+                <a:solidFill>
+                  <a:srgbClr val="8FA3BF"/>
                 </a:solidFill>
                 <a:latin typeface="Consolas" pitchFamily="34" charset="0"/>
                 <a:ea typeface="Consolas" pitchFamily="34" charset="-122"/>
@@ -3969,7 +3971,7 @@
               </a:rPr>
               <a:t>10 / 14</a:t>
             </a:r>
-            <a:endParaRPr lang="en-US" sz="1000" dirty="0"/>
+            <a:endParaRPr lang="en-US" sz="1800" dirty="0"/>
           </a:p>
         </p:txBody>
       </p:sp>
@@ -4053,8 +4055,8 @@
         </p:nvSpPr>
         <p:spPr>
           <a:xfrm>
-            <a:off x="822960" y="502920"/>
-            <a:ext cx="10515600" cy="365760"/>
+            <a:off x="822960" y="457200"/>
+            <a:ext cx="10515600" cy="411480"/>
           </a:xfrm>
           <a:prstGeom prst="rect">
             <a:avLst/>
@@ -4070,7 +4072,7 @@
               <a:buNone/>
             </a:pPr>
             <a:r>
-              <a:rPr lang="en-US" sz="1200" spc="300" kern="0" dirty="0">
+              <a:rPr lang="en-US" sz="1800" spc="300" kern="0" dirty="0">
                 <a:solidFill>
                   <a:srgbClr val="06B6D4"/>
                 </a:solidFill>
@@ -4080,7 +4082,7 @@
               </a:rPr>
               <a:t>PRINCIPLE 5</a:t>
             </a:r>
-            <a:endParaRPr lang="en-US" sz="1200" dirty="0"/>
+            <a:endParaRPr lang="en-US" sz="1800" dirty="0"/>
           </a:p>
         </p:txBody>
       </p:sp>
@@ -4131,7 +4133,7 @@
         </p:nvSpPr>
         <p:spPr>
           <a:xfrm>
-            <a:off x="1371600" y="3035808"/>
+            <a:off x="1371600" y="2907792"/>
             <a:ext cx="9464040" cy="0"/>
           </a:xfrm>
           <a:prstGeom prst="line">
@@ -4154,7 +4156,7 @@
         </p:nvSpPr>
         <p:spPr>
           <a:xfrm>
-            <a:off x="1289304" y="2953512"/>
+            <a:off x="1289304" y="2825496"/>
             <a:ext cx="164592" cy="164592"/>
           </a:xfrm>
           <a:prstGeom prst="ellipse">
@@ -4179,8 +4181,8 @@
         </p:nvSpPr>
         <p:spPr>
           <a:xfrm>
-            <a:off x="342900" y="2395728"/>
-            <a:ext cx="2057400" cy="365760"/>
+            <a:off x="297180" y="2212848"/>
+            <a:ext cx="2148840" cy="384048"/>
           </a:xfrm>
           <a:prstGeom prst="rect">
             <a:avLst/>
@@ -4196,7 +4198,7 @@
               <a:buNone/>
             </a:pPr>
             <a:r>
-              <a:rPr lang="en-US" sz="1100" b="1" dirty="0">
+              <a:rPr lang="en-US" sz="1800" b="1" dirty="0">
                 <a:solidFill>
                   <a:srgbClr val="3B82F6"/>
                 </a:solidFill>
@@ -4206,7 +4208,7 @@
               </a:rPr>
               <a:t>Step 1</a:t>
             </a:r>
-            <a:endParaRPr lang="en-US" sz="1100" dirty="0"/>
+            <a:endParaRPr lang="en-US" sz="1800" dirty="0"/>
           </a:p>
         </p:txBody>
       </p:sp>
@@ -4218,8 +4220,8 @@
         </p:nvSpPr>
         <p:spPr>
           <a:xfrm>
-            <a:off x="342900" y="3310128"/>
-            <a:ext cx="2057400" cy="566928"/>
+            <a:off x="297180" y="3200400"/>
+            <a:ext cx="2148840" cy="713232"/>
           </a:xfrm>
           <a:prstGeom prst="rect">
             <a:avLst/>
@@ -4235,7 +4237,7 @@
               <a:buNone/>
             </a:pPr>
             <a:r>
-              <a:rPr lang="en-US" sz="1250" b="1" dirty="0">
+              <a:rPr lang="en-US" sz="1800" b="1" dirty="0">
                 <a:solidFill>
                   <a:srgbClr val="FFFFFF"/>
                 </a:solidFill>
@@ -4245,7 +4247,7 @@
               </a:rPr>
               <a:t>Profile</a:t>
             </a:r>
-            <a:endParaRPr lang="en-US" sz="1250" dirty="0"/>
+            <a:endParaRPr lang="en-US" sz="1800" dirty="0"/>
           </a:p>
         </p:txBody>
       </p:sp>
@@ -4257,8 +4259,8 @@
         </p:nvSpPr>
         <p:spPr>
           <a:xfrm>
-            <a:off x="342900" y="3895344"/>
-            <a:ext cx="2057400" cy="1234440"/>
+            <a:off x="297180" y="3931920"/>
+            <a:ext cx="2148840" cy="1417320"/>
           </a:xfrm>
           <a:prstGeom prst="rect">
             <a:avLst/>
@@ -4274,7 +4276,7 @@
               <a:buNone/>
             </a:pPr>
             <a:r>
-              <a:rPr lang="en-US" sz="1000" dirty="0">
+              <a:rPr lang="en-US" sz="1800" dirty="0">
                 <a:solidFill>
                   <a:srgbClr val="CBD5E1"/>
                 </a:solidFill>
@@ -4284,7 +4286,7 @@
               </a:rPr>
               <a:t>Row counts, key uniqueness, cadence, and known quirks written down first.</a:t>
             </a:r>
-            <a:endParaRPr lang="en-US" sz="1000" dirty="0"/>
+            <a:endParaRPr lang="en-US" sz="1800" dirty="0"/>
           </a:p>
         </p:txBody>
       </p:sp>
@@ -4296,7 +4298,7 @@
         </p:nvSpPr>
         <p:spPr>
           <a:xfrm>
-            <a:off x="3655314" y="2953512"/>
+            <a:off x="3655314" y="2825496"/>
             <a:ext cx="164592" cy="164592"/>
           </a:xfrm>
           <a:prstGeom prst="ellipse">
@@ -4321,8 +4323,8 @@
         </p:nvSpPr>
         <p:spPr>
           <a:xfrm>
-            <a:off x="2708910" y="2395728"/>
-            <a:ext cx="2057400" cy="365760"/>
+            <a:off x="2663190" y="2212848"/>
+            <a:ext cx="2148840" cy="384048"/>
           </a:xfrm>
           <a:prstGeom prst="rect">
             <a:avLst/>
@@ -4338,7 +4340,7 @@
               <a:buNone/>
             </a:pPr>
             <a:r>
-              <a:rPr lang="en-US" sz="1100" b="1" dirty="0">
+              <a:rPr lang="en-US" sz="1800" b="1" dirty="0">
                 <a:solidFill>
                   <a:srgbClr val="06B6D4"/>
                 </a:solidFill>
@@ -4348,7 +4350,7 @@
               </a:rPr>
               <a:t>Step 2</a:t>
             </a:r>
-            <a:endParaRPr lang="en-US" sz="1100" dirty="0"/>
+            <a:endParaRPr lang="en-US" sz="1800" dirty="0"/>
           </a:p>
         </p:txBody>
       </p:sp>
@@ -4360,8 +4362,8 @@
         </p:nvSpPr>
         <p:spPr>
           <a:xfrm>
-            <a:off x="2708910" y="3310128"/>
-            <a:ext cx="2057400" cy="566928"/>
+            <a:off x="2663190" y="3200400"/>
+            <a:ext cx="2148840" cy="713232"/>
           </a:xfrm>
           <a:prstGeom prst="rect">
             <a:avLst/>
@@ -4377,7 +4379,7 @@
               <a:buNone/>
             </a:pPr>
             <a:r>
-              <a:rPr lang="en-US" sz="1250" b="1" dirty="0">
+              <a:rPr lang="en-US" sz="1800" b="1" dirty="0">
                 <a:solidFill>
                   <a:srgbClr val="FFFFFF"/>
                 </a:solidFill>
@@ -4387,7 +4389,7 @@
               </a:rPr>
               <a:t>Gate</a:t>
             </a:r>
-            <a:endParaRPr lang="en-US" sz="1250" dirty="0"/>
+            <a:endParaRPr lang="en-US" sz="1800" dirty="0"/>
           </a:p>
         </p:txBody>
       </p:sp>
@@ -4399,8 +4401,8 @@
         </p:nvSpPr>
         <p:spPr>
           <a:xfrm>
-            <a:off x="2708910" y="3895344"/>
-            <a:ext cx="2057400" cy="1234440"/>
+            <a:off x="2663190" y="3931920"/>
+            <a:ext cx="2148840" cy="1417320"/>
           </a:xfrm>
           <a:prstGeom prst="rect">
             <a:avLst/>
@@ -4416,7 +4418,7 @@
               <a:buNone/>
             </a:pPr>
             <a:r>
-              <a:rPr lang="en-US" sz="1000" dirty="0">
+              <a:rPr lang="en-US" sz="1800" dirty="0">
                 <a:solidFill>
                   <a:srgbClr val="CBD5E1"/>
                 </a:solidFill>
@@ -4426,7 +4428,7 @@
               </a:rPr>
               <a:t>Schema and sanity checks defined before the first production load.</a:t>
             </a:r>
-            <a:endParaRPr lang="en-US" sz="1000" dirty="0"/>
+            <a:endParaRPr lang="en-US" sz="1800" dirty="0"/>
           </a:p>
         </p:txBody>
       </p:sp>
@@ -4438,7 +4440,7 @@
         </p:nvSpPr>
         <p:spPr>
           <a:xfrm>
-            <a:off x="6021324" y="2953512"/>
+            <a:off x="6021324" y="2825496"/>
             <a:ext cx="164592" cy="164592"/>
           </a:xfrm>
           <a:prstGeom prst="ellipse">
@@ -4463,8 +4465,8 @@
         </p:nvSpPr>
         <p:spPr>
           <a:xfrm>
-            <a:off x="5074920" y="2395728"/>
-            <a:ext cx="2057400" cy="365760"/>
+            <a:off x="5029200" y="2212848"/>
+            <a:ext cx="2148840" cy="384048"/>
           </a:xfrm>
           <a:prstGeom prst="rect">
             <a:avLst/>
@@ -4480,7 +4482,7 @@
               <a:buNone/>
             </a:pPr>
             <a:r>
-              <a:rPr lang="en-US" sz="1100" b="1" dirty="0">
+              <a:rPr lang="en-US" sz="1800" b="1" dirty="0">
                 <a:solidFill>
                   <a:srgbClr val="3B82F6"/>
                 </a:solidFill>
@@ -4490,7 +4492,7 @@
               </a:rPr>
               <a:t>Step 3</a:t>
             </a:r>
-            <a:endParaRPr lang="en-US" sz="1100" dirty="0"/>
+            <a:endParaRPr lang="en-US" sz="1800" dirty="0"/>
           </a:p>
         </p:txBody>
       </p:sp>
@@ -4502,8 +4504,8 @@
         </p:nvSpPr>
         <p:spPr>
           <a:xfrm>
-            <a:off x="5074920" y="3310128"/>
-            <a:ext cx="2057400" cy="566928"/>
+            <a:off x="5029200" y="3200400"/>
+            <a:ext cx="2148840" cy="713232"/>
           </a:xfrm>
           <a:prstGeom prst="rect">
             <a:avLst/>
@@ -4519,7 +4521,7 @@
               <a:buNone/>
             </a:pPr>
             <a:r>
-              <a:rPr lang="en-US" sz="1250" b="1" dirty="0">
+              <a:rPr lang="en-US" sz="1800" b="1" dirty="0">
                 <a:solidFill>
                   <a:srgbClr val="FFFFFF"/>
                 </a:solidFill>
@@ -4529,7 +4531,7 @@
               </a:rPr>
               <a:t>Reconcile</a:t>
             </a:r>
-            <a:endParaRPr lang="en-US" sz="1250" dirty="0"/>
+            <a:endParaRPr lang="en-US" sz="1800" dirty="0"/>
           </a:p>
         </p:txBody>
       </p:sp>
@@ -4541,8 +4543,8 @@
         </p:nvSpPr>
         <p:spPr>
           <a:xfrm>
-            <a:off x="5074920" y="3895344"/>
-            <a:ext cx="2057400" cy="1234440"/>
+            <a:off x="5029200" y="3931920"/>
+            <a:ext cx="2148840" cy="1417320"/>
           </a:xfrm>
           <a:prstGeom prst="rect">
             <a:avLst/>
@@ -4558,7 +4560,7 @@
               <a:buNone/>
             </a:pPr>
             <a:r>
-              <a:rPr lang="en-US" sz="1000" dirty="0">
+              <a:rPr lang="en-US" sz="1800" dirty="0">
                 <a:solidFill>
                   <a:srgbClr val="CBD5E1"/>
                 </a:solidFill>
@@ -4568,7 +4570,7 @@
               </a:rPr>
               <a:t>Seam checks wired into the pipeline from day one, not retrofitted.</a:t>
             </a:r>
-            <a:endParaRPr lang="en-US" sz="1000" dirty="0"/>
+            <a:endParaRPr lang="en-US" sz="1800" dirty="0"/>
           </a:p>
         </p:txBody>
       </p:sp>
@@ -4580,7 +4582,7 @@
         </p:nvSpPr>
         <p:spPr>
           <a:xfrm>
-            <a:off x="8387334" y="2953512"/>
+            <a:off x="8387334" y="2825496"/>
             <a:ext cx="164592" cy="164592"/>
           </a:xfrm>
           <a:prstGeom prst="ellipse">
@@ -4605,8 +4607,8 @@
         </p:nvSpPr>
         <p:spPr>
           <a:xfrm>
-            <a:off x="7440930" y="2395728"/>
-            <a:ext cx="2057400" cy="365760"/>
+            <a:off x="7395210" y="2212848"/>
+            <a:ext cx="2148840" cy="384048"/>
           </a:xfrm>
           <a:prstGeom prst="rect">
             <a:avLst/>
@@ -4622,7 +4624,7 @@
               <a:buNone/>
             </a:pPr>
             <a:r>
-              <a:rPr lang="en-US" sz="1100" b="1" dirty="0">
+              <a:rPr lang="en-US" sz="1800" b="1" dirty="0">
                 <a:solidFill>
                   <a:srgbClr val="06B6D4"/>
                 </a:solidFill>
@@ -4632,7 +4634,7 @@
               </a:rPr>
               <a:t>Step 4</a:t>
             </a:r>
-            <a:endParaRPr lang="en-US" sz="1100" dirty="0"/>
+            <a:endParaRPr lang="en-US" sz="1800" dirty="0"/>
           </a:p>
         </p:txBody>
       </p:sp>
@@ -4644,8 +4646,8 @@
         </p:nvSpPr>
         <p:spPr>
           <a:xfrm>
-            <a:off x="7440930" y="3310128"/>
-            <a:ext cx="2057400" cy="566928"/>
+            <a:off x="7395210" y="3200400"/>
+            <a:ext cx="2148840" cy="713232"/>
           </a:xfrm>
           <a:prstGeom prst="rect">
             <a:avLst/>
@@ -4661,7 +4663,7 @@
               <a:buNone/>
             </a:pPr>
             <a:r>
-              <a:rPr lang="en-US" sz="1250" b="1" dirty="0">
+              <a:rPr lang="en-US" sz="1800" b="1" dirty="0">
                 <a:solidFill>
                   <a:srgbClr val="FFFFFF"/>
                 </a:solidFill>
@@ -4671,7 +4673,7 @@
               </a:rPr>
               <a:t>Alarm</a:t>
             </a:r>
-            <a:endParaRPr lang="en-US" sz="1250" dirty="0"/>
+            <a:endParaRPr lang="en-US" sz="1800" dirty="0"/>
           </a:p>
         </p:txBody>
       </p:sp>
@@ -4683,8 +4685,8 @@
         </p:nvSpPr>
         <p:spPr>
           <a:xfrm>
-            <a:off x="7440930" y="3895344"/>
-            <a:ext cx="2057400" cy="1234440"/>
+            <a:off x="7395210" y="3931920"/>
+            <a:ext cx="2148840" cy="1417320"/>
           </a:xfrm>
           <a:prstGeom prst="rect">
             <a:avLst/>
@@ -4700,7 +4702,7 @@
               <a:buNone/>
             </a:pPr>
             <a:r>
-              <a:rPr lang="en-US" sz="1000" dirty="0">
+              <a:rPr lang="en-US" sz="1800" dirty="0">
                 <a:solidFill>
                   <a:srgbClr val="CBD5E1"/>
                 </a:solidFill>
@@ -4710,7 +4712,7 @@
               </a:rPr>
               <a:t>Freshness alarm attached to the schedule with a named recipient.</a:t>
             </a:r>
-            <a:endParaRPr lang="en-US" sz="1000" dirty="0"/>
+            <a:endParaRPr lang="en-US" sz="1800" dirty="0"/>
           </a:p>
         </p:txBody>
       </p:sp>
@@ -4722,7 +4724,7 @@
         </p:nvSpPr>
         <p:spPr>
           <a:xfrm>
-            <a:off x="10753344" y="2953512"/>
+            <a:off x="10753344" y="2825496"/>
             <a:ext cx="164592" cy="164592"/>
           </a:xfrm>
           <a:prstGeom prst="ellipse">
@@ -4747,8 +4749,8 @@
         </p:nvSpPr>
         <p:spPr>
           <a:xfrm>
-            <a:off x="9806940" y="2395728"/>
-            <a:ext cx="2057400" cy="365760"/>
+            <a:off x="9761220" y="2212848"/>
+            <a:ext cx="2148840" cy="384048"/>
           </a:xfrm>
           <a:prstGeom prst="rect">
             <a:avLst/>
@@ -4764,7 +4766,7 @@
               <a:buNone/>
             </a:pPr>
             <a:r>
-              <a:rPr lang="en-US" sz="1100" b="1" dirty="0">
+              <a:rPr lang="en-US" sz="1800" b="1" dirty="0">
                 <a:solidFill>
                   <a:srgbClr val="3B82F6"/>
                 </a:solidFill>
@@ -4774,7 +4776,7 @@
               </a:rPr>
               <a:t>Step 5</a:t>
             </a:r>
-            <a:endParaRPr lang="en-US" sz="1100" dirty="0"/>
+            <a:endParaRPr lang="en-US" sz="1800" dirty="0"/>
           </a:p>
         </p:txBody>
       </p:sp>
@@ -4786,8 +4788,8 @@
         </p:nvSpPr>
         <p:spPr>
           <a:xfrm>
-            <a:off x="9806940" y="3310128"/>
-            <a:ext cx="2057400" cy="566928"/>
+            <a:off x="9761220" y="3200400"/>
+            <a:ext cx="2148840" cy="713232"/>
           </a:xfrm>
           <a:prstGeom prst="rect">
             <a:avLst/>
@@ -4803,7 +4805,7 @@
               <a:buNone/>
             </a:pPr>
             <a:r>
-              <a:rPr lang="en-US" sz="1250" b="1" dirty="0">
+              <a:rPr lang="en-US" sz="1800" b="1" dirty="0">
                 <a:solidFill>
                   <a:srgbClr val="FFFFFF"/>
                 </a:solidFill>
@@ -4813,7 +4815,7 @@
               </a:rPr>
               <a:t>Document</a:t>
             </a:r>
-            <a:endParaRPr lang="en-US" sz="1250" dirty="0"/>
+            <a:endParaRPr lang="en-US" sz="1800" dirty="0"/>
           </a:p>
         </p:txBody>
       </p:sp>
@@ -4825,8 +4827,8 @@
         </p:nvSpPr>
         <p:spPr>
           <a:xfrm>
-            <a:off x="9806940" y="3895344"/>
-            <a:ext cx="2057400" cy="1234440"/>
+            <a:off x="9761220" y="3931920"/>
+            <a:ext cx="2148840" cy="1417320"/>
           </a:xfrm>
           <a:prstGeom prst="rect">
             <a:avLst/>
@@ -4842,7 +4844,7 @@
               <a:buNone/>
             </a:pPr>
             <a:r>
-              <a:rPr lang="en-US" sz="1000" dirty="0">
+              <a:rPr lang="en-US" sz="1800" dirty="0">
                 <a:solidFill>
                   <a:srgbClr val="CBD5E1"/>
                 </a:solidFill>
@@ -4852,7 +4854,7 @@
               </a:rPr>
               <a:t>Runbook lives next to the pipeline - the quirk you document today is the incident you prevent next month.</a:t>
             </a:r>
-            <a:endParaRPr lang="en-US" sz="1000" dirty="0"/>
+            <a:endParaRPr lang="en-US" sz="1800" dirty="0"/>
           </a:p>
         </p:txBody>
       </p:sp>
@@ -4887,8 +4889,8 @@
         </p:nvSpPr>
         <p:spPr>
           <a:xfrm>
-            <a:off x="822960" y="6053328"/>
-            <a:ext cx="9692640" cy="457200"/>
+            <a:off x="822960" y="6035040"/>
+            <a:ext cx="10424160" cy="566928"/>
           </a:xfrm>
           <a:prstGeom prst="rect">
             <a:avLst/>
@@ -4904,9 +4906,9 @@
               <a:buNone/>
             </a:pPr>
             <a:r>
-              <a:rPr lang="en-US" sz="1150" dirty="0">
-                <a:solidFill>
-                  <a:srgbClr val="64748B"/>
+              <a:rPr lang="en-US" sz="1800" dirty="0">
+                <a:solidFill>
+                  <a:srgbClr val="8FA3BF"/>
                 </a:solidFill>
                 <a:latin typeface="Segoe UI" pitchFamily="34" charset="0"/>
                 <a:ea typeface="Segoe UI" pitchFamily="34" charset="-122"/>
@@ -4914,7 +4916,7 @@
               </a:rPr>
               <a:t>Runbooks live next to the pipelines, not in a wiki nobody opens.</a:t>
             </a:r>
-            <a:endParaRPr lang="en-US" sz="1150" dirty="0"/>
+            <a:endParaRPr lang="en-US" sz="1800" dirty="0"/>
           </a:p>
         </p:txBody>
       </p:sp>
@@ -4926,8 +4928,8 @@
         </p:nvSpPr>
         <p:spPr>
           <a:xfrm>
-            <a:off x="10698480" y="6382512"/>
-            <a:ext cx="1188720" cy="365760"/>
+            <a:off x="10698480" y="6309360"/>
+            <a:ext cx="1188720" cy="411480"/>
           </a:xfrm>
           <a:prstGeom prst="rect">
             <a:avLst/>
@@ -4943,9 +4945,9 @@
               <a:buNone/>
             </a:pPr>
             <a:r>
-              <a:rPr lang="en-US" sz="1000" dirty="0">
-                <a:solidFill>
-                  <a:srgbClr val="64748B"/>
+              <a:rPr lang="en-US" sz="1800" dirty="0">
+                <a:solidFill>
+                  <a:srgbClr val="8FA3BF"/>
                 </a:solidFill>
                 <a:latin typeface="Consolas" pitchFamily="34" charset="0"/>
                 <a:ea typeface="Consolas" pitchFamily="34" charset="-122"/>
@@ -4953,7 +4955,7 @@
               </a:rPr>
               <a:t>11 / 14</a:t>
             </a:r>
-            <a:endParaRPr lang="en-US" sz="1000" dirty="0"/>
+            <a:endParaRPr lang="en-US" sz="1800" dirty="0"/>
           </a:p>
         </p:txBody>
       </p:sp>
@@ -5037,8 +5039,8 @@
         </p:nvSpPr>
         <p:spPr>
           <a:xfrm>
-            <a:off x="822960" y="502920"/>
-            <a:ext cx="10515600" cy="365760"/>
+            <a:off x="822960" y="457200"/>
+            <a:ext cx="10515600" cy="411480"/>
           </a:xfrm>
           <a:prstGeom prst="rect">
             <a:avLst/>
@@ -5054,7 +5056,7 @@
               <a:buNone/>
             </a:pPr>
             <a:r>
-              <a:rPr lang="en-US" sz="1200" spc="300" kern="0" dirty="0">
+              <a:rPr lang="en-US" sz="1800" spc="300" kern="0" dirty="0">
                 <a:solidFill>
                   <a:srgbClr val="06B6D4"/>
                 </a:solidFill>
@@ -5064,7 +5066,7 @@
               </a:rPr>
               <a:t>EVIDENCE</a:t>
             </a:r>
-            <a:endParaRPr lang="en-US" sz="1200" dirty="0"/>
+            <a:endParaRPr lang="en-US" sz="1800" dirty="0"/>
           </a:p>
         </p:txBody>
       </p:sp>
@@ -5115,7 +5117,7 @@
         </p:nvGraphicFramePr>
         <p:xfrm>
           <a:off x="822960" y="1874520"/>
-          <a:ext cx="10515600" cy="3337560"/>
+          <a:ext cx="10515600" cy="3246120"/>
         </p:xfrm>
         <a:graphic xmlns:a="http://schemas.openxmlformats.org/drawingml/2006/main">
           <a:graphicData uri="http://schemas.openxmlformats.org/drawingml/2006/chart">
@@ -5131,7 +5133,7 @@
         </p:nvSpPr>
         <p:spPr>
           <a:xfrm>
-            <a:off x="822960" y="5413248"/>
+            <a:off x="822960" y="5321808"/>
             <a:ext cx="10515600" cy="0"/>
           </a:xfrm>
           <a:prstGeom prst="line">
@@ -5154,8 +5156,8 @@
         </p:nvSpPr>
         <p:spPr>
           <a:xfrm>
-            <a:off x="822960" y="5504688"/>
-            <a:ext cx="10424160" cy="411480"/>
+            <a:off x="822960" y="5394960"/>
+            <a:ext cx="10424160" cy="502920"/>
           </a:xfrm>
           <a:prstGeom prst="rect">
             <a:avLst/>
@@ -5171,7 +5173,7 @@
               <a:buNone/>
             </a:pPr>
             <a:r>
-              <a:rPr lang="en-US" sz="1300" i="1" dirty="0">
+              <a:rPr lang="en-US" sz="1800" i="1" dirty="0">
                 <a:solidFill>
                   <a:srgbClr val="06B6D4"/>
                 </a:solidFill>
@@ -5181,7 +5183,7 @@
               </a:rPr>
               <a:t>→  Most findings are boring and predictable - which is exactly why automating the checks pays for itself.</a:t>
             </a:r>
-            <a:endParaRPr lang="en-US" sz="1300" dirty="0"/>
+            <a:endParaRPr lang="en-US" sz="1800" dirty="0"/>
           </a:p>
         </p:txBody>
       </p:sp>
@@ -5216,8 +5218,8 @@
         </p:nvSpPr>
         <p:spPr>
           <a:xfrm>
-            <a:off x="822960" y="6053328"/>
-            <a:ext cx="9692640" cy="457200"/>
+            <a:off x="822960" y="6035040"/>
+            <a:ext cx="10424160" cy="566928"/>
           </a:xfrm>
           <a:prstGeom prst="rect">
             <a:avLst/>
@@ -5233,9 +5235,9 @@
               <a:buNone/>
             </a:pPr>
             <a:r>
-              <a:rPr lang="en-US" sz="1150" dirty="0">
-                <a:solidFill>
-                  <a:srgbClr val="64748B"/>
+              <a:rPr lang="en-US" sz="1800" dirty="0">
+                <a:solidFill>
+                  <a:srgbClr val="8FA3BF"/>
                 </a:solidFill>
                 <a:latin typeface="Segoe UI" pitchFamily="34" charset="0"/>
                 <a:ea typeface="Segoe UI" pitchFamily="34" charset="-122"/>
@@ -5243,7 +5245,7 @@
               </a:rPr>
               <a:t>Illustrative mix from a mature quarter of seam checks; the point is coverage, not the exact counts.</a:t>
             </a:r>
-            <a:endParaRPr lang="en-US" sz="1150" dirty="0"/>
+            <a:endParaRPr lang="en-US" sz="1800" dirty="0"/>
           </a:p>
         </p:txBody>
       </p:sp>
@@ -5255,8 +5257,8 @@
         </p:nvSpPr>
         <p:spPr>
           <a:xfrm>
-            <a:off x="10698480" y="6382512"/>
-            <a:ext cx="1188720" cy="365760"/>
+            <a:off x="10698480" y="6309360"/>
+            <a:ext cx="1188720" cy="411480"/>
           </a:xfrm>
           <a:prstGeom prst="rect">
             <a:avLst/>
@@ -5272,9 +5274,9 @@
               <a:buNone/>
             </a:pPr>
             <a:r>
-              <a:rPr lang="en-US" sz="1000" dirty="0">
-                <a:solidFill>
-                  <a:srgbClr val="64748B"/>
+              <a:rPr lang="en-US" sz="1800" dirty="0">
+                <a:solidFill>
+                  <a:srgbClr val="8FA3BF"/>
                 </a:solidFill>
                 <a:latin typeface="Consolas" pitchFamily="34" charset="0"/>
                 <a:ea typeface="Consolas" pitchFamily="34" charset="-122"/>
@@ -5282,7 +5284,7 @@
               </a:rPr>
               <a:t>12 / 14</a:t>
             </a:r>
-            <a:endParaRPr lang="en-US" sz="1000" dirty="0"/>
+            <a:endParaRPr lang="en-US" sz="1800" dirty="0"/>
           </a:p>
         </p:txBody>
       </p:sp>
@@ -5366,8 +5368,8 @@
         </p:nvSpPr>
         <p:spPr>
           <a:xfrm>
-            <a:off x="822960" y="502920"/>
-            <a:ext cx="10515600" cy="365760"/>
+            <a:off x="822960" y="457200"/>
+            <a:ext cx="10515600" cy="411480"/>
           </a:xfrm>
           <a:prstGeom prst="rect">
             <a:avLst/>
@@ -5383,7 +5385,7 @@
               <a:buNone/>
             </a:pPr>
             <a:r>
-              <a:rPr lang="en-US" sz="1200" spc="300" kern="0" dirty="0">
+              <a:rPr lang="en-US" sz="1800" spc="300" kern="0" dirty="0">
                 <a:solidFill>
                   <a:srgbClr val="06B6D4"/>
                 </a:solidFill>
@@ -5393,7 +5395,7 @@
               </a:rPr>
               <a:t>THE STACK</a:t>
             </a:r>
-            <a:endParaRPr lang="en-US" sz="1200" dirty="0"/>
+            <a:endParaRPr lang="en-US" sz="1800" dirty="0"/>
           </a:p>
         </p:txBody>
       </p:sp>
@@ -5444,8 +5446,8 @@
         </p:nvSpPr>
         <p:spPr>
           <a:xfrm>
-            <a:off x="868680" y="2011680"/>
-            <a:ext cx="10424160" cy="3566160"/>
+            <a:off x="868680" y="1965960"/>
+            <a:ext cx="10424160" cy="3840480"/>
           </a:xfrm>
           <a:prstGeom prst="rect">
             <a:avLst/>
@@ -5468,7 +5470,7 @@
               <a:buChar char="▸"/>
             </a:pPr>
             <a:r>
-              <a:rPr lang="en-US" sz="1600" dirty="0">
+              <a:rPr lang="en-US" sz="2000" dirty="0">
                 <a:solidFill>
                   <a:srgbClr val="CBD5E1"/>
                 </a:solidFill>
@@ -5478,7 +5480,7 @@
               </a:rPr>
               <a:t>Alteryx scheduled the pipelines feeding the datalake, with naming and error-path standards.</a:t>
             </a:r>
-            <a:endParaRPr lang="en-US" sz="1600" dirty="0"/>
+            <a:endParaRPr lang="en-US" sz="2000" dirty="0"/>
           </a:p>
           <a:p>
             <a:pPr marL="342900" indent="-342900">
@@ -5492,7 +5494,7 @@
               <a:buChar char="▸"/>
             </a:pPr>
             <a:r>
-              <a:rPr lang="en-US" sz="1600" dirty="0">
+              <a:rPr lang="en-US" sz="2000" dirty="0">
                 <a:solidFill>
                   <a:srgbClr val="CBD5E1"/>
                 </a:solidFill>
@@ -5502,7 +5504,7 @@
               </a:rPr>
               <a:t>Qlik Sense served regional dashboards under Management Console governance.</a:t>
             </a:r>
-            <a:endParaRPr lang="en-US" sz="1600" dirty="0"/>
+            <a:endParaRPr lang="en-US" sz="2000" dirty="0"/>
           </a:p>
           <a:p>
             <a:pPr marL="342900" indent="-342900">
@@ -5516,7 +5518,7 @@
               <a:buChar char="▸"/>
             </a:pPr>
             <a:r>
-              <a:rPr lang="en-US" sz="1600" dirty="0">
+              <a:rPr lang="en-US" sz="2000" dirty="0">
                 <a:solidFill>
                   <a:srgbClr val="CBD5E1"/>
                 </a:solidFill>
@@ -5526,7 +5528,7 @@
               </a:rPr>
               <a:t>SQL Server held the ground truth every check compared against.</a:t>
             </a:r>
-            <a:endParaRPr lang="en-US" sz="1600" dirty="0"/>
+            <a:endParaRPr lang="en-US" sz="2000" dirty="0"/>
           </a:p>
           <a:p>
             <a:pPr marL="342900" indent="-342900">
@@ -5540,7 +5542,7 @@
               <a:buChar char="▸"/>
             </a:pPr>
             <a:r>
-              <a:rPr lang="en-US" sz="1600" dirty="0">
+              <a:rPr lang="en-US" sz="2000" dirty="0">
                 <a:solidFill>
                   <a:srgbClr val="CBD5E1"/>
                 </a:solidFill>
@@ -5550,7 +5552,7 @@
               </a:rPr>
               <a:t>A definition registry recorded every KPI's formula, scope, and owner - one number, one definition.</a:t>
             </a:r>
-            <a:endParaRPr lang="en-US" sz="1600" dirty="0"/>
+            <a:endParaRPr lang="en-US" sz="2000" dirty="0"/>
           </a:p>
           <a:p>
             <a:pPr marL="342900" indent="-342900">
@@ -5564,7 +5566,7 @@
               <a:buChar char="▸"/>
             </a:pPr>
             <a:r>
-              <a:rPr lang="en-US" sz="1600" dirty="0">
+              <a:rPr lang="en-US" sz="2000" dirty="0">
                 <a:solidFill>
                   <a:srgbClr val="CBD5E1"/>
                 </a:solidFill>
@@ -5574,7 +5576,7 @@
               </a:rPr>
               <a:t>The tools did not create quality; the discipline wrapped around them did.</a:t>
             </a:r>
-            <a:endParaRPr lang="en-US" sz="1600" dirty="0"/>
+            <a:endParaRPr lang="en-US" sz="2000" dirty="0"/>
           </a:p>
         </p:txBody>
       </p:sp>
@@ -5609,8 +5611,8 @@
         </p:nvSpPr>
         <p:spPr>
           <a:xfrm>
-            <a:off x="822960" y="6053328"/>
-            <a:ext cx="9692640" cy="457200"/>
+            <a:off x="822960" y="6035040"/>
+            <a:ext cx="10424160" cy="566928"/>
           </a:xfrm>
           <a:prstGeom prst="rect">
             <a:avLst/>
@@ -5626,9 +5628,9 @@
               <a:buNone/>
             </a:pPr>
             <a:r>
-              <a:rPr lang="en-US" sz="1150" dirty="0">
-                <a:solidFill>
-                  <a:srgbClr val="64748B"/>
+              <a:rPr lang="en-US" sz="1800" dirty="0">
+                <a:solidFill>
+                  <a:srgbClr val="8FA3BF"/>
                 </a:solidFill>
                 <a:latin typeface="Segoe UI" pitchFamily="34" charset="0"/>
                 <a:ea typeface="Segoe UI" pitchFamily="34" charset="-122"/>
@@ -5636,7 +5638,7 @@
               </a:rPr>
               <a:t>Enterprise BI stacks mirror the discipline of the team running them.</a:t>
             </a:r>
-            <a:endParaRPr lang="en-US" sz="1150" dirty="0"/>
+            <a:endParaRPr lang="en-US" sz="1800" dirty="0"/>
           </a:p>
         </p:txBody>
       </p:sp>
@@ -5648,8 +5650,8 @@
         </p:nvSpPr>
         <p:spPr>
           <a:xfrm>
-            <a:off x="10698480" y="6382512"/>
-            <a:ext cx="1188720" cy="365760"/>
+            <a:off x="10698480" y="6309360"/>
+            <a:ext cx="1188720" cy="411480"/>
           </a:xfrm>
           <a:prstGeom prst="rect">
             <a:avLst/>
@@ -5665,9 +5667,9 @@
               <a:buNone/>
             </a:pPr>
             <a:r>
-              <a:rPr lang="en-US" sz="1000" dirty="0">
-                <a:solidFill>
-                  <a:srgbClr val="64748B"/>
+              <a:rPr lang="en-US" sz="1800" dirty="0">
+                <a:solidFill>
+                  <a:srgbClr val="8FA3BF"/>
                 </a:solidFill>
                 <a:latin typeface="Consolas" pitchFamily="34" charset="0"/>
                 <a:ea typeface="Consolas" pitchFamily="34" charset="-122"/>
@@ -5675,7 +5677,7 @@
               </a:rPr>
               <a:t>13 / 14</a:t>
             </a:r>
-            <a:endParaRPr lang="en-US" sz="1000" dirty="0"/>
+            <a:endParaRPr lang="en-US" sz="1800" dirty="0"/>
           </a:p>
         </p:txBody>
       </p:sp>
@@ -5759,8 +5761,8 @@
         </p:nvSpPr>
         <p:spPr>
           <a:xfrm>
-            <a:off x="822960" y="1417320"/>
-            <a:ext cx="10515600" cy="411480"/>
+            <a:off x="822960" y="1371600"/>
+            <a:ext cx="10515600" cy="457200"/>
           </a:xfrm>
           <a:prstGeom prst="rect">
             <a:avLst/>
@@ -5776,7 +5778,7 @@
               <a:buNone/>
             </a:pPr>
             <a:r>
-              <a:rPr lang="en-US" sz="1300" spc="400" kern="0" dirty="0">
+              <a:rPr lang="en-US" sz="1800" spc="400" kern="0" dirty="0">
                 <a:solidFill>
                   <a:srgbClr val="06B6D4"/>
                 </a:solidFill>
@@ -5786,7 +5788,7 @@
               </a:rPr>
               <a:t>WORK WITH ME</a:t>
             </a:r>
-            <a:endParaRPr lang="en-US" sz="1300" dirty="0"/>
+            <a:endParaRPr lang="en-US" sz="1800" dirty="0"/>
           </a:p>
         </p:txBody>
       </p:sp>
@@ -5798,7 +5800,7 @@
         </p:nvSpPr>
         <p:spPr>
           <a:xfrm>
-            <a:off x="822960" y="1920240"/>
+            <a:off x="822960" y="1874520"/>
             <a:ext cx="10515600" cy="1371600"/>
           </a:xfrm>
           <a:prstGeom prst="rect">
@@ -5837,8 +5839,8 @@
         </p:nvSpPr>
         <p:spPr>
           <a:xfrm>
-            <a:off x="2011680" y="3429000"/>
-            <a:ext cx="8183880" cy="1554480"/>
+            <a:off x="2011680" y="3383280"/>
+            <a:ext cx="8183880" cy="1691640"/>
           </a:xfrm>
           <a:prstGeom prst="rect">
             <a:avLst/>
@@ -5857,7 +5859,7 @@
               <a:buNone/>
             </a:pPr>
             <a:r>
-              <a:rPr lang="en-US" sz="1500" dirty="0">
+              <a:rPr lang="en-US" sz="2000" dirty="0">
                 <a:solidFill>
                   <a:srgbClr val="CBD5E1"/>
                 </a:solidFill>
@@ -5874,7 +5876,7 @@
               <a:buNone/>
             </a:pPr>
             <a:r>
-              <a:rPr lang="en-US" sz="1500" dirty="0">
+              <a:rPr lang="en-US" sz="2000" dirty="0">
                 <a:solidFill>
                   <a:srgbClr val="CBD5E1"/>
                 </a:solidFill>
@@ -5891,7 +5893,7 @@
               <a:buNone/>
             </a:pPr>
             <a:r>
-              <a:rPr lang="en-US" sz="1500" dirty="0">
+              <a:rPr lang="en-US" sz="2000" dirty="0">
                 <a:solidFill>
                   <a:srgbClr val="CBD5E1"/>
                 </a:solidFill>
@@ -5901,7 +5903,7 @@
               </a:rPr>
               <a:t>Bring me the pipeline everyone is afraid to touch.</a:t>
             </a:r>
-            <a:endParaRPr lang="en-US" sz="1500" dirty="0"/>
+            <a:endParaRPr lang="en-US" sz="2000" dirty="0"/>
           </a:p>
         </p:txBody>
       </p:sp>
@@ -5936,8 +5938,8 @@
         </p:nvSpPr>
         <p:spPr>
           <a:xfrm>
-            <a:off x="822960" y="5376672"/>
-            <a:ext cx="10515600" cy="457200"/>
+            <a:off x="822960" y="5349240"/>
+            <a:ext cx="10515600" cy="502920"/>
           </a:xfrm>
           <a:prstGeom prst="rect">
             <a:avLst/>
@@ -5953,7 +5955,7 @@
               <a:buNone/>
             </a:pPr>
             <a:r>
-              <a:rPr lang="en-US" sz="1350" b="1" dirty="0">
+              <a:rPr lang="en-US" sz="1800" b="1" dirty="0">
                 <a:solidFill>
                   <a:srgbClr val="06B6D4"/>
                 </a:solidFill>
@@ -5963,7 +5965,7 @@
               </a:rPr>
               <a:t>rezalianvatiady.github.io · github.com/rezalianvatiady</a:t>
             </a:r>
-            <a:endParaRPr lang="en-US" sz="1350" dirty="0"/>
+            <a:endParaRPr lang="en-US" sz="1800" dirty="0"/>
           </a:p>
         </p:txBody>
       </p:sp>
@@ -5975,8 +5977,8 @@
         </p:nvSpPr>
         <p:spPr>
           <a:xfrm>
-            <a:off x="10698480" y="6382512"/>
-            <a:ext cx="1188720" cy="365760"/>
+            <a:off x="10698480" y="6309360"/>
+            <a:ext cx="1188720" cy="411480"/>
           </a:xfrm>
           <a:prstGeom prst="rect">
             <a:avLst/>
@@ -5992,9 +5994,9 @@
               <a:buNone/>
             </a:pPr>
             <a:r>
-              <a:rPr lang="en-US" sz="1000" dirty="0">
-                <a:solidFill>
-                  <a:srgbClr val="64748B"/>
+              <a:rPr lang="en-US" sz="1800" dirty="0">
+                <a:solidFill>
+                  <a:srgbClr val="8FA3BF"/>
                 </a:solidFill>
                 <a:latin typeface="Consolas" pitchFamily="34" charset="0"/>
                 <a:ea typeface="Consolas" pitchFamily="34" charset="-122"/>
@@ -6002,7 +6004,7 @@
               </a:rPr>
               <a:t>14 / 14</a:t>
             </a:r>
-            <a:endParaRPr lang="en-US" sz="1000" dirty="0"/>
+            <a:endParaRPr lang="en-US" sz="1800" dirty="0"/>
           </a:p>
         </p:txBody>
       </p:sp>
@@ -6086,8 +6088,8 @@
         </p:nvSpPr>
         <p:spPr>
           <a:xfrm>
-            <a:off x="822960" y="502920"/>
-            <a:ext cx="10515600" cy="365760"/>
+            <a:off x="822960" y="457200"/>
+            <a:ext cx="10515600" cy="411480"/>
           </a:xfrm>
           <a:prstGeom prst="rect">
             <a:avLst/>
@@ -6103,7 +6105,7 @@
               <a:buNone/>
             </a:pPr>
             <a:r>
-              <a:rPr lang="en-US" sz="1200" spc="300" kern="0" dirty="0">
+              <a:rPr lang="en-US" sz="1800" spc="300" kern="0" dirty="0">
                 <a:solidFill>
                   <a:srgbClr val="06B6D4"/>
                 </a:solidFill>
@@ -6113,7 +6115,7 @@
               </a:rPr>
               <a:t>AGENDA</a:t>
             </a:r>
-            <a:endParaRPr lang="en-US" sz="1200" dirty="0"/>
+            <a:endParaRPr lang="en-US" sz="1800" dirty="0"/>
           </a:p>
         </p:txBody>
       </p:sp>
@@ -6164,8 +6166,8 @@
         </p:nvSpPr>
         <p:spPr>
           <a:xfrm>
-            <a:off x="868680" y="2112264"/>
-            <a:ext cx="420624" cy="420624"/>
+            <a:off x="868680" y="2103120"/>
+            <a:ext cx="457200" cy="457200"/>
           </a:xfrm>
           <a:prstGeom prst="ellipse">
             <a:avLst/>
@@ -6189,8 +6191,8 @@
         </p:nvSpPr>
         <p:spPr>
           <a:xfrm>
-            <a:off x="868680" y="2112264"/>
-            <a:ext cx="420624" cy="420624"/>
+            <a:off x="868680" y="2103120"/>
+            <a:ext cx="457200" cy="457200"/>
           </a:xfrm>
           <a:prstGeom prst="rect">
             <a:avLst/>
@@ -6206,7 +6208,7 @@
               <a:buNone/>
             </a:pPr>
             <a:r>
-              <a:rPr lang="en-US" sz="1300" b="1" dirty="0">
+              <a:rPr lang="en-US" sz="1800" b="1" dirty="0">
                 <a:solidFill>
                   <a:srgbClr val="3B82F6"/>
                 </a:solidFill>
@@ -6216,7 +6218,7 @@
               </a:rPr>
               <a:t>1</a:t>
             </a:r>
-            <a:endParaRPr lang="en-US" sz="1300" dirty="0"/>
+            <a:endParaRPr lang="en-US" sz="1800" dirty="0"/>
           </a:p>
         </p:txBody>
       </p:sp>
@@ -6228,8 +6230,8 @@
         </p:nvSpPr>
         <p:spPr>
           <a:xfrm>
-            <a:off x="1435608" y="2057400"/>
-            <a:ext cx="4480560" cy="822960"/>
+            <a:off x="1472184" y="2011680"/>
+            <a:ext cx="4443984" cy="960120"/>
           </a:xfrm>
           <a:prstGeom prst="rect">
             <a:avLst/>
@@ -6245,7 +6247,7 @@
               <a:buNone/>
             </a:pPr>
             <a:r>
-              <a:rPr lang="en-US" sz="1450" dirty="0">
+              <a:rPr lang="en-US" sz="2000" dirty="0">
                 <a:solidFill>
                   <a:srgbClr val="CBD5E1"/>
                 </a:solidFill>
@@ -6255,7 +6257,7 @@
               </a:rPr>
               <a:t>Why ETL fails quietly - and why silent is the default state</a:t>
             </a:r>
-            <a:endParaRPr lang="en-US" sz="1450" dirty="0"/>
+            <a:endParaRPr lang="en-US" sz="2000" dirty="0"/>
           </a:p>
         </p:txBody>
       </p:sp>
@@ -6267,8 +6269,8 @@
         </p:nvSpPr>
         <p:spPr>
           <a:xfrm>
-            <a:off x="868680" y="3044952"/>
-            <a:ext cx="420624" cy="420624"/>
+            <a:off x="868680" y="3182112"/>
+            <a:ext cx="457200" cy="457200"/>
           </a:xfrm>
           <a:prstGeom prst="ellipse">
             <a:avLst/>
@@ -6292,8 +6294,8 @@
         </p:nvSpPr>
         <p:spPr>
           <a:xfrm>
-            <a:off x="868680" y="3044952"/>
-            <a:ext cx="420624" cy="420624"/>
+            <a:off x="868680" y="3182112"/>
+            <a:ext cx="457200" cy="457200"/>
           </a:xfrm>
           <a:prstGeom prst="rect">
             <a:avLst/>
@@ -6309,7 +6311,7 @@
               <a:buNone/>
             </a:pPr>
             <a:r>
-              <a:rPr lang="en-US" sz="1300" b="1" dirty="0">
+              <a:rPr lang="en-US" sz="1800" b="1" dirty="0">
                 <a:solidFill>
                   <a:srgbClr val="06B6D4"/>
                 </a:solidFill>
@@ -6319,7 +6321,7 @@
               </a:rPr>
               <a:t>2</a:t>
             </a:r>
-            <a:endParaRPr lang="en-US" sz="1300" dirty="0"/>
+            <a:endParaRPr lang="en-US" sz="1800" dirty="0"/>
           </a:p>
         </p:txBody>
       </p:sp>
@@ -6331,8 +6333,8 @@
         </p:nvSpPr>
         <p:spPr>
           <a:xfrm>
-            <a:off x="1435608" y="2990088"/>
-            <a:ext cx="4480560" cy="822960"/>
+            <a:off x="1472184" y="3090672"/>
+            <a:ext cx="4443984" cy="960120"/>
           </a:xfrm>
           <a:prstGeom prst="rect">
             <a:avLst/>
@@ -6348,7 +6350,7 @@
               <a:buNone/>
             </a:pPr>
             <a:r>
-              <a:rPr lang="en-US" sz="1450" dirty="0">
+              <a:rPr lang="en-US" sz="2000" dirty="0">
                 <a:solidFill>
                   <a:srgbClr val="CBD5E1"/>
                 </a:solidFill>
@@ -6358,7 +6360,7 @@
               </a:rPr>
               <a:t>The arena: one datalake serving four countries of retail BI</a:t>
             </a:r>
-            <a:endParaRPr lang="en-US" sz="1450" dirty="0"/>
+            <a:endParaRPr lang="en-US" sz="2000" dirty="0"/>
           </a:p>
         </p:txBody>
       </p:sp>
@@ -6370,8 +6372,8 @@
         </p:nvSpPr>
         <p:spPr>
           <a:xfrm>
-            <a:off x="868680" y="3977640"/>
-            <a:ext cx="420624" cy="420624"/>
+            <a:off x="868680" y="4261104"/>
+            <a:ext cx="457200" cy="457200"/>
           </a:xfrm>
           <a:prstGeom prst="ellipse">
             <a:avLst/>
@@ -6395,8 +6397,8 @@
         </p:nvSpPr>
         <p:spPr>
           <a:xfrm>
-            <a:off x="868680" y="3977640"/>
-            <a:ext cx="420624" cy="420624"/>
+            <a:off x="868680" y="4261104"/>
+            <a:ext cx="457200" cy="457200"/>
           </a:xfrm>
           <a:prstGeom prst="rect">
             <a:avLst/>
@@ -6412,7 +6414,7 @@
               <a:buNone/>
             </a:pPr>
             <a:r>
-              <a:rPr lang="en-US" sz="1300" b="1" dirty="0">
+              <a:rPr lang="en-US" sz="1800" b="1" dirty="0">
                 <a:solidFill>
                   <a:srgbClr val="3B82F6"/>
                 </a:solidFill>
@@ -6422,7 +6424,7 @@
               </a:rPr>
               <a:t>3</a:t>
             </a:r>
-            <a:endParaRPr lang="en-US" sz="1300" dirty="0"/>
+            <a:endParaRPr lang="en-US" sz="1800" dirty="0"/>
           </a:p>
         </p:txBody>
       </p:sp>
@@ -6434,8 +6436,8 @@
         </p:nvSpPr>
         <p:spPr>
           <a:xfrm>
-            <a:off x="1435608" y="3922776"/>
-            <a:ext cx="4480560" cy="822960"/>
+            <a:off x="1472184" y="4169664"/>
+            <a:ext cx="4443984" cy="960120"/>
           </a:xfrm>
           <a:prstGeom prst="rect">
             <a:avLst/>
@@ -6451,7 +6453,7 @@
               <a:buNone/>
             </a:pPr>
             <a:r>
-              <a:rPr lang="en-US" sz="1450" dirty="0">
+              <a:rPr lang="en-US" sz="2000" dirty="0">
                 <a:solidFill>
                   <a:srgbClr val="CBD5E1"/>
                 </a:solidFill>
@@ -6461,7 +6463,7 @@
               </a:rPr>
               <a:t>Profiling sources and reconciling at every seam</a:t>
             </a:r>
-            <a:endParaRPr lang="en-US" sz="1450" dirty="0"/>
+            <a:endParaRPr lang="en-US" sz="2000" dirty="0"/>
           </a:p>
         </p:txBody>
       </p:sp>
@@ -6473,8 +6475,8 @@
         </p:nvSpPr>
         <p:spPr>
           <a:xfrm>
-            <a:off x="6355080" y="2112264"/>
-            <a:ext cx="420624" cy="420624"/>
+            <a:off x="6355080" y="2103120"/>
+            <a:ext cx="457200" cy="457200"/>
           </a:xfrm>
           <a:prstGeom prst="ellipse">
             <a:avLst/>
@@ -6498,8 +6500,8 @@
         </p:nvSpPr>
         <p:spPr>
           <a:xfrm>
-            <a:off x="6355080" y="2112264"/>
-            <a:ext cx="420624" cy="420624"/>
+            <a:off x="6355080" y="2103120"/>
+            <a:ext cx="457200" cy="457200"/>
           </a:xfrm>
           <a:prstGeom prst="rect">
             <a:avLst/>
@@ -6515,7 +6517,7 @@
               <a:buNone/>
             </a:pPr>
             <a:r>
-              <a:rPr lang="en-US" sz="1300" b="1" dirty="0">
+              <a:rPr lang="en-US" sz="1800" b="1" dirty="0">
                 <a:solidFill>
                   <a:srgbClr val="06B6D4"/>
                 </a:solidFill>
@@ -6525,7 +6527,7 @@
               </a:rPr>
               <a:t>4</a:t>
             </a:r>
-            <a:endParaRPr lang="en-US" sz="1300" dirty="0"/>
+            <a:endParaRPr lang="en-US" sz="1800" dirty="0"/>
           </a:p>
         </p:txBody>
       </p:sp>
@@ -6537,8 +6539,8 @@
         </p:nvSpPr>
         <p:spPr>
           <a:xfrm>
-            <a:off x="6922008" y="2057400"/>
-            <a:ext cx="4480560" cy="822960"/>
+            <a:off x="6958584" y="2011680"/>
+            <a:ext cx="4443984" cy="960120"/>
           </a:xfrm>
           <a:prstGeom prst="rect">
             <a:avLst/>
@@ -6554,7 +6556,7 @@
               <a:buNone/>
             </a:pPr>
             <a:r>
-              <a:rPr lang="en-US" sz="1450" dirty="0">
+              <a:rPr lang="en-US" sz="2000" dirty="0">
                 <a:solidFill>
                   <a:srgbClr val="CBD5E1"/>
                 </a:solidFill>
@@ -6564,7 +6566,7 @@
               </a:rPr>
               <a:t>Instrumenting schedules and giving discrepancies owners</a:t>
             </a:r>
-            <a:endParaRPr lang="en-US" sz="1450" dirty="0"/>
+            <a:endParaRPr lang="en-US" sz="2000" dirty="0"/>
           </a:p>
         </p:txBody>
       </p:sp>
@@ -6576,8 +6578,8 @@
         </p:nvSpPr>
         <p:spPr>
           <a:xfrm>
-            <a:off x="6355080" y="3044952"/>
-            <a:ext cx="420624" cy="420624"/>
+            <a:off x="6355080" y="3182112"/>
+            <a:ext cx="457200" cy="457200"/>
           </a:xfrm>
           <a:prstGeom prst="ellipse">
             <a:avLst/>
@@ -6601,8 +6603,8 @@
         </p:nvSpPr>
         <p:spPr>
           <a:xfrm>
-            <a:off x="6355080" y="3044952"/>
-            <a:ext cx="420624" cy="420624"/>
+            <a:off x="6355080" y="3182112"/>
+            <a:ext cx="457200" cy="457200"/>
           </a:xfrm>
           <a:prstGeom prst="rect">
             <a:avLst/>
@@ -6618,7 +6620,7 @@
               <a:buNone/>
             </a:pPr>
             <a:r>
-              <a:rPr lang="en-US" sz="1300" b="1" dirty="0">
+              <a:rPr lang="en-US" sz="1800" b="1" dirty="0">
                 <a:solidFill>
                   <a:srgbClr val="3B82F6"/>
                 </a:solidFill>
@@ -6628,7 +6630,7 @@
               </a:rPr>
               <a:t>5</a:t>
             </a:r>
-            <a:endParaRPr lang="en-US" sz="1300" dirty="0"/>
+            <a:endParaRPr lang="en-US" sz="1800" dirty="0"/>
           </a:p>
         </p:txBody>
       </p:sp>
@@ -6640,8 +6642,8 @@
         </p:nvSpPr>
         <p:spPr>
           <a:xfrm>
-            <a:off x="6922008" y="2990088"/>
-            <a:ext cx="4480560" cy="822960"/>
+            <a:off x="6958584" y="3090672"/>
+            <a:ext cx="4443984" cy="960120"/>
           </a:xfrm>
           <a:prstGeom prst="rect">
             <a:avLst/>
@@ -6657,7 +6659,7 @@
               <a:buNone/>
             </a:pPr>
             <a:r>
-              <a:rPr lang="en-US" sz="1450" dirty="0">
+              <a:rPr lang="en-US" sz="2000" dirty="0">
                 <a:solidFill>
                   <a:srgbClr val="CBD5E1"/>
                 </a:solidFill>
@@ -6667,7 +6669,7 @@
               </a:rPr>
               <a:t>What a trustworthy pipeline looks like in daily operation</a:t>
             </a:r>
-            <a:endParaRPr lang="en-US" sz="1450" dirty="0"/>
+            <a:endParaRPr lang="en-US" sz="2000" dirty="0"/>
           </a:p>
         </p:txBody>
       </p:sp>
@@ -6679,8 +6681,8 @@
         </p:nvSpPr>
         <p:spPr>
           <a:xfrm>
-            <a:off x="10698480" y="6382512"/>
-            <a:ext cx="1188720" cy="365760"/>
+            <a:off x="10698480" y="6309360"/>
+            <a:ext cx="1188720" cy="411480"/>
           </a:xfrm>
           <a:prstGeom prst="rect">
             <a:avLst/>
@@ -6696,9 +6698,9 @@
               <a:buNone/>
             </a:pPr>
             <a:r>
-              <a:rPr lang="en-US" sz="1000" dirty="0">
-                <a:solidFill>
-                  <a:srgbClr val="64748B"/>
+              <a:rPr lang="en-US" sz="1800" dirty="0">
+                <a:solidFill>
+                  <a:srgbClr val="8FA3BF"/>
                 </a:solidFill>
                 <a:latin typeface="Consolas" pitchFamily="34" charset="0"/>
                 <a:ea typeface="Consolas" pitchFamily="34" charset="-122"/>
@@ -6706,7 +6708,7 @@
               </a:rPr>
               <a:t>2 / 14</a:t>
             </a:r>
-            <a:endParaRPr lang="en-US" sz="1000" dirty="0"/>
+            <a:endParaRPr lang="en-US" sz="1800" dirty="0"/>
           </a:p>
         </p:txBody>
       </p:sp>
@@ -6790,8 +6792,8 @@
         </p:nvSpPr>
         <p:spPr>
           <a:xfrm>
-            <a:off x="822960" y="502920"/>
-            <a:ext cx="10515600" cy="365760"/>
+            <a:off x="822960" y="457200"/>
+            <a:ext cx="10515600" cy="411480"/>
           </a:xfrm>
           <a:prstGeom prst="rect">
             <a:avLst/>
@@ -6807,7 +6809,7 @@
               <a:buNone/>
             </a:pPr>
             <a:r>
-              <a:rPr lang="en-US" sz="1200" spc="300" kern="0" dirty="0">
+              <a:rPr lang="en-US" sz="1800" spc="300" kern="0" dirty="0">
                 <a:solidFill>
                   <a:srgbClr val="06B6D4"/>
                 </a:solidFill>
@@ -6817,7 +6819,7 @@
               </a:rPr>
               <a:t>THE REALITY</a:t>
             </a:r>
-            <a:endParaRPr lang="en-US" sz="1200" dirty="0"/>
+            <a:endParaRPr lang="en-US" sz="1800" dirty="0"/>
           </a:p>
         </p:txBody>
       </p:sp>
@@ -6868,8 +6870,8 @@
         </p:nvSpPr>
         <p:spPr>
           <a:xfrm>
-            <a:off x="868680" y="2011680"/>
-            <a:ext cx="10424160" cy="3566160"/>
+            <a:off x="868680" y="1965960"/>
+            <a:ext cx="10424160" cy="3840480"/>
           </a:xfrm>
           <a:prstGeom prst="rect">
             <a:avLst/>
@@ -6892,7 +6894,7 @@
               <a:buChar char="▸"/>
             </a:pPr>
             <a:r>
-              <a:rPr lang="en-US" sz="1600" dirty="0">
+              <a:rPr lang="en-US" sz="2000" dirty="0">
                 <a:solidFill>
                   <a:srgbClr val="CBD5E1"/>
                 </a:solidFill>
@@ -6902,7 +6904,7 @@
               </a:rPr>
               <a:t>Silent truncation, schema drift, and stale schedules never announce themselves.</a:t>
             </a:r>
-            <a:endParaRPr lang="en-US" sz="1600" dirty="0"/>
+            <a:endParaRPr lang="en-US" sz="2000" dirty="0"/>
           </a:p>
           <a:p>
             <a:pPr marL="342900" indent="-342900">
@@ -6916,7 +6918,7 @@
               <a:buChar char="▸"/>
             </a:pPr>
             <a:r>
-              <a:rPr lang="en-US" sz="1600" dirty="0">
+              <a:rPr lang="en-US" sz="2000" dirty="0">
                 <a:solidFill>
                   <a:srgbClr val="CBD5E1"/>
                 </a:solidFill>
@@ -6926,7 +6928,7 @@
               </a:rPr>
               <a:t>Nobody notices for weeks - then leadership quotes the wrong number in a meeting.</a:t>
             </a:r>
-            <a:endParaRPr lang="en-US" sz="1600" dirty="0"/>
+            <a:endParaRPr lang="en-US" sz="2000" dirty="0"/>
           </a:p>
           <a:p>
             <a:pPr marL="342900" indent="-342900">
@@ -6940,7 +6942,7 @@
               <a:buChar char="▸"/>
             </a:pPr>
             <a:r>
-              <a:rPr lang="en-US" sz="1600" dirty="0">
+              <a:rPr lang="en-US" sz="2000" dirty="0">
                 <a:solidFill>
                   <a:srgbClr val="CBD5E1"/>
                 </a:solidFill>
@@ -6950,7 +6952,7 @@
               </a:rPr>
               <a:t>The pipeline that 'works' is the most dangerous one, because nobody checks it.</a:t>
             </a:r>
-            <a:endParaRPr lang="en-US" sz="1600" dirty="0"/>
+            <a:endParaRPr lang="en-US" sz="2000" dirty="0"/>
           </a:p>
           <a:p>
             <a:pPr marL="342900" indent="-342900">
@@ -6964,7 +6966,7 @@
               <a:buChar char="▸"/>
             </a:pPr>
             <a:r>
-              <a:rPr lang="en-US" sz="1600" dirty="0">
+              <a:rPr lang="en-US" sz="2000" dirty="0">
                 <a:solidFill>
                   <a:srgbClr val="CBD5E1"/>
                 </a:solidFill>
@@ -6974,7 +6976,7 @@
               </a:rPr>
               <a:t>Loud failures get fixed the same day; quiet failures get fixed never.</a:t>
             </a:r>
-            <a:endParaRPr lang="en-US" sz="1600" dirty="0"/>
+            <a:endParaRPr lang="en-US" sz="2000" dirty="0"/>
           </a:p>
           <a:p>
             <a:pPr marL="342900" indent="-342900">
@@ -6988,7 +6990,7 @@
               <a:buChar char="▸"/>
             </a:pPr>
             <a:r>
-              <a:rPr lang="en-US" sz="1600" dirty="0">
+              <a:rPr lang="en-US" sz="2000" dirty="0">
                 <a:solidFill>
                   <a:srgbClr val="CBD5E1"/>
                 </a:solidFill>
@@ -6998,7 +7000,7 @@
               </a:rPr>
               <a:t>The design goal is not fewer failures - it is failures that cannot stay silent.</a:t>
             </a:r>
-            <a:endParaRPr lang="en-US" sz="1600" dirty="0"/>
+            <a:endParaRPr lang="en-US" sz="2000" dirty="0"/>
           </a:p>
         </p:txBody>
       </p:sp>
@@ -7033,8 +7035,8 @@
         </p:nvSpPr>
         <p:spPr>
           <a:xfrm>
-            <a:off x="822960" y="6053328"/>
-            <a:ext cx="9692640" cy="457200"/>
+            <a:off x="822960" y="6035040"/>
+            <a:ext cx="10424160" cy="566928"/>
           </a:xfrm>
           <a:prstGeom prst="rect">
             <a:avLst/>
@@ -7050,9 +7052,9 @@
               <a:buNone/>
             </a:pPr>
             <a:r>
-              <a:rPr lang="en-US" sz="1150" dirty="0">
-                <a:solidFill>
-                  <a:srgbClr val="64748B"/>
+              <a:rPr lang="en-US" sz="1800" dirty="0">
+                <a:solidFill>
+                  <a:srgbClr val="8FA3BF"/>
                 </a:solidFill>
                 <a:latin typeface="Segoe UI" pitchFamily="34" charset="0"/>
                 <a:ea typeface="Segoe UI" pitchFamily="34" charset="-122"/>
@@ -7060,7 +7062,7 @@
               </a:rPr>
               <a:t>Every principle in this playbook exists to make failure loud.</a:t>
             </a:r>
-            <a:endParaRPr lang="en-US" sz="1150" dirty="0"/>
+            <a:endParaRPr lang="en-US" sz="1800" dirty="0"/>
           </a:p>
         </p:txBody>
       </p:sp>
@@ -7072,8 +7074,8 @@
         </p:nvSpPr>
         <p:spPr>
           <a:xfrm>
-            <a:off x="10698480" y="6382512"/>
-            <a:ext cx="1188720" cy="365760"/>
+            <a:off x="10698480" y="6309360"/>
+            <a:ext cx="1188720" cy="411480"/>
           </a:xfrm>
           <a:prstGeom prst="rect">
             <a:avLst/>
@@ -7089,9 +7091,9 @@
               <a:buNone/>
             </a:pPr>
             <a:r>
-              <a:rPr lang="en-US" sz="1000" dirty="0">
-                <a:solidFill>
-                  <a:srgbClr val="64748B"/>
+              <a:rPr lang="en-US" sz="1800" dirty="0">
+                <a:solidFill>
+                  <a:srgbClr val="8FA3BF"/>
                 </a:solidFill>
                 <a:latin typeface="Consolas" pitchFamily="34" charset="0"/>
                 <a:ea typeface="Consolas" pitchFamily="34" charset="-122"/>
@@ -7099,7 +7101,7 @@
               </a:rPr>
               <a:t>3 / 14</a:t>
             </a:r>
-            <a:endParaRPr lang="en-US" sz="1000" dirty="0"/>
+            <a:endParaRPr lang="en-US" sz="1800" dirty="0"/>
           </a:p>
         </p:txBody>
       </p:sp>
@@ -7183,8 +7185,8 @@
         </p:nvSpPr>
         <p:spPr>
           <a:xfrm>
-            <a:off x="822960" y="502920"/>
-            <a:ext cx="10515600" cy="365760"/>
+            <a:off x="822960" y="457200"/>
+            <a:ext cx="10515600" cy="411480"/>
           </a:xfrm>
           <a:prstGeom prst="rect">
             <a:avLst/>
@@ -7200,7 +7202,7 @@
               <a:buNone/>
             </a:pPr>
             <a:r>
-              <a:rPr lang="en-US" sz="1200" spc="300" kern="0" dirty="0">
+              <a:rPr lang="en-US" sz="1800" spc="300" kern="0" dirty="0">
                 <a:solidFill>
                   <a:srgbClr val="06B6D4"/>
                 </a:solidFill>
@@ -7210,7 +7212,7 @@
               </a:rPr>
               <a:t>THE ARENA</a:t>
             </a:r>
-            <a:endParaRPr lang="en-US" sz="1200" dirty="0"/>
+            <a:endParaRPr lang="en-US" sz="1800" dirty="0"/>
           </a:p>
         </p:txBody>
       </p:sp>
@@ -7261,8 +7263,8 @@
         </p:nvSpPr>
         <p:spPr>
           <a:xfrm>
-            <a:off x="822960" y="2194560"/>
-            <a:ext cx="2423160" cy="2697480"/>
+            <a:off x="822960" y="1965960"/>
+            <a:ext cx="2423160" cy="3154680"/>
           </a:xfrm>
           <a:prstGeom prst="roundRect">
             <a:avLst>
@@ -7288,7 +7290,7 @@
         </p:nvSpPr>
         <p:spPr>
           <a:xfrm>
-            <a:off x="960120" y="2514600"/>
+            <a:off x="960120" y="2194560"/>
             <a:ext cx="2148840" cy="914400"/>
           </a:xfrm>
           <a:prstGeom prst="rect">
@@ -7327,8 +7329,8 @@
         </p:nvSpPr>
         <p:spPr>
           <a:xfrm>
-            <a:off x="960120" y="3520440"/>
-            <a:ext cx="2148840" cy="502920"/>
+            <a:off x="960120" y="3200400"/>
+            <a:ext cx="2148840" cy="868680"/>
           </a:xfrm>
           <a:prstGeom prst="rect">
             <a:avLst/>
@@ -7344,7 +7346,7 @@
               <a:buNone/>
             </a:pPr>
             <a:r>
-              <a:rPr lang="en-US" sz="1450" b="1" dirty="0">
+              <a:rPr lang="en-US" sz="1800" b="1" dirty="0">
                 <a:solidFill>
                   <a:srgbClr val="FFFFFF"/>
                 </a:solidFill>
@@ -7354,7 +7356,7 @@
               </a:rPr>
               <a:t>Markets supported</a:t>
             </a:r>
-            <a:endParaRPr lang="en-US" sz="1450" dirty="0"/>
+            <a:endParaRPr lang="en-US" sz="1800" dirty="0"/>
           </a:p>
         </p:txBody>
       </p:sp>
@@ -7366,8 +7368,8 @@
         </p:nvSpPr>
         <p:spPr>
           <a:xfrm>
-            <a:off x="1005840" y="4069080"/>
-            <a:ext cx="2057400" cy="685800"/>
+            <a:off x="1005840" y="4114800"/>
+            <a:ext cx="2057400" cy="914400"/>
           </a:xfrm>
           <a:prstGeom prst="rect">
             <a:avLst/>
@@ -7383,7 +7385,7 @@
               <a:buNone/>
             </a:pPr>
             <a:r>
-              <a:rPr lang="en-US" sz="1050" dirty="0">
+              <a:rPr lang="en-US" sz="1800" dirty="0">
                 <a:solidFill>
                   <a:srgbClr val="94A3B8"/>
                 </a:solidFill>
@@ -7393,7 +7395,7 @@
               </a:rPr>
               <a:t>Indonesia, Taiwan, Hong Kong, and Macau reporting from one datalake.</a:t>
             </a:r>
-            <a:endParaRPr lang="en-US" sz="1050" dirty="0"/>
+            <a:endParaRPr lang="en-US" sz="1800" dirty="0"/>
           </a:p>
         </p:txBody>
       </p:sp>
@@ -7405,8 +7407,8 @@
         </p:nvSpPr>
         <p:spPr>
           <a:xfrm>
-            <a:off x="3520440" y="2194560"/>
-            <a:ext cx="2423160" cy="2697480"/>
+            <a:off x="3520440" y="1965960"/>
+            <a:ext cx="2423160" cy="3154680"/>
           </a:xfrm>
           <a:prstGeom prst="roundRect">
             <a:avLst>
@@ -7432,7 +7434,7 @@
         </p:nvSpPr>
         <p:spPr>
           <a:xfrm>
-            <a:off x="3657600" y="2514600"/>
+            <a:off x="3657600" y="2194560"/>
             <a:ext cx="2148840" cy="914400"/>
           </a:xfrm>
           <a:prstGeom prst="rect">
@@ -7471,8 +7473,8 @@
         </p:nvSpPr>
         <p:spPr>
           <a:xfrm>
-            <a:off x="3657600" y="3520440"/>
-            <a:ext cx="2148840" cy="502920"/>
+            <a:off x="3657600" y="3200400"/>
+            <a:ext cx="2148840" cy="868680"/>
           </a:xfrm>
           <a:prstGeom prst="rect">
             <a:avLst/>
@@ -7488,7 +7490,7 @@
               <a:buNone/>
             </a:pPr>
             <a:r>
-              <a:rPr lang="en-US" sz="1450" b="1" dirty="0">
+              <a:rPr lang="en-US" sz="1800" b="1" dirty="0">
                 <a:solidFill>
                   <a:srgbClr val="FFFFFF"/>
                 </a:solidFill>
@@ -7498,7 +7500,7 @@
               </a:rPr>
               <a:t>Loads reconciled</a:t>
             </a:r>
-            <a:endParaRPr lang="en-US" sz="1450" dirty="0"/>
+            <a:endParaRPr lang="en-US" sz="1800" dirty="0"/>
           </a:p>
         </p:txBody>
       </p:sp>
@@ -7510,8 +7512,8 @@
         </p:nvSpPr>
         <p:spPr>
           <a:xfrm>
-            <a:off x="3703320" y="4069080"/>
-            <a:ext cx="2057400" cy="685800"/>
+            <a:off x="3703320" y="4114800"/>
+            <a:ext cx="2057400" cy="914400"/>
           </a:xfrm>
           <a:prstGeom prst="rect">
             <a:avLst/>
@@ -7527,7 +7529,7 @@
               <a:buNone/>
             </a:pPr>
             <a:r>
-              <a:rPr lang="en-US" sz="1050" dirty="0">
+              <a:rPr lang="en-US" sz="1800" dirty="0">
                 <a:solidFill>
                   <a:srgbClr val="94A3B8"/>
                 </a:solidFill>
@@ -7537,7 +7539,7 @@
               </a:rPr>
               <a:t>Every boundary crossing gets checks - not a quarterly audit.</a:t>
             </a:r>
-            <a:endParaRPr lang="en-US" sz="1050" dirty="0"/>
+            <a:endParaRPr lang="en-US" sz="1800" dirty="0"/>
           </a:p>
         </p:txBody>
       </p:sp>
@@ -7549,8 +7551,8 @@
         </p:nvSpPr>
         <p:spPr>
           <a:xfrm>
-            <a:off x="6217920" y="2194560"/>
-            <a:ext cx="2423160" cy="2697480"/>
+            <a:off x="6217920" y="1965960"/>
+            <a:ext cx="2423160" cy="3154680"/>
           </a:xfrm>
           <a:prstGeom prst="roundRect">
             <a:avLst>
@@ -7576,7 +7578,7 @@
         </p:nvSpPr>
         <p:spPr>
           <a:xfrm>
-            <a:off x="6355080" y="2514600"/>
+            <a:off x="6355080" y="2194560"/>
             <a:ext cx="2148840" cy="914400"/>
           </a:xfrm>
           <a:prstGeom prst="rect">
@@ -7615,8 +7617,8 @@
         </p:nvSpPr>
         <p:spPr>
           <a:xfrm>
-            <a:off x="6355080" y="3520440"/>
-            <a:ext cx="2148840" cy="502920"/>
+            <a:off x="6355080" y="3200400"/>
+            <a:ext cx="2148840" cy="868680"/>
           </a:xfrm>
           <a:prstGeom prst="rect">
             <a:avLst/>
@@ -7632,7 +7634,7 @@
               <a:buNone/>
             </a:pPr>
             <a:r>
-              <a:rPr lang="en-US" sz="1450" b="1" dirty="0">
+              <a:rPr lang="en-US" sz="1800" b="1" dirty="0">
                 <a:solidFill>
                   <a:srgbClr val="FFFFFF"/>
                 </a:solidFill>
@@ -7642,7 +7644,7 @@
               </a:rPr>
               <a:t>Undocumented quirks</a:t>
             </a:r>
-            <a:endParaRPr lang="en-US" sz="1450" dirty="0"/>
+            <a:endParaRPr lang="en-US" sz="1800" dirty="0"/>
           </a:p>
         </p:txBody>
       </p:sp>
@@ -7654,8 +7656,8 @@
         </p:nvSpPr>
         <p:spPr>
           <a:xfrm>
-            <a:off x="6400800" y="4069080"/>
-            <a:ext cx="2057400" cy="685800"/>
+            <a:off x="6400800" y="4114800"/>
+            <a:ext cx="2057400" cy="914400"/>
           </a:xfrm>
           <a:prstGeom prst="rect">
             <a:avLst/>
@@ -7671,7 +7673,7 @@
               <a:buNone/>
             </a:pPr>
             <a:r>
-              <a:rPr lang="en-US" sz="1050" dirty="0">
+              <a:rPr lang="en-US" sz="1800" dirty="0">
                 <a:solidFill>
                   <a:srgbClr val="94A3B8"/>
                 </a:solidFill>
@@ -7681,7 +7683,7 @@
               </a:rPr>
               <a:t>Half of data quality issues trace to undocumented source behavior.</a:t>
             </a:r>
-            <a:endParaRPr lang="en-US" sz="1050" dirty="0"/>
+            <a:endParaRPr lang="en-US" sz="1800" dirty="0"/>
           </a:p>
         </p:txBody>
       </p:sp>
@@ -7693,8 +7695,8 @@
         </p:nvSpPr>
         <p:spPr>
           <a:xfrm>
-            <a:off x="8915400" y="2194560"/>
-            <a:ext cx="2423160" cy="2697480"/>
+            <a:off x="8915400" y="1965960"/>
+            <a:ext cx="2423160" cy="3154680"/>
           </a:xfrm>
           <a:prstGeom prst="roundRect">
             <a:avLst>
@@ -7720,7 +7722,7 @@
         </p:nvSpPr>
         <p:spPr>
           <a:xfrm>
-            <a:off x="9052560" y="2514600"/>
+            <a:off x="9052560" y="2194560"/>
             <a:ext cx="2148840" cy="914400"/>
           </a:xfrm>
           <a:prstGeom prst="rect">
@@ -7759,8 +7761,8 @@
         </p:nvSpPr>
         <p:spPr>
           <a:xfrm>
-            <a:off x="9052560" y="3520440"/>
-            <a:ext cx="2148840" cy="502920"/>
+            <a:off x="9052560" y="3200400"/>
+            <a:ext cx="2148840" cy="868680"/>
           </a:xfrm>
           <a:prstGeom prst="rect">
             <a:avLst/>
@@ -7776,7 +7778,7 @@
               <a:buNone/>
             </a:pPr>
             <a:r>
-              <a:rPr lang="en-US" sz="1450" b="1" dirty="0">
+              <a:rPr lang="en-US" sz="1800" b="1" dirty="0">
                 <a:solidFill>
                   <a:srgbClr val="FFFFFF"/>
                 </a:solidFill>
@@ -7786,7 +7788,7 @@
               </a:rPr>
               <a:t>Quality principles</a:t>
             </a:r>
-            <a:endParaRPr lang="en-US" sz="1450" dirty="0"/>
+            <a:endParaRPr lang="en-US" sz="1800" dirty="0"/>
           </a:p>
         </p:txBody>
       </p:sp>
@@ -7798,8 +7800,8 @@
         </p:nvSpPr>
         <p:spPr>
           <a:xfrm>
-            <a:off x="9098280" y="4069080"/>
-            <a:ext cx="2057400" cy="685800"/>
+            <a:off x="9098280" y="4114800"/>
+            <a:ext cx="2057400" cy="914400"/>
           </a:xfrm>
           <a:prstGeom prst="rect">
             <a:avLst/>
@@ -7815,7 +7817,7 @@
               <a:buNone/>
             </a:pPr>
             <a:r>
-              <a:rPr lang="en-US" sz="1050" dirty="0">
+              <a:rPr lang="en-US" sz="1800" dirty="0">
                 <a:solidFill>
                   <a:srgbClr val="94A3B8"/>
                 </a:solidFill>
@@ -7825,7 +7827,7 @@
               </a:rPr>
               <a:t>The playbook this deck walks through, applied to every source.</a:t>
             </a:r>
-            <a:endParaRPr lang="en-US" sz="1050" dirty="0"/>
+            <a:endParaRPr lang="en-US" sz="1800" dirty="0"/>
           </a:p>
         </p:txBody>
       </p:sp>
@@ -7837,7 +7839,7 @@
         </p:nvSpPr>
         <p:spPr>
           <a:xfrm>
-            <a:off x="822960" y="5413248"/>
+            <a:off x="822960" y="5321808"/>
             <a:ext cx="10515600" cy="0"/>
           </a:xfrm>
           <a:prstGeom prst="line">
@@ -7860,8 +7862,8 @@
         </p:nvSpPr>
         <p:spPr>
           <a:xfrm>
-            <a:off x="822960" y="5504688"/>
-            <a:ext cx="10424160" cy="411480"/>
+            <a:off x="822960" y="5394960"/>
+            <a:ext cx="10424160" cy="502920"/>
           </a:xfrm>
           <a:prstGeom prst="rect">
             <a:avLst/>
@@ -7877,7 +7879,7 @@
               <a:buNone/>
             </a:pPr>
             <a:r>
-              <a:rPr lang="en-US" sz="1300" i="1" dirty="0">
+              <a:rPr lang="en-US" sz="1800" i="1" dirty="0">
                 <a:solidFill>
                   <a:srgbClr val="06B6D4"/>
                 </a:solidFill>
@@ -7887,7 +7889,7 @@
               </a:rPr>
               <a:t>→  Run as Regional Business Intelligence Specialist for IKEA Indonesia.</a:t>
             </a:r>
-            <a:endParaRPr lang="en-US" sz="1300" dirty="0"/>
+            <a:endParaRPr lang="en-US" sz="1800" dirty="0"/>
           </a:p>
         </p:txBody>
       </p:sp>
@@ -7899,8 +7901,8 @@
         </p:nvSpPr>
         <p:spPr>
           <a:xfrm>
-            <a:off x="10698480" y="6382512"/>
-            <a:ext cx="1188720" cy="365760"/>
+            <a:off x="10698480" y="6309360"/>
+            <a:ext cx="1188720" cy="411480"/>
           </a:xfrm>
           <a:prstGeom prst="rect">
             <a:avLst/>
@@ -7916,9 +7918,9 @@
               <a:buNone/>
             </a:pPr>
             <a:r>
-              <a:rPr lang="en-US" sz="1000" dirty="0">
-                <a:solidFill>
-                  <a:srgbClr val="64748B"/>
+              <a:rPr lang="en-US" sz="1800" dirty="0">
+                <a:solidFill>
+                  <a:srgbClr val="8FA3BF"/>
                 </a:solidFill>
                 <a:latin typeface="Consolas" pitchFamily="34" charset="0"/>
                 <a:ea typeface="Consolas" pitchFamily="34" charset="-122"/>
@@ -7926,7 +7928,7 @@
               </a:rPr>
               <a:t>4 / 14</a:t>
             </a:r>
-            <a:endParaRPr lang="en-US" sz="1000" dirty="0"/>
+            <a:endParaRPr lang="en-US" sz="1800" dirty="0"/>
           </a:p>
         </p:txBody>
       </p:sp>
@@ -8010,8 +8012,8 @@
         </p:nvSpPr>
         <p:spPr>
           <a:xfrm>
-            <a:off x="822960" y="502920"/>
-            <a:ext cx="10515600" cy="365760"/>
+            <a:off x="822960" y="457200"/>
+            <a:ext cx="10515600" cy="411480"/>
           </a:xfrm>
           <a:prstGeom prst="rect">
             <a:avLst/>
@@ -8027,7 +8029,7 @@
               <a:buNone/>
             </a:pPr>
             <a:r>
-              <a:rPr lang="en-US" sz="1200" spc="300" kern="0" dirty="0">
+              <a:rPr lang="en-US" sz="1800" spc="300" kern="0" dirty="0">
                 <a:solidFill>
                   <a:srgbClr val="06B6D4"/>
                 </a:solidFill>
@@ -8037,7 +8039,7 @@
               </a:rPr>
               <a:t>ARCHITECTURE</a:t>
             </a:r>
-            <a:endParaRPr lang="en-US" sz="1200" dirty="0"/>
+            <a:endParaRPr lang="en-US" sz="1800" dirty="0"/>
           </a:p>
         </p:txBody>
       </p:sp>
@@ -8088,8 +8090,8 @@
         </p:nvSpPr>
         <p:spPr>
           <a:xfrm>
-            <a:off x="774040" y="2514600"/>
-            <a:ext cx="1938528" cy="2103120"/>
+            <a:off x="774040" y="2331720"/>
+            <a:ext cx="1938528" cy="2697480"/>
           </a:xfrm>
           <a:prstGeom prst="roundRect">
             <a:avLst>
@@ -8115,8 +8117,8 @@
         </p:nvSpPr>
         <p:spPr>
           <a:xfrm>
-            <a:off x="902056" y="2633472"/>
-            <a:ext cx="1682496" cy="310896"/>
+            <a:off x="902056" y="2450592"/>
+            <a:ext cx="1682496" cy="365760"/>
           </a:xfrm>
           <a:prstGeom prst="rect">
             <a:avLst/>
@@ -8132,7 +8134,7 @@
               <a:buNone/>
             </a:pPr>
             <a:r>
-              <a:rPr lang="en-US" sz="1100" b="1" dirty="0">
+              <a:rPr lang="en-US" sz="1800" b="1" dirty="0">
                 <a:solidFill>
                   <a:srgbClr val="3B82F6"/>
                 </a:solidFill>
@@ -8142,7 +8144,7 @@
               </a:rPr>
               <a:t>01</a:t>
             </a:r>
-            <a:endParaRPr lang="en-US" sz="1100" dirty="0"/>
+            <a:endParaRPr lang="en-US" sz="1800" dirty="0"/>
           </a:p>
         </p:txBody>
       </p:sp>
@@ -8154,8 +8156,8 @@
         </p:nvSpPr>
         <p:spPr>
           <a:xfrm>
-            <a:off x="902056" y="2962656"/>
-            <a:ext cx="1682496" cy="566928"/>
+            <a:off x="902056" y="2834640"/>
+            <a:ext cx="1682496" cy="713232"/>
           </a:xfrm>
           <a:prstGeom prst="rect">
             <a:avLst/>
@@ -8171,7 +8173,7 @@
               <a:buNone/>
             </a:pPr>
             <a:r>
-              <a:rPr lang="en-US" sz="1350" b="1" dirty="0">
+              <a:rPr lang="en-US" sz="1800" b="1" dirty="0">
                 <a:solidFill>
                   <a:srgbClr val="FFFFFF"/>
                 </a:solidFill>
@@ -8181,7 +8183,7 @@
               </a:rPr>
               <a:t>Extract</a:t>
             </a:r>
-            <a:endParaRPr lang="en-US" sz="1350" dirty="0"/>
+            <a:endParaRPr lang="en-US" sz="1800" dirty="0"/>
           </a:p>
         </p:txBody>
       </p:sp>
@@ -8193,8 +8195,8 @@
         </p:nvSpPr>
         <p:spPr>
           <a:xfrm>
-            <a:off x="902056" y="3566160"/>
-            <a:ext cx="1682496" cy="960120"/>
+            <a:off x="902056" y="3584448"/>
+            <a:ext cx="1682496" cy="1371600"/>
           </a:xfrm>
           <a:prstGeom prst="rect">
             <a:avLst/>
@@ -8210,7 +8212,7 @@
               <a:buNone/>
             </a:pPr>
             <a:r>
-              <a:rPr lang="en-US" sz="980" dirty="0">
+              <a:rPr lang="en-US" sz="1800" dirty="0">
                 <a:solidFill>
                   <a:srgbClr val="CBD5E1"/>
                 </a:solidFill>
@@ -8220,7 +8222,7 @@
               </a:rPr>
               <a:t>Alteryx schedules pull from regional store systems on a known cadence.</a:t>
             </a:r>
-            <a:endParaRPr lang="en-US" sz="980" dirty="0"/>
+            <a:endParaRPr lang="en-US" sz="1800" dirty="0"/>
           </a:p>
         </p:txBody>
       </p:sp>
@@ -8232,7 +8234,7 @@
         </p:nvSpPr>
         <p:spPr>
           <a:xfrm>
-            <a:off x="2726284" y="3419856"/>
+            <a:off x="2726284" y="3566160"/>
             <a:ext cx="210312" cy="274320"/>
           </a:xfrm>
           <a:prstGeom prst="rightArrow">
@@ -8252,8 +8254,8 @@
         </p:nvSpPr>
         <p:spPr>
           <a:xfrm>
-            <a:off x="2950312" y="2514600"/>
-            <a:ext cx="1938528" cy="2103120"/>
+            <a:off x="2950312" y="2331720"/>
+            <a:ext cx="1938528" cy="2697480"/>
           </a:xfrm>
           <a:prstGeom prst="roundRect">
             <a:avLst>
@@ -8279,8 +8281,8 @@
         </p:nvSpPr>
         <p:spPr>
           <a:xfrm>
-            <a:off x="3078328" y="2633472"/>
-            <a:ext cx="1682496" cy="310896"/>
+            <a:off x="3078328" y="2450592"/>
+            <a:ext cx="1682496" cy="365760"/>
           </a:xfrm>
           <a:prstGeom prst="rect">
             <a:avLst/>
@@ -8296,7 +8298,7 @@
               <a:buNone/>
             </a:pPr>
             <a:r>
-              <a:rPr lang="en-US" sz="1100" b="1" dirty="0">
+              <a:rPr lang="en-US" sz="1800" b="1" dirty="0">
                 <a:solidFill>
                   <a:srgbClr val="06B6D4"/>
                 </a:solidFill>
@@ -8306,7 +8308,7 @@
               </a:rPr>
               <a:t>02</a:t>
             </a:r>
-            <a:endParaRPr lang="en-US" sz="1100" dirty="0"/>
+            <a:endParaRPr lang="en-US" sz="1800" dirty="0"/>
           </a:p>
         </p:txBody>
       </p:sp>
@@ -8318,8 +8320,8 @@
         </p:nvSpPr>
         <p:spPr>
           <a:xfrm>
-            <a:off x="3078328" y="2962656"/>
-            <a:ext cx="1682496" cy="566928"/>
+            <a:off x="3078328" y="2834640"/>
+            <a:ext cx="1682496" cy="713232"/>
           </a:xfrm>
           <a:prstGeom prst="rect">
             <a:avLst/>
@@ -8335,7 +8337,7 @@
               <a:buNone/>
             </a:pPr>
             <a:r>
-              <a:rPr lang="en-US" sz="1350" b="1" dirty="0">
+              <a:rPr lang="en-US" sz="1800" b="1" dirty="0">
                 <a:solidFill>
                   <a:srgbClr val="FFFFFF"/>
                 </a:solidFill>
@@ -8345,7 +8347,7 @@
               </a:rPr>
               <a:t>Load</a:t>
             </a:r>
-            <a:endParaRPr lang="en-US" sz="1350" dirty="0"/>
+            <a:endParaRPr lang="en-US" sz="1800" dirty="0"/>
           </a:p>
         </p:txBody>
       </p:sp>
@@ -8357,8 +8359,8 @@
         </p:nvSpPr>
         <p:spPr>
           <a:xfrm>
-            <a:off x="3078328" y="3566160"/>
-            <a:ext cx="1682496" cy="960120"/>
+            <a:off x="3078328" y="3584448"/>
+            <a:ext cx="1682496" cy="1371600"/>
           </a:xfrm>
           <a:prstGeom prst="rect">
             <a:avLst/>
@@ -8374,7 +8376,7 @@
               <a:buNone/>
             </a:pPr>
             <a:r>
-              <a:rPr lang="en-US" sz="980" dirty="0">
+              <a:rPr lang="en-US" sz="1800" dirty="0">
                 <a:solidFill>
                   <a:srgbClr val="CBD5E1"/>
                 </a:solidFill>
@@ -8384,7 +8386,7 @@
               </a:rPr>
               <a:t>Landing into SQL Server with schema checks before anything is trusted.</a:t>
             </a:r>
-            <a:endParaRPr lang="en-US" sz="980" dirty="0"/>
+            <a:endParaRPr lang="en-US" sz="1800" dirty="0"/>
           </a:p>
         </p:txBody>
       </p:sp>
@@ -8396,7 +8398,7 @@
         </p:nvSpPr>
         <p:spPr>
           <a:xfrm>
-            <a:off x="4902556" y="3419856"/>
+            <a:off x="4902556" y="3566160"/>
             <a:ext cx="210312" cy="274320"/>
           </a:xfrm>
           <a:prstGeom prst="rightArrow">
@@ -8416,8 +8418,8 @@
         </p:nvSpPr>
         <p:spPr>
           <a:xfrm>
-            <a:off x="5126584" y="2514600"/>
-            <a:ext cx="1938528" cy="2103120"/>
+            <a:off x="5126584" y="2331720"/>
+            <a:ext cx="1938528" cy="2697480"/>
           </a:xfrm>
           <a:prstGeom prst="roundRect">
             <a:avLst>
@@ -8443,8 +8445,8 @@
         </p:nvSpPr>
         <p:spPr>
           <a:xfrm>
-            <a:off x="5254600" y="2633472"/>
-            <a:ext cx="1682496" cy="310896"/>
+            <a:off x="5254600" y="2450592"/>
+            <a:ext cx="1682496" cy="365760"/>
           </a:xfrm>
           <a:prstGeom prst="rect">
             <a:avLst/>
@@ -8460,7 +8462,7 @@
               <a:buNone/>
             </a:pPr>
             <a:r>
-              <a:rPr lang="en-US" sz="1100" b="1" dirty="0">
+              <a:rPr lang="en-US" sz="1800" b="1" dirty="0">
                 <a:solidFill>
                   <a:srgbClr val="3B82F6"/>
                 </a:solidFill>
@@ -8470,7 +8472,7 @@
               </a:rPr>
               <a:t>03</a:t>
             </a:r>
-            <a:endParaRPr lang="en-US" sz="1100" dirty="0"/>
+            <a:endParaRPr lang="en-US" sz="1800" dirty="0"/>
           </a:p>
         </p:txBody>
       </p:sp>
@@ -8482,8 +8484,8 @@
         </p:nvSpPr>
         <p:spPr>
           <a:xfrm>
-            <a:off x="5254600" y="2962656"/>
-            <a:ext cx="1682496" cy="566928"/>
+            <a:off x="5254600" y="2834640"/>
+            <a:ext cx="1682496" cy="713232"/>
           </a:xfrm>
           <a:prstGeom prst="rect">
             <a:avLst/>
@@ -8499,7 +8501,7 @@
               <a:buNone/>
             </a:pPr>
             <a:r>
-              <a:rPr lang="en-US" sz="1350" b="1" dirty="0">
+              <a:rPr lang="en-US" sz="1800" b="1" dirty="0">
                 <a:solidFill>
                   <a:srgbClr val="FFFFFF"/>
                 </a:solidFill>
@@ -8509,7 +8511,7 @@
               </a:rPr>
               <a:t>Reconcile</a:t>
             </a:r>
-            <a:endParaRPr lang="en-US" sz="1350" dirty="0"/>
+            <a:endParaRPr lang="en-US" sz="1800" dirty="0"/>
           </a:p>
         </p:txBody>
       </p:sp>
@@ -8521,8 +8523,8 @@
         </p:nvSpPr>
         <p:spPr>
           <a:xfrm>
-            <a:off x="5254600" y="3566160"/>
-            <a:ext cx="1682496" cy="960120"/>
+            <a:off x="5254600" y="3584448"/>
+            <a:ext cx="1682496" cy="1371600"/>
           </a:xfrm>
           <a:prstGeom prst="rect">
             <a:avLst/>
@@ -8538,7 +8540,7 @@
               <a:buNone/>
             </a:pPr>
             <a:r>
-              <a:rPr lang="en-US" sz="980" dirty="0">
+              <a:rPr lang="en-US" sz="1800" dirty="0">
                 <a:solidFill>
                   <a:srgbClr val="CBD5E1"/>
                 </a:solidFill>
@@ -8548,7 +8550,7 @@
               </a:rPr>
               <a:t>Row counts, sum checks, and sampled rows at every seam - every load.</a:t>
             </a:r>
-            <a:endParaRPr lang="en-US" sz="980" dirty="0"/>
+            <a:endParaRPr lang="en-US" sz="1800" dirty="0"/>
           </a:p>
         </p:txBody>
       </p:sp>
@@ -8560,7 +8562,7 @@
         </p:nvSpPr>
         <p:spPr>
           <a:xfrm>
-            <a:off x="7078828" y="3419856"/>
+            <a:off x="7078828" y="3566160"/>
             <a:ext cx="210312" cy="274320"/>
           </a:xfrm>
           <a:prstGeom prst="rightArrow">
@@ -8580,8 +8582,8 @@
         </p:nvSpPr>
         <p:spPr>
           <a:xfrm>
-            <a:off x="7302856" y="2514600"/>
-            <a:ext cx="1938528" cy="2103120"/>
+            <a:off x="7302856" y="2331720"/>
+            <a:ext cx="1938528" cy="2697480"/>
           </a:xfrm>
           <a:prstGeom prst="roundRect">
             <a:avLst>
@@ -8607,8 +8609,8 @@
         </p:nvSpPr>
         <p:spPr>
           <a:xfrm>
-            <a:off x="7430872" y="2633472"/>
-            <a:ext cx="1682496" cy="310896"/>
+            <a:off x="7430872" y="2450592"/>
+            <a:ext cx="1682496" cy="365760"/>
           </a:xfrm>
           <a:prstGeom prst="rect">
             <a:avLst/>
@@ -8624,7 +8626,7 @@
               <a:buNone/>
             </a:pPr>
             <a:r>
-              <a:rPr lang="en-US" sz="1100" b="1" dirty="0">
+              <a:rPr lang="en-US" sz="1800" b="1" dirty="0">
                 <a:solidFill>
                   <a:srgbClr val="06B6D4"/>
                 </a:solidFill>
@@ -8634,7 +8636,7 @@
               </a:rPr>
               <a:t>04</a:t>
             </a:r>
-            <a:endParaRPr lang="en-US" sz="1100" dirty="0"/>
+            <a:endParaRPr lang="en-US" sz="1800" dirty="0"/>
           </a:p>
         </p:txBody>
       </p:sp>
@@ -8646,8 +8648,8 @@
         </p:nvSpPr>
         <p:spPr>
           <a:xfrm>
-            <a:off x="7430872" y="2962656"/>
-            <a:ext cx="1682496" cy="566928"/>
+            <a:off x="7430872" y="2834640"/>
+            <a:ext cx="1682496" cy="713232"/>
           </a:xfrm>
           <a:prstGeom prst="rect">
             <a:avLst/>
@@ -8663,7 +8665,7 @@
               <a:buNone/>
             </a:pPr>
             <a:r>
-              <a:rPr lang="en-US" sz="1350" b="1" dirty="0">
+              <a:rPr lang="en-US" sz="1800" b="1" dirty="0">
                 <a:solidFill>
                   <a:srgbClr val="FFFFFF"/>
                 </a:solidFill>
@@ -8673,7 +8675,7 @@
               </a:rPr>
               <a:t>Serve</a:t>
             </a:r>
-            <a:endParaRPr lang="en-US" sz="1350" dirty="0"/>
+            <a:endParaRPr lang="en-US" sz="1800" dirty="0"/>
           </a:p>
         </p:txBody>
       </p:sp>
@@ -8685,8 +8687,8 @@
         </p:nvSpPr>
         <p:spPr>
           <a:xfrm>
-            <a:off x="7430872" y="3566160"/>
-            <a:ext cx="1682496" cy="960120"/>
+            <a:off x="7430872" y="3584448"/>
+            <a:ext cx="1682496" cy="1371600"/>
           </a:xfrm>
           <a:prstGeom prst="rect">
             <a:avLst/>
@@ -8702,7 +8704,7 @@
               <a:buNone/>
             </a:pPr>
             <a:r>
-              <a:rPr lang="en-US" sz="980" dirty="0">
+              <a:rPr lang="en-US" sz="1800" dirty="0">
                 <a:solidFill>
                   <a:srgbClr val="CBD5E1"/>
                 </a:solidFill>
@@ -8712,7 +8714,7 @@
               </a:rPr>
               <a:t>Qlik Sense dashboards subscribe to certified, reconciled models only.</a:t>
             </a:r>
-            <a:endParaRPr lang="en-US" sz="980" dirty="0"/>
+            <a:endParaRPr lang="en-US" sz="1800" dirty="0"/>
           </a:p>
         </p:txBody>
       </p:sp>
@@ -8724,7 +8726,7 @@
         </p:nvSpPr>
         <p:spPr>
           <a:xfrm>
-            <a:off x="9255100" y="3419856"/>
+            <a:off x="9255100" y="3566160"/>
             <a:ext cx="210312" cy="274320"/>
           </a:xfrm>
           <a:prstGeom prst="rightArrow">
@@ -8744,8 +8746,8 @@
         </p:nvSpPr>
         <p:spPr>
           <a:xfrm>
-            <a:off x="9479128" y="2514600"/>
-            <a:ext cx="1938528" cy="2103120"/>
+            <a:off x="9479128" y="2331720"/>
+            <a:ext cx="1938528" cy="2697480"/>
           </a:xfrm>
           <a:prstGeom prst="roundRect">
             <a:avLst>
@@ -8771,8 +8773,8 @@
         </p:nvSpPr>
         <p:spPr>
           <a:xfrm>
-            <a:off x="9607144" y="2633472"/>
-            <a:ext cx="1682496" cy="310896"/>
+            <a:off x="9607144" y="2450592"/>
+            <a:ext cx="1682496" cy="365760"/>
           </a:xfrm>
           <a:prstGeom prst="rect">
             <a:avLst/>
@@ -8788,7 +8790,7 @@
               <a:buNone/>
             </a:pPr>
             <a:r>
-              <a:rPr lang="en-US" sz="1100" b="1" dirty="0">
+              <a:rPr lang="en-US" sz="1800" b="1" dirty="0">
                 <a:solidFill>
                   <a:srgbClr val="3B82F6"/>
                 </a:solidFill>
@@ -8798,7 +8800,7 @@
               </a:rPr>
               <a:t>05</a:t>
             </a:r>
-            <a:endParaRPr lang="en-US" sz="1100" dirty="0"/>
+            <a:endParaRPr lang="en-US" sz="1800" dirty="0"/>
           </a:p>
         </p:txBody>
       </p:sp>
@@ -8810,8 +8812,8 @@
         </p:nvSpPr>
         <p:spPr>
           <a:xfrm>
-            <a:off x="9607144" y="2962656"/>
-            <a:ext cx="1682496" cy="566928"/>
+            <a:off x="9607144" y="2834640"/>
+            <a:ext cx="1682496" cy="713232"/>
           </a:xfrm>
           <a:prstGeom prst="rect">
             <a:avLst/>
@@ -8827,7 +8829,7 @@
               <a:buNone/>
             </a:pPr>
             <a:r>
-              <a:rPr lang="en-US" sz="1350" b="1" dirty="0">
+              <a:rPr lang="en-US" sz="1800" b="1" dirty="0">
                 <a:solidFill>
                   <a:srgbClr val="FFFFFF"/>
                 </a:solidFill>
@@ -8837,7 +8839,7 @@
               </a:rPr>
               <a:t>Monitor</a:t>
             </a:r>
-            <a:endParaRPr lang="en-US" sz="1350" dirty="0"/>
+            <a:endParaRPr lang="en-US" sz="1800" dirty="0"/>
           </a:p>
         </p:txBody>
       </p:sp>
@@ -8849,8 +8851,8 @@
         </p:nvSpPr>
         <p:spPr>
           <a:xfrm>
-            <a:off x="9607144" y="3566160"/>
-            <a:ext cx="1682496" cy="960120"/>
+            <a:off x="9607144" y="3584448"/>
+            <a:ext cx="1682496" cy="1371600"/>
           </a:xfrm>
           <a:prstGeom prst="rect">
             <a:avLst/>
@@ -8866,7 +8868,7 @@
               <a:buNone/>
             </a:pPr>
             <a:r>
-              <a:rPr lang="en-US" sz="980" dirty="0">
+              <a:rPr lang="en-US" sz="1800" dirty="0">
                 <a:solidFill>
                   <a:srgbClr val="CBD5E1"/>
                 </a:solidFill>
@@ -8876,7 +8878,7 @@
               </a:rPr>
               <a:t>Freshness alarms fire when any source runs late - before the CEO asks.</a:t>
             </a:r>
-            <a:endParaRPr lang="en-US" sz="980" dirty="0"/>
+            <a:endParaRPr lang="en-US" sz="1800" dirty="0"/>
           </a:p>
         </p:txBody>
       </p:sp>
@@ -8911,8 +8913,8 @@
         </p:nvSpPr>
         <p:spPr>
           <a:xfrm>
-            <a:off x="822960" y="6053328"/>
-            <a:ext cx="9692640" cy="457200"/>
+            <a:off x="822960" y="6035040"/>
+            <a:ext cx="10424160" cy="566928"/>
           </a:xfrm>
           <a:prstGeom prst="rect">
             <a:avLst/>
@@ -8928,9 +8930,9 @@
               <a:buNone/>
             </a:pPr>
             <a:r>
-              <a:rPr lang="en-US" sz="1150" dirty="0">
-                <a:solidFill>
-                  <a:srgbClr val="64748B"/>
+              <a:rPr lang="en-US" sz="1800" dirty="0">
+                <a:solidFill>
+                  <a:srgbClr val="8FA3BF"/>
                 </a:solidFill>
                 <a:latin typeface="Segoe UI" pitchFamily="34" charset="0"/>
                 <a:ea typeface="Segoe UI" pitchFamily="34" charset="-122"/>
@@ -8938,7 +8940,7 @@
               </a:rPr>
               <a:t>Reconciliation is a property of the pipeline, not a project.</a:t>
             </a:r>
-            <a:endParaRPr lang="en-US" sz="1150" dirty="0"/>
+            <a:endParaRPr lang="en-US" sz="1800" dirty="0"/>
           </a:p>
         </p:txBody>
       </p:sp>
@@ -8950,8 +8952,8 @@
         </p:nvSpPr>
         <p:spPr>
           <a:xfrm>
-            <a:off x="10698480" y="6382512"/>
-            <a:ext cx="1188720" cy="365760"/>
+            <a:off x="10698480" y="6309360"/>
+            <a:ext cx="1188720" cy="411480"/>
           </a:xfrm>
           <a:prstGeom prst="rect">
             <a:avLst/>
@@ -8967,9 +8969,9 @@
               <a:buNone/>
             </a:pPr>
             <a:r>
-              <a:rPr lang="en-US" sz="1000" dirty="0">
-                <a:solidFill>
-                  <a:srgbClr val="64748B"/>
+              <a:rPr lang="en-US" sz="1800" dirty="0">
+                <a:solidFill>
+                  <a:srgbClr val="8FA3BF"/>
                 </a:solidFill>
                 <a:latin typeface="Consolas" pitchFamily="34" charset="0"/>
                 <a:ea typeface="Consolas" pitchFamily="34" charset="-122"/>
@@ -8977,7 +8979,7 @@
               </a:rPr>
               <a:t>5 / 14</a:t>
             </a:r>
-            <a:endParaRPr lang="en-US" sz="1000" dirty="0"/>
+            <a:endParaRPr lang="en-US" sz="1800" dirty="0"/>
           </a:p>
         </p:txBody>
       </p:sp>
@@ -9061,8 +9063,8 @@
         </p:nvSpPr>
         <p:spPr>
           <a:xfrm>
-            <a:off x="822960" y="502920"/>
-            <a:ext cx="10515600" cy="365760"/>
+            <a:off x="822960" y="457200"/>
+            <a:ext cx="10515600" cy="411480"/>
           </a:xfrm>
           <a:prstGeom prst="rect">
             <a:avLst/>
@@ -9078,7 +9080,7 @@
               <a:buNone/>
             </a:pPr>
             <a:r>
-              <a:rPr lang="en-US" sz="1200" spc="300" kern="0" dirty="0">
+              <a:rPr lang="en-US" sz="1800" spc="300" kern="0" dirty="0">
                 <a:solidFill>
                   <a:srgbClr val="06B6D4"/>
                 </a:solidFill>
@@ -9088,7 +9090,7 @@
               </a:rPr>
               <a:t>PRINCIPLE 1</a:t>
             </a:r>
-            <a:endParaRPr lang="en-US" sz="1200" dirty="0"/>
+            <a:endParaRPr lang="en-US" sz="1800" dirty="0"/>
           </a:p>
         </p:txBody>
       </p:sp>
@@ -9139,8 +9141,8 @@
         </p:nvSpPr>
         <p:spPr>
           <a:xfrm>
-            <a:off x="868680" y="2011680"/>
-            <a:ext cx="10424160" cy="3566160"/>
+            <a:off x="868680" y="1965960"/>
+            <a:ext cx="10424160" cy="3840480"/>
           </a:xfrm>
           <a:prstGeom prst="rect">
             <a:avLst/>
@@ -9163,7 +9165,7 @@
               <a:buChar char="▸"/>
             </a:pPr>
             <a:r>
-              <a:rPr lang="en-US" sz="1600" dirty="0">
+              <a:rPr lang="en-US" sz="2000" dirty="0">
                 <a:solidFill>
                   <a:srgbClr val="CBD5E1"/>
                 </a:solidFill>
@@ -9173,7 +9175,7 @@
               </a:rPr>
               <a:t>Every source gets a profile: expected row counts, key uniqueness, update cadence.</a:t>
             </a:r>
-            <a:endParaRPr lang="en-US" sz="1600" dirty="0"/>
+            <a:endParaRPr lang="en-US" sz="2000" dirty="0"/>
           </a:p>
           <a:p>
             <a:pPr marL="342900" indent="-342900">
@@ -9187,7 +9189,7 @@
               <a:buChar char="▸"/>
             </a:pPr>
             <a:r>
-              <a:rPr lang="en-US" sz="1600" dirty="0">
+              <a:rPr lang="en-US" sz="2000" dirty="0">
                 <a:solidFill>
                   <a:srgbClr val="CBD5E1"/>
                 </a:solidFill>
@@ -9197,7 +9199,7 @@
               </a:rPr>
               <a:t>Known quirks are documented per source, next to the pipeline that consumes it.</a:t>
             </a:r>
-            <a:endParaRPr lang="en-US" sz="1600" dirty="0"/>
+            <a:endParaRPr lang="en-US" sz="2000" dirty="0"/>
           </a:p>
           <a:p>
             <a:pPr marL="342900" indent="-342900">
@@ -9211,7 +9213,7 @@
               <a:buChar char="▸"/>
             </a:pPr>
             <a:r>
-              <a:rPr lang="en-US" sz="1600" dirty="0">
+              <a:rPr lang="en-US" sz="2000" dirty="0">
                 <a:solidFill>
                   <a:srgbClr val="CBD5E1"/>
                 </a:solidFill>
@@ -9221,7 +9223,7 @@
               </a:rPr>
               <a:t>Restated numbers, skipped Sundays, late posts - every source has a personality.</a:t>
             </a:r>
-            <a:endParaRPr lang="en-US" sz="1600" dirty="0"/>
+            <a:endParaRPr lang="en-US" sz="2000" dirty="0"/>
           </a:p>
           <a:p>
             <a:pPr marL="342900" indent="-342900">
@@ -9235,7 +9237,7 @@
               <a:buChar char="▸"/>
             </a:pPr>
             <a:r>
-              <a:rPr lang="en-US" sz="1600" dirty="0">
+              <a:rPr lang="en-US" sz="2000" dirty="0">
                 <a:solidFill>
                   <a:srgbClr val="CBD5E1"/>
                 </a:solidFill>
@@ -9245,7 +9247,7 @@
               </a:rPr>
               <a:t>Profiling turns 'the data is wrong' into 'this feed always restates yesterday'.</a:t>
             </a:r>
-            <a:endParaRPr lang="en-US" sz="1600" dirty="0"/>
+            <a:endParaRPr lang="en-US" sz="2000" dirty="0"/>
           </a:p>
           <a:p>
             <a:pPr marL="342900" indent="-342900">
@@ -9259,7 +9261,7 @@
               <a:buChar char="▸"/>
             </a:pPr>
             <a:r>
-              <a:rPr lang="en-US" sz="1600" dirty="0">
+              <a:rPr lang="en-US" sz="2000" dirty="0">
                 <a:solidFill>
                   <a:srgbClr val="CBD5E1"/>
                 </a:solidFill>
@@ -9269,7 +9271,7 @@
               </a:rPr>
               <a:t>Half of quality issues are simply behavior nobody wrote down.</a:t>
             </a:r>
-            <a:endParaRPr lang="en-US" sz="1600" dirty="0"/>
+            <a:endParaRPr lang="en-US" sz="2000" dirty="0"/>
           </a:p>
         </p:txBody>
       </p:sp>
@@ -9304,8 +9306,8 @@
         </p:nvSpPr>
         <p:spPr>
           <a:xfrm>
-            <a:off x="822960" y="6053328"/>
-            <a:ext cx="9692640" cy="457200"/>
+            <a:off x="822960" y="6035040"/>
+            <a:ext cx="10424160" cy="566928"/>
           </a:xfrm>
           <a:prstGeom prst="rect">
             <a:avLst/>
@@ -9321,9 +9323,9 @@
               <a:buNone/>
             </a:pPr>
             <a:r>
-              <a:rPr lang="en-US" sz="1150" dirty="0">
-                <a:solidFill>
-                  <a:srgbClr val="64748B"/>
+              <a:rPr lang="en-US" sz="1800" dirty="0">
+                <a:solidFill>
+                  <a:srgbClr val="8FA3BF"/>
                 </a:solidFill>
                 <a:latin typeface="Segoe UI" pitchFamily="34" charset="0"/>
                 <a:ea typeface="Segoe UI" pitchFamily="34" charset="-122"/>
@@ -9331,7 +9333,7 @@
               </a:rPr>
               <a:t>You cannot validate against expectations you never defined.</a:t>
             </a:r>
-            <a:endParaRPr lang="en-US" sz="1150" dirty="0"/>
+            <a:endParaRPr lang="en-US" sz="1800" dirty="0"/>
           </a:p>
         </p:txBody>
       </p:sp>
@@ -9343,8 +9345,8 @@
         </p:nvSpPr>
         <p:spPr>
           <a:xfrm>
-            <a:off x="10698480" y="6382512"/>
-            <a:ext cx="1188720" cy="365760"/>
+            <a:off x="10698480" y="6309360"/>
+            <a:ext cx="1188720" cy="411480"/>
           </a:xfrm>
           <a:prstGeom prst="rect">
             <a:avLst/>
@@ -9360,9 +9362,9 @@
               <a:buNone/>
             </a:pPr>
             <a:r>
-              <a:rPr lang="en-US" sz="1000" dirty="0">
-                <a:solidFill>
-                  <a:srgbClr val="64748B"/>
+              <a:rPr lang="en-US" sz="1800" dirty="0">
+                <a:solidFill>
+                  <a:srgbClr val="8FA3BF"/>
                 </a:solidFill>
                 <a:latin typeface="Consolas" pitchFamily="34" charset="0"/>
                 <a:ea typeface="Consolas" pitchFamily="34" charset="-122"/>
@@ -9370,7 +9372,7 @@
               </a:rPr>
               <a:t>6 / 14</a:t>
             </a:r>
-            <a:endParaRPr lang="en-US" sz="1000" dirty="0"/>
+            <a:endParaRPr lang="en-US" sz="1800" dirty="0"/>
           </a:p>
         </p:txBody>
       </p:sp>
@@ -9454,8 +9456,8 @@
         </p:nvSpPr>
         <p:spPr>
           <a:xfrm>
-            <a:off x="822960" y="502920"/>
-            <a:ext cx="10515600" cy="365760"/>
+            <a:off x="822960" y="457200"/>
+            <a:ext cx="10515600" cy="411480"/>
           </a:xfrm>
           <a:prstGeom prst="rect">
             <a:avLst/>
@@ -9471,7 +9473,7 @@
               <a:buNone/>
             </a:pPr>
             <a:r>
-              <a:rPr lang="en-US" sz="1200" spc="300" kern="0" dirty="0">
+              <a:rPr lang="en-US" sz="1800" spc="300" kern="0" dirty="0">
                 <a:solidFill>
                   <a:srgbClr val="06B6D4"/>
                 </a:solidFill>
@@ -9481,7 +9483,7 @@
               </a:rPr>
               <a:t>DIAGNOSIS</a:t>
             </a:r>
-            <a:endParaRPr lang="en-US" sz="1200" dirty="0"/>
+            <a:endParaRPr lang="en-US" sz="1800" dirty="0"/>
           </a:p>
         </p:txBody>
       </p:sp>
@@ -9531,8 +9533,8 @@
           <p:nvPr/>
         </p:nvGraphicFramePr>
         <p:xfrm>
-          <a:off x="822960" y="1874520"/>
-          <a:ext cx="10515600" cy="3337560"/>
+          <a:off x="822960" y="1783080"/>
+          <a:ext cx="10515600" cy="3383280"/>
         </p:xfrm>
         <a:graphic xmlns:a="http://schemas.openxmlformats.org/drawingml/2006/main">
           <a:graphicData uri="http://schemas.openxmlformats.org/drawingml/2006/chart">
@@ -9548,7 +9550,7 @@
         </p:nvSpPr>
         <p:spPr>
           <a:xfrm>
-            <a:off x="822960" y="5413248"/>
+            <a:off x="822960" y="5321808"/>
             <a:ext cx="10515600" cy="0"/>
           </a:xfrm>
           <a:prstGeom prst="line">
@@ -9571,8 +9573,8 @@
         </p:nvSpPr>
         <p:spPr>
           <a:xfrm>
-            <a:off x="822960" y="5504688"/>
-            <a:ext cx="10424160" cy="411480"/>
+            <a:off x="822960" y="5394960"/>
+            <a:ext cx="10424160" cy="502920"/>
           </a:xfrm>
           <a:prstGeom prst="rect">
             <a:avLst/>
@@ -9588,7 +9590,7 @@
               <a:buNone/>
             </a:pPr>
             <a:r>
-              <a:rPr lang="en-US" sz="1300" i="1" dirty="0">
+              <a:rPr lang="en-US" sz="1800" i="1" dirty="0">
                 <a:solidFill>
                   <a:srgbClr val="06B6D4"/>
                 </a:solidFill>
@@ -9598,7 +9600,7 @@
               </a:rPr>
               <a:t>→  Half of 'quality issues' are undocumented source behavior - profiling prevents more than debugging ever will.</a:t>
             </a:r>
-            <a:endParaRPr lang="en-US" sz="1300" dirty="0"/>
+            <a:endParaRPr lang="en-US" sz="1800" dirty="0"/>
           </a:p>
         </p:txBody>
       </p:sp>
@@ -9633,8 +9635,8 @@
         </p:nvSpPr>
         <p:spPr>
           <a:xfrm>
-            <a:off x="822960" y="6053328"/>
-            <a:ext cx="9692640" cy="457200"/>
+            <a:off x="822960" y="6035040"/>
+            <a:ext cx="10424160" cy="566928"/>
           </a:xfrm>
           <a:prstGeom prst="rect">
             <a:avLst/>
@@ -9650,9 +9652,9 @@
               <a:buNone/>
             </a:pPr>
             <a:r>
-              <a:rPr lang="en-US" sz="1150" dirty="0">
-                <a:solidFill>
-                  <a:srgbClr val="64748B"/>
+              <a:rPr lang="en-US" sz="1800" dirty="0">
+                <a:solidFill>
+                  <a:srgbClr val="8FA3BF"/>
                 </a:solidFill>
                 <a:latin typeface="Segoe UI" pitchFamily="34" charset="0"/>
                 <a:ea typeface="Segoe UI" pitchFamily="34" charset="-122"/>
@@ -9660,7 +9662,7 @@
               </a:rPr>
               <a:t>Illustrative distribution consistent with the IKEA regional BI playbook.</a:t>
             </a:r>
-            <a:endParaRPr lang="en-US" sz="1150" dirty="0"/>
+            <a:endParaRPr lang="en-US" sz="1800" dirty="0"/>
           </a:p>
         </p:txBody>
       </p:sp>
@@ -9672,8 +9674,8 @@
         </p:nvSpPr>
         <p:spPr>
           <a:xfrm>
-            <a:off x="10698480" y="6382512"/>
-            <a:ext cx="1188720" cy="365760"/>
+            <a:off x="10698480" y="6309360"/>
+            <a:ext cx="1188720" cy="411480"/>
           </a:xfrm>
           <a:prstGeom prst="rect">
             <a:avLst/>
@@ -9689,9 +9691,9 @@
               <a:buNone/>
             </a:pPr>
             <a:r>
-              <a:rPr lang="en-US" sz="1000" dirty="0">
-                <a:solidFill>
-                  <a:srgbClr val="64748B"/>
+              <a:rPr lang="en-US" sz="1800" dirty="0">
+                <a:solidFill>
+                  <a:srgbClr val="8FA3BF"/>
                 </a:solidFill>
                 <a:latin typeface="Consolas" pitchFamily="34" charset="0"/>
                 <a:ea typeface="Consolas" pitchFamily="34" charset="-122"/>
@@ -9699,7 +9701,7 @@
               </a:rPr>
               <a:t>7 / 14</a:t>
             </a:r>
-            <a:endParaRPr lang="en-US" sz="1000" dirty="0"/>
+            <a:endParaRPr lang="en-US" sz="1800" dirty="0"/>
           </a:p>
         </p:txBody>
       </p:sp>
@@ -9783,8 +9785,8 @@
         </p:nvSpPr>
         <p:spPr>
           <a:xfrm>
-            <a:off x="822960" y="502920"/>
-            <a:ext cx="10515600" cy="365760"/>
+            <a:off x="822960" y="457200"/>
+            <a:ext cx="10515600" cy="411480"/>
           </a:xfrm>
           <a:prstGeom prst="rect">
             <a:avLst/>
@@ -9800,7 +9802,7 @@
               <a:buNone/>
             </a:pPr>
             <a:r>
-              <a:rPr lang="en-US" sz="1200" spc="300" kern="0" dirty="0">
+              <a:rPr lang="en-US" sz="1800" spc="300" kern="0" dirty="0">
                 <a:solidFill>
                   <a:srgbClr val="06B6D4"/>
                 </a:solidFill>
@@ -9810,7 +9812,7 @@
               </a:rPr>
               <a:t>PRINCIPLE 2</a:t>
             </a:r>
-            <a:endParaRPr lang="en-US" sz="1200" dirty="0"/>
+            <a:endParaRPr lang="en-US" sz="1800" dirty="0"/>
           </a:p>
         </p:txBody>
       </p:sp>
@@ -9868,7 +9870,7 @@
           </p:nvPr>
         </p:nvGraphicFramePr>
         <p:xfrm>
-          <a:off x="822960" y="2011680"/>
+          <a:off x="822960" y="1828800"/>
           <a:ext cx="10515600" cy="914400"/>
         </p:xfrm>
         <a:graphic>
@@ -9881,7 +9883,7 @@
                 <a:gridCol w="2628900"/>
                 <a:gridCol w="2628900"/>
               </a:tblGrid>
-              <a:tr h="402336">
+              <a:tr h="457200">
                 <a:tc>
                   <a:txBody>
                     <a:bodyPr/>
@@ -9891,7 +9893,7 @@
                         <a:buNone/>
                       </a:pPr>
                       <a:r>
-                        <a:rPr lang="en-US" sz="1150" b="1" dirty="0">
+                        <a:rPr lang="en-US" sz="1800" b="1" dirty="0">
                           <a:solidFill>
                             <a:srgbClr val="FFFFFF"/>
                           </a:solidFill>
@@ -9901,14 +9903,14 @@
                         </a:rPr>
                         <a:t>Boundary</a:t>
                       </a:r>
-                      <a:endParaRPr lang="en-US" sz="1150" dirty="0">
+                      <a:endParaRPr lang="en-US" sz="1800" dirty="0">
                         <a:latin typeface="Segoe UI" charset="0"/>
                         <a:ea typeface="Segoe UI" charset="0"/>
                         <a:cs typeface="Segoe UI" charset="0"/>
                       </a:endParaRPr>
                     </a:p>
                   </a:txBody>
-                  <a:tcPr marL="64008" marR="64008" marT="64008" marB="64008" anchor="ctr">
+                  <a:tcPr marL="36576" marR="36576" marT="36576" marB="36576" anchor="ctr">
                     <a:lnL w="6350" cap="flat" cmpd="sng" algn="ctr">
                       <a:solidFill>
                         <a:srgbClr val="24365A"/>
@@ -9959,7 +9961,7 @@
                         <a:buNone/>
                       </a:pPr>
                       <a:r>
-                        <a:rPr lang="en-US" sz="1150" b="1" dirty="0">
+                        <a:rPr lang="en-US" sz="1800" b="1" dirty="0">
                           <a:solidFill>
                             <a:srgbClr val="FFFFFF"/>
                           </a:solidFill>
@@ -9969,14 +9971,14 @@
                         </a:rPr>
                         <a:t>Check</a:t>
                       </a:r>
-                      <a:endParaRPr lang="en-US" sz="1150" dirty="0">
+                      <a:endParaRPr lang="en-US" sz="1800" dirty="0">
                         <a:latin typeface="Segoe UI" charset="0"/>
                         <a:ea typeface="Segoe UI" charset="0"/>
                         <a:cs typeface="Segoe UI" charset="0"/>
                       </a:endParaRPr>
                     </a:p>
                   </a:txBody>
-                  <a:tcPr marL="64008" marR="64008" marT="64008" marB="64008" anchor="ctr">
+                  <a:tcPr marL="36576" marR="36576" marT="36576" marB="36576" anchor="ctr">
                     <a:lnL w="6350" cap="flat" cmpd="sng" algn="ctr">
                       <a:solidFill>
                         <a:srgbClr val="24365A"/>
@@ -10027,7 +10029,7 @@
                         <a:buNone/>
                       </a:pPr>
                       <a:r>
-                        <a:rPr lang="en-US" sz="1150" b="1" dirty="0">
+                        <a:rPr lang="en-US" sz="1800" b="1" dirty="0">
                           <a:solidFill>
                             <a:srgbClr val="FFFFFF"/>
                           </a:solidFill>
@@ -10037,14 +10039,14 @@
                         </a:rPr>
                         <a:t>Cadence</a:t>
                       </a:r>
-                      <a:endParaRPr lang="en-US" sz="1150" dirty="0">
+                      <a:endParaRPr lang="en-US" sz="1800" dirty="0">
                         <a:latin typeface="Segoe UI" charset="0"/>
                         <a:ea typeface="Segoe UI" charset="0"/>
                         <a:cs typeface="Segoe UI" charset="0"/>
                       </a:endParaRPr>
                     </a:p>
                   </a:txBody>
-                  <a:tcPr marL="64008" marR="64008" marT="64008" marB="64008" anchor="ctr">
+                  <a:tcPr marL="36576" marR="36576" marT="36576" marB="36576" anchor="ctr">
                     <a:lnL w="6350" cap="flat" cmpd="sng" algn="ctr">
                       <a:solidFill>
                         <a:srgbClr val="24365A"/>
@@ -10095,7 +10097,7 @@
                         <a:buNone/>
                       </a:pPr>
                       <a:r>
-                        <a:rPr lang="en-US" sz="1150" b="1" dirty="0">
+                        <a:rPr lang="en-US" sz="1800" b="1" dirty="0">
                           <a:solidFill>
                             <a:srgbClr val="FFFFFF"/>
                           </a:solidFill>
@@ -10105,14 +10107,14 @@
                         </a:rPr>
                         <a:t>When it fails</a:t>
                       </a:r>
-                      <a:endParaRPr lang="en-US" sz="1150" dirty="0">
+                      <a:endParaRPr lang="en-US" sz="1800" dirty="0">
                         <a:latin typeface="Segoe UI" charset="0"/>
                         <a:ea typeface="Segoe UI" charset="0"/>
                         <a:cs typeface="Segoe UI" charset="0"/>
                       </a:endParaRPr>
                     </a:p>
                   </a:txBody>
-                  <a:tcPr marL="64008" marR="64008" marT="64008" marB="64008" anchor="ctr">
+                  <a:tcPr marL="36576" marR="36576" marT="36576" marB="36576" anchor="ctr">
                     <a:lnL w="6350" cap="flat" cmpd="sng" algn="ctr">
                       <a:solidFill>
                         <a:srgbClr val="24365A"/>
@@ -10155,7 +10157,7 @@
                   </a:tcPr>
                 </a:tc>
               </a:tr>
-              <a:tr h="402336">
+              <a:tr h="457200">
                 <a:tc>
                   <a:txBody>
                     <a:bodyPr/>
@@ -10165,7 +10167,7 @@
                         <a:buNone/>
                       </a:pPr>
                       <a:r>
-                        <a:rPr lang="en-US" sz="1080" dirty="0">
+                        <a:rPr lang="en-US" sz="1800" dirty="0">
                           <a:solidFill>
                             <a:srgbClr val="CBD5E1"/>
                           </a:solidFill>
@@ -10175,14 +10177,14 @@
                         </a:rPr>
                         <a:t>Source to landing</a:t>
                       </a:r>
-                      <a:endParaRPr lang="en-US" sz="1080" dirty="0">
+                      <a:endParaRPr lang="en-US" sz="1800" dirty="0">
                         <a:latin typeface="Segoe UI" charset="0"/>
                         <a:ea typeface="Segoe UI" charset="0"/>
                         <a:cs typeface="Segoe UI" charset="0"/>
                       </a:endParaRPr>
                     </a:p>
                   </a:txBody>
-                  <a:tcPr marL="64008" marR="64008" marT="64008" marB="64008" anchor="ctr">
+                  <a:tcPr marL="36576" marR="36576" marT="36576" marB="36576" anchor="ctr">
                     <a:lnL w="6350" cap="flat" cmpd="sng" algn="ctr">
                       <a:solidFill>
                         <a:srgbClr val="24365A"/>
@@ -10233,7 +10235,7 @@
                         <a:buNone/>
                       </a:pPr>
                       <a:r>
-                        <a:rPr lang="en-US" sz="1080" dirty="0">
+                        <a:rPr lang="en-US" sz="1800" dirty="0">
                           <a:solidFill>
                             <a:srgbClr val="CBD5E1"/>
                           </a:solidFill>
@@ -10243,14 +10245,14 @@
                         </a:rPr>
                         <a:t>Row count and key uniqueness</a:t>
                       </a:r>
-                      <a:endParaRPr lang="en-US" sz="1080" dirty="0">
+                      <a:endParaRPr lang="en-US" sz="1800" dirty="0">
                         <a:latin typeface="Segoe UI" charset="0"/>
                         <a:ea typeface="Segoe UI" charset="0"/>
                         <a:cs typeface="Segoe UI" charset="0"/>
                       </a:endParaRPr>
                     </a:p>
                   </a:txBody>
-                  <a:tcPr marL="64008" marR="64008" marT="64008" marB="64008" anchor="ctr">
+                  <a:tcPr marL="36576" marR="36576" marT="36576" marB="36576" anchor="ctr">
                     <a:lnL w="6350" cap="flat" cmpd="sng" algn="ctr">
                       <a:solidFill>
                         <a:srgbClr val="24365A"/>
@@ -10301,7 +10303,7 @@
                         <a:buNone/>
                       </a:pPr>
                       <a:r>
-                        <a:rPr lang="en-US" sz="1080" dirty="0">
+                        <a:rPr lang="en-US" sz="1800" dirty="0">
                           <a:solidFill>
                             <a:srgbClr val="CBD5E1"/>
                           </a:solidFill>
@@ -10311,14 +10313,14 @@
                         </a:rPr>
                         <a:t>Every load</a:t>
                       </a:r>
-                      <a:endParaRPr lang="en-US" sz="1080" dirty="0">
+                      <a:endParaRPr lang="en-US" sz="1800" dirty="0">
                         <a:latin typeface="Segoe UI" charset="0"/>
                         <a:ea typeface="Segoe UI" charset="0"/>
                         <a:cs typeface="Segoe UI" charset="0"/>
                       </a:endParaRPr>
                     </a:p>
                   </a:txBody>
-                  <a:tcPr marL="64008" marR="64008" marT="64008" marB="64008" anchor="ctr">
+                  <a:tcPr marL="36576" marR="36576" marT="36576" marB="36576" anchor="ctr">
                     <a:lnL w="6350" cap="flat" cmpd="sng" algn="ctr">
                       <a:solidFill>
                         <a:srgbClr val="24365A"/>
@@ -10369,7 +10371,7 @@
                         <a:buNone/>
                       </a:pPr>
                       <a:r>
-                        <a:rPr lang="en-US" sz="1080" dirty="0">
+                        <a:rPr lang="en-US" sz="1800" dirty="0">
                           <a:solidFill>
                             <a:srgbClr val="CBD5E1"/>
                           </a:solidFill>
@@ -10379,14 +10381,14 @@
                         </a:rPr>
                         <a:t>Load halts, alert fires</a:t>
                       </a:r>
-                      <a:endParaRPr lang="en-US" sz="1080" dirty="0">
+                      <a:endParaRPr lang="en-US" sz="1800" dirty="0">
                         <a:latin typeface="Segoe UI" charset="0"/>
                         <a:ea typeface="Segoe UI" charset="0"/>
                         <a:cs typeface="Segoe UI" charset="0"/>
                       </a:endParaRPr>
                     </a:p>
                   </a:txBody>
-                  <a:tcPr marL="64008" marR="64008" marT="64008" marB="64008" anchor="ctr">
+                  <a:tcPr marL="36576" marR="36576" marT="36576" marB="36576" anchor="ctr">
                     <a:lnL w="6350" cap="flat" cmpd="sng" algn="ctr">
                       <a:solidFill>
                         <a:srgbClr val="24365A"/>
@@ -10429,7 +10431,7 @@
                   </a:tcPr>
                 </a:tc>
               </a:tr>
-              <a:tr h="402336">
+              <a:tr h="457200">
                 <a:tc>
                   <a:txBody>
                     <a:bodyPr/>
@@ -10439,7 +10441,7 @@
                         <a:buNone/>
                       </a:pPr>
                       <a:r>
-                        <a:rPr lang="en-US" sz="1080" dirty="0">
+                        <a:rPr lang="en-US" sz="1800" dirty="0">
                           <a:solidFill>
                             <a:srgbClr val="CBD5E1"/>
                           </a:solidFill>
@@ -10449,14 +10451,14 @@
                         </a:rPr>
                         <a:t>Landing to datalake</a:t>
                       </a:r>
-                      <a:endParaRPr lang="en-US" sz="1080" dirty="0">
+                      <a:endParaRPr lang="en-US" sz="1800" dirty="0">
                         <a:latin typeface="Segoe UI" charset="0"/>
                         <a:ea typeface="Segoe UI" charset="0"/>
                         <a:cs typeface="Segoe UI" charset="0"/>
                       </a:endParaRPr>
                     </a:p>
                   </a:txBody>
-                  <a:tcPr marL="64008" marR="64008" marT="64008" marB="64008" anchor="ctr">
+                  <a:tcPr marL="36576" marR="36576" marT="36576" marB="36576" anchor="ctr">
                     <a:lnL w="6350" cap="flat" cmpd="sng" algn="ctr">
                       <a:solidFill>
                         <a:srgbClr val="24365A"/>
@@ -10507,7 +10509,7 @@
                         <a:buNone/>
                       </a:pPr>
                       <a:r>
-                        <a:rPr lang="en-US" sz="1080" dirty="0">
+                        <a:rPr lang="en-US" sz="1800" dirty="0">
                           <a:solidFill>
                             <a:srgbClr val="CBD5E1"/>
                           </a:solidFill>
@@ -10517,14 +10519,14 @@
                         </a:rPr>
                         <a:t>Sum checks on money and volume</a:t>
                       </a:r>
-                      <a:endParaRPr lang="en-US" sz="1080" dirty="0">
+                      <a:endParaRPr lang="en-US" sz="1800" dirty="0">
                         <a:latin typeface="Segoe UI" charset="0"/>
                         <a:ea typeface="Segoe UI" charset="0"/>
                         <a:cs typeface="Segoe UI" charset="0"/>
                       </a:endParaRPr>
                     </a:p>
                   </a:txBody>
-                  <a:tcPr marL="64008" marR="64008" marT="64008" marB="64008" anchor="ctr">
+                  <a:tcPr marL="36576" marR="36576" marT="36576" marB="36576" anchor="ctr">
                     <a:lnL w="6350" cap="flat" cmpd="sng" algn="ctr">
                       <a:solidFill>
                         <a:srgbClr val="24365A"/>
@@ -10575,7 +10577,7 @@
                         <a:buNone/>
                       </a:pPr>
                       <a:r>
-                        <a:rPr lang="en-US" sz="1080" dirty="0">
+                        <a:rPr lang="en-US" sz="1800" dirty="0">
                           <a:solidFill>
                             <a:srgbClr val="CBD5E1"/>
                           </a:solidFill>
@@ -10585,14 +10587,14 @@
                         </a:rPr>
                         <a:t>Every load</a:t>
                       </a:r>
-                      <a:endParaRPr lang="en-US" sz="1080" dirty="0">
+                      <a:endParaRPr lang="en-US" sz="1800" dirty="0">
                         <a:latin typeface="Segoe UI" charset="0"/>
                         <a:ea typeface="Segoe UI" charset="0"/>
                         <a:cs typeface="Segoe UI" charset="0"/>
                       </a:endParaRPr>
                     </a:p>
                   </a:txBody>
-                  <a:tcPr marL="64008" marR="64008" marT="64008" marB="64008" anchor="ctr">
+                  <a:tcPr marL="36576" marR="36576" marT="36576" marB="36576" anchor="ctr">
                     <a:lnL w="6350" cap="flat" cmpd="sng" algn="ctr">
                       <a:solidFill>
                         <a:srgbClr val="24365A"/>
@@ -10643,7 +10645,7 @@
                         <a:buNone/>
                       </a:pPr>
                       <a:r>
-                        <a:rPr lang="en-US" sz="1080" dirty="0">
+                        <a:rPr lang="en-US" sz="1800" dirty="0">
                           <a:solidFill>
                             <a:srgbClr val="CBD5E1"/>
                           </a:solidFill>
@@ -10653,14 +10655,14 @@
                         </a:rPr>
                         <a:t>Discrepancy ticket with owner</a:t>
                       </a:r>
-                      <a:endParaRPr lang="en-US" sz="1080" dirty="0">
+                      <a:endParaRPr lang="en-US" sz="1800" dirty="0">
                         <a:latin typeface="Segoe UI" charset="0"/>
                         <a:ea typeface="Segoe UI" charset="0"/>
                         <a:cs typeface="Segoe UI" charset="0"/>
                       </a:endParaRPr>
                     </a:p>
                   </a:txBody>
-                  <a:tcPr marL="64008" marR="64008" marT="64008" marB="64008" anchor="ctr">
+                  <a:tcPr marL="36576" marR="36576" marT="36576" marB="36576" anchor="ctr">
                     <a:lnL w="6350" cap="flat" cmpd="sng" algn="ctr">
                       <a:solidFill>
                         <a:srgbClr val="24365A"/>
@@ -10703,7 +10705,7 @@
                   </a:tcPr>
                 </a:tc>
               </a:tr>
-              <a:tr h="402336">
+              <a:tr h="457200">
                 <a:tc>
                   <a:txBody>
                     <a:bodyPr/>
@@ -10713,7 +10715,7 @@
                         <a:buNone/>
                       </a:pPr>
                       <a:r>
-                        <a:rPr lang="en-US" sz="1080" dirty="0">
+                        <a:rPr lang="en-US" sz="1800" dirty="0">
                           <a:solidFill>
                             <a:srgbClr val="CBD5E1"/>
                           </a:solidFill>
@@ -10723,14 +10725,14 @@
                         </a:rPr>
                         <a:t>Datalake to marts</a:t>
                       </a:r>
-                      <a:endParaRPr lang="en-US" sz="1080" dirty="0">
+                      <a:endParaRPr lang="en-US" sz="1800" dirty="0">
                         <a:latin typeface="Segoe UI" charset="0"/>
                         <a:ea typeface="Segoe UI" charset="0"/>
                         <a:cs typeface="Segoe UI" charset="0"/>
                       </a:endParaRPr>
                     </a:p>
                   </a:txBody>
-                  <a:tcPr marL="64008" marR="64008" marT="64008" marB="64008" anchor="ctr">
+                  <a:tcPr marL="36576" marR="36576" marT="36576" marB="36576" anchor="ctr">
                     <a:lnL w="6350" cap="flat" cmpd="sng" algn="ctr">
                       <a:solidFill>
                         <a:srgbClr val="24365A"/>
@@ -10781,7 +10783,7 @@
                         <a:buNone/>
                       </a:pPr>
                       <a:r>
-                        <a:rPr lang="en-US" sz="1080" dirty="0">
+                        <a:rPr lang="en-US" sz="1800" dirty="0">
                           <a:solidFill>
                             <a:srgbClr val="CBD5E1"/>
                           </a:solidFill>
@@ -10791,14 +10793,14 @@
                         </a:rPr>
                         <a:t>Sampled row-level comparison</a:t>
                       </a:r>
-                      <a:endParaRPr lang="en-US" sz="1080" dirty="0">
+                      <a:endParaRPr lang="en-US" sz="1800" dirty="0">
                         <a:latin typeface="Segoe UI" charset="0"/>
                         <a:ea typeface="Segoe UI" charset="0"/>
                         <a:cs typeface="Segoe UI" charset="0"/>
                       </a:endParaRPr>
                     </a:p>
                   </a:txBody>
-                  <a:tcPr marL="64008" marR="64008" marT="64008" marB="64008" anchor="ctr">
+                  <a:tcPr marL="36576" marR="36576" marT="36576" marB="36576" anchor="ctr">
                     <a:lnL w="6350" cap="flat" cmpd="sng" algn="ctr">
                       <a:solidFill>
                         <a:srgbClr val="24365A"/>
@@ -10849,7 +10851,7 @@
                         <a:buNone/>
                       </a:pPr>
                       <a:r>
-                        <a:rPr lang="en-US" sz="1080" dirty="0">
+                        <a:rPr lang="en-US" sz="1800" dirty="0">
                           <a:solidFill>
                             <a:srgbClr val="CBD5E1"/>
                           </a:solidFill>
@@ -10859,14 +10861,14 @@
                         </a:rPr>
                         <a:t>Every load</a:t>
                       </a:r>
-                      <a:endParaRPr lang="en-US" sz="1080" dirty="0">
+                      <a:endParaRPr lang="en-US" sz="1800" dirty="0">
                         <a:latin typeface="Segoe UI" charset="0"/>
                         <a:ea typeface="Segoe UI" charset="0"/>
                         <a:cs typeface="Segoe UI" charset="0"/>
                       </a:endParaRPr>
                     </a:p>
                   </a:txBody>
-                  <a:tcPr marL="64008" marR="64008" marT="64008" marB="64008" anchor="ctr">
+                  <a:tcPr marL="36576" marR="36576" marT="36576" marB="36576" anchor="ctr">
                     <a:lnL w="6350" cap="flat" cmpd="sng" algn="ctr">
                       <a:solidFill>
                         <a:srgbClr val="24365A"/>
@@ -10917,7 +10919,7 @@
                         <a:buNone/>
                       </a:pPr>
                       <a:r>
-                        <a:rPr lang="en-US" sz="1080" dirty="0">
+                        <a:rPr lang="en-US" sz="1800" dirty="0">
                           <a:solidFill>
                             <a:srgbClr val="CBD5E1"/>
                           </a:solidFill>
@@ -10927,14 +10929,14 @@
                         </a:rPr>
                         <a:t>Transform blocked until resolved</a:t>
                       </a:r>
-                      <a:endParaRPr lang="en-US" sz="1080" dirty="0">
+                      <a:endParaRPr lang="en-US" sz="1800" dirty="0">
                         <a:latin typeface="Segoe UI" charset="0"/>
                         <a:ea typeface="Segoe UI" charset="0"/>
                         <a:cs typeface="Segoe UI" charset="0"/>
                       </a:endParaRPr>
                     </a:p>
                   </a:txBody>
-                  <a:tcPr marL="64008" marR="64008" marT="64008" marB="64008" anchor="ctr">
+                  <a:tcPr marL="36576" marR="36576" marT="36576" marB="36576" anchor="ctr">
                     <a:lnL w="6350" cap="flat" cmpd="sng" algn="ctr">
                       <a:solidFill>
                         <a:srgbClr val="24365A"/>
@@ -10977,7 +10979,7 @@
                   </a:tcPr>
                 </a:tc>
               </a:tr>
-              <a:tr h="402336">
+              <a:tr h="457200">
                 <a:tc>
                   <a:txBody>
                     <a:bodyPr/>
@@ -10987,7 +10989,7 @@
                         <a:buNone/>
                       </a:pPr>
                       <a:r>
-                        <a:rPr lang="en-US" sz="1080" dirty="0">
+                        <a:rPr lang="en-US" sz="1800" dirty="0">
                           <a:solidFill>
                             <a:srgbClr val="CBD5E1"/>
                           </a:solidFill>
@@ -10997,14 +10999,14 @@
                         </a:rPr>
                         <a:t>Marts to dashboards</a:t>
                       </a:r>
-                      <a:endParaRPr lang="en-US" sz="1080" dirty="0">
+                      <a:endParaRPr lang="en-US" sz="1800" dirty="0">
                         <a:latin typeface="Segoe UI" charset="0"/>
                         <a:ea typeface="Segoe UI" charset="0"/>
                         <a:cs typeface="Segoe UI" charset="0"/>
                       </a:endParaRPr>
                     </a:p>
                   </a:txBody>
-                  <a:tcPr marL="64008" marR="64008" marT="64008" marB="64008" anchor="ctr">
+                  <a:tcPr marL="36576" marR="36576" marT="36576" marB="36576" anchor="ctr">
                     <a:lnL w="6350" cap="flat" cmpd="sng" algn="ctr">
                       <a:solidFill>
                         <a:srgbClr val="24365A"/>
@@ -11055,7 +11057,7 @@
                         <a:buNone/>
                       </a:pPr>
                       <a:r>
-                        <a:rPr lang="en-US" sz="1080" dirty="0">
+                        <a:rPr lang="en-US" sz="1800" dirty="0">
                           <a:solidFill>
                             <a:srgbClr val="CBD5E1"/>
                           </a:solidFill>
@@ -11065,14 +11067,14 @@
                         </a:rPr>
                         <a:t>Certified model subscription</a:t>
                       </a:r>
-                      <a:endParaRPr lang="en-US" sz="1080" dirty="0">
+                      <a:endParaRPr lang="en-US" sz="1800" dirty="0">
                         <a:latin typeface="Segoe UI" charset="0"/>
                         <a:ea typeface="Segoe UI" charset="0"/>
                         <a:cs typeface="Segoe UI" charset="0"/>
                       </a:endParaRPr>
                     </a:p>
                   </a:txBody>
-                  <a:tcPr marL="64008" marR="64008" marT="64008" marB="64008" anchor="ctr">
+                  <a:tcPr marL="36576" marR="36576" marT="36576" marB="36576" anchor="ctr">
                     <a:lnL w="6350" cap="flat" cmpd="sng" algn="ctr">
                       <a:solidFill>
                         <a:srgbClr val="24365A"/>
@@ -11123,7 +11125,7 @@
                         <a:buNone/>
                       </a:pPr>
                       <a:r>
-                        <a:rPr lang="en-US" sz="1080" dirty="0">
+                        <a:rPr lang="en-US" sz="1800" dirty="0">
                           <a:solidFill>
                             <a:srgbClr val="CBD5E1"/>
                           </a:solidFill>
@@ -11133,14 +11135,14 @@
                         </a:rPr>
                         <a:t>Every publish</a:t>
                       </a:r>
-                      <a:endParaRPr lang="en-US" sz="1080" dirty="0">
+                      <a:endParaRPr lang="en-US" sz="1800" dirty="0">
                         <a:latin typeface="Segoe UI" charset="0"/>
                         <a:ea typeface="Segoe UI" charset="0"/>
                         <a:cs typeface="Segoe UI" charset="0"/>
                       </a:endParaRPr>
                     </a:p>
                   </a:txBody>
-                  <a:tcPr marL="64008" marR="64008" marT="64008" marB="64008" anchor="ctr">
+                  <a:tcPr marL="36576" marR="36576" marT="36576" marB="36576" anchor="ctr">
                     <a:lnL w="6350" cap="flat" cmpd="sng" algn="ctr">
                       <a:solidFill>
                         <a:srgbClr val="24365A"/>
@@ -11191,7 +11193,7 @@
                         <a:buNone/>
                       </a:pPr>
                       <a:r>
-                        <a:rPr lang="en-US" sz="1080" dirty="0">
+                        <a:rPr lang="en-US" sz="1800" dirty="0">
                           <a:solidFill>
                             <a:srgbClr val="CBD5E1"/>
                           </a:solidFill>
@@ -11201,14 +11203,14 @@
                         </a:rPr>
                         <a:t>Dashboard refuses stale data</a:t>
                       </a:r>
-                      <a:endParaRPr lang="en-US" sz="1080" dirty="0">
+                      <a:endParaRPr lang="en-US" sz="1800" dirty="0">
                         <a:latin typeface="Segoe UI" charset="0"/>
                         <a:ea typeface="Segoe UI" charset="0"/>
                         <a:cs typeface="Segoe UI" charset="0"/>
                       </a:endParaRPr>
                     </a:p>
                   </a:txBody>
-                  <a:tcPr marL="64008" marR="64008" marT="64008" marB="64008" anchor="ctr">
+                  <a:tcPr marL="36576" marR="36576" marT="36576" marB="36576" anchor="ctr">
                     <a:lnL w="6350" cap="flat" cmpd="sng" algn="ctr">
                       <a:solidFill>
                         <a:srgbClr val="24365A"/>
@@ -11286,8 +11288,8 @@
         </p:nvSpPr>
         <p:spPr>
           <a:xfrm>
-            <a:off x="822960" y="6053328"/>
-            <a:ext cx="9692640" cy="457200"/>
+            <a:off x="822960" y="6035040"/>
+            <a:ext cx="10424160" cy="566928"/>
           </a:xfrm>
           <a:prstGeom prst="rect">
             <a:avLst/>
@@ -11303,9 +11305,9 @@
               <a:buNone/>
             </a:pPr>
             <a:r>
-              <a:rPr lang="en-US" sz="1150" dirty="0">
-                <a:solidFill>
-                  <a:srgbClr val="64748B"/>
+              <a:rPr lang="en-US" sz="1800" dirty="0">
+                <a:solidFill>
+                  <a:srgbClr val="8FA3BF"/>
                 </a:solidFill>
                 <a:latin typeface="Segoe UI" pitchFamily="34" charset="0"/>
                 <a:ea typeface="Segoe UI" pitchFamily="34" charset="-122"/>
@@ -11313,7 +11315,7 @@
               </a:rPr>
               <a:t>Not quarterly, not on request - reconciliation runs on every load.</a:t>
             </a:r>
-            <a:endParaRPr lang="en-US" sz="1150" dirty="0"/>
+            <a:endParaRPr lang="en-US" sz="1800" dirty="0"/>
           </a:p>
         </p:txBody>
       </p:sp>
@@ -11325,8 +11327,8 @@
         </p:nvSpPr>
         <p:spPr>
           <a:xfrm>
-            <a:off x="10698480" y="6382512"/>
-            <a:ext cx="1188720" cy="365760"/>
+            <a:off x="10698480" y="6309360"/>
+            <a:ext cx="1188720" cy="411480"/>
           </a:xfrm>
           <a:prstGeom prst="rect">
             <a:avLst/>
@@ -11342,9 +11344,9 @@
               <a:buNone/>
             </a:pPr>
             <a:r>
-              <a:rPr lang="en-US" sz="1000" dirty="0">
-                <a:solidFill>
-                  <a:srgbClr val="64748B"/>
+              <a:rPr lang="en-US" sz="1800" dirty="0">
+                <a:solidFill>
+                  <a:srgbClr val="8FA3BF"/>
                 </a:solidFill>
                 <a:latin typeface="Consolas" pitchFamily="34" charset="0"/>
                 <a:ea typeface="Consolas" pitchFamily="34" charset="-122"/>
@@ -11352,7 +11354,7 @@
               </a:rPr>
               <a:t>8 / 14</a:t>
             </a:r>
-            <a:endParaRPr lang="en-US" sz="1000" dirty="0"/>
+            <a:endParaRPr lang="en-US" sz="1800" dirty="0"/>
           </a:p>
         </p:txBody>
       </p:sp>
@@ -11436,8 +11438,8 @@
         </p:nvSpPr>
         <p:spPr>
           <a:xfrm>
-            <a:off x="822960" y="502920"/>
-            <a:ext cx="10515600" cy="365760"/>
+            <a:off x="822960" y="457200"/>
+            <a:ext cx="10515600" cy="411480"/>
           </a:xfrm>
           <a:prstGeom prst="rect">
             <a:avLst/>
@@ -11453,7 +11455,7 @@
               <a:buNone/>
             </a:pPr>
             <a:r>
-              <a:rPr lang="en-US" sz="1200" spc="300" kern="0" dirty="0">
+              <a:rPr lang="en-US" sz="1800" spc="300" kern="0" dirty="0">
                 <a:solidFill>
                   <a:srgbClr val="06B6D4"/>
                 </a:solidFill>
@@ -11463,7 +11465,7 @@
               </a:rPr>
               <a:t>PRINCIPLE 3</a:t>
             </a:r>
-            <a:endParaRPr lang="en-US" sz="1200" dirty="0"/>
+            <a:endParaRPr lang="en-US" sz="1800" dirty="0"/>
           </a:p>
         </p:txBody>
       </p:sp>
@@ -11514,7 +11516,7 @@
         </p:nvGraphicFramePr>
         <p:xfrm>
           <a:off x="822960" y="1874520"/>
-          <a:ext cx="10515600" cy="3337560"/>
+          <a:ext cx="10515600" cy="3246120"/>
         </p:xfrm>
         <a:graphic xmlns:a="http://schemas.openxmlformats.org/drawingml/2006/main">
           <a:graphicData uri="http://schemas.openxmlformats.org/drawingml/2006/chart">
@@ -11530,7 +11532,7 @@
         </p:nvSpPr>
         <p:spPr>
           <a:xfrm>
-            <a:off x="822960" y="5413248"/>
+            <a:off x="822960" y="5321808"/>
             <a:ext cx="10515600" cy="0"/>
           </a:xfrm>
           <a:prstGeom prst="line">
@@ -11553,8 +11555,8 @@
         </p:nvSpPr>
         <p:spPr>
           <a:xfrm>
-            <a:off x="822960" y="5504688"/>
-            <a:ext cx="10424160" cy="411480"/>
+            <a:off x="822960" y="5394960"/>
+            <a:ext cx="10424160" cy="502920"/>
           </a:xfrm>
           <a:prstGeom prst="rect">
             <a:avLst/>
@@ -11570,7 +11572,7 @@
               <a:buNone/>
             </a:pPr>
             <a:r>
-              <a:rPr lang="en-US" sz="1300" i="1" dirty="0">
+              <a:rPr lang="en-US" sz="1800" i="1" dirty="0">
                 <a:solidFill>
                   <a:srgbClr val="06B6D4"/>
                 </a:solidFill>
@@ -11580,7 +11582,7 @@
               </a:rPr>
               <a:t>→  Freshness alarms eliminated the biggest incident class within weeks - schedule deaths had caused more incidents than logic bugs.</a:t>
             </a:r>
-            <a:endParaRPr lang="en-US" sz="1300" dirty="0"/>
+            <a:endParaRPr lang="en-US" sz="1800" dirty="0"/>
           </a:p>
         </p:txBody>
       </p:sp>
@@ -11615,8 +11617,8 @@
         </p:nvSpPr>
         <p:spPr>
           <a:xfrm>
-            <a:off x="822960" y="6053328"/>
-            <a:ext cx="9692640" cy="457200"/>
+            <a:off x="822960" y="6035040"/>
+            <a:ext cx="10424160" cy="566928"/>
           </a:xfrm>
           <a:prstGeom prst="rect">
             <a:avLst/>
@@ -11632,9 +11634,9 @@
               <a:buNone/>
             </a:pPr>
             <a:r>
-              <a:rPr lang="en-US" sz="1150" dirty="0">
-                <a:solidFill>
-                  <a:srgbClr val="64748B"/>
+              <a:rPr lang="en-US" sz="1800" dirty="0">
+                <a:solidFill>
+                  <a:srgbClr val="8FA3BF"/>
                 </a:solidFill>
                 <a:latin typeface="Segoe UI" pitchFamily="34" charset="0"/>
                 <a:ea typeface="Segoe UI" pitchFamily="34" charset="-122"/>
@@ -11642,7 +11644,7 @@
               </a:rPr>
               <a:t>Illustrative trend showing the pattern behind the freshness-alarm principle.</a:t>
             </a:r>
-            <a:endParaRPr lang="en-US" sz="1150" dirty="0"/>
+            <a:endParaRPr lang="en-US" sz="1800" dirty="0"/>
           </a:p>
         </p:txBody>
       </p:sp>
@@ -11654,8 +11656,8 @@
         </p:nvSpPr>
         <p:spPr>
           <a:xfrm>
-            <a:off x="10698480" y="6382512"/>
-            <a:ext cx="1188720" cy="365760"/>
+            <a:off x="10698480" y="6309360"/>
+            <a:ext cx="1188720" cy="411480"/>
           </a:xfrm>
           <a:prstGeom prst="rect">
             <a:avLst/>
@@ -11671,9 +11673,9 @@
               <a:buNone/>
             </a:pPr>
             <a:r>
-              <a:rPr lang="en-US" sz="1000" dirty="0">
-                <a:solidFill>
-                  <a:srgbClr val="64748B"/>
+              <a:rPr lang="en-US" sz="1800" dirty="0">
+                <a:solidFill>
+                  <a:srgbClr val="8FA3BF"/>
                 </a:solidFill>
                 <a:latin typeface="Consolas" pitchFamily="34" charset="0"/>
                 <a:ea typeface="Consolas" pitchFamily="34" charset="-122"/>
@@ -11681,7 +11683,7 @@
               </a:rPr>
               <a:t>9 / 14</a:t>
             </a:r>
-            <a:endParaRPr lang="en-US" sz="1000" dirty="0"/>
+            <a:endParaRPr lang="en-US" sz="1800" dirty="0"/>
           </a:p>
         </p:txBody>
       </p:sp>

--- a/decks/etl-playbook.pptx
+++ b/decks/etl-playbook.pptx
@@ -2109,7 +2109,7 @@
           <a:p>
             <a:r>
               <a:rPr lang="en-US" dirty="0"/>
-              <a:t>Key message: What this deck covers | Agenda: Why ETL fails quietly - and why silent is the default state; The arena: one datalake serving four countries of retail BI; Profiling sources and reconciling at every seam; Instrumenting schedules and giving discrepancies owners; What a trustworthy pipeline looks like in daily operation | Transition: next up - "ETL fails quietly".</a:t>
+              <a:t>Key message: What this deck covers | Agenda: Why ETL fails quietly - and why silent is the default state; The arena: one datalake serving four countries of retail BI; Profiling sources and reconciling at every seam; Instrumenting schedules and giving discrepancies owners; What a trustworthy pipeline looks like in daily operation | Transition: next up - "ETL fails quietly, and quiet is expensive".</a:t>
             </a:r>
             <a:endParaRPr lang="en-US" dirty="0"/>
           </a:p>
@@ -2197,7 +2197,7 @@
           <a:p>
             <a:r>
               <a:rPr lang="en-US" dirty="0"/>
-              <a:t>Key message: ETL fails quietly | Talk track: Every principle in this playbook exists to make failure loud. | Transition: next up - "Regional BI across four countries, one datalake".</a:t>
+              <a:t>Key message: ETL fails quietly, and quiet is expensive | Talk track: Every principle in this playbook exists to make failure loud. | Transition: next up - "Regional BI across four countries, one datalake".</a:t>
             </a:r>
             <a:endParaRPr lang="en-US" dirty="0"/>
           </a:p>
@@ -6856,7 +6856,7 @@
                 <a:ea typeface="Segoe UI" pitchFamily="34" charset="-122"/>
                 <a:cs typeface="Segoe UI" pitchFamily="34" charset="-120"/>
               </a:rPr>
-              <a:t>ETL fails quietly</a:t>
+              <a:t>ETL fails quietly, and quiet is expensive</a:t>
             </a:r>
             <a:endParaRPr lang="en-US" sz="2700" dirty="0"/>
           </a:p>
